--- a/2026-07-11_Intro_to_Computer_Science_Programming/2026-07-11_Intro_to_Computer_Science_Programming.pptx
+++ b/2026-07-11_Intro_to_Computer_Science_Programming/2026-07-11_Intro_to_Computer_Science_Programming.pptx
@@ -2,55 +2,55 @@
 <file path=ppt/presentation.xml><?xml version="1.0" encoding="utf-8"?>
 <p:presentation xmlns:p="http://schemas.openxmlformats.org/presentationml/2006/main" embedTrueTypeFonts="1" saveSubsetFonts="1">
   <p:sldMasterIdLst>
-    <p:sldMasterId xmlns:r="http://schemas.openxmlformats.org/officeDocument/2006/relationships" id="2147483648" r:id="R295d22b99e1a4d3c"/>
+    <p:sldMasterId xmlns:r="http://schemas.openxmlformats.org/officeDocument/2006/relationships" id="2147483648" r:id="R316865c0804744ac"/>
   </p:sldMasterIdLst>
   <p:notesMasterIdLst>
-    <p:notesMasterId xmlns:r="http://schemas.openxmlformats.org/officeDocument/2006/relationships" r:id="R032dfde6de0649c4"/>
+    <p:notesMasterId xmlns:r="http://schemas.openxmlformats.org/officeDocument/2006/relationships" r:id="Rae702987c6a5429e"/>
   </p:notesMasterIdLst>
   <p:sldIdLst>
-    <p:sldId xmlns:r="http://schemas.openxmlformats.org/officeDocument/2006/relationships" id="256" r:id="R33c7e37091494555"/>
-    <p:sldId xmlns:r="http://schemas.openxmlformats.org/officeDocument/2006/relationships" id="257" r:id="Rbc376f2834f04f48"/>
-    <p:sldId xmlns:r="http://schemas.openxmlformats.org/officeDocument/2006/relationships" id="258" r:id="R3c307944d04c42a9"/>
-    <p:sldId xmlns:r="http://schemas.openxmlformats.org/officeDocument/2006/relationships" id="259" r:id="R75f8c3d58b39435b"/>
-    <p:sldId xmlns:r="http://schemas.openxmlformats.org/officeDocument/2006/relationships" id="260" r:id="Rbaa49995aa4443c9"/>
-    <p:sldId xmlns:r="http://schemas.openxmlformats.org/officeDocument/2006/relationships" id="261" r:id="Rf788fb8d45ae4551"/>
-    <p:sldId xmlns:r="http://schemas.openxmlformats.org/officeDocument/2006/relationships" id="262" r:id="R2db63211b1a7418d"/>
-    <p:sldId xmlns:r="http://schemas.openxmlformats.org/officeDocument/2006/relationships" id="263" r:id="R2d30aa2a4d814d0f"/>
-    <p:sldId xmlns:r="http://schemas.openxmlformats.org/officeDocument/2006/relationships" id="264" r:id="R1111658d6f3a40ac"/>
-    <p:sldId xmlns:r="http://schemas.openxmlformats.org/officeDocument/2006/relationships" id="265" r:id="Rd0387b244b804e4a"/>
-    <p:sldId xmlns:r="http://schemas.openxmlformats.org/officeDocument/2006/relationships" id="266" r:id="R3982c27fa8bf44ba"/>
-    <p:sldId xmlns:r="http://schemas.openxmlformats.org/officeDocument/2006/relationships" id="267" r:id="R02372a034e274697"/>
-    <p:sldId xmlns:r="http://schemas.openxmlformats.org/officeDocument/2006/relationships" id="268" r:id="Rb932a7e617664cf9"/>
-    <p:sldId xmlns:r="http://schemas.openxmlformats.org/officeDocument/2006/relationships" id="269" r:id="R6684adbc7c3c4087"/>
-    <p:sldId xmlns:r="http://schemas.openxmlformats.org/officeDocument/2006/relationships" id="270" r:id="R792b49c0f5714255"/>
-    <p:sldId xmlns:r="http://schemas.openxmlformats.org/officeDocument/2006/relationships" id="271" r:id="R4541f3f2de864932"/>
-    <p:sldId xmlns:r="http://schemas.openxmlformats.org/officeDocument/2006/relationships" id="272" r:id="R2cd223f7182b4625"/>
-    <p:sldId xmlns:r="http://schemas.openxmlformats.org/officeDocument/2006/relationships" id="273" r:id="R909c1c80d3a2419b"/>
-    <p:sldId xmlns:r="http://schemas.openxmlformats.org/officeDocument/2006/relationships" id="274" r:id="R1dd2708c0bac4787"/>
-    <p:sldId xmlns:r="http://schemas.openxmlformats.org/officeDocument/2006/relationships" id="275" r:id="R733105d437c345a5"/>
-    <p:sldId xmlns:r="http://schemas.openxmlformats.org/officeDocument/2006/relationships" id="276" r:id="R051da964e62a48b4"/>
-    <p:sldId xmlns:r="http://schemas.openxmlformats.org/officeDocument/2006/relationships" id="277" r:id="R70771a91d78c4281"/>
-    <p:sldId xmlns:r="http://schemas.openxmlformats.org/officeDocument/2006/relationships" id="278" r:id="Rbdcec2c3c2594929"/>
-    <p:sldId xmlns:r="http://schemas.openxmlformats.org/officeDocument/2006/relationships" id="279" r:id="R56c9e1e542c74562"/>
-    <p:sldId xmlns:r="http://schemas.openxmlformats.org/officeDocument/2006/relationships" id="280" r:id="R9937ef3502f94b57"/>
-    <p:sldId xmlns:r="http://schemas.openxmlformats.org/officeDocument/2006/relationships" id="281" r:id="R6c74cb77537a40a4"/>
+    <p:sldId xmlns:r="http://schemas.openxmlformats.org/officeDocument/2006/relationships" id="256" r:id="Rc83d3e40e03b457e"/>
+    <p:sldId xmlns:r="http://schemas.openxmlformats.org/officeDocument/2006/relationships" id="257" r:id="Rf9bcddc0cf564cbf"/>
+    <p:sldId xmlns:r="http://schemas.openxmlformats.org/officeDocument/2006/relationships" id="258" r:id="R03a998ecb04c4a4c"/>
+    <p:sldId xmlns:r="http://schemas.openxmlformats.org/officeDocument/2006/relationships" id="259" r:id="Rb451c7d0957b4dd2"/>
+    <p:sldId xmlns:r="http://schemas.openxmlformats.org/officeDocument/2006/relationships" id="260" r:id="Rde4997d4cc614fa9"/>
+    <p:sldId xmlns:r="http://schemas.openxmlformats.org/officeDocument/2006/relationships" id="261" r:id="Rb4f59ffb46884f55"/>
+    <p:sldId xmlns:r="http://schemas.openxmlformats.org/officeDocument/2006/relationships" id="262" r:id="Rb4751571797d45fa"/>
+    <p:sldId xmlns:r="http://schemas.openxmlformats.org/officeDocument/2006/relationships" id="263" r:id="Rb44cb73827ae4262"/>
+    <p:sldId xmlns:r="http://schemas.openxmlformats.org/officeDocument/2006/relationships" id="264" r:id="Rd02745f6be054363"/>
+    <p:sldId xmlns:r="http://schemas.openxmlformats.org/officeDocument/2006/relationships" id="265" r:id="R4343efe845f04457"/>
+    <p:sldId xmlns:r="http://schemas.openxmlformats.org/officeDocument/2006/relationships" id="266" r:id="R8e3ae2e0c9e444f1"/>
+    <p:sldId xmlns:r="http://schemas.openxmlformats.org/officeDocument/2006/relationships" id="267" r:id="R6f76174f040b42b7"/>
+    <p:sldId xmlns:r="http://schemas.openxmlformats.org/officeDocument/2006/relationships" id="268" r:id="R9e76b669f36d49e1"/>
+    <p:sldId xmlns:r="http://schemas.openxmlformats.org/officeDocument/2006/relationships" id="269" r:id="R51bce2330cbc4f12"/>
+    <p:sldId xmlns:r="http://schemas.openxmlformats.org/officeDocument/2006/relationships" id="270" r:id="Rde48d84fa9d34946"/>
+    <p:sldId xmlns:r="http://schemas.openxmlformats.org/officeDocument/2006/relationships" id="271" r:id="Rc7a7a03b8abe4ca3"/>
+    <p:sldId xmlns:r="http://schemas.openxmlformats.org/officeDocument/2006/relationships" id="272" r:id="Reff8d42975984343"/>
+    <p:sldId xmlns:r="http://schemas.openxmlformats.org/officeDocument/2006/relationships" id="273" r:id="Ree90b721cc62469e"/>
+    <p:sldId xmlns:r="http://schemas.openxmlformats.org/officeDocument/2006/relationships" id="274" r:id="Rfd75855a636f4c9d"/>
+    <p:sldId xmlns:r="http://schemas.openxmlformats.org/officeDocument/2006/relationships" id="275" r:id="Rd506d3ca9ae04f23"/>
+    <p:sldId xmlns:r="http://schemas.openxmlformats.org/officeDocument/2006/relationships" id="276" r:id="Rded450775c514e6b"/>
+    <p:sldId xmlns:r="http://schemas.openxmlformats.org/officeDocument/2006/relationships" id="277" r:id="R13b9d3c56d174f06"/>
+    <p:sldId xmlns:r="http://schemas.openxmlformats.org/officeDocument/2006/relationships" id="278" r:id="R8e3390b7d14b4a77"/>
+    <p:sldId xmlns:r="http://schemas.openxmlformats.org/officeDocument/2006/relationships" id="279" r:id="Rec5c23fab7d24afd"/>
+    <p:sldId xmlns:r="http://schemas.openxmlformats.org/officeDocument/2006/relationships" id="280" r:id="R987419ddb34149d3"/>
+    <p:sldId xmlns:r="http://schemas.openxmlformats.org/officeDocument/2006/relationships" id="281" r:id="R8db3c34e99024aaa"/>
   </p:sldIdLst>
   <p:sldSz cx="9144000" cy="5143500"/>
   <p:notesSz cx="6858000" cy="9144000"/>
   <p:embeddedFontLst>
     <p:embeddedFont>
       <p:font typeface="Quantico"/>
-      <p:regular xmlns:r="http://schemas.openxmlformats.org/officeDocument/2006/relationships" r:id="Rb036fd1187bf4226"/>
-      <p:bold xmlns:r="http://schemas.openxmlformats.org/officeDocument/2006/relationships" r:id="Rf2a5e55001e84e3a"/>
-      <p:italic xmlns:r="http://schemas.openxmlformats.org/officeDocument/2006/relationships" r:id="Rfe0d788190b74c48"/>
-      <p:boldItalic xmlns:r="http://schemas.openxmlformats.org/officeDocument/2006/relationships" r:id="R3052e6c6f57f4786"/>
+      <p:regular xmlns:r="http://schemas.openxmlformats.org/officeDocument/2006/relationships" r:id="Rfba20f19358a4d87"/>
+      <p:bold xmlns:r="http://schemas.openxmlformats.org/officeDocument/2006/relationships" r:id="R1e0f457907794504"/>
+      <p:italic xmlns:r="http://schemas.openxmlformats.org/officeDocument/2006/relationships" r:id="Rec5fe9435d654475"/>
+      <p:boldItalic xmlns:r="http://schemas.openxmlformats.org/officeDocument/2006/relationships" r:id="R51107f10382e4b32"/>
     </p:embeddedFont>
     <p:embeddedFont>
       <p:font typeface="Source Code Pro"/>
-      <p:regular xmlns:r="http://schemas.openxmlformats.org/officeDocument/2006/relationships" r:id="R81a4a71336614341"/>
-      <p:bold xmlns:r="http://schemas.openxmlformats.org/officeDocument/2006/relationships" r:id="R597118ed2a074743"/>
-      <p:italic xmlns:r="http://schemas.openxmlformats.org/officeDocument/2006/relationships" r:id="R6b0555c4b0714f4d"/>
-      <p:boldItalic xmlns:r="http://schemas.openxmlformats.org/officeDocument/2006/relationships" r:id="Rc9b35fb273dc4e89"/>
+      <p:regular xmlns:r="http://schemas.openxmlformats.org/officeDocument/2006/relationships" r:id="Rdecc040b29c24ef2"/>
+      <p:bold xmlns:r="http://schemas.openxmlformats.org/officeDocument/2006/relationships" r:id="Rc48a5194ca2546c2"/>
+      <p:italic xmlns:r="http://schemas.openxmlformats.org/officeDocument/2006/relationships" r:id="R1301be46e20645ab"/>
+      <p:boldItalic xmlns:r="http://schemas.openxmlformats.org/officeDocument/2006/relationships" r:id="Rcfcb47df48b04529"/>
     </p:embeddedFont>
   </p:embeddedFontLst>
   <p:defaultTextStyle>
@@ -17953,28 +17953,28 @@
   </p:cSld>
   <p:clrMap bg1="lt1" tx1="dk1" bg2="dk2" tx2="lt2" accent1="accent1" accent2="accent2" accent3="accent3" accent4="accent4" accent5="accent5" accent6="accent6" hlink="hlink" folHlink="folHlink"/>
   <p:sldLayoutIdLst>
-    <p:sldLayoutId xmlns:r="http://schemas.openxmlformats.org/officeDocument/2006/relationships" id="2147483649" r:id="R27b16fdca3f74234"/>
-    <p:sldLayoutId xmlns:r="http://schemas.openxmlformats.org/officeDocument/2006/relationships" id="2147483650" r:id="R1ca4fec8b4ac4c6d"/>
-    <p:sldLayoutId xmlns:r="http://schemas.openxmlformats.org/officeDocument/2006/relationships" id="2147483651" r:id="R06182b9b9f0b4c37"/>
-    <p:sldLayoutId xmlns:r="http://schemas.openxmlformats.org/officeDocument/2006/relationships" id="2147483652" r:id="R2e3e39e9f1e0442d"/>
-    <p:sldLayoutId xmlns:r="http://schemas.openxmlformats.org/officeDocument/2006/relationships" id="2147483653" r:id="Ra4bf0da24ffb4af1"/>
-    <p:sldLayoutId xmlns:r="http://schemas.openxmlformats.org/officeDocument/2006/relationships" id="2147483654" r:id="Rac2bce0e82164aab"/>
-    <p:sldLayoutId xmlns:r="http://schemas.openxmlformats.org/officeDocument/2006/relationships" id="2147483655" r:id="Rfc8aeb4a3a434d13"/>
-    <p:sldLayoutId xmlns:r="http://schemas.openxmlformats.org/officeDocument/2006/relationships" id="2147483656" r:id="R264ad26211d74685"/>
-    <p:sldLayoutId xmlns:r="http://schemas.openxmlformats.org/officeDocument/2006/relationships" id="2147483657" r:id="Rbddc82088e414384"/>
-    <p:sldLayoutId xmlns:r="http://schemas.openxmlformats.org/officeDocument/2006/relationships" id="2147483658" r:id="Rc743b7036a1c4c9c"/>
-    <p:sldLayoutId xmlns:r="http://schemas.openxmlformats.org/officeDocument/2006/relationships" id="2147483659" r:id="R08593d44606245e0"/>
-    <p:sldLayoutId xmlns:r="http://schemas.openxmlformats.org/officeDocument/2006/relationships" id="2147483660" r:id="R96cd3c66fbac4710"/>
-    <p:sldLayoutId xmlns:r="http://schemas.openxmlformats.org/officeDocument/2006/relationships" id="2147483661" r:id="R4ced5fb8783a477f"/>
-    <p:sldLayoutId xmlns:r="http://schemas.openxmlformats.org/officeDocument/2006/relationships" id="2147483662" r:id="Rf74d3de9531043ce"/>
-    <p:sldLayoutId xmlns:r="http://schemas.openxmlformats.org/officeDocument/2006/relationships" id="2147483663" r:id="R67af0c4de7c34044"/>
-    <p:sldLayoutId xmlns:r="http://schemas.openxmlformats.org/officeDocument/2006/relationships" id="2147483664" r:id="R6b6b4055ac9e42e9"/>
-    <p:sldLayoutId xmlns:r="http://schemas.openxmlformats.org/officeDocument/2006/relationships" id="2147483665" r:id="Rfa89669d45474808"/>
-    <p:sldLayoutId xmlns:r="http://schemas.openxmlformats.org/officeDocument/2006/relationships" id="2147483666" r:id="Rcfc9b3fc55804f46"/>
-    <p:sldLayoutId xmlns:r="http://schemas.openxmlformats.org/officeDocument/2006/relationships" id="2147483667" r:id="R927be512e2424b52"/>
-    <p:sldLayoutId xmlns:r="http://schemas.openxmlformats.org/officeDocument/2006/relationships" id="2147483668" r:id="R7e3c14293c35406a"/>
-    <p:sldLayoutId xmlns:r="http://schemas.openxmlformats.org/officeDocument/2006/relationships" id="2147483669" r:id="R32a43aa74a2640c6"/>
-    <p:sldLayoutId xmlns:r="http://schemas.openxmlformats.org/officeDocument/2006/relationships" id="2147483670" r:id="R05bf5d713f884ec5"/>
+    <p:sldLayoutId xmlns:r="http://schemas.openxmlformats.org/officeDocument/2006/relationships" id="2147483649" r:id="R21ebd40119fc4a4d"/>
+    <p:sldLayoutId xmlns:r="http://schemas.openxmlformats.org/officeDocument/2006/relationships" id="2147483650" r:id="R2f5ed9d025834e8e"/>
+    <p:sldLayoutId xmlns:r="http://schemas.openxmlformats.org/officeDocument/2006/relationships" id="2147483651" r:id="R730a2ef0a5f748d2"/>
+    <p:sldLayoutId xmlns:r="http://schemas.openxmlformats.org/officeDocument/2006/relationships" id="2147483652" r:id="R4627175da4124cec"/>
+    <p:sldLayoutId xmlns:r="http://schemas.openxmlformats.org/officeDocument/2006/relationships" id="2147483653" r:id="Ra4174e529dd54a6d"/>
+    <p:sldLayoutId xmlns:r="http://schemas.openxmlformats.org/officeDocument/2006/relationships" id="2147483654" r:id="R9bd1f42ec2ab4e2f"/>
+    <p:sldLayoutId xmlns:r="http://schemas.openxmlformats.org/officeDocument/2006/relationships" id="2147483655" r:id="R6c5209c2057a465a"/>
+    <p:sldLayoutId xmlns:r="http://schemas.openxmlformats.org/officeDocument/2006/relationships" id="2147483656" r:id="Rad2bdfae646a4841"/>
+    <p:sldLayoutId xmlns:r="http://schemas.openxmlformats.org/officeDocument/2006/relationships" id="2147483657" r:id="R7eaccfe1d3a14db5"/>
+    <p:sldLayoutId xmlns:r="http://schemas.openxmlformats.org/officeDocument/2006/relationships" id="2147483658" r:id="R3024559cb9764bb4"/>
+    <p:sldLayoutId xmlns:r="http://schemas.openxmlformats.org/officeDocument/2006/relationships" id="2147483659" r:id="R8cc8e6c365344c19"/>
+    <p:sldLayoutId xmlns:r="http://schemas.openxmlformats.org/officeDocument/2006/relationships" id="2147483660" r:id="R116a576682764054"/>
+    <p:sldLayoutId xmlns:r="http://schemas.openxmlformats.org/officeDocument/2006/relationships" id="2147483661" r:id="R7e4295cdfa3b4f10"/>
+    <p:sldLayoutId xmlns:r="http://schemas.openxmlformats.org/officeDocument/2006/relationships" id="2147483662" r:id="R5c0465a2e09a4485"/>
+    <p:sldLayoutId xmlns:r="http://schemas.openxmlformats.org/officeDocument/2006/relationships" id="2147483663" r:id="Rc94b7756d2604211"/>
+    <p:sldLayoutId xmlns:r="http://schemas.openxmlformats.org/officeDocument/2006/relationships" id="2147483664" r:id="Rdea4fc94a1cf4350"/>
+    <p:sldLayoutId xmlns:r="http://schemas.openxmlformats.org/officeDocument/2006/relationships" id="2147483665" r:id="R03d2f1c378f94235"/>
+    <p:sldLayoutId xmlns:r="http://schemas.openxmlformats.org/officeDocument/2006/relationships" id="2147483666" r:id="Re158bd60edf940e8"/>
+    <p:sldLayoutId xmlns:r="http://schemas.openxmlformats.org/officeDocument/2006/relationships" id="2147483667" r:id="R4a618a026cc948c7"/>
+    <p:sldLayoutId xmlns:r="http://schemas.openxmlformats.org/officeDocument/2006/relationships" id="2147483668" r:id="R3b25be747c9b4812"/>
+    <p:sldLayoutId xmlns:r="http://schemas.openxmlformats.org/officeDocument/2006/relationships" id="2147483669" r:id="Rb5c20ce71d954093"/>
+    <p:sldLayoutId xmlns:r="http://schemas.openxmlformats.org/officeDocument/2006/relationships" id="2147483670" r:id="Rf2b2d0c0f2744114"/>
   </p:sldLayoutIdLst>
   <p:hf sldNum="0" hdr="0" ftr="0" dt="0"/>
   <p:txStyles>
@@ -19562,7 +19562,7 @@
         </p:nvSpPr>
         <p:spPr>
           <a:xfrm xmlns:a="http://schemas.openxmlformats.org/drawingml/2006/main">
-            <a:off x="1252403" y="2678261"/>
+            <a:off x="1252403" y="2857500"/>
             <a:ext cx="4190700" cy="384600"/>
           </a:xfrm>
           <a:prstGeom xmlns:a="http://schemas.openxmlformats.org/drawingml/2006/main" prst="rect">
@@ -19609,7 +19609,7 @@
         <p:spPr>
           <a:xfrm xmlns:a="http://schemas.openxmlformats.org/drawingml/2006/main">
             <a:off x="1252403" y="1022536"/>
-            <a:ext cx="4190700" cy="548640"/>
+            <a:ext cx="4190700" cy="733500"/>
           </a:xfrm>
           <a:prstGeom xmlns:a="http://schemas.openxmlformats.org/drawingml/2006/main" prst="rect">
             <a:avLst/>
@@ -19659,7 +19659,7 @@
         </p:nvSpPr>
         <p:spPr>
           <a:xfrm xmlns:a="http://schemas.openxmlformats.org/drawingml/2006/main">
-            <a:off x="1252403" y="1620161"/>
+            <a:off x="1252403" y="1790700"/>
             <a:ext cx="4190700" cy="384600"/>
           </a:xfrm>
           <a:prstGeom xmlns:a="http://schemas.openxmlformats.org/drawingml/2006/main" prst="rect">
@@ -19706,7 +19706,7 @@
         <p:spPr>
           <a:xfrm xmlns:a="http://schemas.openxmlformats.org/drawingml/2006/main">
             <a:off x="1252403" y="2080661"/>
-            <a:ext cx="4190700" cy="548640"/>
+            <a:ext cx="4190700" cy="733500"/>
           </a:xfrm>
           <a:prstGeom xmlns:a="http://schemas.openxmlformats.org/drawingml/2006/main" prst="rect">
             <a:avLst/>
@@ -19752,7 +19752,7 @@
         <p:spPr>
           <a:xfrm xmlns:a="http://schemas.openxmlformats.org/drawingml/2006/main">
             <a:off x="1252404" y="3138786"/>
-            <a:ext cx="4190700" cy="548640"/>
+            <a:ext cx="4190700" cy="733500"/>
           </a:xfrm>
           <a:prstGeom xmlns:a="http://schemas.openxmlformats.org/drawingml/2006/main" prst="rect">
             <a:avLst/>
@@ -19802,7 +19802,7 @@
         </p:nvSpPr>
         <p:spPr>
           <a:xfrm xmlns:a="http://schemas.openxmlformats.org/drawingml/2006/main">
-            <a:off x="1252404" y="3736386"/>
+            <a:off x="1252404" y="3914775"/>
             <a:ext cx="4190700" cy="384600"/>
           </a:xfrm>
           <a:prstGeom xmlns:a="http://schemas.openxmlformats.org/drawingml/2006/main" prst="rect">
@@ -20065,6 +20065,62 @@
           </a:p>
         </p:txBody>
       </p:sp>
+      <p:sp>
+        <p:nvSpPr>
+          <p:cNvPr id="313" name="slide-heading-10">
+            <a:extLst xmlns:a="http://schemas.openxmlformats.org/drawingml/2006/main">
+              <a:ext uri="{FF2B5EF4-FFF2-40B4-BE49-F238E27FC236}">
+                <a16:creationId xmlns:a16="http://schemas.microsoft.com/office/drawing/2014/main" id="{EB4D228F-D243-4881-BA76-77C63C827DC2}"/>
+              </a:ext>
+            </a:extLst>
+          </p:cNvPr>
+          <p:cNvSpPr>
+            <a:spLocks xmlns:a="http://schemas.openxmlformats.org/drawingml/2006/main" noGrp="1"/>
+          </p:cNvSpPr>
+          <p:nvPr/>
+        </p:nvSpPr>
+        <p:spPr>
+          <a:xfrm xmlns:a="http://schemas.openxmlformats.org/drawingml/2006/main">
+            <a:off x="552450" y="219075"/>
+            <a:ext cx="6858000" cy="266700"/>
+          </a:xfrm>
+          <a:prstGeom xmlns:a="http://schemas.openxmlformats.org/drawingml/2006/main" prst="rect">
+            <a:avLst/>
+          </a:prstGeom>
+          <a:noFill xmlns:a="http://schemas.openxmlformats.org/drawingml/2006/main"/>
+          <a:ln xmlns:a="http://schemas.openxmlformats.org/drawingml/2006/main" w="0">
+            <a:noFill/>
+            <a:prstDash val="solid"/>
+          </a:ln>
+        </p:spPr>
+        <p:txBody>
+          <a:bodyPr xmlns:a="http://schemas.openxmlformats.org/drawingml/2006/main"/>
+          <a:lstStyle xmlns:a="http://schemas.openxmlformats.org/drawingml/2006/main"/>
+          <a:p xmlns:a="http://schemas.openxmlformats.org/drawingml/2006/main">
+            <a:pPr algn="l">
+              <a:defRPr sz="1350" b="1">
+                <a:solidFill>
+                  <a:srgbClr val="FFFFFF"/>
+                </a:solidFill>
+                <a:latin typeface="Source Code Pro"/>
+                <a:ea typeface="Source Code Pro"/>
+                <a:cs typeface="Source Code Pro"/>
+              </a:defRPr>
+            </a:pPr>
+            <a:r>
+              <a:rPr sz="1350" b="1">
+                <a:solidFill>
+                  <a:srgbClr val="FFFFFF"/>
+                </a:solidFill>
+                <a:latin typeface="Source Code Pro"/>
+                <a:ea typeface="Source Code Pro"/>
+                <a:cs typeface="Source Code Pro"/>
+              </a:rPr>
+              <a:t>Find class in Microsoft Teams</a:t>
+            </a:r>
+          </a:p>
+        </p:txBody>
+      </p:sp>
     </p:spTree>
     <p:extLst>
       <p:ext uri="{BB962C8B-B14F-4D97-AF65-F5344CB8AC3E}">
@@ -20105,7 +20161,7 @@
         </p:nvSpPr>
         <p:spPr>
           <a:xfrm xmlns:a="http://schemas.openxmlformats.org/drawingml/2006/main">
-            <a:off x="1252403" y="2678261"/>
+            <a:off x="1252403" y="2857500"/>
             <a:ext cx="4190700" cy="384600"/>
           </a:xfrm>
           <a:prstGeom xmlns:a="http://schemas.openxmlformats.org/drawingml/2006/main" prst="rect">
@@ -20152,7 +20208,7 @@
         <p:spPr>
           <a:xfrm xmlns:a="http://schemas.openxmlformats.org/drawingml/2006/main">
             <a:off x="1252403" y="1022536"/>
-            <a:ext cx="4190700" cy="548640"/>
+            <a:ext cx="4190700" cy="733500"/>
           </a:xfrm>
           <a:prstGeom xmlns:a="http://schemas.openxmlformats.org/drawingml/2006/main" prst="rect">
             <a:avLst/>
@@ -20202,7 +20258,7 @@
         </p:nvSpPr>
         <p:spPr>
           <a:xfrm xmlns:a="http://schemas.openxmlformats.org/drawingml/2006/main">
-            <a:off x="1252403" y="1620161"/>
+            <a:off x="1252403" y="1790700"/>
             <a:ext cx="4190700" cy="384600"/>
           </a:xfrm>
           <a:prstGeom xmlns:a="http://schemas.openxmlformats.org/drawingml/2006/main" prst="rect">
@@ -20249,7 +20305,7 @@
         <p:spPr>
           <a:xfrm xmlns:a="http://schemas.openxmlformats.org/drawingml/2006/main">
             <a:off x="1252403" y="2080661"/>
-            <a:ext cx="4190700" cy="548640"/>
+            <a:ext cx="4190700" cy="733500"/>
           </a:xfrm>
           <a:prstGeom xmlns:a="http://schemas.openxmlformats.org/drawingml/2006/main" prst="rect">
             <a:avLst/>
@@ -20295,7 +20351,7 @@
         <p:spPr>
           <a:xfrm xmlns:a="http://schemas.openxmlformats.org/drawingml/2006/main">
             <a:off x="1252404" y="3138786"/>
-            <a:ext cx="4190700" cy="548640"/>
+            <a:ext cx="4190700" cy="733500"/>
           </a:xfrm>
           <a:prstGeom xmlns:a="http://schemas.openxmlformats.org/drawingml/2006/main" prst="rect">
             <a:avLst/>
@@ -20345,7 +20401,7 @@
         </p:nvSpPr>
         <p:spPr>
           <a:xfrm xmlns:a="http://schemas.openxmlformats.org/drawingml/2006/main">
-            <a:off x="1252404" y="3736386"/>
+            <a:off x="1252404" y="3914775"/>
             <a:ext cx="4190700" cy="384600"/>
           </a:xfrm>
           <a:prstGeom xmlns:a="http://schemas.openxmlformats.org/drawingml/2006/main" prst="rect">
@@ -20608,6 +20664,62 @@
           </a:p>
         </p:txBody>
       </p:sp>
+      <p:sp>
+        <p:nvSpPr>
+          <p:cNvPr id="313" name="slide-heading-11">
+            <a:extLst xmlns:a="http://schemas.openxmlformats.org/drawingml/2006/main">
+              <a:ext uri="{FF2B5EF4-FFF2-40B4-BE49-F238E27FC236}">
+                <a16:creationId xmlns:a16="http://schemas.microsoft.com/office/drawing/2014/main" id="{9DE39D22-8A17-4CC3-AD46-A745C8F2AF0D}"/>
+              </a:ext>
+            </a:extLst>
+          </p:cNvPr>
+          <p:cNvSpPr>
+            <a:spLocks xmlns:a="http://schemas.openxmlformats.org/drawingml/2006/main" noGrp="1"/>
+          </p:cNvSpPr>
+          <p:nvPr/>
+        </p:nvSpPr>
+        <p:spPr>
+          <a:xfrm xmlns:a="http://schemas.openxmlformats.org/drawingml/2006/main">
+            <a:off x="552450" y="219075"/>
+            <a:ext cx="6858000" cy="266700"/>
+          </a:xfrm>
+          <a:prstGeom xmlns:a="http://schemas.openxmlformats.org/drawingml/2006/main" prst="rect">
+            <a:avLst/>
+          </a:prstGeom>
+          <a:noFill xmlns:a="http://schemas.openxmlformats.org/drawingml/2006/main"/>
+          <a:ln xmlns:a="http://schemas.openxmlformats.org/drawingml/2006/main" w="0">
+            <a:noFill/>
+            <a:prstDash val="solid"/>
+          </a:ln>
+        </p:spPr>
+        <p:txBody>
+          <a:bodyPr xmlns:a="http://schemas.openxmlformats.org/drawingml/2006/main"/>
+          <a:lstStyle xmlns:a="http://schemas.openxmlformats.org/drawingml/2006/main"/>
+          <a:p xmlns:a="http://schemas.openxmlformats.org/drawingml/2006/main">
+            <a:pPr algn="l">
+              <a:defRPr sz="1350" b="1">
+                <a:solidFill>
+                  <a:srgbClr val="FFFFFF"/>
+                </a:solidFill>
+                <a:latin typeface="Source Code Pro"/>
+                <a:ea typeface="Source Code Pro"/>
+                <a:cs typeface="Source Code Pro"/>
+              </a:defRPr>
+            </a:pPr>
+            <a:r>
+              <a:rPr sz="1350" b="1">
+                <a:solidFill>
+                  <a:srgbClr val="FFFFFF"/>
+                </a:solidFill>
+                <a:latin typeface="Source Code Pro"/>
+                <a:ea typeface="Source Code Pro"/>
+                <a:cs typeface="Source Code Pro"/>
+              </a:rPr>
+              <a:t>Know the Teams channels</a:t>
+            </a:r>
+          </a:p>
+        </p:txBody>
+      </p:sp>
     </p:spTree>
     <p:extLst>
       <p:ext uri="{BB962C8B-B14F-4D97-AF65-F5344CB8AC3E}">
@@ -20648,7 +20760,7 @@
         </p:nvSpPr>
         <p:spPr>
           <a:xfrm xmlns:a="http://schemas.openxmlformats.org/drawingml/2006/main">
-            <a:off x="1252403" y="2678261"/>
+            <a:off x="1252403" y="2857500"/>
             <a:ext cx="4190700" cy="384600"/>
           </a:xfrm>
           <a:prstGeom xmlns:a="http://schemas.openxmlformats.org/drawingml/2006/main" prst="rect">
@@ -20695,7 +20807,7 @@
         <p:spPr>
           <a:xfrm xmlns:a="http://schemas.openxmlformats.org/drawingml/2006/main">
             <a:off x="1252403" y="1022536"/>
-            <a:ext cx="4190700" cy="548640"/>
+            <a:ext cx="4190700" cy="733500"/>
           </a:xfrm>
           <a:prstGeom xmlns:a="http://schemas.openxmlformats.org/drawingml/2006/main" prst="rect">
             <a:avLst/>
@@ -20745,7 +20857,7 @@
         </p:nvSpPr>
         <p:spPr>
           <a:xfrm xmlns:a="http://schemas.openxmlformats.org/drawingml/2006/main">
-            <a:off x="1252403" y="1620161"/>
+            <a:off x="1252403" y="1790700"/>
             <a:ext cx="4190700" cy="384600"/>
           </a:xfrm>
           <a:prstGeom xmlns:a="http://schemas.openxmlformats.org/drawingml/2006/main" prst="rect">
@@ -20792,7 +20904,7 @@
         <p:spPr>
           <a:xfrm xmlns:a="http://schemas.openxmlformats.org/drawingml/2006/main">
             <a:off x="1252403" y="2080661"/>
-            <a:ext cx="4190700" cy="548640"/>
+            <a:ext cx="4190700" cy="733500"/>
           </a:xfrm>
           <a:prstGeom xmlns:a="http://schemas.openxmlformats.org/drawingml/2006/main" prst="rect">
             <a:avLst/>
@@ -20838,7 +20950,7 @@
         <p:spPr>
           <a:xfrm xmlns:a="http://schemas.openxmlformats.org/drawingml/2006/main">
             <a:off x="1252404" y="3138786"/>
-            <a:ext cx="4190700" cy="548640"/>
+            <a:ext cx="4190700" cy="733500"/>
           </a:xfrm>
           <a:prstGeom xmlns:a="http://schemas.openxmlformats.org/drawingml/2006/main" prst="rect">
             <a:avLst/>
@@ -20888,7 +21000,7 @@
         </p:nvSpPr>
         <p:spPr>
           <a:xfrm xmlns:a="http://schemas.openxmlformats.org/drawingml/2006/main">
-            <a:off x="1252404" y="3736386"/>
+            <a:off x="1252404" y="3914775"/>
             <a:ext cx="4190700" cy="384600"/>
           </a:xfrm>
           <a:prstGeom xmlns:a="http://schemas.openxmlformats.org/drawingml/2006/main" prst="rect">
@@ -21151,6 +21263,62 @@
           </a:p>
         </p:txBody>
       </p:sp>
+      <p:sp>
+        <p:nvSpPr>
+          <p:cNvPr id="313" name="slide-heading-12">
+            <a:extLst xmlns:a="http://schemas.openxmlformats.org/drawingml/2006/main">
+              <a:ext uri="{FF2B5EF4-FFF2-40B4-BE49-F238E27FC236}">
+                <a16:creationId xmlns:a16="http://schemas.microsoft.com/office/drawing/2014/main" id="{E9F6E9FD-1A91-403A-9E34-4884CF214F5B}"/>
+              </a:ext>
+            </a:extLst>
+          </p:cNvPr>
+          <p:cNvSpPr>
+            <a:spLocks xmlns:a="http://schemas.openxmlformats.org/drawingml/2006/main" noGrp="1"/>
+          </p:cNvSpPr>
+          <p:nvPr/>
+        </p:nvSpPr>
+        <p:spPr>
+          <a:xfrm xmlns:a="http://schemas.openxmlformats.org/drawingml/2006/main">
+            <a:off x="552450" y="219075"/>
+            <a:ext cx="6858000" cy="266700"/>
+          </a:xfrm>
+          <a:prstGeom xmlns:a="http://schemas.openxmlformats.org/drawingml/2006/main" prst="rect">
+            <a:avLst/>
+          </a:prstGeom>
+          <a:noFill xmlns:a="http://schemas.openxmlformats.org/drawingml/2006/main"/>
+          <a:ln xmlns:a="http://schemas.openxmlformats.org/drawingml/2006/main" w="0">
+            <a:noFill/>
+            <a:prstDash val="solid"/>
+          </a:ln>
+        </p:spPr>
+        <p:txBody>
+          <a:bodyPr xmlns:a="http://schemas.openxmlformats.org/drawingml/2006/main"/>
+          <a:lstStyle xmlns:a="http://schemas.openxmlformats.org/drawingml/2006/main"/>
+          <a:p xmlns:a="http://schemas.openxmlformats.org/drawingml/2006/main">
+            <a:pPr algn="l">
+              <a:defRPr sz="1350" b="1">
+                <a:solidFill>
+                  <a:srgbClr val="FFFFFF"/>
+                </a:solidFill>
+                <a:latin typeface="Source Code Pro"/>
+                <a:ea typeface="Source Code Pro"/>
+                <a:cs typeface="Source Code Pro"/>
+              </a:defRPr>
+            </a:pPr>
+            <a:r>
+              <a:rPr sz="1350" b="1">
+                <a:solidFill>
+                  <a:srgbClr val="FFFFFF"/>
+                </a:solidFill>
+                <a:latin typeface="Source Code Pro"/>
+                <a:ea typeface="Source Code Pro"/>
+                <a:cs typeface="Source Code Pro"/>
+              </a:rPr>
+              <a:t>Use hangout for extra help</a:t>
+            </a:r>
+          </a:p>
+        </p:txBody>
+      </p:sp>
     </p:spTree>
     <p:extLst>
       <p:ext uri="{BB962C8B-B14F-4D97-AF65-F5344CB8AC3E}">
@@ -21191,7 +21359,7 @@
         </p:nvSpPr>
         <p:spPr>
           <a:xfrm xmlns:a="http://schemas.openxmlformats.org/drawingml/2006/main">
-            <a:off x="1252403" y="2678261"/>
+            <a:off x="1252403" y="2857500"/>
             <a:ext cx="4190700" cy="384600"/>
           </a:xfrm>
           <a:prstGeom xmlns:a="http://schemas.openxmlformats.org/drawingml/2006/main" prst="rect">
@@ -21238,7 +21406,7 @@
         <p:spPr>
           <a:xfrm xmlns:a="http://schemas.openxmlformats.org/drawingml/2006/main">
             <a:off x="1252403" y="1022536"/>
-            <a:ext cx="4190700" cy="548640"/>
+            <a:ext cx="4190700" cy="733500"/>
           </a:xfrm>
           <a:prstGeom xmlns:a="http://schemas.openxmlformats.org/drawingml/2006/main" prst="rect">
             <a:avLst/>
@@ -21291,7 +21459,7 @@
         </p:nvSpPr>
         <p:spPr>
           <a:xfrm xmlns:a="http://schemas.openxmlformats.org/drawingml/2006/main">
-            <a:off x="1252403" y="1620161"/>
+            <a:off x="1252403" y="1790700"/>
             <a:ext cx="4190700" cy="384600"/>
           </a:xfrm>
           <a:prstGeom xmlns:a="http://schemas.openxmlformats.org/drawingml/2006/main" prst="rect">
@@ -21338,7 +21506,7 @@
         <p:spPr>
           <a:xfrm xmlns:a="http://schemas.openxmlformats.org/drawingml/2006/main">
             <a:off x="1252403" y="2080661"/>
-            <a:ext cx="4190700" cy="548640"/>
+            <a:ext cx="4190700" cy="733500"/>
           </a:xfrm>
           <a:prstGeom xmlns:a="http://schemas.openxmlformats.org/drawingml/2006/main" prst="rect">
             <a:avLst/>
@@ -21392,7 +21560,7 @@
         <p:spPr>
           <a:xfrm xmlns:a="http://schemas.openxmlformats.org/drawingml/2006/main">
             <a:off x="1252404" y="3138786"/>
-            <a:ext cx="4190700" cy="548640"/>
+            <a:ext cx="4190700" cy="733500"/>
           </a:xfrm>
           <a:prstGeom xmlns:a="http://schemas.openxmlformats.org/drawingml/2006/main" prst="rect">
             <a:avLst/>
@@ -21445,7 +21613,7 @@
         </p:nvSpPr>
         <p:spPr>
           <a:xfrm xmlns:a="http://schemas.openxmlformats.org/drawingml/2006/main">
-            <a:off x="1252404" y="3736386"/>
+            <a:off x="1252404" y="3914775"/>
             <a:ext cx="4190700" cy="384600"/>
           </a:xfrm>
           <a:prstGeom xmlns:a="http://schemas.openxmlformats.org/drawingml/2006/main" prst="rect">
@@ -21704,6 +21872,62 @@
                 </a:solidFill>
               </a:rPr>
               <a:t>[</a:t>
+            </a:r>
+          </a:p>
+        </p:txBody>
+      </p:sp>
+      <p:sp>
+        <p:nvSpPr>
+          <p:cNvPr id="313" name="slide-heading-13">
+            <a:extLst xmlns:a="http://schemas.openxmlformats.org/drawingml/2006/main">
+              <a:ext uri="{FF2B5EF4-FFF2-40B4-BE49-F238E27FC236}">
+                <a16:creationId xmlns:a16="http://schemas.microsoft.com/office/drawing/2014/main" id="{4ECF204A-636A-4922-8392-3A1E06A68D47}"/>
+              </a:ext>
+            </a:extLst>
+          </p:cNvPr>
+          <p:cNvSpPr>
+            <a:spLocks xmlns:a="http://schemas.openxmlformats.org/drawingml/2006/main" noGrp="1"/>
+          </p:cNvSpPr>
+          <p:nvPr/>
+        </p:nvSpPr>
+        <p:spPr>
+          <a:xfrm xmlns:a="http://schemas.openxmlformats.org/drawingml/2006/main">
+            <a:off x="552450" y="219075"/>
+            <a:ext cx="6858000" cy="266700"/>
+          </a:xfrm>
+          <a:prstGeom xmlns:a="http://schemas.openxmlformats.org/drawingml/2006/main" prst="rect">
+            <a:avLst/>
+          </a:prstGeom>
+          <a:noFill xmlns:a="http://schemas.openxmlformats.org/drawingml/2006/main"/>
+          <a:ln xmlns:a="http://schemas.openxmlformats.org/drawingml/2006/main" w="0">
+            <a:noFill/>
+            <a:prstDash val="solid"/>
+          </a:ln>
+        </p:spPr>
+        <p:txBody>
+          <a:bodyPr xmlns:a="http://schemas.openxmlformats.org/drawingml/2006/main"/>
+          <a:lstStyle xmlns:a="http://schemas.openxmlformats.org/drawingml/2006/main"/>
+          <a:p xmlns:a="http://schemas.openxmlformats.org/drawingml/2006/main">
+            <a:pPr algn="l">
+              <a:defRPr sz="1350" b="1">
+                <a:solidFill>
+                  <a:srgbClr val="FFFFFF"/>
+                </a:solidFill>
+                <a:latin typeface="Source Code Pro"/>
+                <a:ea typeface="Source Code Pro"/>
+                <a:cs typeface="Source Code Pro"/>
+              </a:defRPr>
+            </a:pPr>
+            <a:r>
+              <a:rPr sz="1350" b="1">
+                <a:solidFill>
+                  <a:srgbClr val="FFFFFF"/>
+                </a:solidFill>
+                <a:latin typeface="Source Code Pro"/>
+                <a:ea typeface="Source Code Pro"/>
+                <a:cs typeface="Source Code Pro"/>
+              </a:rPr>
+              <a:t>Class habits that help everyone</a:t>
             </a:r>
           </a:p>
         </p:txBody>
@@ -23956,7 +24180,7 @@
         </p:nvSpPr>
         <p:spPr>
           <a:xfrm xmlns:a="http://schemas.openxmlformats.org/drawingml/2006/main">
-            <a:off x="1252403" y="2678261"/>
+            <a:off x="1252403" y="2857500"/>
             <a:ext cx="4190700" cy="384600"/>
           </a:xfrm>
           <a:prstGeom xmlns:a="http://schemas.openxmlformats.org/drawingml/2006/main" prst="rect">
@@ -24003,7 +24227,7 @@
         <p:spPr>
           <a:xfrm xmlns:a="http://schemas.openxmlformats.org/drawingml/2006/main">
             <a:off x="1252403" y="1022536"/>
-            <a:ext cx="4190700" cy="548640"/>
+            <a:ext cx="4190700" cy="733500"/>
           </a:xfrm>
           <a:prstGeom xmlns:a="http://schemas.openxmlformats.org/drawingml/2006/main" prst="rect">
             <a:avLst/>
@@ -24053,7 +24277,7 @@
         </p:nvSpPr>
         <p:spPr>
           <a:xfrm xmlns:a="http://schemas.openxmlformats.org/drawingml/2006/main">
-            <a:off x="1252403" y="1620161"/>
+            <a:off x="1252403" y="1790700"/>
             <a:ext cx="4190700" cy="384600"/>
           </a:xfrm>
           <a:prstGeom xmlns:a="http://schemas.openxmlformats.org/drawingml/2006/main" prst="rect">
@@ -24100,7 +24324,7 @@
         <p:spPr>
           <a:xfrm xmlns:a="http://schemas.openxmlformats.org/drawingml/2006/main">
             <a:off x="1252403" y="2080661"/>
-            <a:ext cx="4190700" cy="548640"/>
+            <a:ext cx="4190700" cy="733500"/>
           </a:xfrm>
           <a:prstGeom xmlns:a="http://schemas.openxmlformats.org/drawingml/2006/main" prst="rect">
             <a:avLst/>
@@ -24146,7 +24370,7 @@
         <p:spPr>
           <a:xfrm xmlns:a="http://schemas.openxmlformats.org/drawingml/2006/main">
             <a:off x="1252404" y="3138786"/>
-            <a:ext cx="4190700" cy="548640"/>
+            <a:ext cx="4190700" cy="733500"/>
           </a:xfrm>
           <a:prstGeom xmlns:a="http://schemas.openxmlformats.org/drawingml/2006/main" prst="rect">
             <a:avLst/>
@@ -24196,7 +24420,7 @@
         </p:nvSpPr>
         <p:spPr>
           <a:xfrm xmlns:a="http://schemas.openxmlformats.org/drawingml/2006/main">
-            <a:off x="1252404" y="3736386"/>
+            <a:off x="1252404" y="3914775"/>
             <a:ext cx="4190700" cy="384600"/>
           </a:xfrm>
           <a:prstGeom xmlns:a="http://schemas.openxmlformats.org/drawingml/2006/main" prst="rect">
@@ -24459,6 +24683,62 @@
           </a:p>
         </p:txBody>
       </p:sp>
+      <p:sp>
+        <p:nvSpPr>
+          <p:cNvPr id="313" name="slide-heading-17">
+            <a:extLst xmlns:a="http://schemas.openxmlformats.org/drawingml/2006/main">
+              <a:ext uri="{FF2B5EF4-FFF2-40B4-BE49-F238E27FC236}">
+                <a16:creationId xmlns:a16="http://schemas.microsoft.com/office/drawing/2014/main" id="{87C46D78-4836-4F18-AD1F-869A79E49118}"/>
+              </a:ext>
+            </a:extLst>
+          </p:cNvPr>
+          <p:cNvSpPr>
+            <a:spLocks xmlns:a="http://schemas.openxmlformats.org/drawingml/2006/main" noGrp="1"/>
+          </p:cNvSpPr>
+          <p:nvPr/>
+        </p:nvSpPr>
+        <p:spPr>
+          <a:xfrm xmlns:a="http://schemas.openxmlformats.org/drawingml/2006/main">
+            <a:off x="552450" y="219075"/>
+            <a:ext cx="6858000" cy="266700"/>
+          </a:xfrm>
+          <a:prstGeom xmlns:a="http://schemas.openxmlformats.org/drawingml/2006/main" prst="rect">
+            <a:avLst/>
+          </a:prstGeom>
+          <a:noFill xmlns:a="http://schemas.openxmlformats.org/drawingml/2006/main"/>
+          <a:ln xmlns:a="http://schemas.openxmlformats.org/drawingml/2006/main" w="0">
+            <a:noFill/>
+            <a:prstDash val="solid"/>
+          </a:ln>
+        </p:spPr>
+        <p:txBody>
+          <a:bodyPr xmlns:a="http://schemas.openxmlformats.org/drawingml/2006/main"/>
+          <a:lstStyle xmlns:a="http://schemas.openxmlformats.org/drawingml/2006/main"/>
+          <a:p xmlns:a="http://schemas.openxmlformats.org/drawingml/2006/main">
+            <a:pPr algn="l">
+              <a:defRPr sz="1350" b="1">
+                <a:solidFill>
+                  <a:srgbClr val="FFFFFF"/>
+                </a:solidFill>
+                <a:latin typeface="Source Code Pro"/>
+                <a:ea typeface="Source Code Pro"/>
+                <a:cs typeface="Source Code Pro"/>
+              </a:defRPr>
+            </a:pPr>
+            <a:r>
+              <a:rPr sz="1350" b="1">
+                <a:solidFill>
+                  <a:srgbClr val="FFFFFF"/>
+                </a:solidFill>
+                <a:latin typeface="Source Code Pro"/>
+                <a:ea typeface="Source Code Pro"/>
+                <a:cs typeface="Source Code Pro"/>
+              </a:rPr>
+              <a:t>Breakout room jobs</a:t>
+            </a:r>
+          </a:p>
+        </p:txBody>
+      </p:sp>
     </p:spTree>
     <p:extLst>
       <p:ext uri="{BB962C8B-B14F-4D97-AF65-F5344CB8AC3E}">
@@ -24499,7 +24779,7 @@
         </p:nvSpPr>
         <p:spPr>
           <a:xfrm xmlns:a="http://schemas.openxmlformats.org/drawingml/2006/main">
-            <a:off x="1252403" y="2678261"/>
+            <a:off x="1252403" y="2857500"/>
             <a:ext cx="4190700" cy="384600"/>
           </a:xfrm>
           <a:prstGeom xmlns:a="http://schemas.openxmlformats.org/drawingml/2006/main" prst="rect">
@@ -24546,7 +24826,7 @@
         <p:spPr>
           <a:xfrm xmlns:a="http://schemas.openxmlformats.org/drawingml/2006/main">
             <a:off x="1252403" y="1022536"/>
-            <a:ext cx="4190700" cy="548640"/>
+            <a:ext cx="4190700" cy="733500"/>
           </a:xfrm>
           <a:prstGeom xmlns:a="http://schemas.openxmlformats.org/drawingml/2006/main" prst="rect">
             <a:avLst/>
@@ -24596,7 +24876,7 @@
         </p:nvSpPr>
         <p:spPr>
           <a:xfrm xmlns:a="http://schemas.openxmlformats.org/drawingml/2006/main">
-            <a:off x="1252403" y="1620161"/>
+            <a:off x="1252403" y="1790700"/>
             <a:ext cx="4190700" cy="384600"/>
           </a:xfrm>
           <a:prstGeom xmlns:a="http://schemas.openxmlformats.org/drawingml/2006/main" prst="rect">
@@ -24643,7 +24923,7 @@
         <p:spPr>
           <a:xfrm xmlns:a="http://schemas.openxmlformats.org/drawingml/2006/main">
             <a:off x="1252403" y="2080661"/>
-            <a:ext cx="4190700" cy="548640"/>
+            <a:ext cx="4190700" cy="733500"/>
           </a:xfrm>
           <a:prstGeom xmlns:a="http://schemas.openxmlformats.org/drawingml/2006/main" prst="rect">
             <a:avLst/>
@@ -24689,7 +24969,7 @@
         <p:spPr>
           <a:xfrm xmlns:a="http://schemas.openxmlformats.org/drawingml/2006/main">
             <a:off x="1252404" y="3138786"/>
-            <a:ext cx="4190700" cy="548640"/>
+            <a:ext cx="4190700" cy="733500"/>
           </a:xfrm>
           <a:prstGeom xmlns:a="http://schemas.openxmlformats.org/drawingml/2006/main" prst="rect">
             <a:avLst/>
@@ -24739,7 +25019,7 @@
         </p:nvSpPr>
         <p:spPr>
           <a:xfrm xmlns:a="http://schemas.openxmlformats.org/drawingml/2006/main">
-            <a:off x="1252404" y="3736386"/>
+            <a:off x="1252404" y="3914775"/>
             <a:ext cx="4190700" cy="384600"/>
           </a:xfrm>
           <a:prstGeom xmlns:a="http://schemas.openxmlformats.org/drawingml/2006/main" prst="rect">
@@ -25002,6 +25282,62 @@
           </a:p>
         </p:txBody>
       </p:sp>
+      <p:sp>
+        <p:nvSpPr>
+          <p:cNvPr id="313" name="slide-heading-18">
+            <a:extLst xmlns:a="http://schemas.openxmlformats.org/drawingml/2006/main">
+              <a:ext uri="{FF2B5EF4-FFF2-40B4-BE49-F238E27FC236}">
+                <a16:creationId xmlns:a16="http://schemas.microsoft.com/office/drawing/2014/main" id="{D99756FA-5D29-4B40-AB32-0BA3B9CC34F3}"/>
+              </a:ext>
+            </a:extLst>
+          </p:cNvPr>
+          <p:cNvSpPr>
+            <a:spLocks xmlns:a="http://schemas.openxmlformats.org/drawingml/2006/main" noGrp="1"/>
+          </p:cNvSpPr>
+          <p:nvPr/>
+        </p:nvSpPr>
+        <p:spPr>
+          <a:xfrm xmlns:a="http://schemas.openxmlformats.org/drawingml/2006/main">
+            <a:off x="552450" y="219075"/>
+            <a:ext cx="6858000" cy="266700"/>
+          </a:xfrm>
+          <a:prstGeom xmlns:a="http://schemas.openxmlformats.org/drawingml/2006/main" prst="rect">
+            <a:avLst/>
+          </a:prstGeom>
+          <a:noFill xmlns:a="http://schemas.openxmlformats.org/drawingml/2006/main"/>
+          <a:ln xmlns:a="http://schemas.openxmlformats.org/drawingml/2006/main" w="0">
+            <a:noFill/>
+            <a:prstDash val="solid"/>
+          </a:ln>
+        </p:spPr>
+        <p:txBody>
+          <a:bodyPr xmlns:a="http://schemas.openxmlformats.org/drawingml/2006/main"/>
+          <a:lstStyle xmlns:a="http://schemas.openxmlformats.org/drawingml/2006/main"/>
+          <a:p xmlns:a="http://schemas.openxmlformats.org/drawingml/2006/main">
+            <a:pPr algn="l">
+              <a:defRPr sz="1350" b="1">
+                <a:solidFill>
+                  <a:srgbClr val="FFFFFF"/>
+                </a:solidFill>
+                <a:latin typeface="Source Code Pro"/>
+                <a:ea typeface="Source Code Pro"/>
+                <a:cs typeface="Source Code Pro"/>
+              </a:defRPr>
+            </a:pPr>
+            <a:r>
+              <a:rPr sz="1350" b="1">
+                <a:solidFill>
+                  <a:srgbClr val="FFFFFF"/>
+                </a:solidFill>
+                <a:latin typeface="Source Code Pro"/>
+                <a:ea typeface="Source Code Pro"/>
+                <a:cs typeface="Source Code Pro"/>
+              </a:rPr>
+              <a:t>How to work as a code crew</a:t>
+            </a:r>
+          </a:p>
+        </p:txBody>
+      </p:sp>
     </p:spTree>
     <p:extLst>
       <p:ext uri="{BB962C8B-B14F-4D97-AF65-F5344CB8AC3E}">
@@ -25042,7 +25378,7 @@
         </p:nvSpPr>
         <p:spPr>
           <a:xfrm xmlns:a="http://schemas.openxmlformats.org/drawingml/2006/main">
-            <a:off x="1252403" y="2678261"/>
+            <a:off x="1252403" y="2857500"/>
             <a:ext cx="4190700" cy="384600"/>
           </a:xfrm>
           <a:prstGeom xmlns:a="http://schemas.openxmlformats.org/drawingml/2006/main" prst="rect">
@@ -25089,7 +25425,7 @@
         <p:spPr>
           <a:xfrm xmlns:a="http://schemas.openxmlformats.org/drawingml/2006/main">
             <a:off x="1252403" y="1022536"/>
-            <a:ext cx="4190700" cy="548640"/>
+            <a:ext cx="4190700" cy="733500"/>
           </a:xfrm>
           <a:prstGeom xmlns:a="http://schemas.openxmlformats.org/drawingml/2006/main" prst="rect">
             <a:avLst/>
@@ -25139,7 +25475,7 @@
         </p:nvSpPr>
         <p:spPr>
           <a:xfrm xmlns:a="http://schemas.openxmlformats.org/drawingml/2006/main">
-            <a:off x="1252403" y="1620161"/>
+            <a:off x="1252403" y="1790700"/>
             <a:ext cx="4190700" cy="384600"/>
           </a:xfrm>
           <a:prstGeom xmlns:a="http://schemas.openxmlformats.org/drawingml/2006/main" prst="rect">
@@ -25186,7 +25522,7 @@
         <p:spPr>
           <a:xfrm xmlns:a="http://schemas.openxmlformats.org/drawingml/2006/main">
             <a:off x="1252403" y="2080661"/>
-            <a:ext cx="4190700" cy="548640"/>
+            <a:ext cx="4190700" cy="733500"/>
           </a:xfrm>
           <a:prstGeom xmlns:a="http://schemas.openxmlformats.org/drawingml/2006/main" prst="rect">
             <a:avLst/>
@@ -25232,7 +25568,7 @@
         <p:spPr>
           <a:xfrm xmlns:a="http://schemas.openxmlformats.org/drawingml/2006/main">
             <a:off x="1252404" y="3138786"/>
-            <a:ext cx="4190700" cy="548640"/>
+            <a:ext cx="4190700" cy="733500"/>
           </a:xfrm>
           <a:prstGeom xmlns:a="http://schemas.openxmlformats.org/drawingml/2006/main" prst="rect">
             <a:avLst/>
@@ -25282,7 +25618,7 @@
         </p:nvSpPr>
         <p:spPr>
           <a:xfrm xmlns:a="http://schemas.openxmlformats.org/drawingml/2006/main">
-            <a:off x="1252404" y="3736386"/>
+            <a:off x="1252404" y="3914775"/>
             <a:ext cx="4190700" cy="384600"/>
           </a:xfrm>
           <a:prstGeom xmlns:a="http://schemas.openxmlformats.org/drawingml/2006/main" prst="rect">
@@ -25545,6 +25881,62 @@
           </a:p>
         </p:txBody>
       </p:sp>
+      <p:sp>
+        <p:nvSpPr>
+          <p:cNvPr id="313" name="slide-heading-19">
+            <a:extLst xmlns:a="http://schemas.openxmlformats.org/drawingml/2006/main">
+              <a:ext uri="{FF2B5EF4-FFF2-40B4-BE49-F238E27FC236}">
+                <a16:creationId xmlns:a16="http://schemas.microsoft.com/office/drawing/2014/main" id="{B4DFFC3B-38DB-4F89-B81C-9AD2BCCEEDE4}"/>
+              </a:ext>
+            </a:extLst>
+          </p:cNvPr>
+          <p:cNvSpPr>
+            <a:spLocks xmlns:a="http://schemas.openxmlformats.org/drawingml/2006/main" noGrp="1"/>
+          </p:cNvSpPr>
+          <p:nvPr/>
+        </p:nvSpPr>
+        <p:spPr>
+          <a:xfrm xmlns:a="http://schemas.openxmlformats.org/drawingml/2006/main">
+            <a:off x="552450" y="219075"/>
+            <a:ext cx="6858000" cy="266700"/>
+          </a:xfrm>
+          <a:prstGeom xmlns:a="http://schemas.openxmlformats.org/drawingml/2006/main" prst="rect">
+            <a:avLst/>
+          </a:prstGeom>
+          <a:noFill xmlns:a="http://schemas.openxmlformats.org/drawingml/2006/main"/>
+          <a:ln xmlns:a="http://schemas.openxmlformats.org/drawingml/2006/main" w="0">
+            <a:noFill/>
+            <a:prstDash val="solid"/>
+          </a:ln>
+        </p:spPr>
+        <p:txBody>
+          <a:bodyPr xmlns:a="http://schemas.openxmlformats.org/drawingml/2006/main"/>
+          <a:lstStyle xmlns:a="http://schemas.openxmlformats.org/drawingml/2006/main"/>
+          <a:p xmlns:a="http://schemas.openxmlformats.org/drawingml/2006/main">
+            <a:pPr algn="l">
+              <a:defRPr sz="1350" b="1">
+                <a:solidFill>
+                  <a:srgbClr val="FFFFFF"/>
+                </a:solidFill>
+                <a:latin typeface="Source Code Pro"/>
+                <a:ea typeface="Source Code Pro"/>
+                <a:cs typeface="Source Code Pro"/>
+              </a:defRPr>
+            </a:pPr>
+            <a:r>
+              <a:rPr sz="1350" b="1">
+                <a:solidFill>
+                  <a:srgbClr val="FFFFFF"/>
+                </a:solidFill>
+                <a:latin typeface="Source Code Pro"/>
+                <a:ea typeface="Source Code Pro"/>
+                <a:cs typeface="Source Code Pro"/>
+              </a:rPr>
+              <a:t>Code.org Music Lab</a:t>
+            </a:r>
+          </a:p>
+        </p:txBody>
+      </p:sp>
     </p:spTree>
     <p:extLst>
       <p:ext uri="{BB962C8B-B14F-4D97-AF65-F5344CB8AC3E}">
@@ -25986,7 +26378,7 @@
           <p:nvPr/>
         </p:nvPicPr>
         <p:blipFill>
-          <a:blip xmlns:r="http://schemas.openxmlformats.org/officeDocument/2006/relationships" xmlns:a="http://schemas.openxmlformats.org/drawingml/2006/main" r:embed="Ra78dda24fb924957">
+          <a:blip xmlns:r="http://schemas.openxmlformats.org/officeDocument/2006/relationships" xmlns:a="http://schemas.openxmlformats.org/drawingml/2006/main" r:embed="R96d59a3c51fb40f4">
             <a:alphaModFix/>
           </a:blip>
           <a:stretch xmlns:a="http://schemas.openxmlformats.org/drawingml/2006/main">
@@ -26046,7 +26438,7 @@
         </p:nvSpPr>
         <p:spPr>
           <a:xfrm xmlns:a="http://schemas.openxmlformats.org/drawingml/2006/main">
-            <a:off x="1252403" y="2678261"/>
+            <a:off x="1252403" y="2857500"/>
             <a:ext cx="4190700" cy="384600"/>
           </a:xfrm>
           <a:prstGeom xmlns:a="http://schemas.openxmlformats.org/drawingml/2006/main" prst="rect">
@@ -26093,7 +26485,7 @@
         <p:spPr>
           <a:xfrm xmlns:a="http://schemas.openxmlformats.org/drawingml/2006/main">
             <a:off x="1252403" y="1022536"/>
-            <a:ext cx="4190700" cy="548640"/>
+            <a:ext cx="4190700" cy="733500"/>
           </a:xfrm>
           <a:prstGeom xmlns:a="http://schemas.openxmlformats.org/drawingml/2006/main" prst="rect">
             <a:avLst/>
@@ -26143,7 +26535,7 @@
         </p:nvSpPr>
         <p:spPr>
           <a:xfrm xmlns:a="http://schemas.openxmlformats.org/drawingml/2006/main">
-            <a:off x="1252403" y="1620161"/>
+            <a:off x="1252403" y="1790700"/>
             <a:ext cx="4190700" cy="384600"/>
           </a:xfrm>
           <a:prstGeom xmlns:a="http://schemas.openxmlformats.org/drawingml/2006/main" prst="rect">
@@ -26190,7 +26582,7 @@
         <p:spPr>
           <a:xfrm xmlns:a="http://schemas.openxmlformats.org/drawingml/2006/main">
             <a:off x="1252403" y="2080661"/>
-            <a:ext cx="4190700" cy="548640"/>
+            <a:ext cx="4190700" cy="733500"/>
           </a:xfrm>
           <a:prstGeom xmlns:a="http://schemas.openxmlformats.org/drawingml/2006/main" prst="rect">
             <a:avLst/>
@@ -26236,7 +26628,7 @@
         <p:spPr>
           <a:xfrm xmlns:a="http://schemas.openxmlformats.org/drawingml/2006/main">
             <a:off x="1252404" y="3138786"/>
-            <a:ext cx="4190700" cy="548640"/>
+            <a:ext cx="4190700" cy="733500"/>
           </a:xfrm>
           <a:prstGeom xmlns:a="http://schemas.openxmlformats.org/drawingml/2006/main" prst="rect">
             <a:avLst/>
@@ -26286,7 +26678,7 @@
         </p:nvSpPr>
         <p:spPr>
           <a:xfrm xmlns:a="http://schemas.openxmlformats.org/drawingml/2006/main">
-            <a:off x="1252404" y="3736386"/>
+            <a:off x="1252404" y="3914775"/>
             <a:ext cx="4190700" cy="384600"/>
           </a:xfrm>
           <a:prstGeom xmlns:a="http://schemas.openxmlformats.org/drawingml/2006/main" prst="rect">
@@ -26549,6 +26941,62 @@
           </a:p>
         </p:txBody>
       </p:sp>
+      <p:sp>
+        <p:nvSpPr>
+          <p:cNvPr id="313" name="slide-heading-20">
+            <a:extLst xmlns:a="http://schemas.openxmlformats.org/drawingml/2006/main">
+              <a:ext uri="{FF2B5EF4-FFF2-40B4-BE49-F238E27FC236}">
+                <a16:creationId xmlns:a16="http://schemas.microsoft.com/office/drawing/2014/main" id="{C5439BF0-29BD-4E5A-9CA0-F03254D0EA24}"/>
+              </a:ext>
+            </a:extLst>
+          </p:cNvPr>
+          <p:cNvSpPr>
+            <a:spLocks xmlns:a="http://schemas.openxmlformats.org/drawingml/2006/main" noGrp="1"/>
+          </p:cNvSpPr>
+          <p:nvPr/>
+        </p:nvSpPr>
+        <p:spPr>
+          <a:xfrm xmlns:a="http://schemas.openxmlformats.org/drawingml/2006/main">
+            <a:off x="552450" y="219075"/>
+            <a:ext cx="6858000" cy="266700"/>
+          </a:xfrm>
+          <a:prstGeom xmlns:a="http://schemas.openxmlformats.org/drawingml/2006/main" prst="rect">
+            <a:avLst/>
+          </a:prstGeom>
+          <a:noFill xmlns:a="http://schemas.openxmlformats.org/drawingml/2006/main"/>
+          <a:ln xmlns:a="http://schemas.openxmlformats.org/drawingml/2006/main" w="0">
+            <a:noFill/>
+            <a:prstDash val="solid"/>
+          </a:ln>
+        </p:spPr>
+        <p:txBody>
+          <a:bodyPr xmlns:a="http://schemas.openxmlformats.org/drawingml/2006/main"/>
+          <a:lstStyle xmlns:a="http://schemas.openxmlformats.org/drawingml/2006/main"/>
+          <a:p xmlns:a="http://schemas.openxmlformats.org/drawingml/2006/main">
+            <a:pPr algn="l">
+              <a:defRPr sz="1350" b="1">
+                <a:solidFill>
+                  <a:srgbClr val="FFFFFF"/>
+                </a:solidFill>
+                <a:latin typeface="Source Code Pro"/>
+                <a:ea typeface="Source Code Pro"/>
+                <a:cs typeface="Source Code Pro"/>
+              </a:defRPr>
+            </a:pPr>
+            <a:r>
+              <a:rPr sz="1350" b="1">
+                <a:solidFill>
+                  <a:srgbClr val="FFFFFF"/>
+                </a:solidFill>
+                <a:latin typeface="Source Code Pro"/>
+                <a:ea typeface="Source Code Pro"/>
+                <a:cs typeface="Source Code Pro"/>
+              </a:rPr>
+              <a:t>Programming words we will use</a:t>
+            </a:r>
+          </a:p>
+        </p:txBody>
+      </p:sp>
     </p:spTree>
     <p:extLst>
       <p:ext uri="{BB962C8B-B14F-4D97-AF65-F5344CB8AC3E}">
@@ -26589,7 +27037,7 @@
         </p:nvSpPr>
         <p:spPr>
           <a:xfrm xmlns:a="http://schemas.openxmlformats.org/drawingml/2006/main">
-            <a:off x="1252403" y="2678261"/>
+            <a:off x="1252403" y="2857500"/>
             <a:ext cx="4190700" cy="384600"/>
           </a:xfrm>
           <a:prstGeom xmlns:a="http://schemas.openxmlformats.org/drawingml/2006/main" prst="rect">
@@ -26636,7 +27084,7 @@
         <p:spPr>
           <a:xfrm xmlns:a="http://schemas.openxmlformats.org/drawingml/2006/main">
             <a:off x="1252403" y="1022536"/>
-            <a:ext cx="4190700" cy="548640"/>
+            <a:ext cx="4190700" cy="733500"/>
           </a:xfrm>
           <a:prstGeom xmlns:a="http://schemas.openxmlformats.org/drawingml/2006/main" prst="rect">
             <a:avLst/>
@@ -26686,7 +27134,7 @@
         </p:nvSpPr>
         <p:spPr>
           <a:xfrm xmlns:a="http://schemas.openxmlformats.org/drawingml/2006/main">
-            <a:off x="1252403" y="1620161"/>
+            <a:off x="1252403" y="1790700"/>
             <a:ext cx="4190700" cy="384600"/>
           </a:xfrm>
           <a:prstGeom xmlns:a="http://schemas.openxmlformats.org/drawingml/2006/main" prst="rect">
@@ -26733,7 +27181,7 @@
         <p:spPr>
           <a:xfrm xmlns:a="http://schemas.openxmlformats.org/drawingml/2006/main">
             <a:off x="1252403" y="2080661"/>
-            <a:ext cx="4190700" cy="548640"/>
+            <a:ext cx="4190700" cy="733500"/>
           </a:xfrm>
           <a:prstGeom xmlns:a="http://schemas.openxmlformats.org/drawingml/2006/main" prst="rect">
             <a:avLst/>
@@ -26779,7 +27227,7 @@
         <p:spPr>
           <a:xfrm xmlns:a="http://schemas.openxmlformats.org/drawingml/2006/main">
             <a:off x="1252404" y="3138786"/>
-            <a:ext cx="4190700" cy="548640"/>
+            <a:ext cx="4190700" cy="733500"/>
           </a:xfrm>
           <a:prstGeom xmlns:a="http://schemas.openxmlformats.org/drawingml/2006/main" prst="rect">
             <a:avLst/>
@@ -26829,7 +27277,7 @@
         </p:nvSpPr>
         <p:spPr>
           <a:xfrm xmlns:a="http://schemas.openxmlformats.org/drawingml/2006/main">
-            <a:off x="1252404" y="3736386"/>
+            <a:off x="1252404" y="3914775"/>
             <a:ext cx="4190700" cy="384600"/>
           </a:xfrm>
           <a:prstGeom xmlns:a="http://schemas.openxmlformats.org/drawingml/2006/main" prst="rect">
@@ -27092,6 +27540,62 @@
           </a:p>
         </p:txBody>
       </p:sp>
+      <p:sp>
+        <p:nvSpPr>
+          <p:cNvPr id="313" name="slide-heading-21">
+            <a:extLst xmlns:a="http://schemas.openxmlformats.org/drawingml/2006/main">
+              <a:ext uri="{FF2B5EF4-FFF2-40B4-BE49-F238E27FC236}">
+                <a16:creationId xmlns:a16="http://schemas.microsoft.com/office/drawing/2014/main" id="{C7C205A3-D42F-435E-AA4F-28E016136596}"/>
+              </a:ext>
+            </a:extLst>
+          </p:cNvPr>
+          <p:cNvSpPr>
+            <a:spLocks xmlns:a="http://schemas.openxmlformats.org/drawingml/2006/main" noGrp="1"/>
+          </p:cNvSpPr>
+          <p:nvPr/>
+        </p:nvSpPr>
+        <p:spPr>
+          <a:xfrm xmlns:a="http://schemas.openxmlformats.org/drawingml/2006/main">
+            <a:off x="552450" y="219075"/>
+            <a:ext cx="6858000" cy="266700"/>
+          </a:xfrm>
+          <a:prstGeom xmlns:a="http://schemas.openxmlformats.org/drawingml/2006/main" prst="rect">
+            <a:avLst/>
+          </a:prstGeom>
+          <a:noFill xmlns:a="http://schemas.openxmlformats.org/drawingml/2006/main"/>
+          <a:ln xmlns:a="http://schemas.openxmlformats.org/drawingml/2006/main" w="0">
+            <a:noFill/>
+            <a:prstDash val="solid"/>
+          </a:ln>
+        </p:spPr>
+        <p:txBody>
+          <a:bodyPr xmlns:a="http://schemas.openxmlformats.org/drawingml/2006/main"/>
+          <a:lstStyle xmlns:a="http://schemas.openxmlformats.org/drawingml/2006/main"/>
+          <a:p xmlns:a="http://schemas.openxmlformats.org/drawingml/2006/main">
+            <a:pPr algn="l">
+              <a:defRPr sz="1350" b="1">
+                <a:solidFill>
+                  <a:srgbClr val="FFFFFF"/>
+                </a:solidFill>
+                <a:latin typeface="Source Code Pro"/>
+                <a:ea typeface="Source Code Pro"/>
+                <a:cs typeface="Source Code Pro"/>
+              </a:defRPr>
+            </a:pPr>
+            <a:r>
+              <a:rPr sz="1350" b="1">
+                <a:solidFill>
+                  <a:srgbClr val="FFFFFF"/>
+                </a:solidFill>
+                <a:latin typeface="Source Code Pro"/>
+                <a:ea typeface="Source Code Pro"/>
+                <a:cs typeface="Source Code Pro"/>
+              </a:rPr>
+              <a:t>AI can help, but you decide</a:t>
+            </a:r>
+          </a:p>
+        </p:txBody>
+      </p:sp>
     </p:spTree>
     <p:extLst>
       <p:ext uri="{BB962C8B-B14F-4D97-AF65-F5344CB8AC3E}">
@@ -27132,7 +27636,7 @@
         </p:nvSpPr>
         <p:spPr>
           <a:xfrm xmlns:a="http://schemas.openxmlformats.org/drawingml/2006/main">
-            <a:off x="1252403" y="2678261"/>
+            <a:off x="1252403" y="2857500"/>
             <a:ext cx="4190700" cy="384600"/>
           </a:xfrm>
           <a:prstGeom xmlns:a="http://schemas.openxmlformats.org/drawingml/2006/main" prst="rect">
@@ -27179,7 +27683,7 @@
         <p:spPr>
           <a:xfrm xmlns:a="http://schemas.openxmlformats.org/drawingml/2006/main">
             <a:off x="1252403" y="1022536"/>
-            <a:ext cx="4190700" cy="548640"/>
+            <a:ext cx="4190700" cy="733500"/>
           </a:xfrm>
           <a:prstGeom xmlns:a="http://schemas.openxmlformats.org/drawingml/2006/main" prst="rect">
             <a:avLst/>
@@ -27229,7 +27733,7 @@
         </p:nvSpPr>
         <p:spPr>
           <a:xfrm xmlns:a="http://schemas.openxmlformats.org/drawingml/2006/main">
-            <a:off x="1252403" y="1620161"/>
+            <a:off x="1252403" y="1790700"/>
             <a:ext cx="4190700" cy="384600"/>
           </a:xfrm>
           <a:prstGeom xmlns:a="http://schemas.openxmlformats.org/drawingml/2006/main" prst="rect">
@@ -27276,7 +27780,7 @@
         <p:spPr>
           <a:xfrm xmlns:a="http://schemas.openxmlformats.org/drawingml/2006/main">
             <a:off x="1252403" y="2080661"/>
-            <a:ext cx="4190700" cy="548640"/>
+            <a:ext cx="4190700" cy="733500"/>
           </a:xfrm>
           <a:prstGeom xmlns:a="http://schemas.openxmlformats.org/drawingml/2006/main" prst="rect">
             <a:avLst/>
@@ -27322,7 +27826,7 @@
         <p:spPr>
           <a:xfrm xmlns:a="http://schemas.openxmlformats.org/drawingml/2006/main">
             <a:off x="1252404" y="3138786"/>
-            <a:ext cx="4190700" cy="548640"/>
+            <a:ext cx="4190700" cy="733500"/>
           </a:xfrm>
           <a:prstGeom xmlns:a="http://schemas.openxmlformats.org/drawingml/2006/main" prst="rect">
             <a:avLst/>
@@ -27372,7 +27876,7 @@
         </p:nvSpPr>
         <p:spPr>
           <a:xfrm xmlns:a="http://schemas.openxmlformats.org/drawingml/2006/main">
-            <a:off x="1252404" y="3736386"/>
+            <a:off x="1252404" y="3914775"/>
             <a:ext cx="4190700" cy="384600"/>
           </a:xfrm>
           <a:prstGeom xmlns:a="http://schemas.openxmlformats.org/drawingml/2006/main" prst="rect">
@@ -27631,6 +28135,62 @@
                 </a:solidFill>
               </a:rPr>
               <a:t>[</a:t>
+            </a:r>
+          </a:p>
+        </p:txBody>
+      </p:sp>
+      <p:sp>
+        <p:nvSpPr>
+          <p:cNvPr id="313" name="slide-heading-22">
+            <a:extLst xmlns:a="http://schemas.openxmlformats.org/drawingml/2006/main">
+              <a:ext uri="{FF2B5EF4-FFF2-40B4-BE49-F238E27FC236}">
+                <a16:creationId xmlns:a16="http://schemas.microsoft.com/office/drawing/2014/main" id="{7ACF9CCC-EB63-42EC-8B0B-7C8D856395B8}"/>
+              </a:ext>
+            </a:extLst>
+          </p:cNvPr>
+          <p:cNvSpPr>
+            <a:spLocks xmlns:a="http://schemas.openxmlformats.org/drawingml/2006/main" noGrp="1"/>
+          </p:cNvSpPr>
+          <p:nvPr/>
+        </p:nvSpPr>
+        <p:spPr>
+          <a:xfrm xmlns:a="http://schemas.openxmlformats.org/drawingml/2006/main">
+            <a:off x="552450" y="219075"/>
+            <a:ext cx="6858000" cy="266700"/>
+          </a:xfrm>
+          <a:prstGeom xmlns:a="http://schemas.openxmlformats.org/drawingml/2006/main" prst="rect">
+            <a:avLst/>
+          </a:prstGeom>
+          <a:noFill xmlns:a="http://schemas.openxmlformats.org/drawingml/2006/main"/>
+          <a:ln xmlns:a="http://schemas.openxmlformats.org/drawingml/2006/main" w="0">
+            <a:noFill/>
+            <a:prstDash val="solid"/>
+          </a:ln>
+        </p:spPr>
+        <p:txBody>
+          <a:bodyPr xmlns:a="http://schemas.openxmlformats.org/drawingml/2006/main"/>
+          <a:lstStyle xmlns:a="http://schemas.openxmlformats.org/drawingml/2006/main"/>
+          <a:p xmlns:a="http://schemas.openxmlformats.org/drawingml/2006/main">
+            <a:pPr algn="l">
+              <a:defRPr sz="1350" b="1">
+                <a:solidFill>
+                  <a:srgbClr val="FFFFFF"/>
+                </a:solidFill>
+                <a:latin typeface="Source Code Pro"/>
+                <a:ea typeface="Source Code Pro"/>
+                <a:cs typeface="Source Code Pro"/>
+              </a:defRPr>
+            </a:pPr>
+            <a:r>
+              <a:rPr sz="1350" b="1">
+                <a:solidFill>
+                  <a:srgbClr val="FFFFFF"/>
+                </a:solidFill>
+                <a:latin typeface="Source Code Pro"/>
+                <a:ea typeface="Source Code Pro"/>
+                <a:cs typeface="Source Code Pro"/>
+              </a:rPr>
+              <a:t>Share what your crew made</a:t>
             </a:r>
           </a:p>
         </p:txBody>
@@ -28411,7 +28971,7 @@
         </p:nvSpPr>
         <p:spPr>
           <a:xfrm xmlns:a="http://schemas.openxmlformats.org/drawingml/2006/main">
-            <a:off x="1252403" y="2678261"/>
+            <a:off x="1252403" y="2857500"/>
             <a:ext cx="4190700" cy="384600"/>
           </a:xfrm>
           <a:prstGeom xmlns:a="http://schemas.openxmlformats.org/drawingml/2006/main" prst="rect">
@@ -28458,7 +29018,7 @@
         <p:spPr>
           <a:xfrm xmlns:a="http://schemas.openxmlformats.org/drawingml/2006/main">
             <a:off x="1252403" y="1022536"/>
-            <a:ext cx="4190700" cy="548640"/>
+            <a:ext cx="4190700" cy="733500"/>
           </a:xfrm>
           <a:prstGeom xmlns:a="http://schemas.openxmlformats.org/drawingml/2006/main" prst="rect">
             <a:avLst/>
@@ -28508,7 +29068,7 @@
         </p:nvSpPr>
         <p:spPr>
           <a:xfrm xmlns:a="http://schemas.openxmlformats.org/drawingml/2006/main">
-            <a:off x="1252403" y="1620161"/>
+            <a:off x="1252403" y="1790700"/>
             <a:ext cx="4190700" cy="384600"/>
           </a:xfrm>
           <a:prstGeom xmlns:a="http://schemas.openxmlformats.org/drawingml/2006/main" prst="rect">
@@ -28555,7 +29115,7 @@
         <p:spPr>
           <a:xfrm xmlns:a="http://schemas.openxmlformats.org/drawingml/2006/main">
             <a:off x="1252403" y="2080661"/>
-            <a:ext cx="4190700" cy="548640"/>
+            <a:ext cx="4190700" cy="733500"/>
           </a:xfrm>
           <a:prstGeom xmlns:a="http://schemas.openxmlformats.org/drawingml/2006/main" prst="rect">
             <a:avLst/>
@@ -28601,7 +29161,7 @@
         <p:spPr>
           <a:xfrm xmlns:a="http://schemas.openxmlformats.org/drawingml/2006/main">
             <a:off x="1252404" y="3138786"/>
-            <a:ext cx="4190700" cy="548640"/>
+            <a:ext cx="4190700" cy="733500"/>
           </a:xfrm>
           <a:prstGeom xmlns:a="http://schemas.openxmlformats.org/drawingml/2006/main" prst="rect">
             <a:avLst/>
@@ -28651,7 +29211,7 @@
         </p:nvSpPr>
         <p:spPr>
           <a:xfrm xmlns:a="http://schemas.openxmlformats.org/drawingml/2006/main">
-            <a:off x="1252404" y="3736386"/>
+            <a:off x="1252404" y="3914775"/>
             <a:ext cx="4190700" cy="384600"/>
           </a:xfrm>
           <a:prstGeom xmlns:a="http://schemas.openxmlformats.org/drawingml/2006/main" prst="rect">
@@ -28914,6 +29474,62 @@
           </a:p>
         </p:txBody>
       </p:sp>
+      <p:sp>
+        <p:nvSpPr>
+          <p:cNvPr id="313" name="slide-heading-24">
+            <a:extLst xmlns:a="http://schemas.openxmlformats.org/drawingml/2006/main">
+              <a:ext uri="{FF2B5EF4-FFF2-40B4-BE49-F238E27FC236}">
+                <a16:creationId xmlns:a16="http://schemas.microsoft.com/office/drawing/2014/main" id="{10A7C660-D469-4279-8BF0-C97A112E2F74}"/>
+              </a:ext>
+            </a:extLst>
+          </p:cNvPr>
+          <p:cNvSpPr>
+            <a:spLocks xmlns:a="http://schemas.openxmlformats.org/drawingml/2006/main" noGrp="1"/>
+          </p:cNvSpPr>
+          <p:nvPr/>
+        </p:nvSpPr>
+        <p:spPr>
+          <a:xfrm xmlns:a="http://schemas.openxmlformats.org/drawingml/2006/main">
+            <a:off x="552450" y="219075"/>
+            <a:ext cx="6858000" cy="266700"/>
+          </a:xfrm>
+          <a:prstGeom xmlns:a="http://schemas.openxmlformats.org/drawingml/2006/main" prst="rect">
+            <a:avLst/>
+          </a:prstGeom>
+          <a:noFill xmlns:a="http://schemas.openxmlformats.org/drawingml/2006/main"/>
+          <a:ln xmlns:a="http://schemas.openxmlformats.org/drawingml/2006/main" w="0">
+            <a:noFill/>
+            <a:prstDash val="solid"/>
+          </a:ln>
+        </p:spPr>
+        <p:txBody>
+          <a:bodyPr xmlns:a="http://schemas.openxmlformats.org/drawingml/2006/main"/>
+          <a:lstStyle xmlns:a="http://schemas.openxmlformats.org/drawingml/2006/main"/>
+          <a:p xmlns:a="http://schemas.openxmlformats.org/drawingml/2006/main">
+            <a:pPr algn="l">
+              <a:defRPr sz="1350" b="1">
+                <a:solidFill>
+                  <a:srgbClr val="FFFFFF"/>
+                </a:solidFill>
+                <a:latin typeface="Source Code Pro"/>
+                <a:ea typeface="Source Code Pro"/>
+                <a:cs typeface="Source Code Pro"/>
+              </a:defRPr>
+            </a:pPr>
+            <a:r>
+              <a:rPr sz="1350" b="1">
+                <a:solidFill>
+                  <a:srgbClr val="FFFFFF"/>
+                </a:solidFill>
+                <a:latin typeface="Source Code Pro"/>
+                <a:ea typeface="Source Code Pro"/>
+                <a:cs typeface="Source Code Pro"/>
+              </a:rPr>
+              <a:t>Homework: Music Lab remix</a:t>
+            </a:r>
+          </a:p>
+        </p:txBody>
+      </p:sp>
     </p:spTree>
     <p:extLst>
       <p:ext uri="{BB962C8B-B14F-4D97-AF65-F5344CB8AC3E}">
@@ -28954,7 +29570,7 @@
         </p:nvSpPr>
         <p:spPr>
           <a:xfrm xmlns:a="http://schemas.openxmlformats.org/drawingml/2006/main">
-            <a:off x="1252403" y="2678261"/>
+            <a:off x="1252403" y="2857500"/>
             <a:ext cx="4190700" cy="384600"/>
           </a:xfrm>
           <a:prstGeom xmlns:a="http://schemas.openxmlformats.org/drawingml/2006/main" prst="rect">
@@ -29001,7 +29617,7 @@
         <p:spPr>
           <a:xfrm xmlns:a="http://schemas.openxmlformats.org/drawingml/2006/main">
             <a:off x="1252403" y="1022536"/>
-            <a:ext cx="4190700" cy="548640"/>
+            <a:ext cx="4190700" cy="733500"/>
           </a:xfrm>
           <a:prstGeom xmlns:a="http://schemas.openxmlformats.org/drawingml/2006/main" prst="rect">
             <a:avLst/>
@@ -29051,7 +29667,7 @@
         </p:nvSpPr>
         <p:spPr>
           <a:xfrm xmlns:a="http://schemas.openxmlformats.org/drawingml/2006/main">
-            <a:off x="1252403" y="1620161"/>
+            <a:off x="1252403" y="1790700"/>
             <a:ext cx="4190700" cy="384600"/>
           </a:xfrm>
           <a:prstGeom xmlns:a="http://schemas.openxmlformats.org/drawingml/2006/main" prst="rect">
@@ -29098,7 +29714,7 @@
         <p:spPr>
           <a:xfrm xmlns:a="http://schemas.openxmlformats.org/drawingml/2006/main">
             <a:off x="1252403" y="2080661"/>
-            <a:ext cx="4190700" cy="548640"/>
+            <a:ext cx="4190700" cy="733500"/>
           </a:xfrm>
           <a:prstGeom xmlns:a="http://schemas.openxmlformats.org/drawingml/2006/main" prst="rect">
             <a:avLst/>
@@ -29144,7 +29760,7 @@
         <p:spPr>
           <a:xfrm xmlns:a="http://schemas.openxmlformats.org/drawingml/2006/main">
             <a:off x="1252404" y="3138786"/>
-            <a:ext cx="4190700" cy="548640"/>
+            <a:ext cx="4190700" cy="733500"/>
           </a:xfrm>
           <a:prstGeom xmlns:a="http://schemas.openxmlformats.org/drawingml/2006/main" prst="rect">
             <a:avLst/>
@@ -29194,7 +29810,7 @@
         </p:nvSpPr>
         <p:spPr>
           <a:xfrm xmlns:a="http://schemas.openxmlformats.org/drawingml/2006/main">
-            <a:off x="1252404" y="3736386"/>
+            <a:off x="1252404" y="3914775"/>
             <a:ext cx="4190700" cy="384600"/>
           </a:xfrm>
           <a:prstGeom xmlns:a="http://schemas.openxmlformats.org/drawingml/2006/main" prst="rect">
@@ -29453,6 +30069,62 @@
                 </a:solidFill>
               </a:rPr>
               <a:t>[</a:t>
+            </a:r>
+          </a:p>
+        </p:txBody>
+      </p:sp>
+      <p:sp>
+        <p:nvSpPr>
+          <p:cNvPr id="313" name="slide-heading-25">
+            <a:extLst xmlns:a="http://schemas.openxmlformats.org/drawingml/2006/main">
+              <a:ext uri="{FF2B5EF4-FFF2-40B4-BE49-F238E27FC236}">
+                <a16:creationId xmlns:a16="http://schemas.microsoft.com/office/drawing/2014/main" id="{72E08CB2-5A61-45A9-9E0B-B95914960732}"/>
+              </a:ext>
+            </a:extLst>
+          </p:cNvPr>
+          <p:cNvSpPr>
+            <a:spLocks xmlns:a="http://schemas.openxmlformats.org/drawingml/2006/main" noGrp="1"/>
+          </p:cNvSpPr>
+          <p:nvPr/>
+        </p:nvSpPr>
+        <p:spPr>
+          <a:xfrm xmlns:a="http://schemas.openxmlformats.org/drawingml/2006/main">
+            <a:off x="552450" y="219075"/>
+            <a:ext cx="6858000" cy="266700"/>
+          </a:xfrm>
+          <a:prstGeom xmlns:a="http://schemas.openxmlformats.org/drawingml/2006/main" prst="rect">
+            <a:avLst/>
+          </a:prstGeom>
+          <a:noFill xmlns:a="http://schemas.openxmlformats.org/drawingml/2006/main"/>
+          <a:ln xmlns:a="http://schemas.openxmlformats.org/drawingml/2006/main" w="0">
+            <a:noFill/>
+            <a:prstDash val="solid"/>
+          </a:ln>
+        </p:spPr>
+        <p:txBody>
+          <a:bodyPr xmlns:a="http://schemas.openxmlformats.org/drawingml/2006/main"/>
+          <a:lstStyle xmlns:a="http://schemas.openxmlformats.org/drawingml/2006/main"/>
+          <a:p xmlns:a="http://schemas.openxmlformats.org/drawingml/2006/main">
+            <a:pPr algn="l">
+              <a:defRPr sz="1350" b="1">
+                <a:solidFill>
+                  <a:srgbClr val="FFFFFF"/>
+                </a:solidFill>
+                <a:latin typeface="Source Code Pro"/>
+                <a:ea typeface="Source Code Pro"/>
+                <a:cs typeface="Source Code Pro"/>
+              </a:defRPr>
+            </a:pPr>
+            <a:r>
+              <a:rPr sz="1350" b="1">
+                <a:solidFill>
+                  <a:srgbClr val="FFFFFF"/>
+                </a:solidFill>
+                <a:latin typeface="Source Code Pro"/>
+                <a:ea typeface="Source Code Pro"/>
+                <a:cs typeface="Source Code Pro"/>
+              </a:rPr>
+              <a:t>Next week we start TypeScript</a:t>
             </a:r>
           </a:p>
         </p:txBody>
@@ -30520,7 +31192,7 @@
           <p:nvPr/>
         </p:nvPicPr>
         <p:blipFill>
-          <a:blip xmlns:r="http://schemas.openxmlformats.org/officeDocument/2006/relationships" xmlns:a="http://schemas.openxmlformats.org/drawingml/2006/main" r:embed="R631074e59a0b454c"/>
+          <a:blip xmlns:r="http://schemas.openxmlformats.org/officeDocument/2006/relationships" xmlns:a="http://schemas.openxmlformats.org/drawingml/2006/main" r:embed="Re20179d6e9c74a8c"/>
           <a:stretch xmlns:a="http://schemas.openxmlformats.org/drawingml/2006/main">
             <a:fillRect l="0" t="0" r="0" b="0"/>
           </a:stretch>
@@ -30882,7 +31554,7 @@
           <p:nvPr/>
         </p:nvPicPr>
         <p:blipFill>
-          <a:blip xmlns:r="http://schemas.openxmlformats.org/officeDocument/2006/relationships" xmlns:a="http://schemas.openxmlformats.org/drawingml/2006/main" r:embed="Rdc2db03b26d74c6a"/>
+          <a:blip xmlns:r="http://schemas.openxmlformats.org/officeDocument/2006/relationships" xmlns:a="http://schemas.openxmlformats.org/drawingml/2006/main" r:embed="Rde2092cdea9b4126"/>
           <a:stretch xmlns:a="http://schemas.openxmlformats.org/drawingml/2006/main">
             <a:fillRect l="0" t="0" r="0" b="0"/>
           </a:stretch>
@@ -31086,7 +31758,7 @@
           <p:nvPr/>
         </p:nvPicPr>
         <p:blipFill>
-          <a:blip xmlns:r="http://schemas.openxmlformats.org/officeDocument/2006/relationships" xmlns:a="http://schemas.openxmlformats.org/drawingml/2006/main" r:embed="Rf7557e696e134fa3"/>
+          <a:blip xmlns:r="http://schemas.openxmlformats.org/officeDocument/2006/relationships" xmlns:a="http://schemas.openxmlformats.org/drawingml/2006/main" r:embed="R0f2426831e324b49"/>
           <a:stretch xmlns:a="http://schemas.openxmlformats.org/drawingml/2006/main">
             <a:fillRect l="0" t="0" r="0" b="0"/>
           </a:stretch>
@@ -31141,7 +31813,7 @@
         </p:nvSpPr>
         <p:spPr>
           <a:xfrm xmlns:a="http://schemas.openxmlformats.org/drawingml/2006/main">
-            <a:off x="1252403" y="2678261"/>
+            <a:off x="1252403" y="2857500"/>
             <a:ext cx="4190700" cy="384600"/>
           </a:xfrm>
           <a:prstGeom xmlns:a="http://schemas.openxmlformats.org/drawingml/2006/main" prst="rect">
@@ -31188,7 +31860,7 @@
         <p:spPr>
           <a:xfrm xmlns:a="http://schemas.openxmlformats.org/drawingml/2006/main">
             <a:off x="1252403" y="1022536"/>
-            <a:ext cx="4190700" cy="548640"/>
+            <a:ext cx="4190700" cy="733500"/>
           </a:xfrm>
           <a:prstGeom xmlns:a="http://schemas.openxmlformats.org/drawingml/2006/main" prst="rect">
             <a:avLst/>
@@ -31238,7 +31910,7 @@
         </p:nvSpPr>
         <p:spPr>
           <a:xfrm xmlns:a="http://schemas.openxmlformats.org/drawingml/2006/main">
-            <a:off x="1252403" y="1620161"/>
+            <a:off x="1252403" y="1790700"/>
             <a:ext cx="4190700" cy="384600"/>
           </a:xfrm>
           <a:prstGeom xmlns:a="http://schemas.openxmlformats.org/drawingml/2006/main" prst="rect">
@@ -31285,7 +31957,7 @@
         <p:spPr>
           <a:xfrm xmlns:a="http://schemas.openxmlformats.org/drawingml/2006/main">
             <a:off x="1252403" y="2080661"/>
-            <a:ext cx="4190700" cy="548640"/>
+            <a:ext cx="4190700" cy="733500"/>
           </a:xfrm>
           <a:prstGeom xmlns:a="http://schemas.openxmlformats.org/drawingml/2006/main" prst="rect">
             <a:avLst/>
@@ -31331,7 +32003,7 @@
         <p:spPr>
           <a:xfrm xmlns:a="http://schemas.openxmlformats.org/drawingml/2006/main">
             <a:off x="1252404" y="3138786"/>
-            <a:ext cx="4190700" cy="548640"/>
+            <a:ext cx="4190700" cy="733500"/>
           </a:xfrm>
           <a:prstGeom xmlns:a="http://schemas.openxmlformats.org/drawingml/2006/main" prst="rect">
             <a:avLst/>
@@ -31381,7 +32053,7 @@
         </p:nvSpPr>
         <p:spPr>
           <a:xfrm xmlns:a="http://schemas.openxmlformats.org/drawingml/2006/main">
-            <a:off x="1252404" y="3736386"/>
+            <a:off x="1252404" y="3914775"/>
             <a:ext cx="4190700" cy="384600"/>
           </a:xfrm>
           <a:prstGeom xmlns:a="http://schemas.openxmlformats.org/drawingml/2006/main" prst="rect">
@@ -31644,6 +32316,62 @@
           </a:p>
         </p:txBody>
       </p:sp>
+      <p:sp>
+        <p:nvSpPr>
+          <p:cNvPr id="313" name="slide-heading-6">
+            <a:extLst xmlns:a="http://schemas.openxmlformats.org/drawingml/2006/main">
+              <a:ext uri="{FF2B5EF4-FFF2-40B4-BE49-F238E27FC236}">
+                <a16:creationId xmlns:a16="http://schemas.microsoft.com/office/drawing/2014/main" id="{E73CF497-0584-42DA-AFC9-6F53A87DBDF6}"/>
+              </a:ext>
+            </a:extLst>
+          </p:cNvPr>
+          <p:cNvSpPr>
+            <a:spLocks xmlns:a="http://schemas.openxmlformats.org/drawingml/2006/main" noGrp="1"/>
+          </p:cNvSpPr>
+          <p:nvPr/>
+        </p:nvSpPr>
+        <p:spPr>
+          <a:xfrm xmlns:a="http://schemas.openxmlformats.org/drawingml/2006/main">
+            <a:off x="552450" y="219075"/>
+            <a:ext cx="6858000" cy="266700"/>
+          </a:xfrm>
+          <a:prstGeom xmlns:a="http://schemas.openxmlformats.org/drawingml/2006/main" prst="rect">
+            <a:avLst/>
+          </a:prstGeom>
+          <a:noFill xmlns:a="http://schemas.openxmlformats.org/drawingml/2006/main"/>
+          <a:ln xmlns:a="http://schemas.openxmlformats.org/drawingml/2006/main" w="0">
+            <a:noFill/>
+            <a:prstDash val="solid"/>
+          </a:ln>
+        </p:spPr>
+        <p:txBody>
+          <a:bodyPr xmlns:a="http://schemas.openxmlformats.org/drawingml/2006/main"/>
+          <a:lstStyle xmlns:a="http://schemas.openxmlformats.org/drawingml/2006/main"/>
+          <a:p xmlns:a="http://schemas.openxmlformats.org/drawingml/2006/main">
+            <a:pPr algn="l">
+              <a:defRPr sz="1350" b="1">
+                <a:solidFill>
+                  <a:srgbClr val="FFFFFF"/>
+                </a:solidFill>
+                <a:latin typeface="Source Code Pro"/>
+                <a:ea typeface="Source Code Pro"/>
+                <a:cs typeface="Source Code Pro"/>
+              </a:defRPr>
+            </a:pPr>
+            <a:r>
+              <a:rPr sz="1350" b="1">
+                <a:solidFill>
+                  <a:srgbClr val="FFFFFF"/>
+                </a:solidFill>
+                <a:latin typeface="Source Code Pro"/>
+                <a:ea typeface="Source Code Pro"/>
+                <a:cs typeface="Source Code Pro"/>
+              </a:rPr>
+              <a:t>Today's mission</a:t>
+            </a:r>
+          </a:p>
+        </p:txBody>
+      </p:sp>
     </p:spTree>
     <p:extLst>
       <p:ext uri="{BB962C8B-B14F-4D97-AF65-F5344CB8AC3E}">
@@ -31684,7 +32412,7 @@
         </p:nvSpPr>
         <p:spPr>
           <a:xfrm xmlns:a="http://schemas.openxmlformats.org/drawingml/2006/main">
-            <a:off x="1252403" y="2678261"/>
+            <a:off x="1252403" y="2857500"/>
             <a:ext cx="4190700" cy="384600"/>
           </a:xfrm>
           <a:prstGeom xmlns:a="http://schemas.openxmlformats.org/drawingml/2006/main" prst="rect">
@@ -31731,7 +32459,7 @@
         <p:spPr>
           <a:xfrm xmlns:a="http://schemas.openxmlformats.org/drawingml/2006/main">
             <a:off x="1252403" y="1022536"/>
-            <a:ext cx="4190700" cy="548640"/>
+            <a:ext cx="4190700" cy="733500"/>
           </a:xfrm>
           <a:prstGeom xmlns:a="http://schemas.openxmlformats.org/drawingml/2006/main" prst="rect">
             <a:avLst/>
@@ -31781,7 +32509,7 @@
         </p:nvSpPr>
         <p:spPr>
           <a:xfrm xmlns:a="http://schemas.openxmlformats.org/drawingml/2006/main">
-            <a:off x="1252403" y="1620161"/>
+            <a:off x="1252403" y="1790700"/>
             <a:ext cx="4190700" cy="384600"/>
           </a:xfrm>
           <a:prstGeom xmlns:a="http://schemas.openxmlformats.org/drawingml/2006/main" prst="rect">
@@ -31828,7 +32556,7 @@
         <p:spPr>
           <a:xfrm xmlns:a="http://schemas.openxmlformats.org/drawingml/2006/main">
             <a:off x="1252403" y="2080661"/>
-            <a:ext cx="4190700" cy="548640"/>
+            <a:ext cx="4190700" cy="733500"/>
           </a:xfrm>
           <a:prstGeom xmlns:a="http://schemas.openxmlformats.org/drawingml/2006/main" prst="rect">
             <a:avLst/>
@@ -31874,7 +32602,7 @@
         <p:spPr>
           <a:xfrm xmlns:a="http://schemas.openxmlformats.org/drawingml/2006/main">
             <a:off x="1252404" y="3138786"/>
-            <a:ext cx="4190700" cy="548640"/>
+            <a:ext cx="4190700" cy="733500"/>
           </a:xfrm>
           <a:prstGeom xmlns:a="http://schemas.openxmlformats.org/drawingml/2006/main" prst="rect">
             <a:avLst/>
@@ -31924,7 +32652,7 @@
         </p:nvSpPr>
         <p:spPr>
           <a:xfrm xmlns:a="http://schemas.openxmlformats.org/drawingml/2006/main">
-            <a:off x="1252404" y="3736386"/>
+            <a:off x="1252404" y="3914775"/>
             <a:ext cx="4190700" cy="384600"/>
           </a:xfrm>
           <a:prstGeom xmlns:a="http://schemas.openxmlformats.org/drawingml/2006/main" prst="rect">
@@ -32187,6 +32915,62 @@
           </a:p>
         </p:txBody>
       </p:sp>
+      <p:sp>
+        <p:nvSpPr>
+          <p:cNvPr id="313" name="slide-heading-7">
+            <a:extLst xmlns:a="http://schemas.openxmlformats.org/drawingml/2006/main">
+              <a:ext uri="{FF2B5EF4-FFF2-40B4-BE49-F238E27FC236}">
+                <a16:creationId xmlns:a16="http://schemas.microsoft.com/office/drawing/2014/main" id="{0C27150C-6CF9-4E45-86A8-40688D407385}"/>
+              </a:ext>
+            </a:extLst>
+          </p:cNvPr>
+          <p:cNvSpPr>
+            <a:spLocks xmlns:a="http://schemas.openxmlformats.org/drawingml/2006/main" noGrp="1"/>
+          </p:cNvSpPr>
+          <p:nvPr/>
+        </p:nvSpPr>
+        <p:spPr>
+          <a:xfrm xmlns:a="http://schemas.openxmlformats.org/drawingml/2006/main">
+            <a:off x="552450" y="219075"/>
+            <a:ext cx="6858000" cy="266700"/>
+          </a:xfrm>
+          <a:prstGeom xmlns:a="http://schemas.openxmlformats.org/drawingml/2006/main" prst="rect">
+            <a:avLst/>
+          </a:prstGeom>
+          <a:noFill xmlns:a="http://schemas.openxmlformats.org/drawingml/2006/main"/>
+          <a:ln xmlns:a="http://schemas.openxmlformats.org/drawingml/2006/main" w="0">
+            <a:noFill/>
+            <a:prstDash val="solid"/>
+          </a:ln>
+        </p:spPr>
+        <p:txBody>
+          <a:bodyPr xmlns:a="http://schemas.openxmlformats.org/drawingml/2006/main"/>
+          <a:lstStyle xmlns:a="http://schemas.openxmlformats.org/drawingml/2006/main"/>
+          <a:p xmlns:a="http://schemas.openxmlformats.org/drawingml/2006/main">
+            <a:pPr algn="l">
+              <a:defRPr sz="1350" b="1">
+                <a:solidFill>
+                  <a:srgbClr val="FFFFFF"/>
+                </a:solidFill>
+                <a:latin typeface="Source Code Pro"/>
+                <a:ea typeface="Source Code Pro"/>
+                <a:cs typeface="Source Code Pro"/>
+              </a:defRPr>
+            </a:pPr>
+            <a:r>
+              <a:rPr sz="1350" b="1">
+                <a:solidFill>
+                  <a:srgbClr val="FFFFFF"/>
+                </a:solidFill>
+                <a:latin typeface="Source Code Pro"/>
+                <a:ea typeface="Source Code Pro"/>
+                <a:cs typeface="Source Code Pro"/>
+              </a:rPr>
+              <a:t>Introduce yourself</a:t>
+            </a:r>
+          </a:p>
+        </p:txBody>
+      </p:sp>
     </p:spTree>
     <p:extLst>
       <p:ext uri="{BB962C8B-B14F-4D97-AF65-F5344CB8AC3E}">
@@ -32227,7 +33011,7 @@
         </p:nvSpPr>
         <p:spPr>
           <a:xfrm xmlns:a="http://schemas.openxmlformats.org/drawingml/2006/main">
-            <a:off x="1252403" y="2678261"/>
+            <a:off x="1252403" y="2857500"/>
             <a:ext cx="4190700" cy="384600"/>
           </a:xfrm>
           <a:prstGeom xmlns:a="http://schemas.openxmlformats.org/drawingml/2006/main" prst="rect">
@@ -32274,7 +33058,7 @@
         <p:spPr>
           <a:xfrm xmlns:a="http://schemas.openxmlformats.org/drawingml/2006/main">
             <a:off x="1252403" y="1022536"/>
-            <a:ext cx="4190700" cy="548640"/>
+            <a:ext cx="4190700" cy="733500"/>
           </a:xfrm>
           <a:prstGeom xmlns:a="http://schemas.openxmlformats.org/drawingml/2006/main" prst="rect">
             <a:avLst/>
@@ -32324,7 +33108,7 @@
         </p:nvSpPr>
         <p:spPr>
           <a:xfrm xmlns:a="http://schemas.openxmlformats.org/drawingml/2006/main">
-            <a:off x="1252403" y="1620161"/>
+            <a:off x="1252403" y="1790700"/>
             <a:ext cx="4190700" cy="384600"/>
           </a:xfrm>
           <a:prstGeom xmlns:a="http://schemas.openxmlformats.org/drawingml/2006/main" prst="rect">
@@ -32371,7 +33155,7 @@
         <p:spPr>
           <a:xfrm xmlns:a="http://schemas.openxmlformats.org/drawingml/2006/main">
             <a:off x="1252403" y="2080661"/>
-            <a:ext cx="4190700" cy="548640"/>
+            <a:ext cx="4190700" cy="733500"/>
           </a:xfrm>
           <a:prstGeom xmlns:a="http://schemas.openxmlformats.org/drawingml/2006/main" prst="rect">
             <a:avLst/>
@@ -32417,7 +33201,7 @@
         <p:spPr>
           <a:xfrm xmlns:a="http://schemas.openxmlformats.org/drawingml/2006/main">
             <a:off x="1252404" y="3138786"/>
-            <a:ext cx="4190700" cy="548640"/>
+            <a:ext cx="4190700" cy="733500"/>
           </a:xfrm>
           <a:prstGeom xmlns:a="http://schemas.openxmlformats.org/drawingml/2006/main" prst="rect">
             <a:avLst/>
@@ -32467,7 +33251,7 @@
         </p:nvSpPr>
         <p:spPr>
           <a:xfrm xmlns:a="http://schemas.openxmlformats.org/drawingml/2006/main">
-            <a:off x="1252404" y="3736386"/>
+            <a:off x="1252404" y="3914775"/>
             <a:ext cx="4190700" cy="384600"/>
           </a:xfrm>
           <a:prstGeom xmlns:a="http://schemas.openxmlformats.org/drawingml/2006/main" prst="rect">
@@ -32730,6 +33514,62 @@
           </a:p>
         </p:txBody>
       </p:sp>
+      <p:sp>
+        <p:nvSpPr>
+          <p:cNvPr id="313" name="slide-heading-8">
+            <a:extLst xmlns:a="http://schemas.openxmlformats.org/drawingml/2006/main">
+              <a:ext uri="{FF2B5EF4-FFF2-40B4-BE49-F238E27FC236}">
+                <a16:creationId xmlns:a16="http://schemas.microsoft.com/office/drawing/2014/main" id="{42A63C4E-0D5B-4E2F-9924-0968778D40A2}"/>
+              </a:ext>
+            </a:extLst>
+          </p:cNvPr>
+          <p:cNvSpPr>
+            <a:spLocks xmlns:a="http://schemas.openxmlformats.org/drawingml/2006/main" noGrp="1"/>
+          </p:cNvSpPr>
+          <p:nvPr/>
+        </p:nvSpPr>
+        <p:spPr>
+          <a:xfrm xmlns:a="http://schemas.openxmlformats.org/drawingml/2006/main">
+            <a:off x="552450" y="219075"/>
+            <a:ext cx="6858000" cy="266700"/>
+          </a:xfrm>
+          <a:prstGeom xmlns:a="http://schemas.openxmlformats.org/drawingml/2006/main" prst="rect">
+            <a:avLst/>
+          </a:prstGeom>
+          <a:noFill xmlns:a="http://schemas.openxmlformats.org/drawingml/2006/main"/>
+          <a:ln xmlns:a="http://schemas.openxmlformats.org/drawingml/2006/main" w="0">
+            <a:noFill/>
+            <a:prstDash val="solid"/>
+          </a:ln>
+        </p:spPr>
+        <p:txBody>
+          <a:bodyPr xmlns:a="http://schemas.openxmlformats.org/drawingml/2006/main"/>
+          <a:lstStyle xmlns:a="http://schemas.openxmlformats.org/drawingml/2006/main"/>
+          <a:p xmlns:a="http://schemas.openxmlformats.org/drawingml/2006/main">
+            <a:pPr algn="l">
+              <a:defRPr sz="1350" b="1">
+                <a:solidFill>
+                  <a:srgbClr val="FFFFFF"/>
+                </a:solidFill>
+                <a:latin typeface="Source Code Pro"/>
+                <a:ea typeface="Source Code Pro"/>
+                <a:cs typeface="Source Code Pro"/>
+              </a:defRPr>
+            </a:pPr>
+            <a:r>
+              <a:rPr sz="1350" b="1">
+                <a:solidFill>
+                  <a:srgbClr val="FFFFFF"/>
+                </a:solidFill>
+                <a:latin typeface="Source Code Pro"/>
+                <a:ea typeface="Source Code Pro"/>
+                <a:cs typeface="Source Code Pro"/>
+              </a:rPr>
+              <a:t>Programming starts with ideas</a:t>
+            </a:r>
+          </a:p>
+        </p:txBody>
+      </p:sp>
     </p:spTree>
     <p:extLst>
       <p:ext uri="{BB962C8B-B14F-4D97-AF65-F5344CB8AC3E}">
@@ -32770,7 +33610,7 @@
         </p:nvSpPr>
         <p:spPr>
           <a:xfrm xmlns:a="http://schemas.openxmlformats.org/drawingml/2006/main">
-            <a:off x="1252403" y="2678261"/>
+            <a:off x="1252403" y="2857500"/>
             <a:ext cx="4190700" cy="384600"/>
           </a:xfrm>
           <a:prstGeom xmlns:a="http://schemas.openxmlformats.org/drawingml/2006/main" prst="rect">
@@ -32817,7 +33657,7 @@
         <p:spPr>
           <a:xfrm xmlns:a="http://schemas.openxmlformats.org/drawingml/2006/main">
             <a:off x="1252403" y="1022536"/>
-            <a:ext cx="4190700" cy="548640"/>
+            <a:ext cx="4190700" cy="733500"/>
           </a:xfrm>
           <a:prstGeom xmlns:a="http://schemas.openxmlformats.org/drawingml/2006/main" prst="rect">
             <a:avLst/>
@@ -32867,7 +33707,7 @@
         </p:nvSpPr>
         <p:spPr>
           <a:xfrm xmlns:a="http://schemas.openxmlformats.org/drawingml/2006/main">
-            <a:off x="1252403" y="1620161"/>
+            <a:off x="1252403" y="1790700"/>
             <a:ext cx="4190700" cy="384600"/>
           </a:xfrm>
           <a:prstGeom xmlns:a="http://schemas.openxmlformats.org/drawingml/2006/main" prst="rect">
@@ -32914,7 +33754,7 @@
         <p:spPr>
           <a:xfrm xmlns:a="http://schemas.openxmlformats.org/drawingml/2006/main">
             <a:off x="1252403" y="2080661"/>
-            <a:ext cx="4190700" cy="548640"/>
+            <a:ext cx="4190700" cy="733500"/>
           </a:xfrm>
           <a:prstGeom xmlns:a="http://schemas.openxmlformats.org/drawingml/2006/main" prst="rect">
             <a:avLst/>
@@ -32960,7 +33800,7 @@
         <p:spPr>
           <a:xfrm xmlns:a="http://schemas.openxmlformats.org/drawingml/2006/main">
             <a:off x="1252404" y="3138786"/>
-            <a:ext cx="4190700" cy="548640"/>
+            <a:ext cx="4190700" cy="733500"/>
           </a:xfrm>
           <a:prstGeom xmlns:a="http://schemas.openxmlformats.org/drawingml/2006/main" prst="rect">
             <a:avLst/>
@@ -33010,7 +33850,7 @@
         </p:nvSpPr>
         <p:spPr>
           <a:xfrm xmlns:a="http://schemas.openxmlformats.org/drawingml/2006/main">
-            <a:off x="1252404" y="3736386"/>
+            <a:off x="1252404" y="3914775"/>
             <a:ext cx="4190700" cy="384600"/>
           </a:xfrm>
           <a:prstGeom xmlns:a="http://schemas.openxmlformats.org/drawingml/2006/main" prst="rect">
@@ -33269,6 +34109,62 @@
                 </a:solidFill>
               </a:rPr>
               <a:t>[</a:t>
+            </a:r>
+          </a:p>
+        </p:txBody>
+      </p:sp>
+      <p:sp>
+        <p:nvSpPr>
+          <p:cNvPr id="313" name="slide-heading-9">
+            <a:extLst xmlns:a="http://schemas.openxmlformats.org/drawingml/2006/main">
+              <a:ext uri="{FF2B5EF4-FFF2-40B4-BE49-F238E27FC236}">
+                <a16:creationId xmlns:a16="http://schemas.microsoft.com/office/drawing/2014/main" id="{DC58C05B-4865-470F-A3BA-388C322B816A}"/>
+              </a:ext>
+            </a:extLst>
+          </p:cNvPr>
+          <p:cNvSpPr>
+            <a:spLocks xmlns:a="http://schemas.openxmlformats.org/drawingml/2006/main" noGrp="1"/>
+          </p:cNvSpPr>
+          <p:nvPr/>
+        </p:nvSpPr>
+        <p:spPr>
+          <a:xfrm xmlns:a="http://schemas.openxmlformats.org/drawingml/2006/main">
+            <a:off x="552450" y="219075"/>
+            <a:ext cx="6858000" cy="266700"/>
+          </a:xfrm>
+          <a:prstGeom xmlns:a="http://schemas.openxmlformats.org/drawingml/2006/main" prst="rect">
+            <a:avLst/>
+          </a:prstGeom>
+          <a:noFill xmlns:a="http://schemas.openxmlformats.org/drawingml/2006/main"/>
+          <a:ln xmlns:a="http://schemas.openxmlformats.org/drawingml/2006/main" w="0">
+            <a:noFill/>
+            <a:prstDash val="solid"/>
+          </a:ln>
+        </p:spPr>
+        <p:txBody>
+          <a:bodyPr xmlns:a="http://schemas.openxmlformats.org/drawingml/2006/main"/>
+          <a:lstStyle xmlns:a="http://schemas.openxmlformats.org/drawingml/2006/main"/>
+          <a:p xmlns:a="http://schemas.openxmlformats.org/drawingml/2006/main">
+            <a:pPr algn="l">
+              <a:defRPr sz="1350" b="1">
+                <a:solidFill>
+                  <a:srgbClr val="FFFFFF"/>
+                </a:solidFill>
+                <a:latin typeface="Source Code Pro"/>
+                <a:ea typeface="Source Code Pro"/>
+                <a:cs typeface="Source Code Pro"/>
+              </a:defRPr>
+            </a:pPr>
+            <a:r>
+              <a:rPr sz="1350" b="1">
+                <a:solidFill>
+                  <a:srgbClr val="FFFFFF"/>
+                </a:solidFill>
+                <a:latin typeface="Source Code Pro"/>
+                <a:ea typeface="Source Code Pro"/>
+                <a:cs typeface="Source Code Pro"/>
+              </a:rPr>
+              <a:t>Our Saturday class routine</a:t>
             </a:r>
           </a:p>
         </p:txBody>

--- a/2026-07-11_Intro_to_Computer_Science_Programming/2026-07-11_Intro_to_Computer_Science_Programming.pptx
+++ b/2026-07-11_Intro_to_Computer_Science_Programming/2026-07-11_Intro_to_Computer_Science_Programming.pptx
@@ -2,55 +2,55 @@
 <file path=ppt/presentation.xml><?xml version="1.0" encoding="utf-8"?>
 <p:presentation xmlns:p="http://schemas.openxmlformats.org/presentationml/2006/main" embedTrueTypeFonts="1" saveSubsetFonts="1">
   <p:sldMasterIdLst>
-    <p:sldMasterId xmlns:r="http://schemas.openxmlformats.org/officeDocument/2006/relationships" id="2147483648" r:id="R316865c0804744ac"/>
+    <p:sldMasterId xmlns:r="http://schemas.openxmlformats.org/officeDocument/2006/relationships" id="2147483648" r:id="R3b4eb1c274d24026"/>
   </p:sldMasterIdLst>
   <p:notesMasterIdLst>
-    <p:notesMasterId xmlns:r="http://schemas.openxmlformats.org/officeDocument/2006/relationships" r:id="Rae702987c6a5429e"/>
+    <p:notesMasterId xmlns:r="http://schemas.openxmlformats.org/officeDocument/2006/relationships" r:id="R92feef4b6a164373"/>
   </p:notesMasterIdLst>
   <p:sldIdLst>
-    <p:sldId xmlns:r="http://schemas.openxmlformats.org/officeDocument/2006/relationships" id="256" r:id="Rc83d3e40e03b457e"/>
-    <p:sldId xmlns:r="http://schemas.openxmlformats.org/officeDocument/2006/relationships" id="257" r:id="Rf9bcddc0cf564cbf"/>
-    <p:sldId xmlns:r="http://schemas.openxmlformats.org/officeDocument/2006/relationships" id="258" r:id="R03a998ecb04c4a4c"/>
-    <p:sldId xmlns:r="http://schemas.openxmlformats.org/officeDocument/2006/relationships" id="259" r:id="Rb451c7d0957b4dd2"/>
-    <p:sldId xmlns:r="http://schemas.openxmlformats.org/officeDocument/2006/relationships" id="260" r:id="Rde4997d4cc614fa9"/>
-    <p:sldId xmlns:r="http://schemas.openxmlformats.org/officeDocument/2006/relationships" id="261" r:id="Rb4f59ffb46884f55"/>
-    <p:sldId xmlns:r="http://schemas.openxmlformats.org/officeDocument/2006/relationships" id="262" r:id="Rb4751571797d45fa"/>
-    <p:sldId xmlns:r="http://schemas.openxmlformats.org/officeDocument/2006/relationships" id="263" r:id="Rb44cb73827ae4262"/>
-    <p:sldId xmlns:r="http://schemas.openxmlformats.org/officeDocument/2006/relationships" id="264" r:id="Rd02745f6be054363"/>
-    <p:sldId xmlns:r="http://schemas.openxmlformats.org/officeDocument/2006/relationships" id="265" r:id="R4343efe845f04457"/>
-    <p:sldId xmlns:r="http://schemas.openxmlformats.org/officeDocument/2006/relationships" id="266" r:id="R8e3ae2e0c9e444f1"/>
-    <p:sldId xmlns:r="http://schemas.openxmlformats.org/officeDocument/2006/relationships" id="267" r:id="R6f76174f040b42b7"/>
-    <p:sldId xmlns:r="http://schemas.openxmlformats.org/officeDocument/2006/relationships" id="268" r:id="R9e76b669f36d49e1"/>
-    <p:sldId xmlns:r="http://schemas.openxmlformats.org/officeDocument/2006/relationships" id="269" r:id="R51bce2330cbc4f12"/>
-    <p:sldId xmlns:r="http://schemas.openxmlformats.org/officeDocument/2006/relationships" id="270" r:id="Rde48d84fa9d34946"/>
-    <p:sldId xmlns:r="http://schemas.openxmlformats.org/officeDocument/2006/relationships" id="271" r:id="Rc7a7a03b8abe4ca3"/>
-    <p:sldId xmlns:r="http://schemas.openxmlformats.org/officeDocument/2006/relationships" id="272" r:id="Reff8d42975984343"/>
-    <p:sldId xmlns:r="http://schemas.openxmlformats.org/officeDocument/2006/relationships" id="273" r:id="Ree90b721cc62469e"/>
-    <p:sldId xmlns:r="http://schemas.openxmlformats.org/officeDocument/2006/relationships" id="274" r:id="Rfd75855a636f4c9d"/>
-    <p:sldId xmlns:r="http://schemas.openxmlformats.org/officeDocument/2006/relationships" id="275" r:id="Rd506d3ca9ae04f23"/>
-    <p:sldId xmlns:r="http://schemas.openxmlformats.org/officeDocument/2006/relationships" id="276" r:id="Rded450775c514e6b"/>
-    <p:sldId xmlns:r="http://schemas.openxmlformats.org/officeDocument/2006/relationships" id="277" r:id="R13b9d3c56d174f06"/>
-    <p:sldId xmlns:r="http://schemas.openxmlformats.org/officeDocument/2006/relationships" id="278" r:id="R8e3390b7d14b4a77"/>
-    <p:sldId xmlns:r="http://schemas.openxmlformats.org/officeDocument/2006/relationships" id="279" r:id="Rec5c23fab7d24afd"/>
-    <p:sldId xmlns:r="http://schemas.openxmlformats.org/officeDocument/2006/relationships" id="280" r:id="R987419ddb34149d3"/>
-    <p:sldId xmlns:r="http://schemas.openxmlformats.org/officeDocument/2006/relationships" id="281" r:id="R8db3c34e99024aaa"/>
+    <p:sldId xmlns:r="http://schemas.openxmlformats.org/officeDocument/2006/relationships" id="256" r:id="Rd94febe393374a7f"/>
+    <p:sldId xmlns:r="http://schemas.openxmlformats.org/officeDocument/2006/relationships" id="257" r:id="Rcd080cf73ea746d7"/>
+    <p:sldId xmlns:r="http://schemas.openxmlformats.org/officeDocument/2006/relationships" id="258" r:id="R6e3668c970f44cf0"/>
+    <p:sldId xmlns:r="http://schemas.openxmlformats.org/officeDocument/2006/relationships" id="259" r:id="R455fdb550fad4788"/>
+    <p:sldId xmlns:r="http://schemas.openxmlformats.org/officeDocument/2006/relationships" id="260" r:id="Rf1457677984a423d"/>
+    <p:sldId xmlns:r="http://schemas.openxmlformats.org/officeDocument/2006/relationships" id="261" r:id="R225d2b71901e421b"/>
+    <p:sldId xmlns:r="http://schemas.openxmlformats.org/officeDocument/2006/relationships" id="262" r:id="Ra2d5baa2848e4300"/>
+    <p:sldId xmlns:r="http://schemas.openxmlformats.org/officeDocument/2006/relationships" id="263" r:id="R4239a5e40fc8477a"/>
+    <p:sldId xmlns:r="http://schemas.openxmlformats.org/officeDocument/2006/relationships" id="264" r:id="R04c923c23c674af9"/>
+    <p:sldId xmlns:r="http://schemas.openxmlformats.org/officeDocument/2006/relationships" id="265" r:id="R444a8f1106d74044"/>
+    <p:sldId xmlns:r="http://schemas.openxmlformats.org/officeDocument/2006/relationships" id="266" r:id="R0c526b69462546a1"/>
+    <p:sldId xmlns:r="http://schemas.openxmlformats.org/officeDocument/2006/relationships" id="267" r:id="R3584a4828d1d496b"/>
+    <p:sldId xmlns:r="http://schemas.openxmlformats.org/officeDocument/2006/relationships" id="268" r:id="Rcae0cef513ae4da7"/>
+    <p:sldId xmlns:r="http://schemas.openxmlformats.org/officeDocument/2006/relationships" id="269" r:id="R4a9c884ff4784241"/>
+    <p:sldId xmlns:r="http://schemas.openxmlformats.org/officeDocument/2006/relationships" id="270" r:id="R54853493cacd4509"/>
+    <p:sldId xmlns:r="http://schemas.openxmlformats.org/officeDocument/2006/relationships" id="271" r:id="Reb24ac8b36844933"/>
+    <p:sldId xmlns:r="http://schemas.openxmlformats.org/officeDocument/2006/relationships" id="272" r:id="R7da55bc024b6469e"/>
+    <p:sldId xmlns:r="http://schemas.openxmlformats.org/officeDocument/2006/relationships" id="273" r:id="R6369efebb97e401b"/>
+    <p:sldId xmlns:r="http://schemas.openxmlformats.org/officeDocument/2006/relationships" id="274" r:id="Rdae5811f91ba4789"/>
+    <p:sldId xmlns:r="http://schemas.openxmlformats.org/officeDocument/2006/relationships" id="275" r:id="R067545a7a82f41e8"/>
+    <p:sldId xmlns:r="http://schemas.openxmlformats.org/officeDocument/2006/relationships" id="276" r:id="R15b4ed74f0894b5a"/>
+    <p:sldId xmlns:r="http://schemas.openxmlformats.org/officeDocument/2006/relationships" id="277" r:id="R7865d703741c4f3a"/>
+    <p:sldId xmlns:r="http://schemas.openxmlformats.org/officeDocument/2006/relationships" id="278" r:id="R95645096c70c4a37"/>
+    <p:sldId xmlns:r="http://schemas.openxmlformats.org/officeDocument/2006/relationships" id="279" r:id="R6e285976ba7744ad"/>
+    <p:sldId xmlns:r="http://schemas.openxmlformats.org/officeDocument/2006/relationships" id="280" r:id="R627d7fdbe5054847"/>
+    <p:sldId xmlns:r="http://schemas.openxmlformats.org/officeDocument/2006/relationships" id="281" r:id="R6a40418975994017"/>
   </p:sldIdLst>
   <p:sldSz cx="9144000" cy="5143500"/>
   <p:notesSz cx="6858000" cy="9144000"/>
   <p:embeddedFontLst>
     <p:embeddedFont>
       <p:font typeface="Quantico"/>
-      <p:regular xmlns:r="http://schemas.openxmlformats.org/officeDocument/2006/relationships" r:id="Rfba20f19358a4d87"/>
-      <p:bold xmlns:r="http://schemas.openxmlformats.org/officeDocument/2006/relationships" r:id="R1e0f457907794504"/>
-      <p:italic xmlns:r="http://schemas.openxmlformats.org/officeDocument/2006/relationships" r:id="Rec5fe9435d654475"/>
-      <p:boldItalic xmlns:r="http://schemas.openxmlformats.org/officeDocument/2006/relationships" r:id="R51107f10382e4b32"/>
+      <p:regular xmlns:r="http://schemas.openxmlformats.org/officeDocument/2006/relationships" r:id="R523dc4b30b964ec9"/>
+      <p:bold xmlns:r="http://schemas.openxmlformats.org/officeDocument/2006/relationships" r:id="Rb400b9af09f840ce"/>
+      <p:italic xmlns:r="http://schemas.openxmlformats.org/officeDocument/2006/relationships" r:id="Rc906242da7e04149"/>
+      <p:boldItalic xmlns:r="http://schemas.openxmlformats.org/officeDocument/2006/relationships" r:id="Rdf4d33b368c14d35"/>
     </p:embeddedFont>
     <p:embeddedFont>
       <p:font typeface="Source Code Pro"/>
-      <p:regular xmlns:r="http://schemas.openxmlformats.org/officeDocument/2006/relationships" r:id="Rdecc040b29c24ef2"/>
-      <p:bold xmlns:r="http://schemas.openxmlformats.org/officeDocument/2006/relationships" r:id="Rc48a5194ca2546c2"/>
-      <p:italic xmlns:r="http://schemas.openxmlformats.org/officeDocument/2006/relationships" r:id="R1301be46e20645ab"/>
-      <p:boldItalic xmlns:r="http://schemas.openxmlformats.org/officeDocument/2006/relationships" r:id="Rcfcb47df48b04529"/>
+      <p:regular xmlns:r="http://schemas.openxmlformats.org/officeDocument/2006/relationships" r:id="R8aeffa911ca14701"/>
+      <p:bold xmlns:r="http://schemas.openxmlformats.org/officeDocument/2006/relationships" r:id="Rb429eee467774760"/>
+      <p:italic xmlns:r="http://schemas.openxmlformats.org/officeDocument/2006/relationships" r:id="R06824bffc7634510"/>
+      <p:boldItalic xmlns:r="http://schemas.openxmlformats.org/officeDocument/2006/relationships" r:id="R0accc5d07c734001"/>
     </p:embeddedFont>
   </p:embeddedFontLst>
   <p:defaultTextStyle>
@@ -17953,28 +17953,28 @@
   </p:cSld>
   <p:clrMap bg1="lt1" tx1="dk1" bg2="dk2" tx2="lt2" accent1="accent1" accent2="accent2" accent3="accent3" accent4="accent4" accent5="accent5" accent6="accent6" hlink="hlink" folHlink="folHlink"/>
   <p:sldLayoutIdLst>
-    <p:sldLayoutId xmlns:r="http://schemas.openxmlformats.org/officeDocument/2006/relationships" id="2147483649" r:id="R21ebd40119fc4a4d"/>
-    <p:sldLayoutId xmlns:r="http://schemas.openxmlformats.org/officeDocument/2006/relationships" id="2147483650" r:id="R2f5ed9d025834e8e"/>
-    <p:sldLayoutId xmlns:r="http://schemas.openxmlformats.org/officeDocument/2006/relationships" id="2147483651" r:id="R730a2ef0a5f748d2"/>
-    <p:sldLayoutId xmlns:r="http://schemas.openxmlformats.org/officeDocument/2006/relationships" id="2147483652" r:id="R4627175da4124cec"/>
-    <p:sldLayoutId xmlns:r="http://schemas.openxmlformats.org/officeDocument/2006/relationships" id="2147483653" r:id="Ra4174e529dd54a6d"/>
-    <p:sldLayoutId xmlns:r="http://schemas.openxmlformats.org/officeDocument/2006/relationships" id="2147483654" r:id="R9bd1f42ec2ab4e2f"/>
-    <p:sldLayoutId xmlns:r="http://schemas.openxmlformats.org/officeDocument/2006/relationships" id="2147483655" r:id="R6c5209c2057a465a"/>
-    <p:sldLayoutId xmlns:r="http://schemas.openxmlformats.org/officeDocument/2006/relationships" id="2147483656" r:id="Rad2bdfae646a4841"/>
-    <p:sldLayoutId xmlns:r="http://schemas.openxmlformats.org/officeDocument/2006/relationships" id="2147483657" r:id="R7eaccfe1d3a14db5"/>
-    <p:sldLayoutId xmlns:r="http://schemas.openxmlformats.org/officeDocument/2006/relationships" id="2147483658" r:id="R3024559cb9764bb4"/>
-    <p:sldLayoutId xmlns:r="http://schemas.openxmlformats.org/officeDocument/2006/relationships" id="2147483659" r:id="R8cc8e6c365344c19"/>
-    <p:sldLayoutId xmlns:r="http://schemas.openxmlformats.org/officeDocument/2006/relationships" id="2147483660" r:id="R116a576682764054"/>
-    <p:sldLayoutId xmlns:r="http://schemas.openxmlformats.org/officeDocument/2006/relationships" id="2147483661" r:id="R7e4295cdfa3b4f10"/>
-    <p:sldLayoutId xmlns:r="http://schemas.openxmlformats.org/officeDocument/2006/relationships" id="2147483662" r:id="R5c0465a2e09a4485"/>
-    <p:sldLayoutId xmlns:r="http://schemas.openxmlformats.org/officeDocument/2006/relationships" id="2147483663" r:id="Rc94b7756d2604211"/>
-    <p:sldLayoutId xmlns:r="http://schemas.openxmlformats.org/officeDocument/2006/relationships" id="2147483664" r:id="Rdea4fc94a1cf4350"/>
-    <p:sldLayoutId xmlns:r="http://schemas.openxmlformats.org/officeDocument/2006/relationships" id="2147483665" r:id="R03d2f1c378f94235"/>
-    <p:sldLayoutId xmlns:r="http://schemas.openxmlformats.org/officeDocument/2006/relationships" id="2147483666" r:id="Re158bd60edf940e8"/>
-    <p:sldLayoutId xmlns:r="http://schemas.openxmlformats.org/officeDocument/2006/relationships" id="2147483667" r:id="R4a618a026cc948c7"/>
-    <p:sldLayoutId xmlns:r="http://schemas.openxmlformats.org/officeDocument/2006/relationships" id="2147483668" r:id="R3b25be747c9b4812"/>
-    <p:sldLayoutId xmlns:r="http://schemas.openxmlformats.org/officeDocument/2006/relationships" id="2147483669" r:id="Rb5c20ce71d954093"/>
-    <p:sldLayoutId xmlns:r="http://schemas.openxmlformats.org/officeDocument/2006/relationships" id="2147483670" r:id="Rf2b2d0c0f2744114"/>
+    <p:sldLayoutId xmlns:r="http://schemas.openxmlformats.org/officeDocument/2006/relationships" id="2147483649" r:id="Rc604adb281c94f6b"/>
+    <p:sldLayoutId xmlns:r="http://schemas.openxmlformats.org/officeDocument/2006/relationships" id="2147483650" r:id="R4a3746803beb4b79"/>
+    <p:sldLayoutId xmlns:r="http://schemas.openxmlformats.org/officeDocument/2006/relationships" id="2147483651" r:id="Rf822cf1c267748ae"/>
+    <p:sldLayoutId xmlns:r="http://schemas.openxmlformats.org/officeDocument/2006/relationships" id="2147483652" r:id="R22125ee904c944f1"/>
+    <p:sldLayoutId xmlns:r="http://schemas.openxmlformats.org/officeDocument/2006/relationships" id="2147483653" r:id="R0a447dd64cb34d28"/>
+    <p:sldLayoutId xmlns:r="http://schemas.openxmlformats.org/officeDocument/2006/relationships" id="2147483654" r:id="Rbf8abc33f673497d"/>
+    <p:sldLayoutId xmlns:r="http://schemas.openxmlformats.org/officeDocument/2006/relationships" id="2147483655" r:id="Reeb06a758787420f"/>
+    <p:sldLayoutId xmlns:r="http://schemas.openxmlformats.org/officeDocument/2006/relationships" id="2147483656" r:id="Ra20c9c54cb9f4b14"/>
+    <p:sldLayoutId xmlns:r="http://schemas.openxmlformats.org/officeDocument/2006/relationships" id="2147483657" r:id="Rbe80e6bc41f44e7d"/>
+    <p:sldLayoutId xmlns:r="http://schemas.openxmlformats.org/officeDocument/2006/relationships" id="2147483658" r:id="Rc0d6938f29b44a33"/>
+    <p:sldLayoutId xmlns:r="http://schemas.openxmlformats.org/officeDocument/2006/relationships" id="2147483659" r:id="Rf1b52ede8fe14fcb"/>
+    <p:sldLayoutId xmlns:r="http://schemas.openxmlformats.org/officeDocument/2006/relationships" id="2147483660" r:id="R50e7a0d9dc3f414e"/>
+    <p:sldLayoutId xmlns:r="http://schemas.openxmlformats.org/officeDocument/2006/relationships" id="2147483661" r:id="R45e1dad6676049e7"/>
+    <p:sldLayoutId xmlns:r="http://schemas.openxmlformats.org/officeDocument/2006/relationships" id="2147483662" r:id="R60128d31b1864452"/>
+    <p:sldLayoutId xmlns:r="http://schemas.openxmlformats.org/officeDocument/2006/relationships" id="2147483663" r:id="R459caf1f592a4c03"/>
+    <p:sldLayoutId xmlns:r="http://schemas.openxmlformats.org/officeDocument/2006/relationships" id="2147483664" r:id="R5b654e360ee94800"/>
+    <p:sldLayoutId xmlns:r="http://schemas.openxmlformats.org/officeDocument/2006/relationships" id="2147483665" r:id="Rd2ddbf651a7d43f5"/>
+    <p:sldLayoutId xmlns:r="http://schemas.openxmlformats.org/officeDocument/2006/relationships" id="2147483666" r:id="R1bf63582000641a6"/>
+    <p:sldLayoutId xmlns:r="http://schemas.openxmlformats.org/officeDocument/2006/relationships" id="2147483667" r:id="R5fc94e3547fa43be"/>
+    <p:sldLayoutId xmlns:r="http://schemas.openxmlformats.org/officeDocument/2006/relationships" id="2147483668" r:id="Rbc88a9654a664144"/>
+    <p:sldLayoutId xmlns:r="http://schemas.openxmlformats.org/officeDocument/2006/relationships" id="2147483669" r:id="R8293d955d301404c"/>
+    <p:sldLayoutId xmlns:r="http://schemas.openxmlformats.org/officeDocument/2006/relationships" id="2147483670" r:id="Rd7cc72f752c24963"/>
   </p:sldLayoutIdLst>
   <p:hf sldNum="0" hdr="0" ftr="0" dt="0"/>
   <p:txStyles>
@@ -20067,10 +20067,10 @@
       </p:sp>
       <p:sp>
         <p:nvSpPr>
-          <p:cNvPr id="313" name="slide-heading-10">
-            <a:extLst xmlns:a="http://schemas.openxmlformats.org/drawingml/2006/main">
-              <a:ext uri="{FF2B5EF4-FFF2-40B4-BE49-F238E27FC236}">
-                <a16:creationId xmlns:a16="http://schemas.microsoft.com/office/drawing/2014/main" id="{EB4D228F-D243-4881-BA76-77C63C827DC2}"/>
+          <p:cNvPr id="313" name="slide-heading-marker-10">
+            <a:extLst xmlns:a="http://schemas.openxmlformats.org/drawingml/2006/main">
+              <a:ext uri="{FF2B5EF4-FFF2-40B4-BE49-F238E27FC236}">
+                <a16:creationId xmlns:a16="http://schemas.microsoft.com/office/drawing/2014/main" id="{D9D2D26E-6407-43BB-852F-7CB5FA81EE9F}"/>
               </a:ext>
             </a:extLst>
           </p:cNvPr>
@@ -20081,8 +20081,8 @@
         </p:nvSpPr>
         <p:spPr>
           <a:xfrm xmlns:a="http://schemas.openxmlformats.org/drawingml/2006/main">
-            <a:off x="552450" y="219075"/>
-            <a:ext cx="6858000" cy="266700"/>
+            <a:off x="742950" y="447675"/>
+            <a:ext cx="476250" cy="323850"/>
           </a:xfrm>
           <a:prstGeom xmlns:a="http://schemas.openxmlformats.org/drawingml/2006/main" prst="rect">
             <a:avLst/>
@@ -20098,9 +20098,9 @@
           <a:lstStyle xmlns:a="http://schemas.openxmlformats.org/drawingml/2006/main"/>
           <a:p xmlns:a="http://schemas.openxmlformats.org/drawingml/2006/main">
             <a:pPr algn="l">
-              <a:defRPr sz="1350" b="1">
+              <a:defRPr sz="1950" b="1">
                 <a:solidFill>
-                  <a:srgbClr val="FFFFFF"/>
+                  <a:srgbClr val="FFDB5D"/>
                 </a:solidFill>
                 <a:latin typeface="Source Code Pro"/>
                 <a:ea typeface="Source Code Pro"/>
@@ -20108,13 +20108,69 @@
               </a:defRPr>
             </a:pPr>
             <a:r>
-              <a:rPr sz="1350" b="1">
+              <a:rPr sz="1950" b="1">
                 <a:solidFill>
-                  <a:srgbClr val="FFFFFF"/>
+                  <a:srgbClr val="FFDB5D"/>
                 </a:solidFill>
                 <a:latin typeface="Source Code Pro"/>
                 <a:ea typeface="Source Code Pro"/>
                 <a:cs typeface="Source Code Pro"/>
+              </a:rPr>
+              <a:t>&lt;/</a:t>
+            </a:r>
+          </a:p>
+        </p:txBody>
+      </p:sp>
+      <p:sp>
+        <p:nvSpPr>
+          <p:cNvPr id="314" name="slide-heading-text-10">
+            <a:extLst xmlns:a="http://schemas.openxmlformats.org/drawingml/2006/main">
+              <a:ext uri="{FF2B5EF4-FFF2-40B4-BE49-F238E27FC236}">
+                <a16:creationId xmlns:a16="http://schemas.microsoft.com/office/drawing/2014/main" id="{495A3B83-4C65-4C13-9FD7-4AD8AF24B897}"/>
+              </a:ext>
+            </a:extLst>
+          </p:cNvPr>
+          <p:cNvSpPr>
+            <a:spLocks xmlns:a="http://schemas.openxmlformats.org/drawingml/2006/main" noGrp="1"/>
+          </p:cNvSpPr>
+          <p:nvPr/>
+        </p:nvSpPr>
+        <p:spPr>
+          <a:xfrm xmlns:a="http://schemas.openxmlformats.org/drawingml/2006/main">
+            <a:off x="1152525" y="428625"/>
+            <a:ext cx="5619750" cy="361950"/>
+          </a:xfrm>
+          <a:prstGeom xmlns:a="http://schemas.openxmlformats.org/drawingml/2006/main" prst="rect">
+            <a:avLst/>
+          </a:prstGeom>
+          <a:noFill xmlns:a="http://schemas.openxmlformats.org/drawingml/2006/main"/>
+          <a:ln xmlns:a="http://schemas.openxmlformats.org/drawingml/2006/main" w="0">
+            <a:noFill/>
+            <a:prstDash val="solid"/>
+          </a:ln>
+        </p:spPr>
+        <p:txBody>
+          <a:bodyPr xmlns:a="http://schemas.openxmlformats.org/drawingml/2006/main"/>
+          <a:lstStyle xmlns:a="http://schemas.openxmlformats.org/drawingml/2006/main"/>
+          <a:p xmlns:a="http://schemas.openxmlformats.org/drawingml/2006/main">
+            <a:pPr algn="l">
+              <a:defRPr sz="1800" b="0">
+                <a:solidFill>
+                  <a:srgbClr val="FFFFFF"/>
+                </a:solidFill>
+                <a:latin typeface="Arial"/>
+                <a:ea typeface="Arial"/>
+                <a:cs typeface="Arial"/>
+              </a:defRPr>
+            </a:pPr>
+            <a:r>
+              <a:rPr sz="1800" b="0">
+                <a:solidFill>
+                  <a:srgbClr val="FFFFFF"/>
+                </a:solidFill>
+                <a:latin typeface="Arial"/>
+                <a:ea typeface="Arial"/>
+                <a:cs typeface="Arial"/>
               </a:rPr>
               <a:t>Find class in Microsoft Teams</a:t>
             </a:r>
@@ -20666,10 +20722,10 @@
       </p:sp>
       <p:sp>
         <p:nvSpPr>
-          <p:cNvPr id="313" name="slide-heading-11">
-            <a:extLst xmlns:a="http://schemas.openxmlformats.org/drawingml/2006/main">
-              <a:ext uri="{FF2B5EF4-FFF2-40B4-BE49-F238E27FC236}">
-                <a16:creationId xmlns:a16="http://schemas.microsoft.com/office/drawing/2014/main" id="{9DE39D22-8A17-4CC3-AD46-A745C8F2AF0D}"/>
+          <p:cNvPr id="313" name="slide-heading-marker-11">
+            <a:extLst xmlns:a="http://schemas.openxmlformats.org/drawingml/2006/main">
+              <a:ext uri="{FF2B5EF4-FFF2-40B4-BE49-F238E27FC236}">
+                <a16:creationId xmlns:a16="http://schemas.microsoft.com/office/drawing/2014/main" id="{E0D9E6CB-365E-4F2E-9D9B-DBFDD9CB055C}"/>
               </a:ext>
             </a:extLst>
           </p:cNvPr>
@@ -20680,8 +20736,8 @@
         </p:nvSpPr>
         <p:spPr>
           <a:xfrm xmlns:a="http://schemas.openxmlformats.org/drawingml/2006/main">
-            <a:off x="552450" y="219075"/>
-            <a:ext cx="6858000" cy="266700"/>
+            <a:off x="742950" y="447675"/>
+            <a:ext cx="476250" cy="323850"/>
           </a:xfrm>
           <a:prstGeom xmlns:a="http://schemas.openxmlformats.org/drawingml/2006/main" prst="rect">
             <a:avLst/>
@@ -20697,9 +20753,9 @@
           <a:lstStyle xmlns:a="http://schemas.openxmlformats.org/drawingml/2006/main"/>
           <a:p xmlns:a="http://schemas.openxmlformats.org/drawingml/2006/main">
             <a:pPr algn="l">
-              <a:defRPr sz="1350" b="1">
+              <a:defRPr sz="1950" b="1">
                 <a:solidFill>
-                  <a:srgbClr val="FFFFFF"/>
+                  <a:srgbClr val="FFDB5D"/>
                 </a:solidFill>
                 <a:latin typeface="Source Code Pro"/>
                 <a:ea typeface="Source Code Pro"/>
@@ -20707,13 +20763,69 @@
               </a:defRPr>
             </a:pPr>
             <a:r>
-              <a:rPr sz="1350" b="1">
+              <a:rPr sz="1950" b="1">
                 <a:solidFill>
-                  <a:srgbClr val="FFFFFF"/>
+                  <a:srgbClr val="FFDB5D"/>
                 </a:solidFill>
                 <a:latin typeface="Source Code Pro"/>
                 <a:ea typeface="Source Code Pro"/>
                 <a:cs typeface="Source Code Pro"/>
+              </a:rPr>
+              <a:t>&lt;/</a:t>
+            </a:r>
+          </a:p>
+        </p:txBody>
+      </p:sp>
+      <p:sp>
+        <p:nvSpPr>
+          <p:cNvPr id="314" name="slide-heading-text-11">
+            <a:extLst xmlns:a="http://schemas.openxmlformats.org/drawingml/2006/main">
+              <a:ext uri="{FF2B5EF4-FFF2-40B4-BE49-F238E27FC236}">
+                <a16:creationId xmlns:a16="http://schemas.microsoft.com/office/drawing/2014/main" id="{E036BAB6-753C-4A3C-BB90-409F06C989DB}"/>
+              </a:ext>
+            </a:extLst>
+          </p:cNvPr>
+          <p:cNvSpPr>
+            <a:spLocks xmlns:a="http://schemas.openxmlformats.org/drawingml/2006/main" noGrp="1"/>
+          </p:cNvSpPr>
+          <p:nvPr/>
+        </p:nvSpPr>
+        <p:spPr>
+          <a:xfrm xmlns:a="http://schemas.openxmlformats.org/drawingml/2006/main">
+            <a:off x="1152525" y="428625"/>
+            <a:ext cx="5619750" cy="361950"/>
+          </a:xfrm>
+          <a:prstGeom xmlns:a="http://schemas.openxmlformats.org/drawingml/2006/main" prst="rect">
+            <a:avLst/>
+          </a:prstGeom>
+          <a:noFill xmlns:a="http://schemas.openxmlformats.org/drawingml/2006/main"/>
+          <a:ln xmlns:a="http://schemas.openxmlformats.org/drawingml/2006/main" w="0">
+            <a:noFill/>
+            <a:prstDash val="solid"/>
+          </a:ln>
+        </p:spPr>
+        <p:txBody>
+          <a:bodyPr xmlns:a="http://schemas.openxmlformats.org/drawingml/2006/main"/>
+          <a:lstStyle xmlns:a="http://schemas.openxmlformats.org/drawingml/2006/main"/>
+          <a:p xmlns:a="http://schemas.openxmlformats.org/drawingml/2006/main">
+            <a:pPr algn="l">
+              <a:defRPr sz="1800" b="0">
+                <a:solidFill>
+                  <a:srgbClr val="FFFFFF"/>
+                </a:solidFill>
+                <a:latin typeface="Arial"/>
+                <a:ea typeface="Arial"/>
+                <a:cs typeface="Arial"/>
+              </a:defRPr>
+            </a:pPr>
+            <a:r>
+              <a:rPr sz="1800" b="0">
+                <a:solidFill>
+                  <a:srgbClr val="FFFFFF"/>
+                </a:solidFill>
+                <a:latin typeface="Arial"/>
+                <a:ea typeface="Arial"/>
+                <a:cs typeface="Arial"/>
               </a:rPr>
               <a:t>Know the Teams channels</a:t>
             </a:r>
@@ -21265,10 +21377,10 @@
       </p:sp>
       <p:sp>
         <p:nvSpPr>
-          <p:cNvPr id="313" name="slide-heading-12">
-            <a:extLst xmlns:a="http://schemas.openxmlformats.org/drawingml/2006/main">
-              <a:ext uri="{FF2B5EF4-FFF2-40B4-BE49-F238E27FC236}">
-                <a16:creationId xmlns:a16="http://schemas.microsoft.com/office/drawing/2014/main" id="{E9F6E9FD-1A91-403A-9E34-4884CF214F5B}"/>
+          <p:cNvPr id="313" name="slide-heading-marker-12">
+            <a:extLst xmlns:a="http://schemas.openxmlformats.org/drawingml/2006/main">
+              <a:ext uri="{FF2B5EF4-FFF2-40B4-BE49-F238E27FC236}">
+                <a16:creationId xmlns:a16="http://schemas.microsoft.com/office/drawing/2014/main" id="{AFA73CC8-D9D6-4500-B08A-A8EA76A0D0B7}"/>
               </a:ext>
             </a:extLst>
           </p:cNvPr>
@@ -21279,8 +21391,8 @@
         </p:nvSpPr>
         <p:spPr>
           <a:xfrm xmlns:a="http://schemas.openxmlformats.org/drawingml/2006/main">
-            <a:off x="552450" y="219075"/>
-            <a:ext cx="6858000" cy="266700"/>
+            <a:off x="742950" y="447675"/>
+            <a:ext cx="476250" cy="323850"/>
           </a:xfrm>
           <a:prstGeom xmlns:a="http://schemas.openxmlformats.org/drawingml/2006/main" prst="rect">
             <a:avLst/>
@@ -21296,9 +21408,9 @@
           <a:lstStyle xmlns:a="http://schemas.openxmlformats.org/drawingml/2006/main"/>
           <a:p xmlns:a="http://schemas.openxmlformats.org/drawingml/2006/main">
             <a:pPr algn="l">
-              <a:defRPr sz="1350" b="1">
+              <a:defRPr sz="1950" b="1">
                 <a:solidFill>
-                  <a:srgbClr val="FFFFFF"/>
+                  <a:srgbClr val="FFDB5D"/>
                 </a:solidFill>
                 <a:latin typeface="Source Code Pro"/>
                 <a:ea typeface="Source Code Pro"/>
@@ -21306,13 +21418,69 @@
               </a:defRPr>
             </a:pPr>
             <a:r>
-              <a:rPr sz="1350" b="1">
+              <a:rPr sz="1950" b="1">
                 <a:solidFill>
-                  <a:srgbClr val="FFFFFF"/>
+                  <a:srgbClr val="FFDB5D"/>
                 </a:solidFill>
                 <a:latin typeface="Source Code Pro"/>
                 <a:ea typeface="Source Code Pro"/>
                 <a:cs typeface="Source Code Pro"/>
+              </a:rPr>
+              <a:t>&lt;/</a:t>
+            </a:r>
+          </a:p>
+        </p:txBody>
+      </p:sp>
+      <p:sp>
+        <p:nvSpPr>
+          <p:cNvPr id="314" name="slide-heading-text-12">
+            <a:extLst xmlns:a="http://schemas.openxmlformats.org/drawingml/2006/main">
+              <a:ext uri="{FF2B5EF4-FFF2-40B4-BE49-F238E27FC236}">
+                <a16:creationId xmlns:a16="http://schemas.microsoft.com/office/drawing/2014/main" id="{055DA8BF-BF41-474D-9CE9-69D773356B96}"/>
+              </a:ext>
+            </a:extLst>
+          </p:cNvPr>
+          <p:cNvSpPr>
+            <a:spLocks xmlns:a="http://schemas.openxmlformats.org/drawingml/2006/main" noGrp="1"/>
+          </p:cNvSpPr>
+          <p:nvPr/>
+        </p:nvSpPr>
+        <p:spPr>
+          <a:xfrm xmlns:a="http://schemas.openxmlformats.org/drawingml/2006/main">
+            <a:off x="1152525" y="428625"/>
+            <a:ext cx="5619750" cy="361950"/>
+          </a:xfrm>
+          <a:prstGeom xmlns:a="http://schemas.openxmlformats.org/drawingml/2006/main" prst="rect">
+            <a:avLst/>
+          </a:prstGeom>
+          <a:noFill xmlns:a="http://schemas.openxmlformats.org/drawingml/2006/main"/>
+          <a:ln xmlns:a="http://schemas.openxmlformats.org/drawingml/2006/main" w="0">
+            <a:noFill/>
+            <a:prstDash val="solid"/>
+          </a:ln>
+        </p:spPr>
+        <p:txBody>
+          <a:bodyPr xmlns:a="http://schemas.openxmlformats.org/drawingml/2006/main"/>
+          <a:lstStyle xmlns:a="http://schemas.openxmlformats.org/drawingml/2006/main"/>
+          <a:p xmlns:a="http://schemas.openxmlformats.org/drawingml/2006/main">
+            <a:pPr algn="l">
+              <a:defRPr sz="1800" b="0">
+                <a:solidFill>
+                  <a:srgbClr val="FFFFFF"/>
+                </a:solidFill>
+                <a:latin typeface="Arial"/>
+                <a:ea typeface="Arial"/>
+                <a:cs typeface="Arial"/>
+              </a:defRPr>
+            </a:pPr>
+            <a:r>
+              <a:rPr sz="1800" b="0">
+                <a:solidFill>
+                  <a:srgbClr val="FFFFFF"/>
+                </a:solidFill>
+                <a:latin typeface="Arial"/>
+                <a:ea typeface="Arial"/>
+                <a:cs typeface="Arial"/>
               </a:rPr>
               <a:t>Use hangout for extra help</a:t>
             </a:r>
@@ -21878,10 +22046,10 @@
       </p:sp>
       <p:sp>
         <p:nvSpPr>
-          <p:cNvPr id="313" name="slide-heading-13">
-            <a:extLst xmlns:a="http://schemas.openxmlformats.org/drawingml/2006/main">
-              <a:ext uri="{FF2B5EF4-FFF2-40B4-BE49-F238E27FC236}">
-                <a16:creationId xmlns:a16="http://schemas.microsoft.com/office/drawing/2014/main" id="{4ECF204A-636A-4922-8392-3A1E06A68D47}"/>
+          <p:cNvPr id="313" name="slide-heading-marker-13">
+            <a:extLst xmlns:a="http://schemas.openxmlformats.org/drawingml/2006/main">
+              <a:ext uri="{FF2B5EF4-FFF2-40B4-BE49-F238E27FC236}">
+                <a16:creationId xmlns:a16="http://schemas.microsoft.com/office/drawing/2014/main" id="{CE43F6CE-4D82-4FBD-9536-475175BA4BAB}"/>
               </a:ext>
             </a:extLst>
           </p:cNvPr>
@@ -21892,8 +22060,8 @@
         </p:nvSpPr>
         <p:spPr>
           <a:xfrm xmlns:a="http://schemas.openxmlformats.org/drawingml/2006/main">
-            <a:off x="552450" y="219075"/>
-            <a:ext cx="6858000" cy="266700"/>
+            <a:off x="742950" y="447675"/>
+            <a:ext cx="476250" cy="323850"/>
           </a:xfrm>
           <a:prstGeom xmlns:a="http://schemas.openxmlformats.org/drawingml/2006/main" prst="rect">
             <a:avLst/>
@@ -21909,9 +22077,9 @@
           <a:lstStyle xmlns:a="http://schemas.openxmlformats.org/drawingml/2006/main"/>
           <a:p xmlns:a="http://schemas.openxmlformats.org/drawingml/2006/main">
             <a:pPr algn="l">
-              <a:defRPr sz="1350" b="1">
+              <a:defRPr sz="1950" b="1">
                 <a:solidFill>
-                  <a:srgbClr val="FFFFFF"/>
+                  <a:srgbClr val="FFDB5D"/>
                 </a:solidFill>
                 <a:latin typeface="Source Code Pro"/>
                 <a:ea typeface="Source Code Pro"/>
@@ -21919,13 +22087,69 @@
               </a:defRPr>
             </a:pPr>
             <a:r>
-              <a:rPr sz="1350" b="1">
+              <a:rPr sz="1950" b="1">
                 <a:solidFill>
-                  <a:srgbClr val="FFFFFF"/>
+                  <a:srgbClr val="FFDB5D"/>
                 </a:solidFill>
                 <a:latin typeface="Source Code Pro"/>
                 <a:ea typeface="Source Code Pro"/>
                 <a:cs typeface="Source Code Pro"/>
+              </a:rPr>
+              <a:t>&lt;/</a:t>
+            </a:r>
+          </a:p>
+        </p:txBody>
+      </p:sp>
+      <p:sp>
+        <p:nvSpPr>
+          <p:cNvPr id="314" name="slide-heading-text-13">
+            <a:extLst xmlns:a="http://schemas.openxmlformats.org/drawingml/2006/main">
+              <a:ext uri="{FF2B5EF4-FFF2-40B4-BE49-F238E27FC236}">
+                <a16:creationId xmlns:a16="http://schemas.microsoft.com/office/drawing/2014/main" id="{83BF32FD-0FAF-4485-80FA-BBFCBD628ABA}"/>
+              </a:ext>
+            </a:extLst>
+          </p:cNvPr>
+          <p:cNvSpPr>
+            <a:spLocks xmlns:a="http://schemas.openxmlformats.org/drawingml/2006/main" noGrp="1"/>
+          </p:cNvSpPr>
+          <p:nvPr/>
+        </p:nvSpPr>
+        <p:spPr>
+          <a:xfrm xmlns:a="http://schemas.openxmlformats.org/drawingml/2006/main">
+            <a:off x="1152525" y="428625"/>
+            <a:ext cx="5619750" cy="361950"/>
+          </a:xfrm>
+          <a:prstGeom xmlns:a="http://schemas.openxmlformats.org/drawingml/2006/main" prst="rect">
+            <a:avLst/>
+          </a:prstGeom>
+          <a:noFill xmlns:a="http://schemas.openxmlformats.org/drawingml/2006/main"/>
+          <a:ln xmlns:a="http://schemas.openxmlformats.org/drawingml/2006/main" w="0">
+            <a:noFill/>
+            <a:prstDash val="solid"/>
+          </a:ln>
+        </p:spPr>
+        <p:txBody>
+          <a:bodyPr xmlns:a="http://schemas.openxmlformats.org/drawingml/2006/main"/>
+          <a:lstStyle xmlns:a="http://schemas.openxmlformats.org/drawingml/2006/main"/>
+          <a:p xmlns:a="http://schemas.openxmlformats.org/drawingml/2006/main">
+            <a:pPr algn="l">
+              <a:defRPr sz="1800" b="0">
+                <a:solidFill>
+                  <a:srgbClr val="FFFFFF"/>
+                </a:solidFill>
+                <a:latin typeface="Arial"/>
+                <a:ea typeface="Arial"/>
+                <a:cs typeface="Arial"/>
+              </a:defRPr>
+            </a:pPr>
+            <a:r>
+              <a:rPr sz="1800" b="0">
+                <a:solidFill>
+                  <a:srgbClr val="FFFFFF"/>
+                </a:solidFill>
+                <a:latin typeface="Arial"/>
+                <a:ea typeface="Arial"/>
+                <a:cs typeface="Arial"/>
               </a:rPr>
               <a:t>Class habits that help everyone</a:t>
             </a:r>
@@ -24685,10 +24909,10 @@
       </p:sp>
       <p:sp>
         <p:nvSpPr>
-          <p:cNvPr id="313" name="slide-heading-17">
-            <a:extLst xmlns:a="http://schemas.openxmlformats.org/drawingml/2006/main">
-              <a:ext uri="{FF2B5EF4-FFF2-40B4-BE49-F238E27FC236}">
-                <a16:creationId xmlns:a16="http://schemas.microsoft.com/office/drawing/2014/main" id="{87C46D78-4836-4F18-AD1F-869A79E49118}"/>
+          <p:cNvPr id="313" name="slide-heading-marker-17">
+            <a:extLst xmlns:a="http://schemas.openxmlformats.org/drawingml/2006/main">
+              <a:ext uri="{FF2B5EF4-FFF2-40B4-BE49-F238E27FC236}">
+                <a16:creationId xmlns:a16="http://schemas.microsoft.com/office/drawing/2014/main" id="{559BC036-4BD0-412B-AB5C-572DD9375E95}"/>
               </a:ext>
             </a:extLst>
           </p:cNvPr>
@@ -24699,8 +24923,8 @@
         </p:nvSpPr>
         <p:spPr>
           <a:xfrm xmlns:a="http://schemas.openxmlformats.org/drawingml/2006/main">
-            <a:off x="552450" y="219075"/>
-            <a:ext cx="6858000" cy="266700"/>
+            <a:off x="742950" y="447675"/>
+            <a:ext cx="476250" cy="323850"/>
           </a:xfrm>
           <a:prstGeom xmlns:a="http://schemas.openxmlformats.org/drawingml/2006/main" prst="rect">
             <a:avLst/>
@@ -24716,9 +24940,9 @@
           <a:lstStyle xmlns:a="http://schemas.openxmlformats.org/drawingml/2006/main"/>
           <a:p xmlns:a="http://schemas.openxmlformats.org/drawingml/2006/main">
             <a:pPr algn="l">
-              <a:defRPr sz="1350" b="1">
+              <a:defRPr sz="1950" b="1">
                 <a:solidFill>
-                  <a:srgbClr val="FFFFFF"/>
+                  <a:srgbClr val="FFDB5D"/>
                 </a:solidFill>
                 <a:latin typeface="Source Code Pro"/>
                 <a:ea typeface="Source Code Pro"/>
@@ -24726,13 +24950,69 @@
               </a:defRPr>
             </a:pPr>
             <a:r>
-              <a:rPr sz="1350" b="1">
+              <a:rPr sz="1950" b="1">
                 <a:solidFill>
-                  <a:srgbClr val="FFFFFF"/>
+                  <a:srgbClr val="FFDB5D"/>
                 </a:solidFill>
                 <a:latin typeface="Source Code Pro"/>
                 <a:ea typeface="Source Code Pro"/>
                 <a:cs typeface="Source Code Pro"/>
+              </a:rPr>
+              <a:t>&lt;/</a:t>
+            </a:r>
+          </a:p>
+        </p:txBody>
+      </p:sp>
+      <p:sp>
+        <p:nvSpPr>
+          <p:cNvPr id="314" name="slide-heading-text-17">
+            <a:extLst xmlns:a="http://schemas.openxmlformats.org/drawingml/2006/main">
+              <a:ext uri="{FF2B5EF4-FFF2-40B4-BE49-F238E27FC236}">
+                <a16:creationId xmlns:a16="http://schemas.microsoft.com/office/drawing/2014/main" id="{7252F779-6AC0-41E4-A633-40E59A7D6DCB}"/>
+              </a:ext>
+            </a:extLst>
+          </p:cNvPr>
+          <p:cNvSpPr>
+            <a:spLocks xmlns:a="http://schemas.openxmlformats.org/drawingml/2006/main" noGrp="1"/>
+          </p:cNvSpPr>
+          <p:nvPr/>
+        </p:nvSpPr>
+        <p:spPr>
+          <a:xfrm xmlns:a="http://schemas.openxmlformats.org/drawingml/2006/main">
+            <a:off x="1152525" y="428625"/>
+            <a:ext cx="5619750" cy="361950"/>
+          </a:xfrm>
+          <a:prstGeom xmlns:a="http://schemas.openxmlformats.org/drawingml/2006/main" prst="rect">
+            <a:avLst/>
+          </a:prstGeom>
+          <a:noFill xmlns:a="http://schemas.openxmlformats.org/drawingml/2006/main"/>
+          <a:ln xmlns:a="http://schemas.openxmlformats.org/drawingml/2006/main" w="0">
+            <a:noFill/>
+            <a:prstDash val="solid"/>
+          </a:ln>
+        </p:spPr>
+        <p:txBody>
+          <a:bodyPr xmlns:a="http://schemas.openxmlformats.org/drawingml/2006/main"/>
+          <a:lstStyle xmlns:a="http://schemas.openxmlformats.org/drawingml/2006/main"/>
+          <a:p xmlns:a="http://schemas.openxmlformats.org/drawingml/2006/main">
+            <a:pPr algn="l">
+              <a:defRPr sz="1800" b="0">
+                <a:solidFill>
+                  <a:srgbClr val="FFFFFF"/>
+                </a:solidFill>
+                <a:latin typeface="Arial"/>
+                <a:ea typeface="Arial"/>
+                <a:cs typeface="Arial"/>
+              </a:defRPr>
+            </a:pPr>
+            <a:r>
+              <a:rPr sz="1800" b="0">
+                <a:solidFill>
+                  <a:srgbClr val="FFFFFF"/>
+                </a:solidFill>
+                <a:latin typeface="Arial"/>
+                <a:ea typeface="Arial"/>
+                <a:cs typeface="Arial"/>
               </a:rPr>
               <a:t>Breakout room jobs</a:t>
             </a:r>
@@ -25284,10 +25564,10 @@
       </p:sp>
       <p:sp>
         <p:nvSpPr>
-          <p:cNvPr id="313" name="slide-heading-18">
-            <a:extLst xmlns:a="http://schemas.openxmlformats.org/drawingml/2006/main">
-              <a:ext uri="{FF2B5EF4-FFF2-40B4-BE49-F238E27FC236}">
-                <a16:creationId xmlns:a16="http://schemas.microsoft.com/office/drawing/2014/main" id="{D99756FA-5D29-4B40-AB32-0BA3B9CC34F3}"/>
+          <p:cNvPr id="313" name="slide-heading-marker-18">
+            <a:extLst xmlns:a="http://schemas.openxmlformats.org/drawingml/2006/main">
+              <a:ext uri="{FF2B5EF4-FFF2-40B4-BE49-F238E27FC236}">
+                <a16:creationId xmlns:a16="http://schemas.microsoft.com/office/drawing/2014/main" id="{A39BB46D-1AA7-4211-9D40-E9FFDCFA524F}"/>
               </a:ext>
             </a:extLst>
           </p:cNvPr>
@@ -25298,8 +25578,8 @@
         </p:nvSpPr>
         <p:spPr>
           <a:xfrm xmlns:a="http://schemas.openxmlformats.org/drawingml/2006/main">
-            <a:off x="552450" y="219075"/>
-            <a:ext cx="6858000" cy="266700"/>
+            <a:off x="742950" y="447675"/>
+            <a:ext cx="476250" cy="323850"/>
           </a:xfrm>
           <a:prstGeom xmlns:a="http://schemas.openxmlformats.org/drawingml/2006/main" prst="rect">
             <a:avLst/>
@@ -25315,9 +25595,9 @@
           <a:lstStyle xmlns:a="http://schemas.openxmlformats.org/drawingml/2006/main"/>
           <a:p xmlns:a="http://schemas.openxmlformats.org/drawingml/2006/main">
             <a:pPr algn="l">
-              <a:defRPr sz="1350" b="1">
+              <a:defRPr sz="1950" b="1">
                 <a:solidFill>
-                  <a:srgbClr val="FFFFFF"/>
+                  <a:srgbClr val="FFDB5D"/>
                 </a:solidFill>
                 <a:latin typeface="Source Code Pro"/>
                 <a:ea typeface="Source Code Pro"/>
@@ -25325,13 +25605,69 @@
               </a:defRPr>
             </a:pPr>
             <a:r>
-              <a:rPr sz="1350" b="1">
+              <a:rPr sz="1950" b="1">
                 <a:solidFill>
-                  <a:srgbClr val="FFFFFF"/>
+                  <a:srgbClr val="FFDB5D"/>
                 </a:solidFill>
                 <a:latin typeface="Source Code Pro"/>
                 <a:ea typeface="Source Code Pro"/>
                 <a:cs typeface="Source Code Pro"/>
+              </a:rPr>
+              <a:t>&lt;/</a:t>
+            </a:r>
+          </a:p>
+        </p:txBody>
+      </p:sp>
+      <p:sp>
+        <p:nvSpPr>
+          <p:cNvPr id="314" name="slide-heading-text-18">
+            <a:extLst xmlns:a="http://schemas.openxmlformats.org/drawingml/2006/main">
+              <a:ext uri="{FF2B5EF4-FFF2-40B4-BE49-F238E27FC236}">
+                <a16:creationId xmlns:a16="http://schemas.microsoft.com/office/drawing/2014/main" id="{FC3829C1-E401-4194-8D1B-38B699279D94}"/>
+              </a:ext>
+            </a:extLst>
+          </p:cNvPr>
+          <p:cNvSpPr>
+            <a:spLocks xmlns:a="http://schemas.openxmlformats.org/drawingml/2006/main" noGrp="1"/>
+          </p:cNvSpPr>
+          <p:nvPr/>
+        </p:nvSpPr>
+        <p:spPr>
+          <a:xfrm xmlns:a="http://schemas.openxmlformats.org/drawingml/2006/main">
+            <a:off x="1152525" y="428625"/>
+            <a:ext cx="5619750" cy="361950"/>
+          </a:xfrm>
+          <a:prstGeom xmlns:a="http://schemas.openxmlformats.org/drawingml/2006/main" prst="rect">
+            <a:avLst/>
+          </a:prstGeom>
+          <a:noFill xmlns:a="http://schemas.openxmlformats.org/drawingml/2006/main"/>
+          <a:ln xmlns:a="http://schemas.openxmlformats.org/drawingml/2006/main" w="0">
+            <a:noFill/>
+            <a:prstDash val="solid"/>
+          </a:ln>
+        </p:spPr>
+        <p:txBody>
+          <a:bodyPr xmlns:a="http://schemas.openxmlformats.org/drawingml/2006/main"/>
+          <a:lstStyle xmlns:a="http://schemas.openxmlformats.org/drawingml/2006/main"/>
+          <a:p xmlns:a="http://schemas.openxmlformats.org/drawingml/2006/main">
+            <a:pPr algn="l">
+              <a:defRPr sz="1800" b="0">
+                <a:solidFill>
+                  <a:srgbClr val="FFFFFF"/>
+                </a:solidFill>
+                <a:latin typeface="Arial"/>
+                <a:ea typeface="Arial"/>
+                <a:cs typeface="Arial"/>
+              </a:defRPr>
+            </a:pPr>
+            <a:r>
+              <a:rPr sz="1800" b="0">
+                <a:solidFill>
+                  <a:srgbClr val="FFFFFF"/>
+                </a:solidFill>
+                <a:latin typeface="Arial"/>
+                <a:ea typeface="Arial"/>
+                <a:cs typeface="Arial"/>
               </a:rPr>
               <a:t>How to work as a code crew</a:t>
             </a:r>
@@ -25883,10 +26219,10 @@
       </p:sp>
       <p:sp>
         <p:nvSpPr>
-          <p:cNvPr id="313" name="slide-heading-19">
-            <a:extLst xmlns:a="http://schemas.openxmlformats.org/drawingml/2006/main">
-              <a:ext uri="{FF2B5EF4-FFF2-40B4-BE49-F238E27FC236}">
-                <a16:creationId xmlns:a16="http://schemas.microsoft.com/office/drawing/2014/main" id="{B4DFFC3B-38DB-4F89-B81C-9AD2BCCEEDE4}"/>
+          <p:cNvPr id="313" name="slide-heading-marker-19">
+            <a:extLst xmlns:a="http://schemas.openxmlformats.org/drawingml/2006/main">
+              <a:ext uri="{FF2B5EF4-FFF2-40B4-BE49-F238E27FC236}">
+                <a16:creationId xmlns:a16="http://schemas.microsoft.com/office/drawing/2014/main" id="{F56B54AD-AC38-4C09-9E91-D1E5CB005254}"/>
               </a:ext>
             </a:extLst>
           </p:cNvPr>
@@ -25897,8 +26233,8 @@
         </p:nvSpPr>
         <p:spPr>
           <a:xfrm xmlns:a="http://schemas.openxmlformats.org/drawingml/2006/main">
-            <a:off x="552450" y="219075"/>
-            <a:ext cx="6858000" cy="266700"/>
+            <a:off x="742950" y="447675"/>
+            <a:ext cx="476250" cy="323850"/>
           </a:xfrm>
           <a:prstGeom xmlns:a="http://schemas.openxmlformats.org/drawingml/2006/main" prst="rect">
             <a:avLst/>
@@ -25914,9 +26250,9 @@
           <a:lstStyle xmlns:a="http://schemas.openxmlformats.org/drawingml/2006/main"/>
           <a:p xmlns:a="http://schemas.openxmlformats.org/drawingml/2006/main">
             <a:pPr algn="l">
-              <a:defRPr sz="1350" b="1">
+              <a:defRPr sz="1950" b="1">
                 <a:solidFill>
-                  <a:srgbClr val="FFFFFF"/>
+                  <a:srgbClr val="FFDB5D"/>
                 </a:solidFill>
                 <a:latin typeface="Source Code Pro"/>
                 <a:ea typeface="Source Code Pro"/>
@@ -25924,13 +26260,69 @@
               </a:defRPr>
             </a:pPr>
             <a:r>
-              <a:rPr sz="1350" b="1">
+              <a:rPr sz="1950" b="1">
                 <a:solidFill>
-                  <a:srgbClr val="FFFFFF"/>
+                  <a:srgbClr val="FFDB5D"/>
                 </a:solidFill>
                 <a:latin typeface="Source Code Pro"/>
                 <a:ea typeface="Source Code Pro"/>
                 <a:cs typeface="Source Code Pro"/>
+              </a:rPr>
+              <a:t>&lt;/</a:t>
+            </a:r>
+          </a:p>
+        </p:txBody>
+      </p:sp>
+      <p:sp>
+        <p:nvSpPr>
+          <p:cNvPr id="314" name="slide-heading-text-19">
+            <a:extLst xmlns:a="http://schemas.openxmlformats.org/drawingml/2006/main">
+              <a:ext uri="{FF2B5EF4-FFF2-40B4-BE49-F238E27FC236}">
+                <a16:creationId xmlns:a16="http://schemas.microsoft.com/office/drawing/2014/main" id="{BEE061BA-D36C-48C1-9B9A-1C904F65885B}"/>
+              </a:ext>
+            </a:extLst>
+          </p:cNvPr>
+          <p:cNvSpPr>
+            <a:spLocks xmlns:a="http://schemas.openxmlformats.org/drawingml/2006/main" noGrp="1"/>
+          </p:cNvSpPr>
+          <p:nvPr/>
+        </p:nvSpPr>
+        <p:spPr>
+          <a:xfrm xmlns:a="http://schemas.openxmlformats.org/drawingml/2006/main">
+            <a:off x="1152525" y="428625"/>
+            <a:ext cx="5619750" cy="361950"/>
+          </a:xfrm>
+          <a:prstGeom xmlns:a="http://schemas.openxmlformats.org/drawingml/2006/main" prst="rect">
+            <a:avLst/>
+          </a:prstGeom>
+          <a:noFill xmlns:a="http://schemas.openxmlformats.org/drawingml/2006/main"/>
+          <a:ln xmlns:a="http://schemas.openxmlformats.org/drawingml/2006/main" w="0">
+            <a:noFill/>
+            <a:prstDash val="solid"/>
+          </a:ln>
+        </p:spPr>
+        <p:txBody>
+          <a:bodyPr xmlns:a="http://schemas.openxmlformats.org/drawingml/2006/main"/>
+          <a:lstStyle xmlns:a="http://schemas.openxmlformats.org/drawingml/2006/main"/>
+          <a:p xmlns:a="http://schemas.openxmlformats.org/drawingml/2006/main">
+            <a:pPr algn="l">
+              <a:defRPr sz="1800" b="0">
+                <a:solidFill>
+                  <a:srgbClr val="FFFFFF"/>
+                </a:solidFill>
+                <a:latin typeface="Arial"/>
+                <a:ea typeface="Arial"/>
+                <a:cs typeface="Arial"/>
+              </a:defRPr>
+            </a:pPr>
+            <a:r>
+              <a:rPr sz="1800" b="0">
+                <a:solidFill>
+                  <a:srgbClr val="FFFFFF"/>
+                </a:solidFill>
+                <a:latin typeface="Arial"/>
+                <a:ea typeface="Arial"/>
+                <a:cs typeface="Arial"/>
               </a:rPr>
               <a:t>Code.org Music Lab</a:t>
             </a:r>
@@ -26378,7 +26770,7 @@
           <p:nvPr/>
         </p:nvPicPr>
         <p:blipFill>
-          <a:blip xmlns:r="http://schemas.openxmlformats.org/officeDocument/2006/relationships" xmlns:a="http://schemas.openxmlformats.org/drawingml/2006/main" r:embed="R96d59a3c51fb40f4">
+          <a:blip xmlns:r="http://schemas.openxmlformats.org/officeDocument/2006/relationships" xmlns:a="http://schemas.openxmlformats.org/drawingml/2006/main" r:embed="R01a281b9a14a4469">
             <a:alphaModFix/>
           </a:blip>
           <a:stretch xmlns:a="http://schemas.openxmlformats.org/drawingml/2006/main">
@@ -26943,10 +27335,10 @@
       </p:sp>
       <p:sp>
         <p:nvSpPr>
-          <p:cNvPr id="313" name="slide-heading-20">
-            <a:extLst xmlns:a="http://schemas.openxmlformats.org/drawingml/2006/main">
-              <a:ext uri="{FF2B5EF4-FFF2-40B4-BE49-F238E27FC236}">
-                <a16:creationId xmlns:a16="http://schemas.microsoft.com/office/drawing/2014/main" id="{C5439BF0-29BD-4E5A-9CA0-F03254D0EA24}"/>
+          <p:cNvPr id="313" name="slide-heading-marker-20">
+            <a:extLst xmlns:a="http://schemas.openxmlformats.org/drawingml/2006/main">
+              <a:ext uri="{FF2B5EF4-FFF2-40B4-BE49-F238E27FC236}">
+                <a16:creationId xmlns:a16="http://schemas.microsoft.com/office/drawing/2014/main" id="{45868136-9554-4792-BEFF-67B1A93DE446}"/>
               </a:ext>
             </a:extLst>
           </p:cNvPr>
@@ -26957,8 +27349,8 @@
         </p:nvSpPr>
         <p:spPr>
           <a:xfrm xmlns:a="http://schemas.openxmlformats.org/drawingml/2006/main">
-            <a:off x="552450" y="219075"/>
-            <a:ext cx="6858000" cy="266700"/>
+            <a:off x="742950" y="447675"/>
+            <a:ext cx="476250" cy="323850"/>
           </a:xfrm>
           <a:prstGeom xmlns:a="http://schemas.openxmlformats.org/drawingml/2006/main" prst="rect">
             <a:avLst/>
@@ -26974,9 +27366,9 @@
           <a:lstStyle xmlns:a="http://schemas.openxmlformats.org/drawingml/2006/main"/>
           <a:p xmlns:a="http://schemas.openxmlformats.org/drawingml/2006/main">
             <a:pPr algn="l">
-              <a:defRPr sz="1350" b="1">
+              <a:defRPr sz="1950" b="1">
                 <a:solidFill>
-                  <a:srgbClr val="FFFFFF"/>
+                  <a:srgbClr val="FFDB5D"/>
                 </a:solidFill>
                 <a:latin typeface="Source Code Pro"/>
                 <a:ea typeface="Source Code Pro"/>
@@ -26984,13 +27376,69 @@
               </a:defRPr>
             </a:pPr>
             <a:r>
-              <a:rPr sz="1350" b="1">
+              <a:rPr sz="1950" b="1">
                 <a:solidFill>
-                  <a:srgbClr val="FFFFFF"/>
+                  <a:srgbClr val="FFDB5D"/>
                 </a:solidFill>
                 <a:latin typeface="Source Code Pro"/>
                 <a:ea typeface="Source Code Pro"/>
                 <a:cs typeface="Source Code Pro"/>
+              </a:rPr>
+              <a:t>&lt;/</a:t>
+            </a:r>
+          </a:p>
+        </p:txBody>
+      </p:sp>
+      <p:sp>
+        <p:nvSpPr>
+          <p:cNvPr id="314" name="slide-heading-text-20">
+            <a:extLst xmlns:a="http://schemas.openxmlformats.org/drawingml/2006/main">
+              <a:ext uri="{FF2B5EF4-FFF2-40B4-BE49-F238E27FC236}">
+                <a16:creationId xmlns:a16="http://schemas.microsoft.com/office/drawing/2014/main" id="{E354BC7C-CD89-4A48-A4B0-863C4553A9BC}"/>
+              </a:ext>
+            </a:extLst>
+          </p:cNvPr>
+          <p:cNvSpPr>
+            <a:spLocks xmlns:a="http://schemas.openxmlformats.org/drawingml/2006/main" noGrp="1"/>
+          </p:cNvSpPr>
+          <p:nvPr/>
+        </p:nvSpPr>
+        <p:spPr>
+          <a:xfrm xmlns:a="http://schemas.openxmlformats.org/drawingml/2006/main">
+            <a:off x="1152525" y="428625"/>
+            <a:ext cx="5619750" cy="361950"/>
+          </a:xfrm>
+          <a:prstGeom xmlns:a="http://schemas.openxmlformats.org/drawingml/2006/main" prst="rect">
+            <a:avLst/>
+          </a:prstGeom>
+          <a:noFill xmlns:a="http://schemas.openxmlformats.org/drawingml/2006/main"/>
+          <a:ln xmlns:a="http://schemas.openxmlformats.org/drawingml/2006/main" w="0">
+            <a:noFill/>
+            <a:prstDash val="solid"/>
+          </a:ln>
+        </p:spPr>
+        <p:txBody>
+          <a:bodyPr xmlns:a="http://schemas.openxmlformats.org/drawingml/2006/main"/>
+          <a:lstStyle xmlns:a="http://schemas.openxmlformats.org/drawingml/2006/main"/>
+          <a:p xmlns:a="http://schemas.openxmlformats.org/drawingml/2006/main">
+            <a:pPr algn="l">
+              <a:defRPr sz="1800" b="0">
+                <a:solidFill>
+                  <a:srgbClr val="FFFFFF"/>
+                </a:solidFill>
+                <a:latin typeface="Arial"/>
+                <a:ea typeface="Arial"/>
+                <a:cs typeface="Arial"/>
+              </a:defRPr>
+            </a:pPr>
+            <a:r>
+              <a:rPr sz="1800" b="0">
+                <a:solidFill>
+                  <a:srgbClr val="FFFFFF"/>
+                </a:solidFill>
+                <a:latin typeface="Arial"/>
+                <a:ea typeface="Arial"/>
+                <a:cs typeface="Arial"/>
               </a:rPr>
               <a:t>Programming words we will use</a:t>
             </a:r>
@@ -27542,10 +27990,10 @@
       </p:sp>
       <p:sp>
         <p:nvSpPr>
-          <p:cNvPr id="313" name="slide-heading-21">
-            <a:extLst xmlns:a="http://schemas.openxmlformats.org/drawingml/2006/main">
-              <a:ext uri="{FF2B5EF4-FFF2-40B4-BE49-F238E27FC236}">
-                <a16:creationId xmlns:a16="http://schemas.microsoft.com/office/drawing/2014/main" id="{C7C205A3-D42F-435E-AA4F-28E016136596}"/>
+          <p:cNvPr id="313" name="slide-heading-marker-21">
+            <a:extLst xmlns:a="http://schemas.openxmlformats.org/drawingml/2006/main">
+              <a:ext uri="{FF2B5EF4-FFF2-40B4-BE49-F238E27FC236}">
+                <a16:creationId xmlns:a16="http://schemas.microsoft.com/office/drawing/2014/main" id="{538DD39C-610E-410F-AFD9-AB9C2149CD18}"/>
               </a:ext>
             </a:extLst>
           </p:cNvPr>
@@ -27556,8 +28004,8 @@
         </p:nvSpPr>
         <p:spPr>
           <a:xfrm xmlns:a="http://schemas.openxmlformats.org/drawingml/2006/main">
-            <a:off x="552450" y="219075"/>
-            <a:ext cx="6858000" cy="266700"/>
+            <a:off x="742950" y="447675"/>
+            <a:ext cx="476250" cy="323850"/>
           </a:xfrm>
           <a:prstGeom xmlns:a="http://schemas.openxmlformats.org/drawingml/2006/main" prst="rect">
             <a:avLst/>
@@ -27573,9 +28021,9 @@
           <a:lstStyle xmlns:a="http://schemas.openxmlformats.org/drawingml/2006/main"/>
           <a:p xmlns:a="http://schemas.openxmlformats.org/drawingml/2006/main">
             <a:pPr algn="l">
-              <a:defRPr sz="1350" b="1">
+              <a:defRPr sz="1950" b="1">
                 <a:solidFill>
-                  <a:srgbClr val="FFFFFF"/>
+                  <a:srgbClr val="FFDB5D"/>
                 </a:solidFill>
                 <a:latin typeface="Source Code Pro"/>
                 <a:ea typeface="Source Code Pro"/>
@@ -27583,13 +28031,69 @@
               </a:defRPr>
             </a:pPr>
             <a:r>
-              <a:rPr sz="1350" b="1">
+              <a:rPr sz="1950" b="1">
                 <a:solidFill>
-                  <a:srgbClr val="FFFFFF"/>
+                  <a:srgbClr val="FFDB5D"/>
                 </a:solidFill>
                 <a:latin typeface="Source Code Pro"/>
                 <a:ea typeface="Source Code Pro"/>
                 <a:cs typeface="Source Code Pro"/>
+              </a:rPr>
+              <a:t>&lt;/</a:t>
+            </a:r>
+          </a:p>
+        </p:txBody>
+      </p:sp>
+      <p:sp>
+        <p:nvSpPr>
+          <p:cNvPr id="314" name="slide-heading-text-21">
+            <a:extLst xmlns:a="http://schemas.openxmlformats.org/drawingml/2006/main">
+              <a:ext uri="{FF2B5EF4-FFF2-40B4-BE49-F238E27FC236}">
+                <a16:creationId xmlns:a16="http://schemas.microsoft.com/office/drawing/2014/main" id="{F41FAAE0-8387-417B-9A51-260235602C2B}"/>
+              </a:ext>
+            </a:extLst>
+          </p:cNvPr>
+          <p:cNvSpPr>
+            <a:spLocks xmlns:a="http://schemas.openxmlformats.org/drawingml/2006/main" noGrp="1"/>
+          </p:cNvSpPr>
+          <p:nvPr/>
+        </p:nvSpPr>
+        <p:spPr>
+          <a:xfrm xmlns:a="http://schemas.openxmlformats.org/drawingml/2006/main">
+            <a:off x="1152525" y="428625"/>
+            <a:ext cx="5619750" cy="361950"/>
+          </a:xfrm>
+          <a:prstGeom xmlns:a="http://schemas.openxmlformats.org/drawingml/2006/main" prst="rect">
+            <a:avLst/>
+          </a:prstGeom>
+          <a:noFill xmlns:a="http://schemas.openxmlformats.org/drawingml/2006/main"/>
+          <a:ln xmlns:a="http://schemas.openxmlformats.org/drawingml/2006/main" w="0">
+            <a:noFill/>
+            <a:prstDash val="solid"/>
+          </a:ln>
+        </p:spPr>
+        <p:txBody>
+          <a:bodyPr xmlns:a="http://schemas.openxmlformats.org/drawingml/2006/main"/>
+          <a:lstStyle xmlns:a="http://schemas.openxmlformats.org/drawingml/2006/main"/>
+          <a:p xmlns:a="http://schemas.openxmlformats.org/drawingml/2006/main">
+            <a:pPr algn="l">
+              <a:defRPr sz="1800" b="0">
+                <a:solidFill>
+                  <a:srgbClr val="FFFFFF"/>
+                </a:solidFill>
+                <a:latin typeface="Arial"/>
+                <a:ea typeface="Arial"/>
+                <a:cs typeface="Arial"/>
+              </a:defRPr>
+            </a:pPr>
+            <a:r>
+              <a:rPr sz="1800" b="0">
+                <a:solidFill>
+                  <a:srgbClr val="FFFFFF"/>
+                </a:solidFill>
+                <a:latin typeface="Arial"/>
+                <a:ea typeface="Arial"/>
+                <a:cs typeface="Arial"/>
               </a:rPr>
               <a:t>AI can help, but you decide</a:t>
             </a:r>
@@ -28141,10 +28645,10 @@
       </p:sp>
       <p:sp>
         <p:nvSpPr>
-          <p:cNvPr id="313" name="slide-heading-22">
-            <a:extLst xmlns:a="http://schemas.openxmlformats.org/drawingml/2006/main">
-              <a:ext uri="{FF2B5EF4-FFF2-40B4-BE49-F238E27FC236}">
-                <a16:creationId xmlns:a16="http://schemas.microsoft.com/office/drawing/2014/main" id="{7ACF9CCC-EB63-42EC-8B0B-7C8D856395B8}"/>
+          <p:cNvPr id="313" name="slide-heading-marker-22">
+            <a:extLst xmlns:a="http://schemas.openxmlformats.org/drawingml/2006/main">
+              <a:ext uri="{FF2B5EF4-FFF2-40B4-BE49-F238E27FC236}">
+                <a16:creationId xmlns:a16="http://schemas.microsoft.com/office/drawing/2014/main" id="{F6C2D193-E68A-4077-9735-13C38DF15C7D}"/>
               </a:ext>
             </a:extLst>
           </p:cNvPr>
@@ -28155,8 +28659,8 @@
         </p:nvSpPr>
         <p:spPr>
           <a:xfrm xmlns:a="http://schemas.openxmlformats.org/drawingml/2006/main">
-            <a:off x="552450" y="219075"/>
-            <a:ext cx="6858000" cy="266700"/>
+            <a:off x="742950" y="447675"/>
+            <a:ext cx="476250" cy="323850"/>
           </a:xfrm>
           <a:prstGeom xmlns:a="http://schemas.openxmlformats.org/drawingml/2006/main" prst="rect">
             <a:avLst/>
@@ -28172,9 +28676,9 @@
           <a:lstStyle xmlns:a="http://schemas.openxmlformats.org/drawingml/2006/main"/>
           <a:p xmlns:a="http://schemas.openxmlformats.org/drawingml/2006/main">
             <a:pPr algn="l">
-              <a:defRPr sz="1350" b="1">
+              <a:defRPr sz="1950" b="1">
                 <a:solidFill>
-                  <a:srgbClr val="FFFFFF"/>
+                  <a:srgbClr val="FFDB5D"/>
                 </a:solidFill>
                 <a:latin typeface="Source Code Pro"/>
                 <a:ea typeface="Source Code Pro"/>
@@ -28182,13 +28686,69 @@
               </a:defRPr>
             </a:pPr>
             <a:r>
-              <a:rPr sz="1350" b="1">
+              <a:rPr sz="1950" b="1">
                 <a:solidFill>
-                  <a:srgbClr val="FFFFFF"/>
+                  <a:srgbClr val="FFDB5D"/>
                 </a:solidFill>
                 <a:latin typeface="Source Code Pro"/>
                 <a:ea typeface="Source Code Pro"/>
                 <a:cs typeface="Source Code Pro"/>
+              </a:rPr>
+              <a:t>&lt;/</a:t>
+            </a:r>
+          </a:p>
+        </p:txBody>
+      </p:sp>
+      <p:sp>
+        <p:nvSpPr>
+          <p:cNvPr id="314" name="slide-heading-text-22">
+            <a:extLst xmlns:a="http://schemas.openxmlformats.org/drawingml/2006/main">
+              <a:ext uri="{FF2B5EF4-FFF2-40B4-BE49-F238E27FC236}">
+                <a16:creationId xmlns:a16="http://schemas.microsoft.com/office/drawing/2014/main" id="{5B04327E-6B3F-46C1-9339-73C7435C5DF0}"/>
+              </a:ext>
+            </a:extLst>
+          </p:cNvPr>
+          <p:cNvSpPr>
+            <a:spLocks xmlns:a="http://schemas.openxmlformats.org/drawingml/2006/main" noGrp="1"/>
+          </p:cNvSpPr>
+          <p:nvPr/>
+        </p:nvSpPr>
+        <p:spPr>
+          <a:xfrm xmlns:a="http://schemas.openxmlformats.org/drawingml/2006/main">
+            <a:off x="1152525" y="428625"/>
+            <a:ext cx="5619750" cy="361950"/>
+          </a:xfrm>
+          <a:prstGeom xmlns:a="http://schemas.openxmlformats.org/drawingml/2006/main" prst="rect">
+            <a:avLst/>
+          </a:prstGeom>
+          <a:noFill xmlns:a="http://schemas.openxmlformats.org/drawingml/2006/main"/>
+          <a:ln xmlns:a="http://schemas.openxmlformats.org/drawingml/2006/main" w="0">
+            <a:noFill/>
+            <a:prstDash val="solid"/>
+          </a:ln>
+        </p:spPr>
+        <p:txBody>
+          <a:bodyPr xmlns:a="http://schemas.openxmlformats.org/drawingml/2006/main"/>
+          <a:lstStyle xmlns:a="http://schemas.openxmlformats.org/drawingml/2006/main"/>
+          <a:p xmlns:a="http://schemas.openxmlformats.org/drawingml/2006/main">
+            <a:pPr algn="l">
+              <a:defRPr sz="1800" b="0">
+                <a:solidFill>
+                  <a:srgbClr val="FFFFFF"/>
+                </a:solidFill>
+                <a:latin typeface="Arial"/>
+                <a:ea typeface="Arial"/>
+                <a:cs typeface="Arial"/>
+              </a:defRPr>
+            </a:pPr>
+            <a:r>
+              <a:rPr sz="1800" b="0">
+                <a:solidFill>
+                  <a:srgbClr val="FFFFFF"/>
+                </a:solidFill>
+                <a:latin typeface="Arial"/>
+                <a:ea typeface="Arial"/>
+                <a:cs typeface="Arial"/>
               </a:rPr>
               <a:t>Share what your crew made</a:t>
             </a:r>
@@ -29476,10 +30036,10 @@
       </p:sp>
       <p:sp>
         <p:nvSpPr>
-          <p:cNvPr id="313" name="slide-heading-24">
-            <a:extLst xmlns:a="http://schemas.openxmlformats.org/drawingml/2006/main">
-              <a:ext uri="{FF2B5EF4-FFF2-40B4-BE49-F238E27FC236}">
-                <a16:creationId xmlns:a16="http://schemas.microsoft.com/office/drawing/2014/main" id="{10A7C660-D469-4279-8BF0-C97A112E2F74}"/>
+          <p:cNvPr id="313" name="slide-heading-marker-24">
+            <a:extLst xmlns:a="http://schemas.openxmlformats.org/drawingml/2006/main">
+              <a:ext uri="{FF2B5EF4-FFF2-40B4-BE49-F238E27FC236}">
+                <a16:creationId xmlns:a16="http://schemas.microsoft.com/office/drawing/2014/main" id="{3B558470-BCEC-4DFB-81AE-A82ED8F6A4C5}"/>
               </a:ext>
             </a:extLst>
           </p:cNvPr>
@@ -29490,8 +30050,8 @@
         </p:nvSpPr>
         <p:spPr>
           <a:xfrm xmlns:a="http://schemas.openxmlformats.org/drawingml/2006/main">
-            <a:off x="552450" y="219075"/>
-            <a:ext cx="6858000" cy="266700"/>
+            <a:off x="742950" y="447675"/>
+            <a:ext cx="476250" cy="323850"/>
           </a:xfrm>
           <a:prstGeom xmlns:a="http://schemas.openxmlformats.org/drawingml/2006/main" prst="rect">
             <a:avLst/>
@@ -29507,9 +30067,9 @@
           <a:lstStyle xmlns:a="http://schemas.openxmlformats.org/drawingml/2006/main"/>
           <a:p xmlns:a="http://schemas.openxmlformats.org/drawingml/2006/main">
             <a:pPr algn="l">
-              <a:defRPr sz="1350" b="1">
+              <a:defRPr sz="1950" b="1">
                 <a:solidFill>
-                  <a:srgbClr val="FFFFFF"/>
+                  <a:srgbClr val="FFDB5D"/>
                 </a:solidFill>
                 <a:latin typeface="Source Code Pro"/>
                 <a:ea typeface="Source Code Pro"/>
@@ -29517,13 +30077,69 @@
               </a:defRPr>
             </a:pPr>
             <a:r>
-              <a:rPr sz="1350" b="1">
+              <a:rPr sz="1950" b="1">
                 <a:solidFill>
-                  <a:srgbClr val="FFFFFF"/>
+                  <a:srgbClr val="FFDB5D"/>
                 </a:solidFill>
                 <a:latin typeface="Source Code Pro"/>
                 <a:ea typeface="Source Code Pro"/>
                 <a:cs typeface="Source Code Pro"/>
+              </a:rPr>
+              <a:t>&lt;/</a:t>
+            </a:r>
+          </a:p>
+        </p:txBody>
+      </p:sp>
+      <p:sp>
+        <p:nvSpPr>
+          <p:cNvPr id="314" name="slide-heading-text-24">
+            <a:extLst xmlns:a="http://schemas.openxmlformats.org/drawingml/2006/main">
+              <a:ext uri="{FF2B5EF4-FFF2-40B4-BE49-F238E27FC236}">
+                <a16:creationId xmlns:a16="http://schemas.microsoft.com/office/drawing/2014/main" id="{8B23174A-638A-46EC-AD07-1B1BC78D919D}"/>
+              </a:ext>
+            </a:extLst>
+          </p:cNvPr>
+          <p:cNvSpPr>
+            <a:spLocks xmlns:a="http://schemas.openxmlformats.org/drawingml/2006/main" noGrp="1"/>
+          </p:cNvSpPr>
+          <p:nvPr/>
+        </p:nvSpPr>
+        <p:spPr>
+          <a:xfrm xmlns:a="http://schemas.openxmlformats.org/drawingml/2006/main">
+            <a:off x="1152525" y="428625"/>
+            <a:ext cx="5619750" cy="361950"/>
+          </a:xfrm>
+          <a:prstGeom xmlns:a="http://schemas.openxmlformats.org/drawingml/2006/main" prst="rect">
+            <a:avLst/>
+          </a:prstGeom>
+          <a:noFill xmlns:a="http://schemas.openxmlformats.org/drawingml/2006/main"/>
+          <a:ln xmlns:a="http://schemas.openxmlformats.org/drawingml/2006/main" w="0">
+            <a:noFill/>
+            <a:prstDash val="solid"/>
+          </a:ln>
+        </p:spPr>
+        <p:txBody>
+          <a:bodyPr xmlns:a="http://schemas.openxmlformats.org/drawingml/2006/main"/>
+          <a:lstStyle xmlns:a="http://schemas.openxmlformats.org/drawingml/2006/main"/>
+          <a:p xmlns:a="http://schemas.openxmlformats.org/drawingml/2006/main">
+            <a:pPr algn="l">
+              <a:defRPr sz="1800" b="0">
+                <a:solidFill>
+                  <a:srgbClr val="FFFFFF"/>
+                </a:solidFill>
+                <a:latin typeface="Arial"/>
+                <a:ea typeface="Arial"/>
+                <a:cs typeface="Arial"/>
+              </a:defRPr>
+            </a:pPr>
+            <a:r>
+              <a:rPr sz="1800" b="0">
+                <a:solidFill>
+                  <a:srgbClr val="FFFFFF"/>
+                </a:solidFill>
+                <a:latin typeface="Arial"/>
+                <a:ea typeface="Arial"/>
+                <a:cs typeface="Arial"/>
               </a:rPr>
               <a:t>Homework: Music Lab remix</a:t>
             </a:r>
@@ -30075,10 +30691,10 @@
       </p:sp>
       <p:sp>
         <p:nvSpPr>
-          <p:cNvPr id="313" name="slide-heading-25">
-            <a:extLst xmlns:a="http://schemas.openxmlformats.org/drawingml/2006/main">
-              <a:ext uri="{FF2B5EF4-FFF2-40B4-BE49-F238E27FC236}">
-                <a16:creationId xmlns:a16="http://schemas.microsoft.com/office/drawing/2014/main" id="{72E08CB2-5A61-45A9-9E0B-B95914960732}"/>
+          <p:cNvPr id="313" name="slide-heading-marker-25">
+            <a:extLst xmlns:a="http://schemas.openxmlformats.org/drawingml/2006/main">
+              <a:ext uri="{FF2B5EF4-FFF2-40B4-BE49-F238E27FC236}">
+                <a16:creationId xmlns:a16="http://schemas.microsoft.com/office/drawing/2014/main" id="{079E65ED-329B-4E2D-81E6-058ECD3A6287}"/>
               </a:ext>
             </a:extLst>
           </p:cNvPr>
@@ -30089,8 +30705,8 @@
         </p:nvSpPr>
         <p:spPr>
           <a:xfrm xmlns:a="http://schemas.openxmlformats.org/drawingml/2006/main">
-            <a:off x="552450" y="219075"/>
-            <a:ext cx="6858000" cy="266700"/>
+            <a:off x="742950" y="447675"/>
+            <a:ext cx="476250" cy="323850"/>
           </a:xfrm>
           <a:prstGeom xmlns:a="http://schemas.openxmlformats.org/drawingml/2006/main" prst="rect">
             <a:avLst/>
@@ -30106,9 +30722,9 @@
           <a:lstStyle xmlns:a="http://schemas.openxmlformats.org/drawingml/2006/main"/>
           <a:p xmlns:a="http://schemas.openxmlformats.org/drawingml/2006/main">
             <a:pPr algn="l">
-              <a:defRPr sz="1350" b="1">
+              <a:defRPr sz="1950" b="1">
                 <a:solidFill>
-                  <a:srgbClr val="FFFFFF"/>
+                  <a:srgbClr val="FFDB5D"/>
                 </a:solidFill>
                 <a:latin typeface="Source Code Pro"/>
                 <a:ea typeface="Source Code Pro"/>
@@ -30116,13 +30732,69 @@
               </a:defRPr>
             </a:pPr>
             <a:r>
-              <a:rPr sz="1350" b="1">
+              <a:rPr sz="1950" b="1">
                 <a:solidFill>
-                  <a:srgbClr val="FFFFFF"/>
+                  <a:srgbClr val="FFDB5D"/>
                 </a:solidFill>
                 <a:latin typeface="Source Code Pro"/>
                 <a:ea typeface="Source Code Pro"/>
                 <a:cs typeface="Source Code Pro"/>
+              </a:rPr>
+              <a:t>&lt;/</a:t>
+            </a:r>
+          </a:p>
+        </p:txBody>
+      </p:sp>
+      <p:sp>
+        <p:nvSpPr>
+          <p:cNvPr id="314" name="slide-heading-text-25">
+            <a:extLst xmlns:a="http://schemas.openxmlformats.org/drawingml/2006/main">
+              <a:ext uri="{FF2B5EF4-FFF2-40B4-BE49-F238E27FC236}">
+                <a16:creationId xmlns:a16="http://schemas.microsoft.com/office/drawing/2014/main" id="{2D39112E-D020-422B-8364-BD10B744919B}"/>
+              </a:ext>
+            </a:extLst>
+          </p:cNvPr>
+          <p:cNvSpPr>
+            <a:spLocks xmlns:a="http://schemas.openxmlformats.org/drawingml/2006/main" noGrp="1"/>
+          </p:cNvSpPr>
+          <p:nvPr/>
+        </p:nvSpPr>
+        <p:spPr>
+          <a:xfrm xmlns:a="http://schemas.openxmlformats.org/drawingml/2006/main">
+            <a:off x="1152525" y="428625"/>
+            <a:ext cx="5619750" cy="361950"/>
+          </a:xfrm>
+          <a:prstGeom xmlns:a="http://schemas.openxmlformats.org/drawingml/2006/main" prst="rect">
+            <a:avLst/>
+          </a:prstGeom>
+          <a:noFill xmlns:a="http://schemas.openxmlformats.org/drawingml/2006/main"/>
+          <a:ln xmlns:a="http://schemas.openxmlformats.org/drawingml/2006/main" w="0">
+            <a:noFill/>
+            <a:prstDash val="solid"/>
+          </a:ln>
+        </p:spPr>
+        <p:txBody>
+          <a:bodyPr xmlns:a="http://schemas.openxmlformats.org/drawingml/2006/main"/>
+          <a:lstStyle xmlns:a="http://schemas.openxmlformats.org/drawingml/2006/main"/>
+          <a:p xmlns:a="http://schemas.openxmlformats.org/drawingml/2006/main">
+            <a:pPr algn="l">
+              <a:defRPr sz="1800" b="0">
+                <a:solidFill>
+                  <a:srgbClr val="FFFFFF"/>
+                </a:solidFill>
+                <a:latin typeface="Arial"/>
+                <a:ea typeface="Arial"/>
+                <a:cs typeface="Arial"/>
+              </a:defRPr>
+            </a:pPr>
+            <a:r>
+              <a:rPr sz="1800" b="0">
+                <a:solidFill>
+                  <a:srgbClr val="FFFFFF"/>
+                </a:solidFill>
+                <a:latin typeface="Arial"/>
+                <a:ea typeface="Arial"/>
+                <a:cs typeface="Arial"/>
               </a:rPr>
               <a:t>Next week we start TypeScript</a:t>
             </a:r>
@@ -31192,7 +31864,7 @@
           <p:nvPr/>
         </p:nvPicPr>
         <p:blipFill>
-          <a:blip xmlns:r="http://schemas.openxmlformats.org/officeDocument/2006/relationships" xmlns:a="http://schemas.openxmlformats.org/drawingml/2006/main" r:embed="Re20179d6e9c74a8c"/>
+          <a:blip xmlns:r="http://schemas.openxmlformats.org/officeDocument/2006/relationships" xmlns:a="http://schemas.openxmlformats.org/drawingml/2006/main" r:embed="Recfdc9f447464a0d"/>
           <a:stretch xmlns:a="http://schemas.openxmlformats.org/drawingml/2006/main">
             <a:fillRect l="0" t="0" r="0" b="0"/>
           </a:stretch>
@@ -31554,7 +32226,7 @@
           <p:nvPr/>
         </p:nvPicPr>
         <p:blipFill>
-          <a:blip xmlns:r="http://schemas.openxmlformats.org/officeDocument/2006/relationships" xmlns:a="http://schemas.openxmlformats.org/drawingml/2006/main" r:embed="Rde2092cdea9b4126"/>
+          <a:blip xmlns:r="http://schemas.openxmlformats.org/officeDocument/2006/relationships" xmlns:a="http://schemas.openxmlformats.org/drawingml/2006/main" r:embed="R99f16198d822401b"/>
           <a:stretch xmlns:a="http://schemas.openxmlformats.org/drawingml/2006/main">
             <a:fillRect l="0" t="0" r="0" b="0"/>
           </a:stretch>
@@ -31758,7 +32430,7 @@
           <p:nvPr/>
         </p:nvPicPr>
         <p:blipFill>
-          <a:blip xmlns:r="http://schemas.openxmlformats.org/officeDocument/2006/relationships" xmlns:a="http://schemas.openxmlformats.org/drawingml/2006/main" r:embed="R0f2426831e324b49"/>
+          <a:blip xmlns:r="http://schemas.openxmlformats.org/officeDocument/2006/relationships" xmlns:a="http://schemas.openxmlformats.org/drawingml/2006/main" r:embed="R28a3943f73514f90"/>
           <a:stretch xmlns:a="http://schemas.openxmlformats.org/drawingml/2006/main">
             <a:fillRect l="0" t="0" r="0" b="0"/>
           </a:stretch>
@@ -32318,10 +32990,10 @@
       </p:sp>
       <p:sp>
         <p:nvSpPr>
-          <p:cNvPr id="313" name="slide-heading-6">
-            <a:extLst xmlns:a="http://schemas.openxmlformats.org/drawingml/2006/main">
-              <a:ext uri="{FF2B5EF4-FFF2-40B4-BE49-F238E27FC236}">
-                <a16:creationId xmlns:a16="http://schemas.microsoft.com/office/drawing/2014/main" id="{E73CF497-0584-42DA-AFC9-6F53A87DBDF6}"/>
+          <p:cNvPr id="313" name="slide-heading-marker-6">
+            <a:extLst xmlns:a="http://schemas.openxmlformats.org/drawingml/2006/main">
+              <a:ext uri="{FF2B5EF4-FFF2-40B4-BE49-F238E27FC236}">
+                <a16:creationId xmlns:a16="http://schemas.microsoft.com/office/drawing/2014/main" id="{2C098171-21A5-4CC8-BC03-EC51286BE3DD}"/>
               </a:ext>
             </a:extLst>
           </p:cNvPr>
@@ -32332,8 +33004,8 @@
         </p:nvSpPr>
         <p:spPr>
           <a:xfrm xmlns:a="http://schemas.openxmlformats.org/drawingml/2006/main">
-            <a:off x="552450" y="219075"/>
-            <a:ext cx="6858000" cy="266700"/>
+            <a:off x="742950" y="447675"/>
+            <a:ext cx="476250" cy="323850"/>
           </a:xfrm>
           <a:prstGeom xmlns:a="http://schemas.openxmlformats.org/drawingml/2006/main" prst="rect">
             <a:avLst/>
@@ -32349,9 +33021,9 @@
           <a:lstStyle xmlns:a="http://schemas.openxmlformats.org/drawingml/2006/main"/>
           <a:p xmlns:a="http://schemas.openxmlformats.org/drawingml/2006/main">
             <a:pPr algn="l">
-              <a:defRPr sz="1350" b="1">
+              <a:defRPr sz="1950" b="1">
                 <a:solidFill>
-                  <a:srgbClr val="FFFFFF"/>
+                  <a:srgbClr val="FFDB5D"/>
                 </a:solidFill>
                 <a:latin typeface="Source Code Pro"/>
                 <a:ea typeface="Source Code Pro"/>
@@ -32359,13 +33031,69 @@
               </a:defRPr>
             </a:pPr>
             <a:r>
-              <a:rPr sz="1350" b="1">
+              <a:rPr sz="1950" b="1">
                 <a:solidFill>
-                  <a:srgbClr val="FFFFFF"/>
+                  <a:srgbClr val="FFDB5D"/>
                 </a:solidFill>
                 <a:latin typeface="Source Code Pro"/>
                 <a:ea typeface="Source Code Pro"/>
                 <a:cs typeface="Source Code Pro"/>
+              </a:rPr>
+              <a:t>&lt;/</a:t>
+            </a:r>
+          </a:p>
+        </p:txBody>
+      </p:sp>
+      <p:sp>
+        <p:nvSpPr>
+          <p:cNvPr id="314" name="slide-heading-text-6">
+            <a:extLst xmlns:a="http://schemas.openxmlformats.org/drawingml/2006/main">
+              <a:ext uri="{FF2B5EF4-FFF2-40B4-BE49-F238E27FC236}">
+                <a16:creationId xmlns:a16="http://schemas.microsoft.com/office/drawing/2014/main" id="{5479F54C-0325-47A0-9630-F0FCCB742455}"/>
+              </a:ext>
+            </a:extLst>
+          </p:cNvPr>
+          <p:cNvSpPr>
+            <a:spLocks xmlns:a="http://schemas.openxmlformats.org/drawingml/2006/main" noGrp="1"/>
+          </p:cNvSpPr>
+          <p:nvPr/>
+        </p:nvSpPr>
+        <p:spPr>
+          <a:xfrm xmlns:a="http://schemas.openxmlformats.org/drawingml/2006/main">
+            <a:off x="1152525" y="428625"/>
+            <a:ext cx="5619750" cy="361950"/>
+          </a:xfrm>
+          <a:prstGeom xmlns:a="http://schemas.openxmlformats.org/drawingml/2006/main" prst="rect">
+            <a:avLst/>
+          </a:prstGeom>
+          <a:noFill xmlns:a="http://schemas.openxmlformats.org/drawingml/2006/main"/>
+          <a:ln xmlns:a="http://schemas.openxmlformats.org/drawingml/2006/main" w="0">
+            <a:noFill/>
+            <a:prstDash val="solid"/>
+          </a:ln>
+        </p:spPr>
+        <p:txBody>
+          <a:bodyPr xmlns:a="http://schemas.openxmlformats.org/drawingml/2006/main"/>
+          <a:lstStyle xmlns:a="http://schemas.openxmlformats.org/drawingml/2006/main"/>
+          <a:p xmlns:a="http://schemas.openxmlformats.org/drawingml/2006/main">
+            <a:pPr algn="l">
+              <a:defRPr sz="1800" b="0">
+                <a:solidFill>
+                  <a:srgbClr val="FFFFFF"/>
+                </a:solidFill>
+                <a:latin typeface="Arial"/>
+                <a:ea typeface="Arial"/>
+                <a:cs typeface="Arial"/>
+              </a:defRPr>
+            </a:pPr>
+            <a:r>
+              <a:rPr sz="1800" b="0">
+                <a:solidFill>
+                  <a:srgbClr val="FFFFFF"/>
+                </a:solidFill>
+                <a:latin typeface="Arial"/>
+                <a:ea typeface="Arial"/>
+                <a:cs typeface="Arial"/>
               </a:rPr>
               <a:t>Today's mission</a:t>
             </a:r>
@@ -32917,10 +33645,10 @@
       </p:sp>
       <p:sp>
         <p:nvSpPr>
-          <p:cNvPr id="313" name="slide-heading-7">
-            <a:extLst xmlns:a="http://schemas.openxmlformats.org/drawingml/2006/main">
-              <a:ext uri="{FF2B5EF4-FFF2-40B4-BE49-F238E27FC236}">
-                <a16:creationId xmlns:a16="http://schemas.microsoft.com/office/drawing/2014/main" id="{0C27150C-6CF9-4E45-86A8-40688D407385}"/>
+          <p:cNvPr id="313" name="slide-heading-marker-7">
+            <a:extLst xmlns:a="http://schemas.openxmlformats.org/drawingml/2006/main">
+              <a:ext uri="{FF2B5EF4-FFF2-40B4-BE49-F238E27FC236}">
+                <a16:creationId xmlns:a16="http://schemas.microsoft.com/office/drawing/2014/main" id="{31E9FE38-047B-4F43-B15D-E811F696848C}"/>
               </a:ext>
             </a:extLst>
           </p:cNvPr>
@@ -32931,8 +33659,8 @@
         </p:nvSpPr>
         <p:spPr>
           <a:xfrm xmlns:a="http://schemas.openxmlformats.org/drawingml/2006/main">
-            <a:off x="552450" y="219075"/>
-            <a:ext cx="6858000" cy="266700"/>
+            <a:off x="742950" y="447675"/>
+            <a:ext cx="476250" cy="323850"/>
           </a:xfrm>
           <a:prstGeom xmlns:a="http://schemas.openxmlformats.org/drawingml/2006/main" prst="rect">
             <a:avLst/>
@@ -32948,9 +33676,9 @@
           <a:lstStyle xmlns:a="http://schemas.openxmlformats.org/drawingml/2006/main"/>
           <a:p xmlns:a="http://schemas.openxmlformats.org/drawingml/2006/main">
             <a:pPr algn="l">
-              <a:defRPr sz="1350" b="1">
+              <a:defRPr sz="1950" b="1">
                 <a:solidFill>
-                  <a:srgbClr val="FFFFFF"/>
+                  <a:srgbClr val="FFDB5D"/>
                 </a:solidFill>
                 <a:latin typeface="Source Code Pro"/>
                 <a:ea typeface="Source Code Pro"/>
@@ -32958,13 +33686,69 @@
               </a:defRPr>
             </a:pPr>
             <a:r>
-              <a:rPr sz="1350" b="1">
+              <a:rPr sz="1950" b="1">
                 <a:solidFill>
-                  <a:srgbClr val="FFFFFF"/>
+                  <a:srgbClr val="FFDB5D"/>
                 </a:solidFill>
                 <a:latin typeface="Source Code Pro"/>
                 <a:ea typeface="Source Code Pro"/>
                 <a:cs typeface="Source Code Pro"/>
+              </a:rPr>
+              <a:t>&lt;/</a:t>
+            </a:r>
+          </a:p>
+        </p:txBody>
+      </p:sp>
+      <p:sp>
+        <p:nvSpPr>
+          <p:cNvPr id="314" name="slide-heading-text-7">
+            <a:extLst xmlns:a="http://schemas.openxmlformats.org/drawingml/2006/main">
+              <a:ext uri="{FF2B5EF4-FFF2-40B4-BE49-F238E27FC236}">
+                <a16:creationId xmlns:a16="http://schemas.microsoft.com/office/drawing/2014/main" id="{A5C51008-35EA-4C2F-893C-55B209672C0D}"/>
+              </a:ext>
+            </a:extLst>
+          </p:cNvPr>
+          <p:cNvSpPr>
+            <a:spLocks xmlns:a="http://schemas.openxmlformats.org/drawingml/2006/main" noGrp="1"/>
+          </p:cNvSpPr>
+          <p:nvPr/>
+        </p:nvSpPr>
+        <p:spPr>
+          <a:xfrm xmlns:a="http://schemas.openxmlformats.org/drawingml/2006/main">
+            <a:off x="1152525" y="428625"/>
+            <a:ext cx="5619750" cy="361950"/>
+          </a:xfrm>
+          <a:prstGeom xmlns:a="http://schemas.openxmlformats.org/drawingml/2006/main" prst="rect">
+            <a:avLst/>
+          </a:prstGeom>
+          <a:noFill xmlns:a="http://schemas.openxmlformats.org/drawingml/2006/main"/>
+          <a:ln xmlns:a="http://schemas.openxmlformats.org/drawingml/2006/main" w="0">
+            <a:noFill/>
+            <a:prstDash val="solid"/>
+          </a:ln>
+        </p:spPr>
+        <p:txBody>
+          <a:bodyPr xmlns:a="http://schemas.openxmlformats.org/drawingml/2006/main"/>
+          <a:lstStyle xmlns:a="http://schemas.openxmlformats.org/drawingml/2006/main"/>
+          <a:p xmlns:a="http://schemas.openxmlformats.org/drawingml/2006/main">
+            <a:pPr algn="l">
+              <a:defRPr sz="1800" b="0">
+                <a:solidFill>
+                  <a:srgbClr val="FFFFFF"/>
+                </a:solidFill>
+                <a:latin typeface="Arial"/>
+                <a:ea typeface="Arial"/>
+                <a:cs typeface="Arial"/>
+              </a:defRPr>
+            </a:pPr>
+            <a:r>
+              <a:rPr sz="1800" b="0">
+                <a:solidFill>
+                  <a:srgbClr val="FFFFFF"/>
+                </a:solidFill>
+                <a:latin typeface="Arial"/>
+                <a:ea typeface="Arial"/>
+                <a:cs typeface="Arial"/>
               </a:rPr>
               <a:t>Introduce yourself</a:t>
             </a:r>
@@ -33516,10 +34300,10 @@
       </p:sp>
       <p:sp>
         <p:nvSpPr>
-          <p:cNvPr id="313" name="slide-heading-8">
-            <a:extLst xmlns:a="http://schemas.openxmlformats.org/drawingml/2006/main">
-              <a:ext uri="{FF2B5EF4-FFF2-40B4-BE49-F238E27FC236}">
-                <a16:creationId xmlns:a16="http://schemas.microsoft.com/office/drawing/2014/main" id="{42A63C4E-0D5B-4E2F-9924-0968778D40A2}"/>
+          <p:cNvPr id="313" name="slide-heading-marker-8">
+            <a:extLst xmlns:a="http://schemas.openxmlformats.org/drawingml/2006/main">
+              <a:ext uri="{FF2B5EF4-FFF2-40B4-BE49-F238E27FC236}">
+                <a16:creationId xmlns:a16="http://schemas.microsoft.com/office/drawing/2014/main" id="{3A8C6A94-A94C-44E1-ADDF-B4561B404724}"/>
               </a:ext>
             </a:extLst>
           </p:cNvPr>
@@ -33530,8 +34314,8 @@
         </p:nvSpPr>
         <p:spPr>
           <a:xfrm xmlns:a="http://schemas.openxmlformats.org/drawingml/2006/main">
-            <a:off x="552450" y="219075"/>
-            <a:ext cx="6858000" cy="266700"/>
+            <a:off x="742950" y="447675"/>
+            <a:ext cx="476250" cy="323850"/>
           </a:xfrm>
           <a:prstGeom xmlns:a="http://schemas.openxmlformats.org/drawingml/2006/main" prst="rect">
             <a:avLst/>
@@ -33547,9 +34331,9 @@
           <a:lstStyle xmlns:a="http://schemas.openxmlformats.org/drawingml/2006/main"/>
           <a:p xmlns:a="http://schemas.openxmlformats.org/drawingml/2006/main">
             <a:pPr algn="l">
-              <a:defRPr sz="1350" b="1">
+              <a:defRPr sz="1950" b="1">
                 <a:solidFill>
-                  <a:srgbClr val="FFFFFF"/>
+                  <a:srgbClr val="FFDB5D"/>
                 </a:solidFill>
                 <a:latin typeface="Source Code Pro"/>
                 <a:ea typeface="Source Code Pro"/>
@@ -33557,13 +34341,69 @@
               </a:defRPr>
             </a:pPr>
             <a:r>
-              <a:rPr sz="1350" b="1">
+              <a:rPr sz="1950" b="1">
                 <a:solidFill>
-                  <a:srgbClr val="FFFFFF"/>
+                  <a:srgbClr val="FFDB5D"/>
                 </a:solidFill>
                 <a:latin typeface="Source Code Pro"/>
                 <a:ea typeface="Source Code Pro"/>
                 <a:cs typeface="Source Code Pro"/>
+              </a:rPr>
+              <a:t>&lt;/</a:t>
+            </a:r>
+          </a:p>
+        </p:txBody>
+      </p:sp>
+      <p:sp>
+        <p:nvSpPr>
+          <p:cNvPr id="314" name="slide-heading-text-8">
+            <a:extLst xmlns:a="http://schemas.openxmlformats.org/drawingml/2006/main">
+              <a:ext uri="{FF2B5EF4-FFF2-40B4-BE49-F238E27FC236}">
+                <a16:creationId xmlns:a16="http://schemas.microsoft.com/office/drawing/2014/main" id="{D8FEFC39-CF12-4D35-9E56-0675E79EBED3}"/>
+              </a:ext>
+            </a:extLst>
+          </p:cNvPr>
+          <p:cNvSpPr>
+            <a:spLocks xmlns:a="http://schemas.openxmlformats.org/drawingml/2006/main" noGrp="1"/>
+          </p:cNvSpPr>
+          <p:nvPr/>
+        </p:nvSpPr>
+        <p:spPr>
+          <a:xfrm xmlns:a="http://schemas.openxmlformats.org/drawingml/2006/main">
+            <a:off x="1152525" y="428625"/>
+            <a:ext cx="5619750" cy="361950"/>
+          </a:xfrm>
+          <a:prstGeom xmlns:a="http://schemas.openxmlformats.org/drawingml/2006/main" prst="rect">
+            <a:avLst/>
+          </a:prstGeom>
+          <a:noFill xmlns:a="http://schemas.openxmlformats.org/drawingml/2006/main"/>
+          <a:ln xmlns:a="http://schemas.openxmlformats.org/drawingml/2006/main" w="0">
+            <a:noFill/>
+            <a:prstDash val="solid"/>
+          </a:ln>
+        </p:spPr>
+        <p:txBody>
+          <a:bodyPr xmlns:a="http://schemas.openxmlformats.org/drawingml/2006/main"/>
+          <a:lstStyle xmlns:a="http://schemas.openxmlformats.org/drawingml/2006/main"/>
+          <a:p xmlns:a="http://schemas.openxmlformats.org/drawingml/2006/main">
+            <a:pPr algn="l">
+              <a:defRPr sz="1800" b="0">
+                <a:solidFill>
+                  <a:srgbClr val="FFFFFF"/>
+                </a:solidFill>
+                <a:latin typeface="Arial"/>
+                <a:ea typeface="Arial"/>
+                <a:cs typeface="Arial"/>
+              </a:defRPr>
+            </a:pPr>
+            <a:r>
+              <a:rPr sz="1800" b="0">
+                <a:solidFill>
+                  <a:srgbClr val="FFFFFF"/>
+                </a:solidFill>
+                <a:latin typeface="Arial"/>
+                <a:ea typeface="Arial"/>
+                <a:cs typeface="Arial"/>
               </a:rPr>
               <a:t>Programming starts with ideas</a:t>
             </a:r>
@@ -34115,10 +34955,10 @@
       </p:sp>
       <p:sp>
         <p:nvSpPr>
-          <p:cNvPr id="313" name="slide-heading-9">
-            <a:extLst xmlns:a="http://schemas.openxmlformats.org/drawingml/2006/main">
-              <a:ext uri="{FF2B5EF4-FFF2-40B4-BE49-F238E27FC236}">
-                <a16:creationId xmlns:a16="http://schemas.microsoft.com/office/drawing/2014/main" id="{DC58C05B-4865-470F-A3BA-388C322B816A}"/>
+          <p:cNvPr id="313" name="slide-heading-marker-9">
+            <a:extLst xmlns:a="http://schemas.openxmlformats.org/drawingml/2006/main">
+              <a:ext uri="{FF2B5EF4-FFF2-40B4-BE49-F238E27FC236}">
+                <a16:creationId xmlns:a16="http://schemas.microsoft.com/office/drawing/2014/main" id="{49DBD3CA-3E4D-4E27-8CFD-2ECB71A27EDB}"/>
               </a:ext>
             </a:extLst>
           </p:cNvPr>
@@ -34129,8 +34969,8 @@
         </p:nvSpPr>
         <p:spPr>
           <a:xfrm xmlns:a="http://schemas.openxmlformats.org/drawingml/2006/main">
-            <a:off x="552450" y="219075"/>
-            <a:ext cx="6858000" cy="266700"/>
+            <a:off x="742950" y="447675"/>
+            <a:ext cx="476250" cy="323850"/>
           </a:xfrm>
           <a:prstGeom xmlns:a="http://schemas.openxmlformats.org/drawingml/2006/main" prst="rect">
             <a:avLst/>
@@ -34146,9 +34986,9 @@
           <a:lstStyle xmlns:a="http://schemas.openxmlformats.org/drawingml/2006/main"/>
           <a:p xmlns:a="http://schemas.openxmlformats.org/drawingml/2006/main">
             <a:pPr algn="l">
-              <a:defRPr sz="1350" b="1">
+              <a:defRPr sz="1950" b="1">
                 <a:solidFill>
-                  <a:srgbClr val="FFFFFF"/>
+                  <a:srgbClr val="FFDB5D"/>
                 </a:solidFill>
                 <a:latin typeface="Source Code Pro"/>
                 <a:ea typeface="Source Code Pro"/>
@@ -34156,13 +34996,69 @@
               </a:defRPr>
             </a:pPr>
             <a:r>
-              <a:rPr sz="1350" b="1">
+              <a:rPr sz="1950" b="1">
                 <a:solidFill>
-                  <a:srgbClr val="FFFFFF"/>
+                  <a:srgbClr val="FFDB5D"/>
                 </a:solidFill>
                 <a:latin typeface="Source Code Pro"/>
                 <a:ea typeface="Source Code Pro"/>
                 <a:cs typeface="Source Code Pro"/>
+              </a:rPr>
+              <a:t>&lt;/</a:t>
+            </a:r>
+          </a:p>
+        </p:txBody>
+      </p:sp>
+      <p:sp>
+        <p:nvSpPr>
+          <p:cNvPr id="314" name="slide-heading-text-9">
+            <a:extLst xmlns:a="http://schemas.openxmlformats.org/drawingml/2006/main">
+              <a:ext uri="{FF2B5EF4-FFF2-40B4-BE49-F238E27FC236}">
+                <a16:creationId xmlns:a16="http://schemas.microsoft.com/office/drawing/2014/main" id="{69BDD1A1-B1AD-49F4-94CD-9D4423E1A401}"/>
+              </a:ext>
+            </a:extLst>
+          </p:cNvPr>
+          <p:cNvSpPr>
+            <a:spLocks xmlns:a="http://schemas.openxmlformats.org/drawingml/2006/main" noGrp="1"/>
+          </p:cNvSpPr>
+          <p:nvPr/>
+        </p:nvSpPr>
+        <p:spPr>
+          <a:xfrm xmlns:a="http://schemas.openxmlformats.org/drawingml/2006/main">
+            <a:off x="1152525" y="428625"/>
+            <a:ext cx="5619750" cy="361950"/>
+          </a:xfrm>
+          <a:prstGeom xmlns:a="http://schemas.openxmlformats.org/drawingml/2006/main" prst="rect">
+            <a:avLst/>
+          </a:prstGeom>
+          <a:noFill xmlns:a="http://schemas.openxmlformats.org/drawingml/2006/main"/>
+          <a:ln xmlns:a="http://schemas.openxmlformats.org/drawingml/2006/main" w="0">
+            <a:noFill/>
+            <a:prstDash val="solid"/>
+          </a:ln>
+        </p:spPr>
+        <p:txBody>
+          <a:bodyPr xmlns:a="http://schemas.openxmlformats.org/drawingml/2006/main"/>
+          <a:lstStyle xmlns:a="http://schemas.openxmlformats.org/drawingml/2006/main"/>
+          <a:p xmlns:a="http://schemas.openxmlformats.org/drawingml/2006/main">
+            <a:pPr algn="l">
+              <a:defRPr sz="1800" b="0">
+                <a:solidFill>
+                  <a:srgbClr val="FFFFFF"/>
+                </a:solidFill>
+                <a:latin typeface="Arial"/>
+                <a:ea typeface="Arial"/>
+                <a:cs typeface="Arial"/>
+              </a:defRPr>
+            </a:pPr>
+            <a:r>
+              <a:rPr sz="1800" b="0">
+                <a:solidFill>
+                  <a:srgbClr val="FFFFFF"/>
+                </a:solidFill>
+                <a:latin typeface="Arial"/>
+                <a:ea typeface="Arial"/>
+                <a:cs typeface="Arial"/>
               </a:rPr>
               <a:t>Our Saturday class routine</a:t>
             </a:r>

--- a/2026-07-11_Intro_to_Computer_Science_Programming/2026-07-11_Intro_to_Computer_Science_Programming.pptx
+++ b/2026-07-11_Intro_to_Computer_Science_Programming/2026-07-11_Intro_to_Computer_Science_Programming.pptx
@@ -2,55 +2,56 @@
 <file path=ppt/presentation.xml><?xml version="1.0" encoding="utf-8"?>
 <p:presentation xmlns:p="http://schemas.openxmlformats.org/presentationml/2006/main" embedTrueTypeFonts="1" saveSubsetFonts="1">
   <p:sldMasterIdLst>
-    <p:sldMasterId xmlns:r="http://schemas.openxmlformats.org/officeDocument/2006/relationships" id="2147483648" r:id="R3b4eb1c274d24026"/>
+    <p:sldMasterId xmlns:r="http://schemas.openxmlformats.org/officeDocument/2006/relationships" id="2147483648" r:id="Rcfe12427a4094900"/>
   </p:sldMasterIdLst>
   <p:notesMasterIdLst>
-    <p:notesMasterId xmlns:r="http://schemas.openxmlformats.org/officeDocument/2006/relationships" r:id="R92feef4b6a164373"/>
+    <p:notesMasterId xmlns:r="http://schemas.openxmlformats.org/officeDocument/2006/relationships" r:id="Raa51bb3259934e91"/>
   </p:notesMasterIdLst>
   <p:sldIdLst>
-    <p:sldId xmlns:r="http://schemas.openxmlformats.org/officeDocument/2006/relationships" id="256" r:id="Rd94febe393374a7f"/>
-    <p:sldId xmlns:r="http://schemas.openxmlformats.org/officeDocument/2006/relationships" id="257" r:id="Rcd080cf73ea746d7"/>
-    <p:sldId xmlns:r="http://schemas.openxmlformats.org/officeDocument/2006/relationships" id="258" r:id="R6e3668c970f44cf0"/>
-    <p:sldId xmlns:r="http://schemas.openxmlformats.org/officeDocument/2006/relationships" id="259" r:id="R455fdb550fad4788"/>
-    <p:sldId xmlns:r="http://schemas.openxmlformats.org/officeDocument/2006/relationships" id="260" r:id="Rf1457677984a423d"/>
-    <p:sldId xmlns:r="http://schemas.openxmlformats.org/officeDocument/2006/relationships" id="261" r:id="R225d2b71901e421b"/>
-    <p:sldId xmlns:r="http://schemas.openxmlformats.org/officeDocument/2006/relationships" id="262" r:id="Ra2d5baa2848e4300"/>
-    <p:sldId xmlns:r="http://schemas.openxmlformats.org/officeDocument/2006/relationships" id="263" r:id="R4239a5e40fc8477a"/>
-    <p:sldId xmlns:r="http://schemas.openxmlformats.org/officeDocument/2006/relationships" id="264" r:id="R04c923c23c674af9"/>
-    <p:sldId xmlns:r="http://schemas.openxmlformats.org/officeDocument/2006/relationships" id="265" r:id="R444a8f1106d74044"/>
-    <p:sldId xmlns:r="http://schemas.openxmlformats.org/officeDocument/2006/relationships" id="266" r:id="R0c526b69462546a1"/>
-    <p:sldId xmlns:r="http://schemas.openxmlformats.org/officeDocument/2006/relationships" id="267" r:id="R3584a4828d1d496b"/>
-    <p:sldId xmlns:r="http://schemas.openxmlformats.org/officeDocument/2006/relationships" id="268" r:id="Rcae0cef513ae4da7"/>
-    <p:sldId xmlns:r="http://schemas.openxmlformats.org/officeDocument/2006/relationships" id="269" r:id="R4a9c884ff4784241"/>
-    <p:sldId xmlns:r="http://schemas.openxmlformats.org/officeDocument/2006/relationships" id="270" r:id="R54853493cacd4509"/>
-    <p:sldId xmlns:r="http://schemas.openxmlformats.org/officeDocument/2006/relationships" id="271" r:id="Reb24ac8b36844933"/>
-    <p:sldId xmlns:r="http://schemas.openxmlformats.org/officeDocument/2006/relationships" id="272" r:id="R7da55bc024b6469e"/>
-    <p:sldId xmlns:r="http://schemas.openxmlformats.org/officeDocument/2006/relationships" id="273" r:id="R6369efebb97e401b"/>
-    <p:sldId xmlns:r="http://schemas.openxmlformats.org/officeDocument/2006/relationships" id="274" r:id="Rdae5811f91ba4789"/>
-    <p:sldId xmlns:r="http://schemas.openxmlformats.org/officeDocument/2006/relationships" id="275" r:id="R067545a7a82f41e8"/>
-    <p:sldId xmlns:r="http://schemas.openxmlformats.org/officeDocument/2006/relationships" id="276" r:id="R15b4ed74f0894b5a"/>
-    <p:sldId xmlns:r="http://schemas.openxmlformats.org/officeDocument/2006/relationships" id="277" r:id="R7865d703741c4f3a"/>
-    <p:sldId xmlns:r="http://schemas.openxmlformats.org/officeDocument/2006/relationships" id="278" r:id="R95645096c70c4a37"/>
-    <p:sldId xmlns:r="http://schemas.openxmlformats.org/officeDocument/2006/relationships" id="279" r:id="R6e285976ba7744ad"/>
-    <p:sldId xmlns:r="http://schemas.openxmlformats.org/officeDocument/2006/relationships" id="280" r:id="R627d7fdbe5054847"/>
-    <p:sldId xmlns:r="http://schemas.openxmlformats.org/officeDocument/2006/relationships" id="281" r:id="R6a40418975994017"/>
+    <p:sldId xmlns:r="http://schemas.openxmlformats.org/officeDocument/2006/relationships" id="256" r:id="Rdddbd04feb2f4bdc"/>
+    <p:sldId xmlns:r="http://schemas.openxmlformats.org/officeDocument/2006/relationships" id="257" r:id="R22c7d9bb3655438c"/>
+    <p:sldId xmlns:r="http://schemas.openxmlformats.org/officeDocument/2006/relationships" id="258" r:id="R7b902146a27c49b8"/>
+    <p:sldId xmlns:r="http://schemas.openxmlformats.org/officeDocument/2006/relationships" id="259" r:id="Rc1a9bcf7e1614bff"/>
+    <p:sldId xmlns:r="http://schemas.openxmlformats.org/officeDocument/2006/relationships" id="260" r:id="R0b1aa918ba124e97"/>
+    <p:sldId xmlns:r="http://schemas.openxmlformats.org/officeDocument/2006/relationships" id="261" r:id="R74eda5994de74ba1"/>
+    <p:sldId xmlns:r="http://schemas.openxmlformats.org/officeDocument/2006/relationships" id="262" r:id="R512433db5d174045"/>
+    <p:sldId xmlns:r="http://schemas.openxmlformats.org/officeDocument/2006/relationships" id="263" r:id="R5ebe5b47306a45b5"/>
+    <p:sldId xmlns:r="http://schemas.openxmlformats.org/officeDocument/2006/relationships" id="264" r:id="R640f190c86724bf4"/>
+    <p:sldId xmlns:r="http://schemas.openxmlformats.org/officeDocument/2006/relationships" id="265" r:id="Rdc078e2c8a4842c3"/>
+    <p:sldId xmlns:r="http://schemas.openxmlformats.org/officeDocument/2006/relationships" id="266" r:id="Ra6476e4663ff4e83"/>
+    <p:sldId xmlns:r="http://schemas.openxmlformats.org/officeDocument/2006/relationships" id="267" r:id="R54e7862ca7ee4cb7"/>
+    <p:sldId xmlns:r="http://schemas.openxmlformats.org/officeDocument/2006/relationships" id="268" r:id="Rbdc4c5e2a35d469e"/>
+    <p:sldId xmlns:r="http://schemas.openxmlformats.org/officeDocument/2006/relationships" id="269" r:id="R6013dd50ab854f6d"/>
+    <p:sldId xmlns:r="http://schemas.openxmlformats.org/officeDocument/2006/relationships" id="270" r:id="Rd17a381817794578"/>
+    <p:sldId xmlns:r="http://schemas.openxmlformats.org/officeDocument/2006/relationships" id="271" r:id="R0f9fd4b93e7b496c"/>
+    <p:sldId xmlns:r="http://schemas.openxmlformats.org/officeDocument/2006/relationships" id="272" r:id="R7b2651bbd05842a0"/>
+    <p:sldId xmlns:r="http://schemas.openxmlformats.org/officeDocument/2006/relationships" id="273" r:id="Rc67618229149413a"/>
+    <p:sldId xmlns:r="http://schemas.openxmlformats.org/officeDocument/2006/relationships" id="274" r:id="Rd81014f7431b496d"/>
+    <p:sldId xmlns:r="http://schemas.openxmlformats.org/officeDocument/2006/relationships" id="275" r:id="R29fc275cc4e94981"/>
+    <p:sldId xmlns:r="http://schemas.openxmlformats.org/officeDocument/2006/relationships" id="276" r:id="R846bc2a9671449c9"/>
+    <p:sldId xmlns:r="http://schemas.openxmlformats.org/officeDocument/2006/relationships" id="277" r:id="R1d3e1b367d32461b"/>
+    <p:sldId xmlns:r="http://schemas.openxmlformats.org/officeDocument/2006/relationships" id="278" r:id="R71104ba616b14063"/>
+    <p:sldId xmlns:r="http://schemas.openxmlformats.org/officeDocument/2006/relationships" id="279" r:id="R5c461f2f4e644179"/>
+    <p:sldId xmlns:r="http://schemas.openxmlformats.org/officeDocument/2006/relationships" id="280" r:id="Rcdba4e2ad33949c7"/>
+    <p:sldId xmlns:r="http://schemas.openxmlformats.org/officeDocument/2006/relationships" id="281" r:id="R23cfb416f9e548f2"/>
+    <p:sldId xmlns:r="http://schemas.openxmlformats.org/officeDocument/2006/relationships" id="282" r:id="Rbf4108e7232242a2"/>
   </p:sldIdLst>
   <p:sldSz cx="9144000" cy="5143500"/>
   <p:notesSz cx="6858000" cy="9144000"/>
   <p:embeddedFontLst>
     <p:embeddedFont>
       <p:font typeface="Quantico"/>
-      <p:regular xmlns:r="http://schemas.openxmlformats.org/officeDocument/2006/relationships" r:id="R523dc4b30b964ec9"/>
-      <p:bold xmlns:r="http://schemas.openxmlformats.org/officeDocument/2006/relationships" r:id="Rb400b9af09f840ce"/>
-      <p:italic xmlns:r="http://schemas.openxmlformats.org/officeDocument/2006/relationships" r:id="Rc906242da7e04149"/>
-      <p:boldItalic xmlns:r="http://schemas.openxmlformats.org/officeDocument/2006/relationships" r:id="Rdf4d33b368c14d35"/>
+      <p:regular xmlns:r="http://schemas.openxmlformats.org/officeDocument/2006/relationships" r:id="Rd2cf79ea5cbd442e"/>
+      <p:bold xmlns:r="http://schemas.openxmlformats.org/officeDocument/2006/relationships" r:id="Rca1065c8cf7e471f"/>
+      <p:italic xmlns:r="http://schemas.openxmlformats.org/officeDocument/2006/relationships" r:id="R91169508e4854825"/>
+      <p:boldItalic xmlns:r="http://schemas.openxmlformats.org/officeDocument/2006/relationships" r:id="Rdbdb11b8d1894d33"/>
     </p:embeddedFont>
     <p:embeddedFont>
       <p:font typeface="Source Code Pro"/>
-      <p:regular xmlns:r="http://schemas.openxmlformats.org/officeDocument/2006/relationships" r:id="R8aeffa911ca14701"/>
-      <p:bold xmlns:r="http://schemas.openxmlformats.org/officeDocument/2006/relationships" r:id="Rb429eee467774760"/>
-      <p:italic xmlns:r="http://schemas.openxmlformats.org/officeDocument/2006/relationships" r:id="R06824bffc7634510"/>
-      <p:boldItalic xmlns:r="http://schemas.openxmlformats.org/officeDocument/2006/relationships" r:id="R0accc5d07c734001"/>
+      <p:regular xmlns:r="http://schemas.openxmlformats.org/officeDocument/2006/relationships" r:id="R645689ac091a4d60"/>
+      <p:bold xmlns:r="http://schemas.openxmlformats.org/officeDocument/2006/relationships" r:id="R4ce1462bf78f445f"/>
+      <p:italic xmlns:r="http://schemas.openxmlformats.org/officeDocument/2006/relationships" r:id="R0fc5e679c9524d05"/>
+      <p:boldItalic xmlns:r="http://schemas.openxmlformats.org/officeDocument/2006/relationships" r:id="R4925bc8541b24b43"/>
     </p:embeddedFont>
   </p:embeddedFontLst>
   <p:defaultTextStyle>
@@ -2005,6 +2006,82 @@
 </p:notes>
 </file>
 
+<file path=ppt/notesSlides/notesSlide27.xml><?xml version="1.0" encoding="utf-8"?>
+<p:notes xmlns:p="http://schemas.openxmlformats.org/presentationml/2006/main">
+  <p:cSld>
+    <p:spTree>
+      <p:nvGrpSpPr>
+        <p:cNvPr id="1" name=""/>
+        <p:cNvGrpSpPr/>
+        <p:nvPr/>
+      </p:nvGrpSpPr>
+      <p:grpSpPr>
+        <a:xfrm xmlns:a="http://schemas.openxmlformats.org/drawingml/2006/main"/>
+      </p:grpSpPr>
+      <p:sp>
+        <p:nvSpPr>
+          <p:cNvPr id="2" name="Slide Image Placeholder 1"/>
+          <p:cNvSpPr>
+            <a:spLocks xmlns:a="http://schemas.openxmlformats.org/drawingml/2006/main" noGrp="1"/>
+          </p:cNvSpPr>
+          <p:nvPr>
+            <p:ph type="sldImg" idx="0"/>
+          </p:nvPr>
+        </p:nvSpPr>
+        <p:spPr/>
+      </p:sp>
+      <p:sp>
+        <p:nvSpPr>
+          <p:cNvPr id="3" name="Notes Placeholder 2"/>
+          <p:cNvSpPr>
+            <a:spLocks xmlns:a="http://schemas.openxmlformats.org/drawingml/2006/main" noGrp="1"/>
+          </p:cNvSpPr>
+          <p:nvPr>
+            <p:ph type="body" idx="1"/>
+          </p:nvPr>
+        </p:nvSpPr>
+        <p:spPr/>
+        <p:txBody>
+          <a:bodyPr xmlns:a="http://schemas.openxmlformats.org/drawingml/2006/main"/>
+          <a:lstStyle xmlns:a="http://schemas.openxmlformats.org/drawingml/2006/main"/>
+          <a:p xmlns:a="http://schemas.openxmlformats.org/drawingml/2006/main">
+            <a:pPr marL="0" indent="0" algn="l">
+              <a:spcBef>
+                <a:spcPts val="0"/>
+              </a:spcBef>
+              <a:spcAft>
+                <a:spcPts val="0"/>
+              </a:spcAft>
+              <a:buNone/>
+            </a:pPr>
+          </a:p>
+        </p:txBody>
+      </p:sp>
+      <p:sp>
+        <p:nvSpPr>
+          <p:cNvPr id="4" name="Slide Number Placeholder 3"/>
+          <p:cNvSpPr>
+            <a:spLocks xmlns:a="http://schemas.openxmlformats.org/drawingml/2006/main" noGrp="1"/>
+          </p:cNvSpPr>
+          <p:nvPr>
+            <p:ph type="sldNum" idx="5"/>
+          </p:nvPr>
+        </p:nvSpPr>
+        <p:spPr/>
+        <p:txBody>
+          <a:bodyPr xmlns:a="http://schemas.openxmlformats.org/drawingml/2006/main"/>
+          <a:lstStyle xmlns:a="http://schemas.openxmlformats.org/drawingml/2006/main"/>
+          <a:p xmlns:a="http://schemas.openxmlformats.org/drawingml/2006/main"/>
+        </p:txBody>
+      </p:sp>
+    </p:spTree>
+  </p:cSld>
+  <p:clrMapOvr>
+    <a:masterClrMapping xmlns:a="http://schemas.openxmlformats.org/drawingml/2006/main"/>
+  </p:clrMapOvr>
+</p:notes>
+</file>
+
 <file path=ppt/notesSlides/notesSlide3.xml><?xml version="1.0" encoding="utf-8"?>
 <p:notes xmlns:p="http://schemas.openxmlformats.org/presentationml/2006/main">
   <p:cSld>
@@ -2271,17 +2348,7 @@
         <p:txBody>
           <a:bodyPr xmlns:a="http://schemas.openxmlformats.org/drawingml/2006/main"/>
           <a:lstStyle xmlns:a="http://schemas.openxmlformats.org/drawingml/2006/main"/>
-          <a:p xmlns:a="http://schemas.openxmlformats.org/drawingml/2006/main">
-            <a:pPr marL="0" indent="0" algn="l">
-              <a:spcBef>
-                <a:spcPts val="0"/>
-              </a:spcBef>
-              <a:spcAft>
-                <a:spcPts val="0"/>
-              </a:spcAft>
-              <a:buNone/>
-            </a:pPr>
-          </a:p>
+          <a:p xmlns:a="http://schemas.openxmlformats.org/drawingml/2006/main"/>
         </p:txBody>
       </p:sp>
       <p:sp>
@@ -17953,28 +18020,28 @@
   </p:cSld>
   <p:clrMap bg1="lt1" tx1="dk1" bg2="dk2" tx2="lt2" accent1="accent1" accent2="accent2" accent3="accent3" accent4="accent4" accent5="accent5" accent6="accent6" hlink="hlink" folHlink="folHlink"/>
   <p:sldLayoutIdLst>
-    <p:sldLayoutId xmlns:r="http://schemas.openxmlformats.org/officeDocument/2006/relationships" id="2147483649" r:id="Rc604adb281c94f6b"/>
-    <p:sldLayoutId xmlns:r="http://schemas.openxmlformats.org/officeDocument/2006/relationships" id="2147483650" r:id="R4a3746803beb4b79"/>
-    <p:sldLayoutId xmlns:r="http://schemas.openxmlformats.org/officeDocument/2006/relationships" id="2147483651" r:id="Rf822cf1c267748ae"/>
-    <p:sldLayoutId xmlns:r="http://schemas.openxmlformats.org/officeDocument/2006/relationships" id="2147483652" r:id="R22125ee904c944f1"/>
-    <p:sldLayoutId xmlns:r="http://schemas.openxmlformats.org/officeDocument/2006/relationships" id="2147483653" r:id="R0a447dd64cb34d28"/>
-    <p:sldLayoutId xmlns:r="http://schemas.openxmlformats.org/officeDocument/2006/relationships" id="2147483654" r:id="Rbf8abc33f673497d"/>
-    <p:sldLayoutId xmlns:r="http://schemas.openxmlformats.org/officeDocument/2006/relationships" id="2147483655" r:id="Reeb06a758787420f"/>
-    <p:sldLayoutId xmlns:r="http://schemas.openxmlformats.org/officeDocument/2006/relationships" id="2147483656" r:id="Ra20c9c54cb9f4b14"/>
-    <p:sldLayoutId xmlns:r="http://schemas.openxmlformats.org/officeDocument/2006/relationships" id="2147483657" r:id="Rbe80e6bc41f44e7d"/>
-    <p:sldLayoutId xmlns:r="http://schemas.openxmlformats.org/officeDocument/2006/relationships" id="2147483658" r:id="Rc0d6938f29b44a33"/>
-    <p:sldLayoutId xmlns:r="http://schemas.openxmlformats.org/officeDocument/2006/relationships" id="2147483659" r:id="Rf1b52ede8fe14fcb"/>
-    <p:sldLayoutId xmlns:r="http://schemas.openxmlformats.org/officeDocument/2006/relationships" id="2147483660" r:id="R50e7a0d9dc3f414e"/>
-    <p:sldLayoutId xmlns:r="http://schemas.openxmlformats.org/officeDocument/2006/relationships" id="2147483661" r:id="R45e1dad6676049e7"/>
-    <p:sldLayoutId xmlns:r="http://schemas.openxmlformats.org/officeDocument/2006/relationships" id="2147483662" r:id="R60128d31b1864452"/>
-    <p:sldLayoutId xmlns:r="http://schemas.openxmlformats.org/officeDocument/2006/relationships" id="2147483663" r:id="R459caf1f592a4c03"/>
-    <p:sldLayoutId xmlns:r="http://schemas.openxmlformats.org/officeDocument/2006/relationships" id="2147483664" r:id="R5b654e360ee94800"/>
-    <p:sldLayoutId xmlns:r="http://schemas.openxmlformats.org/officeDocument/2006/relationships" id="2147483665" r:id="Rd2ddbf651a7d43f5"/>
-    <p:sldLayoutId xmlns:r="http://schemas.openxmlformats.org/officeDocument/2006/relationships" id="2147483666" r:id="R1bf63582000641a6"/>
-    <p:sldLayoutId xmlns:r="http://schemas.openxmlformats.org/officeDocument/2006/relationships" id="2147483667" r:id="R5fc94e3547fa43be"/>
-    <p:sldLayoutId xmlns:r="http://schemas.openxmlformats.org/officeDocument/2006/relationships" id="2147483668" r:id="Rbc88a9654a664144"/>
-    <p:sldLayoutId xmlns:r="http://schemas.openxmlformats.org/officeDocument/2006/relationships" id="2147483669" r:id="R8293d955d301404c"/>
-    <p:sldLayoutId xmlns:r="http://schemas.openxmlformats.org/officeDocument/2006/relationships" id="2147483670" r:id="Rd7cc72f752c24963"/>
+    <p:sldLayoutId xmlns:r="http://schemas.openxmlformats.org/officeDocument/2006/relationships" id="2147483649" r:id="Reae8a4548af441e2"/>
+    <p:sldLayoutId xmlns:r="http://schemas.openxmlformats.org/officeDocument/2006/relationships" id="2147483650" r:id="R6b29dd6f750a4be9"/>
+    <p:sldLayoutId xmlns:r="http://schemas.openxmlformats.org/officeDocument/2006/relationships" id="2147483651" r:id="Rc995b37612364da9"/>
+    <p:sldLayoutId xmlns:r="http://schemas.openxmlformats.org/officeDocument/2006/relationships" id="2147483652" r:id="R69bae714e6b14a57"/>
+    <p:sldLayoutId xmlns:r="http://schemas.openxmlformats.org/officeDocument/2006/relationships" id="2147483653" r:id="R18785394cace4961"/>
+    <p:sldLayoutId xmlns:r="http://schemas.openxmlformats.org/officeDocument/2006/relationships" id="2147483654" r:id="R00da08b7de7d44f9"/>
+    <p:sldLayoutId xmlns:r="http://schemas.openxmlformats.org/officeDocument/2006/relationships" id="2147483655" r:id="Rac287d0c01fb46c6"/>
+    <p:sldLayoutId xmlns:r="http://schemas.openxmlformats.org/officeDocument/2006/relationships" id="2147483656" r:id="R7e803db47d9a4b6e"/>
+    <p:sldLayoutId xmlns:r="http://schemas.openxmlformats.org/officeDocument/2006/relationships" id="2147483657" r:id="R78f36d413dda4b81"/>
+    <p:sldLayoutId xmlns:r="http://schemas.openxmlformats.org/officeDocument/2006/relationships" id="2147483658" r:id="R5433be3ebb6c44aa"/>
+    <p:sldLayoutId xmlns:r="http://schemas.openxmlformats.org/officeDocument/2006/relationships" id="2147483659" r:id="R2469e564fd454374"/>
+    <p:sldLayoutId xmlns:r="http://schemas.openxmlformats.org/officeDocument/2006/relationships" id="2147483660" r:id="Rc33611963df44539"/>
+    <p:sldLayoutId xmlns:r="http://schemas.openxmlformats.org/officeDocument/2006/relationships" id="2147483661" r:id="R56eeccaa0dd040cb"/>
+    <p:sldLayoutId xmlns:r="http://schemas.openxmlformats.org/officeDocument/2006/relationships" id="2147483662" r:id="R56f97d02569d4ec0"/>
+    <p:sldLayoutId xmlns:r="http://schemas.openxmlformats.org/officeDocument/2006/relationships" id="2147483663" r:id="R8576f9fd8ae7496f"/>
+    <p:sldLayoutId xmlns:r="http://schemas.openxmlformats.org/officeDocument/2006/relationships" id="2147483664" r:id="R755ab6a960c240f9"/>
+    <p:sldLayoutId xmlns:r="http://schemas.openxmlformats.org/officeDocument/2006/relationships" id="2147483665" r:id="Rc01569da870f42f9"/>
+    <p:sldLayoutId xmlns:r="http://schemas.openxmlformats.org/officeDocument/2006/relationships" id="2147483666" r:id="R6584ad6876e74b9d"/>
+    <p:sldLayoutId xmlns:r="http://schemas.openxmlformats.org/officeDocument/2006/relationships" id="2147483667" r:id="R3180cee31d384d0a"/>
+    <p:sldLayoutId xmlns:r="http://schemas.openxmlformats.org/officeDocument/2006/relationships" id="2147483668" r:id="R5c1900a3350f4a9e"/>
+    <p:sldLayoutId xmlns:r="http://schemas.openxmlformats.org/officeDocument/2006/relationships" id="2147483669" r:id="R2ade8be3d74c4b0e"/>
+    <p:sldLayoutId xmlns:r="http://schemas.openxmlformats.org/officeDocument/2006/relationships" id="2147483670" r:id="Rd13d46e49a294ba4"/>
   </p:sldLayoutIdLst>
   <p:hf sldNum="0" hdr="0" ftr="0" dt="0"/>
   <p:txStyles>
@@ -19585,7 +19652,7 @@
               <a:buNone/>
             </a:pPr>
             <a:r>
-              <a:t>Open Kids Computer Science</a:t>
+              <a:t>Rest and recharge</a:t>
             </a:r>
           </a:p>
         </p:txBody>
@@ -19636,7 +19703,7 @@
                   <a:schemeClr val="accent2"/>
                 </a:solidFill>
               </a:rPr>
-              <a:t>{Calendar}</a:t>
+              <a:t>{Class: 9-1}</a:t>
             </a:r>
           </a:p>
         </p:txBody>
@@ -19682,7 +19749,7 @@
               <a:buNone/>
             </a:pPr>
             <a:r>
-              <a:t>Find the Saturday meeting</a:t>
+              <a:t>Saturdays, Pacific Time</a:t>
             </a:r>
           </a:p>
         </p:txBody>
@@ -19728,7 +19795,7 @@
               <a:buNone/>
             </a:pPr>
             <a:r>
-              <a:t>{Join the Team}</a:t>
+              <a:t>{Break: 10:30}</a:t>
             </a:r>
           </a:p>
         </p:txBody>
@@ -19779,7 +19846,7 @@
                   <a:schemeClr val="lt2"/>
                 </a:solidFill>
               </a:rPr>
-              <a:t>{Ask for help}</a:t>
+              <a:t>{Typing: 11:00}</a:t>
             </a:r>
           </a:p>
         </p:txBody>
@@ -19825,7 +19892,7 @@
               <a:buNone/>
             </a:pPr>
             <a:r>
-              <a:t>Use chat or raise your hand</a:t>
+              <a:t>Practice accuracy and speed</a:t>
             </a:r>
           </a:p>
         </p:txBody>
@@ -20067,10 +20134,10 @@
       </p:sp>
       <p:sp>
         <p:nvSpPr>
-          <p:cNvPr id="313" name="slide-heading-marker-10">
-            <a:extLst xmlns:a="http://schemas.openxmlformats.org/drawingml/2006/main">
-              <a:ext uri="{FF2B5EF4-FFF2-40B4-BE49-F238E27FC236}">
-                <a16:creationId xmlns:a16="http://schemas.microsoft.com/office/drawing/2014/main" id="{D9D2D26E-6407-43BB-852F-7CB5FA81EE9F}"/>
+          <p:cNvPr id="313" name="slide-heading-marker-9">
+            <a:extLst xmlns:a="http://schemas.openxmlformats.org/drawingml/2006/main">
+              <a:ext uri="{FF2B5EF4-FFF2-40B4-BE49-F238E27FC236}">
+                <a16:creationId xmlns:a16="http://schemas.microsoft.com/office/drawing/2014/main" id="{42F879FE-5A76-4B89-8D63-00E138E2E6D6}"/>
               </a:ext>
             </a:extLst>
           </p:cNvPr>
@@ -20123,10 +20190,10 @@
       </p:sp>
       <p:sp>
         <p:nvSpPr>
-          <p:cNvPr id="314" name="slide-heading-text-10">
-            <a:extLst xmlns:a="http://schemas.openxmlformats.org/drawingml/2006/main">
-              <a:ext uri="{FF2B5EF4-FFF2-40B4-BE49-F238E27FC236}">
-                <a16:creationId xmlns:a16="http://schemas.microsoft.com/office/drawing/2014/main" id="{495A3B83-4C65-4C13-9FD7-4AD8AF24B897}"/>
+          <p:cNvPr id="314" name="slide-heading-text-9">
+            <a:extLst xmlns:a="http://schemas.openxmlformats.org/drawingml/2006/main">
+              <a:ext uri="{FF2B5EF4-FFF2-40B4-BE49-F238E27FC236}">
+                <a16:creationId xmlns:a16="http://schemas.microsoft.com/office/drawing/2014/main" id="{51CCCEF5-66BF-40EE-8CD5-5797D8C86F95}"/>
               </a:ext>
             </a:extLst>
           </p:cNvPr>
@@ -20172,7 +20239,7 @@
                 <a:ea typeface="Arial"/>
                 <a:cs typeface="Arial"/>
               </a:rPr>
-              <a:t>Find class in Microsoft Teams</a:t>
+              <a:t>Our Saturday class routine</a:t>
             </a:r>
           </a:p>
         </p:txBody>
@@ -20240,7 +20307,7 @@
               <a:buNone/>
             </a:pPr>
             <a:r>
-              <a:t>Find and submit assignments</a:t>
+              <a:t>Open Kids Computer Science</a:t>
             </a:r>
           </a:p>
         </p:txBody>
@@ -20291,7 +20358,7 @@
                   <a:schemeClr val="accent2"/>
                 </a:solidFill>
               </a:rPr>
-              <a:t>{Updates}</a:t>
+              <a:t>{Calendar}</a:t>
             </a:r>
           </a:p>
         </p:txBody>
@@ -20337,7 +20404,7 @@
               <a:buNone/>
             </a:pPr>
             <a:r>
-              <a:t>Important teacher updates</a:t>
+              <a:t>Find the Saturday meeting</a:t>
             </a:r>
           </a:p>
         </p:txBody>
@@ -20383,7 +20450,7 @@
               <a:buNone/>
             </a:pPr>
             <a:r>
-              <a:t>{Assignments}</a:t>
+              <a:t>{Join the Team}</a:t>
             </a:r>
           </a:p>
         </p:txBody>
@@ -20434,7 +20501,7 @@
                   <a:schemeClr val="lt2"/>
                 </a:solidFill>
               </a:rPr>
-              <a:t>{Hangout}</a:t>
+              <a:t>{Ask for help}</a:t>
             </a:r>
           </a:p>
         </p:txBody>
@@ -20480,7 +20547,7 @@
               <a:buNone/>
             </a:pPr>
             <a:r>
-              <a:t>Join extra help after class</a:t>
+              <a:t>Use chat or raise your hand</a:t>
             </a:r>
           </a:p>
         </p:txBody>
@@ -20722,10 +20789,10 @@
       </p:sp>
       <p:sp>
         <p:nvSpPr>
-          <p:cNvPr id="313" name="slide-heading-marker-11">
-            <a:extLst xmlns:a="http://schemas.openxmlformats.org/drawingml/2006/main">
-              <a:ext uri="{FF2B5EF4-FFF2-40B4-BE49-F238E27FC236}">
-                <a16:creationId xmlns:a16="http://schemas.microsoft.com/office/drawing/2014/main" id="{E0D9E6CB-365E-4F2E-9D9B-DBFDD9CB055C}"/>
+          <p:cNvPr id="313" name="slide-heading-marker-10">
+            <a:extLst xmlns:a="http://schemas.openxmlformats.org/drawingml/2006/main">
+              <a:ext uri="{FF2B5EF4-FFF2-40B4-BE49-F238E27FC236}">
+                <a16:creationId xmlns:a16="http://schemas.microsoft.com/office/drawing/2014/main" id="{63954541-69DF-4C20-9DEE-0A6C8AFB9433}"/>
               </a:ext>
             </a:extLst>
           </p:cNvPr>
@@ -20778,10 +20845,10 @@
       </p:sp>
       <p:sp>
         <p:nvSpPr>
-          <p:cNvPr id="314" name="slide-heading-text-11">
-            <a:extLst xmlns:a="http://schemas.openxmlformats.org/drawingml/2006/main">
-              <a:ext uri="{FF2B5EF4-FFF2-40B4-BE49-F238E27FC236}">
-                <a16:creationId xmlns:a16="http://schemas.microsoft.com/office/drawing/2014/main" id="{E036BAB6-753C-4A3C-BB90-409F06C989DB}"/>
+          <p:cNvPr id="314" name="slide-heading-text-10">
+            <a:extLst xmlns:a="http://schemas.openxmlformats.org/drawingml/2006/main">
+              <a:ext uri="{FF2B5EF4-FFF2-40B4-BE49-F238E27FC236}">
+                <a16:creationId xmlns:a16="http://schemas.microsoft.com/office/drawing/2014/main" id="{0B4395C4-C510-4CC0-A34F-DB59179E2792}"/>
               </a:ext>
             </a:extLst>
           </p:cNvPr>
@@ -20827,7 +20894,7 @@
                 <a:ea typeface="Arial"/>
                 <a:cs typeface="Arial"/>
               </a:rPr>
-              <a:t>Know the Teams channels</a:t>
+              <a:t>Find class in Microsoft Teams</a:t>
             </a:r>
           </a:p>
         </p:txBody>
@@ -20895,7 +20962,7 @@
               <a:buNone/>
             </a:pPr>
             <a:r>
-              <a:t>Homework, classwork, or setup</a:t>
+              <a:t>Find and submit assignments</a:t>
             </a:r>
           </a:p>
         </p:txBody>
@@ -20946,7 +21013,7 @@
                   <a:schemeClr val="accent2"/>
                 </a:solidFill>
               </a:rPr>
-              <a:t>{4:30-5:30}</a:t>
+              <a:t>{Updates}</a:t>
             </a:r>
           </a:p>
         </p:txBody>
@@ -20992,7 +21059,7 @@
               <a:buNone/>
             </a:pPr>
             <a:r>
-              <a:t>Pacific Time</a:t>
+              <a:t>Important teacher updates</a:t>
             </a:r>
           </a:p>
         </p:txBody>
@@ -21038,7 +21105,7 @@
               <a:buNone/>
             </a:pPr>
             <a:r>
-              <a:t>{Questions}</a:t>
+              <a:t>{Assignments}</a:t>
             </a:r>
           </a:p>
         </p:txBody>
@@ -21089,7 +21156,7 @@
                   <a:schemeClr val="lt2"/>
                 </a:solidFill>
               </a:rPr>
-              <a:t>{Join Hangout}</a:t>
+              <a:t>{Hangout}</a:t>
             </a:r>
           </a:p>
         </p:txBody>
@@ -21135,7 +21202,7 @@
               <a:buNone/>
             </a:pPr>
             <a:r>
-              <a:t>Assistant teachers are ready to help</a:t>
+              <a:t>Join extra help after class</a:t>
             </a:r>
           </a:p>
         </p:txBody>
@@ -21377,10 +21444,10 @@
       </p:sp>
       <p:sp>
         <p:nvSpPr>
-          <p:cNvPr id="313" name="slide-heading-marker-12">
-            <a:extLst xmlns:a="http://schemas.openxmlformats.org/drawingml/2006/main">
-              <a:ext uri="{FF2B5EF4-FFF2-40B4-BE49-F238E27FC236}">
-                <a16:creationId xmlns:a16="http://schemas.microsoft.com/office/drawing/2014/main" id="{AFA73CC8-D9D6-4500-B08A-A8EA76A0D0B7}"/>
+          <p:cNvPr id="313" name="slide-heading-marker-11">
+            <a:extLst xmlns:a="http://schemas.openxmlformats.org/drawingml/2006/main">
+              <a:ext uri="{FF2B5EF4-FFF2-40B4-BE49-F238E27FC236}">
+                <a16:creationId xmlns:a16="http://schemas.microsoft.com/office/drawing/2014/main" id="{81B557BB-8246-4DFA-8DB9-485EA7DD4918}"/>
               </a:ext>
             </a:extLst>
           </p:cNvPr>
@@ -21433,10 +21500,10 @@
       </p:sp>
       <p:sp>
         <p:nvSpPr>
-          <p:cNvPr id="314" name="slide-heading-text-12">
-            <a:extLst xmlns:a="http://schemas.openxmlformats.org/drawingml/2006/main">
-              <a:ext uri="{FF2B5EF4-FFF2-40B4-BE49-F238E27FC236}">
-                <a16:creationId xmlns:a16="http://schemas.microsoft.com/office/drawing/2014/main" id="{055DA8BF-BF41-474D-9CE9-69D773356B96}"/>
+          <p:cNvPr id="314" name="slide-heading-text-11">
+            <a:extLst xmlns:a="http://schemas.openxmlformats.org/drawingml/2006/main">
+              <a:ext uri="{FF2B5EF4-FFF2-40B4-BE49-F238E27FC236}">
+                <a16:creationId xmlns:a16="http://schemas.microsoft.com/office/drawing/2014/main" id="{74AE04A5-E1E4-4AAB-8943-1A4D6957331D}"/>
               </a:ext>
             </a:extLst>
           </p:cNvPr>
@@ -21482,7 +21549,7 @@
                 <a:ea typeface="Arial"/>
                 <a:cs typeface="Arial"/>
               </a:rPr>
-              <a:t>Use hangout for extra help</a:t>
+              <a:t>Know the Teams channels</a:t>
             </a:r>
           </a:p>
         </p:txBody>
@@ -21550,7 +21617,7 @@
               <a:buNone/>
             </a:pPr>
             <a:r>
-              <a:t>Attend the class on time to be successful</a:t>
+              <a:t>Homework, classwork, or setup</a:t>
             </a:r>
           </a:p>
         </p:txBody>
@@ -21601,10 +21668,7 @@
                   <a:schemeClr val="accent2"/>
                 </a:solidFill>
               </a:rPr>
-              <a:t>{</a:t>
-            </a:r>
-            <a:r>
-              <a:t>Be respectful}</a:t>
+              <a:t>{4:30-5:30}</a:t>
             </a:r>
           </a:p>
         </p:txBody>
@@ -21650,7 +21714,7 @@
               <a:buNone/>
             </a:pPr>
             <a:r>
-              <a:t>Respect your fellow students and treat them as you want to be treated</a:t>
+              <a:t>Pacific Time</a:t>
             </a:r>
           </a:p>
         </p:txBody>
@@ -21696,15 +21760,7 @@
               <a:buNone/>
             </a:pPr>
             <a:r>
-              <a:t>{Be on time</a:t>
-            </a:r>
-            <a:r>
-              <a:rPr>
-                <a:solidFill>
-                  <a:schemeClr val="accent1"/>
-                </a:solidFill>
-              </a:rPr>
-              <a:t>}</a:t>
+              <a:t>{Questions}</a:t>
             </a:r>
           </a:p>
         </p:txBody>
@@ -21755,10 +21811,7 @@
                   <a:schemeClr val="lt2"/>
                 </a:solidFill>
               </a:rPr>
-              <a:t>{</a:t>
-            </a:r>
-            <a:r>
-              <a:t>Be ready}</a:t>
+              <a:t>{Join Hangout}</a:t>
             </a:r>
           </a:p>
         </p:txBody>
@@ -21804,7 +21857,7 @@
               <a:buNone/>
             </a:pPr>
             <a:r>
-              <a:t>Set yourself up for success by bringing the necessary tools</a:t>
+              <a:t>Assistant teachers are ready to help</a:t>
             </a:r>
           </a:p>
         </p:txBody>
@@ -22046,10 +22099,10 @@
       </p:sp>
       <p:sp>
         <p:nvSpPr>
-          <p:cNvPr id="313" name="slide-heading-marker-13">
-            <a:extLst xmlns:a="http://schemas.openxmlformats.org/drawingml/2006/main">
-              <a:ext uri="{FF2B5EF4-FFF2-40B4-BE49-F238E27FC236}">
-                <a16:creationId xmlns:a16="http://schemas.microsoft.com/office/drawing/2014/main" id="{CE43F6CE-4D82-4FBD-9536-475175BA4BAB}"/>
+          <p:cNvPr id="313" name="slide-heading-marker-12">
+            <a:extLst xmlns:a="http://schemas.openxmlformats.org/drawingml/2006/main">
+              <a:ext uri="{FF2B5EF4-FFF2-40B4-BE49-F238E27FC236}">
+                <a16:creationId xmlns:a16="http://schemas.microsoft.com/office/drawing/2014/main" id="{C4AC6F95-A342-4001-9E57-59639F66FCBC}"/>
               </a:ext>
             </a:extLst>
           </p:cNvPr>
@@ -22102,10 +22155,10 @@
       </p:sp>
       <p:sp>
         <p:nvSpPr>
-          <p:cNvPr id="314" name="slide-heading-text-13">
-            <a:extLst xmlns:a="http://schemas.openxmlformats.org/drawingml/2006/main">
-              <a:ext uri="{FF2B5EF4-FFF2-40B4-BE49-F238E27FC236}">
-                <a16:creationId xmlns:a16="http://schemas.microsoft.com/office/drawing/2014/main" id="{83BF32FD-0FAF-4485-80FA-BBFCBD628ABA}"/>
+          <p:cNvPr id="314" name="slide-heading-text-12">
+            <a:extLst xmlns:a="http://schemas.openxmlformats.org/drawingml/2006/main">
+              <a:ext uri="{FF2B5EF4-FFF2-40B4-BE49-F238E27FC236}">
+                <a16:creationId xmlns:a16="http://schemas.microsoft.com/office/drawing/2014/main" id="{920E5DF7-A4E8-401B-BA5A-CC8F5995BC84}"/>
               </a:ext>
             </a:extLst>
           </p:cNvPr>
@@ -22151,7 +22204,7 @@
                 <a:ea typeface="Arial"/>
                 <a:cs typeface="Arial"/>
               </a:rPr>
-              <a:t>Class habits that help everyone</a:t>
+              <a:t>Use hangout for extra help</a:t>
             </a:r>
           </a:p>
         </p:txBody>
@@ -22169,13 +22222,6 @@
 <file path=ppt/slides/slide14.xml><?xml version="1.0" encoding="utf-8"?>
 <p:sld xmlns:p="http://schemas.openxmlformats.org/presentationml/2006/main">
   <p:cSld>
-    <p:bg>
-      <p:bgPr>
-        <a:solidFill xmlns:a="http://schemas.openxmlformats.org/drawingml/2006/main">
-          <a:schemeClr val="lt1"/>
-        </a:solidFill>
-      </p:bgPr>
-    </p:bg>
     <p:spTree>
       <p:nvGrpSpPr>
         <p:cNvPr id="1" name=""/>
@@ -22187,10 +22233,310 @@
       </p:grpSpPr>
       <p:sp>
         <p:nvSpPr>
-          <p:cNvPr id="203" name="Google Shape;203;p24">
-            <a:extLst xmlns:a="http://schemas.openxmlformats.org/drawingml/2006/main">
-              <a:ext uri="{FF2B5EF4-FFF2-40B4-BE49-F238E27FC236}">
-                <a16:creationId xmlns:a16="http://schemas.microsoft.com/office/drawing/2014/main" id="{04D2E2B3-22FD-441D-93E4-32F09B56D5E7}"/>
+          <p:cNvPr id="302" name="Google Shape;302;p30">
+            <a:extLst xmlns:a="http://schemas.openxmlformats.org/drawingml/2006/main">
+              <a:ext uri="{FF2B5EF4-FFF2-40B4-BE49-F238E27FC236}">
+                <a16:creationId xmlns:a16="http://schemas.microsoft.com/office/drawing/2014/main" id="{069093DC-4E13-45FD-972F-EFACFB762C06}"/>
+              </a:ext>
+            </a:extLst>
+          </p:cNvPr>
+          <p:cNvSpPr>
+            <a:spLocks xmlns:a="http://schemas.openxmlformats.org/drawingml/2006/main" noGrp="1"/>
+          </p:cNvSpPr>
+          <p:nvPr>
+            <p:ph type="subTitle" idx="3"/>
+          </p:nvPr>
+        </p:nvSpPr>
+        <p:spPr>
+          <a:xfrm xmlns:a="http://schemas.openxmlformats.org/drawingml/2006/main">
+            <a:off x="1252403" y="2857500"/>
+            <a:ext cx="4190700" cy="384600"/>
+          </a:xfrm>
+          <a:prstGeom xmlns:a="http://schemas.openxmlformats.org/drawingml/2006/main" prst="rect">
+            <a:avLst/>
+          </a:prstGeom>
+        </p:spPr>
+        <p:txBody>
+          <a:bodyPr xmlns:a="http://schemas.openxmlformats.org/drawingml/2006/main" spcFirstLastPara="1" wrap="square" lIns="91425" tIns="91425" rIns="91425" bIns="91425" anchor="t">
+            <a:noAutofit/>
+          </a:bodyPr>
+          <a:lstStyle xmlns:a="http://schemas.openxmlformats.org/drawingml/2006/main"/>
+          <a:p xmlns:a="http://schemas.openxmlformats.org/drawingml/2006/main">
+            <a:pPr marL="0" indent="0" algn="l">
+              <a:spcBef>
+                <a:spcPts val="0"/>
+              </a:spcBef>
+              <a:spcAft>
+                <a:spcPts val="0"/>
+              </a:spcAft>
+              <a:buNone/>
+            </a:pPr>
+            <a:r>
+              <a:t>Attend the class on time to be successful</a:t>
+            </a:r>
+          </a:p>
+        </p:txBody>
+      </p:sp>
+      <p:sp>
+        <p:nvSpPr>
+          <p:cNvPr id="303" name="Google Shape;303;p30">
+            <a:extLst xmlns:a="http://schemas.openxmlformats.org/drawingml/2006/main">
+              <a:ext uri="{FF2B5EF4-FFF2-40B4-BE49-F238E27FC236}">
+                <a16:creationId xmlns:a16="http://schemas.microsoft.com/office/drawing/2014/main" id="{22068794-3762-46E6-9FE4-6EE3ED61B7DC}"/>
+              </a:ext>
+            </a:extLst>
+          </p:cNvPr>
+          <p:cNvSpPr>
+            <a:spLocks xmlns:a="http://schemas.openxmlformats.org/drawingml/2006/main" noGrp="1"/>
+          </p:cNvSpPr>
+          <p:nvPr>
+            <p:ph type="title" idx="0"/>
+          </p:nvPr>
+        </p:nvSpPr>
+        <p:spPr>
+          <a:xfrm xmlns:a="http://schemas.openxmlformats.org/drawingml/2006/main">
+            <a:off x="1252403" y="1022536"/>
+            <a:ext cx="4190700" cy="733500"/>
+          </a:xfrm>
+          <a:prstGeom xmlns:a="http://schemas.openxmlformats.org/drawingml/2006/main" prst="rect">
+            <a:avLst/>
+          </a:prstGeom>
+        </p:spPr>
+        <p:txBody>
+          <a:bodyPr xmlns:a="http://schemas.openxmlformats.org/drawingml/2006/main" spcFirstLastPara="1" wrap="square" lIns="91425" tIns="91425" rIns="91425" bIns="91425" anchor="b">
+            <a:noAutofit/>
+          </a:bodyPr>
+          <a:lstStyle xmlns:a="http://schemas.openxmlformats.org/drawingml/2006/main"/>
+          <a:p xmlns:a="http://schemas.openxmlformats.org/drawingml/2006/main">
+            <a:pPr marL="0" indent="0" algn="l">
+              <a:spcBef>
+                <a:spcPts val="0"/>
+              </a:spcBef>
+              <a:spcAft>
+                <a:spcPts val="0"/>
+              </a:spcAft>
+              <a:buNone/>
+            </a:pPr>
+            <a:r>
+              <a:rPr>
+                <a:solidFill>
+                  <a:schemeClr val="accent2"/>
+                </a:solidFill>
+              </a:rPr>
+              <a:t>{</a:t>
+            </a:r>
+            <a:r>
+              <a:t>Be respectful}</a:t>
+            </a:r>
+          </a:p>
+        </p:txBody>
+      </p:sp>
+      <p:sp>
+        <p:nvSpPr>
+          <p:cNvPr id="304" name="Google Shape;304;p30">
+            <a:extLst xmlns:a="http://schemas.openxmlformats.org/drawingml/2006/main">
+              <a:ext uri="{FF2B5EF4-FFF2-40B4-BE49-F238E27FC236}">
+                <a16:creationId xmlns:a16="http://schemas.microsoft.com/office/drawing/2014/main" id="{4B083477-9C13-4431-934E-B2803526A8A3}"/>
+              </a:ext>
+            </a:extLst>
+          </p:cNvPr>
+          <p:cNvSpPr>
+            <a:spLocks xmlns:a="http://schemas.openxmlformats.org/drawingml/2006/main" noGrp="1"/>
+          </p:cNvSpPr>
+          <p:nvPr>
+            <p:ph type="subTitle" idx="1"/>
+          </p:nvPr>
+        </p:nvSpPr>
+        <p:spPr>
+          <a:xfrm xmlns:a="http://schemas.openxmlformats.org/drawingml/2006/main">
+            <a:off x="1252403" y="1790700"/>
+            <a:ext cx="4190700" cy="384600"/>
+          </a:xfrm>
+          <a:prstGeom xmlns:a="http://schemas.openxmlformats.org/drawingml/2006/main" prst="rect">
+            <a:avLst/>
+          </a:prstGeom>
+        </p:spPr>
+        <p:txBody>
+          <a:bodyPr xmlns:a="http://schemas.openxmlformats.org/drawingml/2006/main" spcFirstLastPara="1" wrap="square" lIns="91425" tIns="91425" rIns="91425" bIns="91425" anchor="t">
+            <a:noAutofit/>
+          </a:bodyPr>
+          <a:lstStyle xmlns:a="http://schemas.openxmlformats.org/drawingml/2006/main"/>
+          <a:p xmlns:a="http://schemas.openxmlformats.org/drawingml/2006/main">
+            <a:pPr marL="0" indent="0" algn="l">
+              <a:spcBef>
+                <a:spcPts val="0"/>
+              </a:spcBef>
+              <a:spcAft>
+                <a:spcPts val="0"/>
+              </a:spcAft>
+              <a:buNone/>
+            </a:pPr>
+            <a:r>
+              <a:t>Respect your fellow students and treat them as you want to be treated</a:t>
+            </a:r>
+          </a:p>
+        </p:txBody>
+      </p:sp>
+      <p:sp>
+        <p:nvSpPr>
+          <p:cNvPr id="305" name="Google Shape;305;p30">
+            <a:extLst xmlns:a="http://schemas.openxmlformats.org/drawingml/2006/main">
+              <a:ext uri="{FF2B5EF4-FFF2-40B4-BE49-F238E27FC236}">
+                <a16:creationId xmlns:a16="http://schemas.microsoft.com/office/drawing/2014/main" id="{8FB84568-B635-4D96-BECD-DDAB98281B56}"/>
+              </a:ext>
+            </a:extLst>
+          </p:cNvPr>
+          <p:cNvSpPr>
+            <a:spLocks xmlns:a="http://schemas.openxmlformats.org/drawingml/2006/main" noGrp="1"/>
+          </p:cNvSpPr>
+          <p:nvPr>
+            <p:ph type="title" idx="2"/>
+          </p:nvPr>
+        </p:nvSpPr>
+        <p:spPr>
+          <a:xfrm xmlns:a="http://schemas.openxmlformats.org/drawingml/2006/main">
+            <a:off x="1252403" y="2080661"/>
+            <a:ext cx="4190700" cy="733500"/>
+          </a:xfrm>
+          <a:prstGeom xmlns:a="http://schemas.openxmlformats.org/drawingml/2006/main" prst="rect">
+            <a:avLst/>
+          </a:prstGeom>
+        </p:spPr>
+        <p:txBody>
+          <a:bodyPr xmlns:a="http://schemas.openxmlformats.org/drawingml/2006/main" spcFirstLastPara="1" wrap="square" lIns="91425" tIns="91425" rIns="91425" bIns="91425" anchor="b">
+            <a:noAutofit/>
+          </a:bodyPr>
+          <a:lstStyle xmlns:a="http://schemas.openxmlformats.org/drawingml/2006/main"/>
+          <a:p xmlns:a="http://schemas.openxmlformats.org/drawingml/2006/main">
+            <a:pPr marL="0" indent="0" algn="l">
+              <a:spcBef>
+                <a:spcPts val="0"/>
+              </a:spcBef>
+              <a:spcAft>
+                <a:spcPts val="0"/>
+              </a:spcAft>
+              <a:buNone/>
+            </a:pPr>
+            <a:r>
+              <a:t>{Be on time</a:t>
+            </a:r>
+            <a:r>
+              <a:rPr>
+                <a:solidFill>
+                  <a:schemeClr val="accent1"/>
+                </a:solidFill>
+              </a:rPr>
+              <a:t>}</a:t>
+            </a:r>
+          </a:p>
+        </p:txBody>
+      </p:sp>
+      <p:sp>
+        <p:nvSpPr>
+          <p:cNvPr id="306" name="Google Shape;306;p30">
+            <a:extLst xmlns:a="http://schemas.openxmlformats.org/drawingml/2006/main">
+              <a:ext uri="{FF2B5EF4-FFF2-40B4-BE49-F238E27FC236}">
+                <a16:creationId xmlns:a16="http://schemas.microsoft.com/office/drawing/2014/main" id="{39D7BB6A-B939-4CF0-8868-1E889722D03D}"/>
+              </a:ext>
+            </a:extLst>
+          </p:cNvPr>
+          <p:cNvSpPr>
+            <a:spLocks xmlns:a="http://schemas.openxmlformats.org/drawingml/2006/main" noGrp="1"/>
+          </p:cNvSpPr>
+          <p:nvPr>
+            <p:ph type="title" idx="4"/>
+          </p:nvPr>
+        </p:nvSpPr>
+        <p:spPr>
+          <a:xfrm xmlns:a="http://schemas.openxmlformats.org/drawingml/2006/main">
+            <a:off x="1252404" y="3138786"/>
+            <a:ext cx="4190700" cy="733500"/>
+          </a:xfrm>
+          <a:prstGeom xmlns:a="http://schemas.openxmlformats.org/drawingml/2006/main" prst="rect">
+            <a:avLst/>
+          </a:prstGeom>
+        </p:spPr>
+        <p:txBody>
+          <a:bodyPr xmlns:a="http://schemas.openxmlformats.org/drawingml/2006/main" spcFirstLastPara="1" wrap="square" lIns="91425" tIns="91425" rIns="91425" bIns="91425" anchor="b">
+            <a:noAutofit/>
+          </a:bodyPr>
+          <a:lstStyle xmlns:a="http://schemas.openxmlformats.org/drawingml/2006/main"/>
+          <a:p xmlns:a="http://schemas.openxmlformats.org/drawingml/2006/main">
+            <a:pPr marL="0" indent="0" algn="l">
+              <a:spcBef>
+                <a:spcPts val="0"/>
+              </a:spcBef>
+              <a:spcAft>
+                <a:spcPts val="0"/>
+              </a:spcAft>
+              <a:buNone/>
+            </a:pPr>
+            <a:r>
+              <a:rPr>
+                <a:solidFill>
+                  <a:schemeClr val="lt2"/>
+                </a:solidFill>
+              </a:rPr>
+              <a:t>{</a:t>
+            </a:r>
+            <a:r>
+              <a:t>Be ready}</a:t>
+            </a:r>
+          </a:p>
+        </p:txBody>
+      </p:sp>
+      <p:sp>
+        <p:nvSpPr>
+          <p:cNvPr id="307" name="Google Shape;307;p30">
+            <a:extLst xmlns:a="http://schemas.openxmlformats.org/drawingml/2006/main">
+              <a:ext uri="{FF2B5EF4-FFF2-40B4-BE49-F238E27FC236}">
+                <a16:creationId xmlns:a16="http://schemas.microsoft.com/office/drawing/2014/main" id="{B1468CD5-D03B-4903-8BF7-9F0C7E81B677}"/>
+              </a:ext>
+            </a:extLst>
+          </p:cNvPr>
+          <p:cNvSpPr>
+            <a:spLocks xmlns:a="http://schemas.openxmlformats.org/drawingml/2006/main" noGrp="1"/>
+          </p:cNvSpPr>
+          <p:nvPr>
+            <p:ph type="subTitle" idx="5"/>
+          </p:nvPr>
+        </p:nvSpPr>
+        <p:spPr>
+          <a:xfrm xmlns:a="http://schemas.openxmlformats.org/drawingml/2006/main">
+            <a:off x="1252404" y="3914775"/>
+            <a:ext cx="4190700" cy="384600"/>
+          </a:xfrm>
+          <a:prstGeom xmlns:a="http://schemas.openxmlformats.org/drawingml/2006/main" prst="rect">
+            <a:avLst/>
+          </a:prstGeom>
+        </p:spPr>
+        <p:txBody>
+          <a:bodyPr xmlns:a="http://schemas.openxmlformats.org/drawingml/2006/main" spcFirstLastPara="1" wrap="square" lIns="91425" tIns="91425" rIns="91425" bIns="91425" anchor="t">
+            <a:noAutofit/>
+          </a:bodyPr>
+          <a:lstStyle xmlns:a="http://schemas.openxmlformats.org/drawingml/2006/main"/>
+          <a:p xmlns:a="http://schemas.openxmlformats.org/drawingml/2006/main">
+            <a:pPr marL="0" indent="0" algn="l">
+              <a:spcBef>
+                <a:spcPts val="0"/>
+              </a:spcBef>
+              <a:spcAft>
+                <a:spcPts val="0"/>
+              </a:spcAft>
+              <a:buNone/>
+            </a:pPr>
+            <a:r>
+              <a:t>Set yourself up for success by bringing the necessary tools</a:t>
+            </a:r>
+          </a:p>
+        </p:txBody>
+      </p:sp>
+      <p:sp>
+        <p:nvSpPr>
+          <p:cNvPr id="308" name="Google Shape;308;p30">
+            <a:extLst xmlns:a="http://schemas.openxmlformats.org/drawingml/2006/main">
+              <a:ext uri="{FF2B5EF4-FFF2-40B4-BE49-F238E27FC236}">
+                <a16:creationId xmlns:a16="http://schemas.microsoft.com/office/drawing/2014/main" id="{B78C6BA0-ED32-48DC-85F2-B4E00038ECB9}"/>
               </a:ext>
             </a:extLst>
           </p:cNvPr>
@@ -22200,9 +22546,68 @@
           <p:nvPr/>
         </p:nvSpPr>
         <p:spPr>
+          <a:xfrm xmlns:a="http://schemas.openxmlformats.org/drawingml/2006/main">
+            <a:off x="7721100" y="3868300"/>
+            <a:ext cx="702900" cy="606900"/>
+          </a:xfrm>
+          <a:prstGeom xmlns:a="http://schemas.openxmlformats.org/drawingml/2006/main" prst="rect">
+            <a:avLst/>
+          </a:prstGeom>
+          <a:noFill xmlns:a="http://schemas.openxmlformats.org/drawingml/2006/main"/>
+          <a:ln xmlns:a="http://schemas.openxmlformats.org/drawingml/2006/main">
+            <a:noFill/>
+          </a:ln>
+        </p:spPr>
+        <p:txBody>
+          <a:bodyPr xmlns:a="http://schemas.openxmlformats.org/drawingml/2006/main" spcFirstLastPara="1" wrap="square" lIns="91425" tIns="91425" rIns="91425" bIns="91425" anchor="ctr">
+            <a:noAutofit/>
+          </a:bodyPr>
+          <a:lstStyle xmlns:a="http://schemas.openxmlformats.org/drawingml/2006/main"/>
+          <a:p xmlns:a="http://schemas.openxmlformats.org/drawingml/2006/main">
+            <a:pPr marL="0" indent="0" algn="l">
+              <a:lnSpc>
+                <a:spcPct val="90000"/>
+              </a:lnSpc>
+              <a:spcBef>
+                <a:spcPts val="0"/>
+              </a:spcBef>
+              <a:spcAft>
+                <a:spcPts val="0"/>
+              </a:spcAft>
+              <a:buNone/>
+            </a:pPr>
+            <a:r>
+              <a:rPr sz="3600">
+                <a:solidFill>
+                  <a:schemeClr val="dk1"/>
+                </a:solidFill>
+                <a:latin typeface="Quantico"/>
+                <a:ea typeface="Quantico"/>
+                <a:cs typeface="Quantico"/>
+              </a:rPr>
+              <a:t>/&gt;</a:t>
+            </a:r>
+          </a:p>
+        </p:txBody>
+      </p:sp>
+      <p:sp>
+        <p:nvSpPr>
+          <p:cNvPr id="310" name="Google Shape;310;p30">
+            <a:extLst xmlns:a="http://schemas.openxmlformats.org/drawingml/2006/main">
+              <a:ext uri="{FF2B5EF4-FFF2-40B4-BE49-F238E27FC236}">
+                <a16:creationId xmlns:a16="http://schemas.microsoft.com/office/drawing/2014/main" id="{09B6DAF8-8302-4623-897D-26165EA51BCA}"/>
+              </a:ext>
+            </a:extLst>
+          </p:cNvPr>
+          <p:cNvSpPr>
+            <a:spLocks xmlns:a="http://schemas.openxmlformats.org/drawingml/2006/main" noGrp="1"/>
+          </p:cNvSpPr>
+          <p:nvPr/>
+        </p:nvSpPr>
+        <p:spPr>
           <a:xfrm xmlns:a="http://schemas.openxmlformats.org/drawingml/2006/main" rot="0">
-            <a:off x="772525" y="726625"/>
-            <a:ext cx="6578100" cy="3438300"/>
+            <a:off x="5827600" y="697350"/>
+            <a:ext cx="2119744" cy="1127400"/>
           </a:xfrm>
           <a:prstGeom xmlns:a="http://schemas.openxmlformats.org/drawingml/2006/main" prst="rect">
             <a:avLst/>
@@ -22239,10 +22644,10 @@
       </p:sp>
       <p:sp>
         <p:nvSpPr>
-          <p:cNvPr id="204" name="Google Shape;204;p24">
-            <a:extLst xmlns:a="http://schemas.openxmlformats.org/drawingml/2006/main">
-              <a:ext uri="{FF2B5EF4-FFF2-40B4-BE49-F238E27FC236}">
-                <a16:creationId xmlns:a16="http://schemas.microsoft.com/office/drawing/2014/main" id="{B1D93451-B164-4654-813D-9B921C836466}"/>
+          <p:cNvPr id="311" name="Google Shape;311;p30">
+            <a:extLst xmlns:a="http://schemas.openxmlformats.org/drawingml/2006/main">
+              <a:ext uri="{FF2B5EF4-FFF2-40B4-BE49-F238E27FC236}">
+                <a16:creationId xmlns:a16="http://schemas.microsoft.com/office/drawing/2014/main" id="{742D31F6-3221-48C9-8E30-90EE2ECD8DA0}"/>
               </a:ext>
             </a:extLst>
           </p:cNvPr>
@@ -22253,8 +22658,8 @@
         </p:nvSpPr>
         <p:spPr>
           <a:xfrm xmlns:a="http://schemas.openxmlformats.org/drawingml/2006/main" rot="0">
-            <a:off x="772525" y="726625"/>
-            <a:ext cx="6578100" cy="255300"/>
+            <a:off x="5827603" y="697350"/>
+            <a:ext cx="2119744" cy="255300"/>
           </a:xfrm>
           <a:prstGeom xmlns:a="http://schemas.openxmlformats.org/drawingml/2006/main" prst="rect">
             <a:avLst/>
@@ -22291,10 +22696,10 @@
       </p:sp>
       <p:sp>
         <p:nvSpPr>
-          <p:cNvPr id="206" name="Google Shape;206;p24">
-            <a:extLst xmlns:a="http://schemas.openxmlformats.org/drawingml/2006/main">
-              <a:ext uri="{FF2B5EF4-FFF2-40B4-BE49-F238E27FC236}">
-                <a16:creationId xmlns:a16="http://schemas.microsoft.com/office/drawing/2014/main" id="{EE5B2A1D-12A2-40AB-8D58-2E80CD3BFA13}"/>
+          <p:cNvPr id="312" name="Google Shape;312;p30">
+            <a:extLst xmlns:a="http://schemas.openxmlformats.org/drawingml/2006/main">
+              <a:ext uri="{FF2B5EF4-FFF2-40B4-BE49-F238E27FC236}">
+                <a16:creationId xmlns:a16="http://schemas.microsoft.com/office/drawing/2014/main" id="{1197A6D5-E686-4D9D-B748-4B534E594BA4}"/>
               </a:ext>
             </a:extLst>
           </p:cNvPr>
@@ -22304,334 +22709,8 @@
           <p:nvPr/>
         </p:nvSpPr>
         <p:spPr>
-          <a:xfrm xmlns:a="http://schemas.openxmlformats.org/drawingml/2006/main" rot="0">
-            <a:off x="4506625" y="3349925"/>
-            <a:ext cx="3447300" cy="962400"/>
-          </a:xfrm>
-          <a:prstGeom xmlns:a="http://schemas.openxmlformats.org/drawingml/2006/main" prst="rect">
-            <a:avLst/>
-          </a:prstGeom>
-          <a:solidFill xmlns:a="http://schemas.openxmlformats.org/drawingml/2006/main">
-            <a:schemeClr val="lt1"/>
-          </a:solidFill>
-          <a:ln xmlns:a="http://schemas.openxmlformats.org/drawingml/2006/main" w="9525" cmpd="sng">
-            <a:solidFill>
-              <a:schemeClr val="dk1"/>
-            </a:solidFill>
-            <a:prstDash val="solid"/>
-            <a:headEnd type="none" w="sm" len="sm"/>
-            <a:tailEnd type="none" w="sm" len="sm"/>
-          </a:ln>
-        </p:spPr>
-        <p:txBody>
-          <a:bodyPr xmlns:a="http://schemas.openxmlformats.org/drawingml/2006/main" spcFirstLastPara="1" wrap="square" lIns="91425" tIns="91425" rIns="91425" bIns="91425" anchor="ctr">
-            <a:noAutofit/>
-          </a:bodyPr>
-          <a:lstStyle xmlns:a="http://schemas.openxmlformats.org/drawingml/2006/main"/>
-          <a:p xmlns:a="http://schemas.openxmlformats.org/drawingml/2006/main">
-            <a:pPr marL="0" indent="0" algn="l">
-              <a:spcBef>
-                <a:spcPts val="0"/>
-              </a:spcBef>
-              <a:spcAft>
-                <a:spcPts val="0"/>
-              </a:spcAft>
-              <a:buNone/>
-            </a:pPr>
-          </a:p>
-        </p:txBody>
-      </p:sp>
-      <p:sp>
-        <p:nvSpPr>
-          <p:cNvPr id="207" name="Google Shape;207;p24">
-            <a:extLst xmlns:a="http://schemas.openxmlformats.org/drawingml/2006/main">
-              <a:ext uri="{FF2B5EF4-FFF2-40B4-BE49-F238E27FC236}">
-                <a16:creationId xmlns:a16="http://schemas.microsoft.com/office/drawing/2014/main" id="{2045E92C-FD95-4F72-B1D3-175AA5BC638E}"/>
-              </a:ext>
-            </a:extLst>
-          </p:cNvPr>
-          <p:cNvSpPr>
-            <a:spLocks xmlns:a="http://schemas.openxmlformats.org/drawingml/2006/main" noGrp="1"/>
-          </p:cNvSpPr>
-          <p:nvPr/>
-        </p:nvSpPr>
-        <p:spPr>
-          <a:xfrm xmlns:a="http://schemas.openxmlformats.org/drawingml/2006/main" rot="0">
-            <a:off x="4506625" y="3349925"/>
-            <a:ext cx="3447300" cy="255300"/>
-          </a:xfrm>
-          <a:prstGeom xmlns:a="http://schemas.openxmlformats.org/drawingml/2006/main" prst="rect">
-            <a:avLst/>
-          </a:prstGeom>
-          <a:solidFill xmlns:a="http://schemas.openxmlformats.org/drawingml/2006/main">
-            <a:schemeClr val="lt1"/>
-          </a:solidFill>
-          <a:ln xmlns:a="http://schemas.openxmlformats.org/drawingml/2006/main" w="9525" cmpd="sng">
-            <a:solidFill>
-              <a:schemeClr val="dk1"/>
-            </a:solidFill>
-            <a:prstDash val="solid"/>
-            <a:headEnd type="none" w="sm" len="sm"/>
-            <a:tailEnd type="none" w="sm" len="sm"/>
-          </a:ln>
-        </p:spPr>
-        <p:txBody>
-          <a:bodyPr xmlns:a="http://schemas.openxmlformats.org/drawingml/2006/main" spcFirstLastPara="1" wrap="square" lIns="91425" tIns="91425" rIns="91425" bIns="91425" anchor="ctr">
-            <a:noAutofit/>
-          </a:bodyPr>
-          <a:lstStyle xmlns:a="http://schemas.openxmlformats.org/drawingml/2006/main"/>
-          <a:p xmlns:a="http://schemas.openxmlformats.org/drawingml/2006/main">
-            <a:pPr marL="0" indent="0" algn="l">
-              <a:spcBef>
-                <a:spcPts val="0"/>
-              </a:spcBef>
-              <a:spcAft>
-                <a:spcPts val="0"/>
-              </a:spcAft>
-              <a:buNone/>
-            </a:pPr>
-          </a:p>
-        </p:txBody>
-      </p:sp>
-      <p:sp>
-        <p:nvSpPr>
-          <p:cNvPr id="209" name="Google Shape;209;p24">
-            <a:extLst xmlns:a="http://schemas.openxmlformats.org/drawingml/2006/main">
-              <a:ext uri="{FF2B5EF4-FFF2-40B4-BE49-F238E27FC236}">
-                <a16:creationId xmlns:a16="http://schemas.microsoft.com/office/drawing/2014/main" id="{0AE4C7F2-E08C-4333-A7CB-F563247B91DD}"/>
-              </a:ext>
-            </a:extLst>
-          </p:cNvPr>
-          <p:cNvSpPr>
-            <a:spLocks xmlns:a="http://schemas.openxmlformats.org/drawingml/2006/main" noGrp="1"/>
-          </p:cNvSpPr>
-          <p:nvPr/>
-        </p:nvSpPr>
-        <p:spPr>
-          <a:xfrm xmlns:a="http://schemas.openxmlformats.org/drawingml/2006/main" rot="0">
-            <a:off x="6849418" y="1309987"/>
-            <a:ext cx="1864825" cy="1637031"/>
-          </a:xfrm>
-          <a:prstGeom xmlns:a="http://schemas.openxmlformats.org/drawingml/2006/main" prst="rect">
-            <a:avLst/>
-          </a:prstGeom>
-          <a:solidFill xmlns:a="http://schemas.openxmlformats.org/drawingml/2006/main">
-            <a:schemeClr val="lt1"/>
-          </a:solidFill>
-          <a:ln xmlns:a="http://schemas.openxmlformats.org/drawingml/2006/main" w="9525" cmpd="sng">
-            <a:solidFill>
-              <a:schemeClr val="dk1"/>
-            </a:solidFill>
-            <a:prstDash val="solid"/>
-            <a:headEnd type="none" w="sm" len="sm"/>
-            <a:tailEnd type="none" w="sm" len="sm"/>
-          </a:ln>
-        </p:spPr>
-        <p:txBody>
-          <a:bodyPr xmlns:a="http://schemas.openxmlformats.org/drawingml/2006/main" spcFirstLastPara="1" wrap="square" lIns="91425" tIns="91425" rIns="91425" bIns="91425" anchor="ctr">
-            <a:noAutofit/>
-          </a:bodyPr>
-          <a:lstStyle xmlns:a="http://schemas.openxmlformats.org/drawingml/2006/main"/>
-          <a:p xmlns:a="http://schemas.openxmlformats.org/drawingml/2006/main">
-            <a:pPr marL="0" indent="0" algn="l">
-              <a:spcBef>
-                <a:spcPts val="0"/>
-              </a:spcBef>
-              <a:spcAft>
-                <a:spcPts val="0"/>
-              </a:spcAft>
-              <a:buNone/>
-            </a:pPr>
-          </a:p>
-        </p:txBody>
-      </p:sp>
-      <p:sp>
-        <p:nvSpPr>
-          <p:cNvPr id="210" name="Google Shape;210;p24">
-            <a:extLst xmlns:a="http://schemas.openxmlformats.org/drawingml/2006/main">
-              <a:ext uri="{FF2B5EF4-FFF2-40B4-BE49-F238E27FC236}">
-                <a16:creationId xmlns:a16="http://schemas.microsoft.com/office/drawing/2014/main" id="{976E2B22-EB9F-4CC7-ABF6-B9854C645052}"/>
-              </a:ext>
-            </a:extLst>
-          </p:cNvPr>
-          <p:cNvSpPr>
-            <a:spLocks xmlns:a="http://schemas.openxmlformats.org/drawingml/2006/main" noGrp="1"/>
-          </p:cNvSpPr>
-          <p:nvPr/>
-        </p:nvSpPr>
-        <p:spPr>
-          <a:xfrm xmlns:a="http://schemas.openxmlformats.org/drawingml/2006/main" rot="0">
-            <a:off x="6849425" y="1309976"/>
-            <a:ext cx="1864825" cy="255307"/>
-          </a:xfrm>
-          <a:prstGeom xmlns:a="http://schemas.openxmlformats.org/drawingml/2006/main" prst="rect">
-            <a:avLst/>
-          </a:prstGeom>
-          <a:solidFill xmlns:a="http://schemas.openxmlformats.org/drawingml/2006/main">
-            <a:schemeClr val="lt1"/>
-          </a:solidFill>
-          <a:ln xmlns:a="http://schemas.openxmlformats.org/drawingml/2006/main" w="9525" cmpd="sng">
-            <a:solidFill>
-              <a:schemeClr val="dk1"/>
-            </a:solidFill>
-            <a:prstDash val="solid"/>
-            <a:headEnd type="none" w="sm" len="sm"/>
-            <a:tailEnd type="none" w="sm" len="sm"/>
-          </a:ln>
-        </p:spPr>
-        <p:txBody>
-          <a:bodyPr xmlns:a="http://schemas.openxmlformats.org/drawingml/2006/main" spcFirstLastPara="1" wrap="square" lIns="91425" tIns="91425" rIns="91425" bIns="91425" anchor="ctr">
-            <a:noAutofit/>
-          </a:bodyPr>
-          <a:lstStyle xmlns:a="http://schemas.openxmlformats.org/drawingml/2006/main"/>
-          <a:p xmlns:a="http://schemas.openxmlformats.org/drawingml/2006/main">
-            <a:pPr marL="0" indent="0" algn="l">
-              <a:spcBef>
-                <a:spcPts val="0"/>
-              </a:spcBef>
-              <a:spcAft>
-                <a:spcPts val="0"/>
-              </a:spcAft>
-              <a:buNone/>
-            </a:pPr>
-          </a:p>
-        </p:txBody>
-      </p:sp>
-      <p:sp>
-        <p:nvSpPr>
-          <p:cNvPr id="211" name="Google Shape;211;p24">
-            <a:extLst xmlns:a="http://schemas.openxmlformats.org/drawingml/2006/main">
-              <a:ext uri="{FF2B5EF4-FFF2-40B4-BE49-F238E27FC236}">
-                <a16:creationId xmlns:a16="http://schemas.microsoft.com/office/drawing/2014/main" id="{6775FBA8-32A6-4C5D-858A-FBE91F9F8C9B}"/>
-              </a:ext>
-            </a:extLst>
-          </p:cNvPr>
-          <p:cNvSpPr>
-            <a:spLocks xmlns:a="http://schemas.openxmlformats.org/drawingml/2006/main" noGrp="1"/>
-          </p:cNvSpPr>
-          <p:nvPr/>
-        </p:nvSpPr>
-        <p:spPr>
           <a:xfrm xmlns:a="http://schemas.openxmlformats.org/drawingml/2006/main">
-            <a:off x="1084325" y="2012800"/>
-            <a:ext cx="702900" cy="606900"/>
-          </a:xfrm>
-          <a:prstGeom xmlns:a="http://schemas.openxmlformats.org/drawingml/2006/main" prst="rect">
-            <a:avLst/>
-          </a:prstGeom>
-          <a:noFill xmlns:a="http://schemas.openxmlformats.org/drawingml/2006/main"/>
-          <a:ln xmlns:a="http://schemas.openxmlformats.org/drawingml/2006/main">
-            <a:noFill/>
-          </a:ln>
-        </p:spPr>
-        <p:txBody>
-          <a:bodyPr xmlns:a="http://schemas.openxmlformats.org/drawingml/2006/main" spcFirstLastPara="1" wrap="square" lIns="91425" tIns="91425" rIns="91425" bIns="91425" anchor="ctr">
-            <a:noAutofit/>
-          </a:bodyPr>
-          <a:lstStyle xmlns:a="http://schemas.openxmlformats.org/drawingml/2006/main"/>
-          <a:p xmlns:a="http://schemas.openxmlformats.org/drawingml/2006/main">
-            <a:pPr marL="0" indent="0" algn="l">
-              <a:lnSpc>
-                <a:spcPct val="90000"/>
-              </a:lnSpc>
-              <a:spcBef>
-                <a:spcPts val="0"/>
-              </a:spcBef>
-              <a:spcAft>
-                <a:spcPts val="0"/>
-              </a:spcAft>
-              <a:buNone/>
-            </a:pPr>
-            <a:r>
-              <a:rPr sz="3600">
-                <a:solidFill>
-                  <a:schemeClr val="lt2"/>
-                </a:solidFill>
-                <a:latin typeface="Quantico"/>
-                <a:ea typeface="Quantico"/>
-                <a:cs typeface="Quantico"/>
-              </a:rPr>
-              <a:t>&lt;/</a:t>
-            </a:r>
-          </a:p>
-        </p:txBody>
-      </p:sp>
-      <p:sp>
-        <p:nvSpPr>
-          <p:cNvPr id="212" name="Google Shape;212;p24">
-            <a:extLst xmlns:a="http://schemas.openxmlformats.org/drawingml/2006/main">
-              <a:ext uri="{FF2B5EF4-FFF2-40B4-BE49-F238E27FC236}">
-                <a16:creationId xmlns:a16="http://schemas.microsoft.com/office/drawing/2014/main" id="{E705969D-D0F1-46F7-91BE-19AAFA3FBB61}"/>
-              </a:ext>
-            </a:extLst>
-          </p:cNvPr>
-          <p:cNvSpPr>
-            <a:spLocks xmlns:a="http://schemas.openxmlformats.org/drawingml/2006/main" noGrp="1"/>
-          </p:cNvSpPr>
-          <p:nvPr/>
-        </p:nvSpPr>
-        <p:spPr>
-          <a:xfrm xmlns:a="http://schemas.openxmlformats.org/drawingml/2006/main">
-            <a:off x="5878825" y="1974375"/>
-            <a:ext cx="702900" cy="606900"/>
-          </a:xfrm>
-          <a:prstGeom xmlns:a="http://schemas.openxmlformats.org/drawingml/2006/main" prst="rect">
-            <a:avLst/>
-          </a:prstGeom>
-          <a:noFill xmlns:a="http://schemas.openxmlformats.org/drawingml/2006/main"/>
-          <a:ln xmlns:a="http://schemas.openxmlformats.org/drawingml/2006/main">
-            <a:noFill/>
-          </a:ln>
-        </p:spPr>
-        <p:txBody>
-          <a:bodyPr xmlns:a="http://schemas.openxmlformats.org/drawingml/2006/main" spcFirstLastPara="1" wrap="square" lIns="91425" tIns="91425" rIns="91425" bIns="91425" anchor="ctr">
-            <a:noAutofit/>
-          </a:bodyPr>
-          <a:lstStyle xmlns:a="http://schemas.openxmlformats.org/drawingml/2006/main"/>
-          <a:p xmlns:a="http://schemas.openxmlformats.org/drawingml/2006/main">
-            <a:pPr marL="0" indent="0" algn="l">
-              <a:lnSpc>
-                <a:spcPct val="90000"/>
-              </a:lnSpc>
-              <a:spcBef>
-                <a:spcPts val="0"/>
-              </a:spcBef>
-              <a:spcAft>
-                <a:spcPts val="0"/>
-              </a:spcAft>
-              <a:buNone/>
-            </a:pPr>
-            <a:r>
-              <a:rPr sz="3600">
-                <a:solidFill>
-                  <a:schemeClr val="dk1"/>
-                </a:solidFill>
-                <a:latin typeface="Quantico"/>
-                <a:ea typeface="Quantico"/>
-                <a:cs typeface="Quantico"/>
-              </a:rPr>
-              <a:t>/&gt;</a:t>
-            </a:r>
-          </a:p>
-        </p:txBody>
-      </p:sp>
-      <p:sp>
-        <p:nvSpPr>
-          <p:cNvPr id="213" name="Google Shape;213;p24">
-            <a:extLst xmlns:a="http://schemas.openxmlformats.org/drawingml/2006/main">
-              <a:ext uri="{FF2B5EF4-FFF2-40B4-BE49-F238E27FC236}">
-                <a16:creationId xmlns:a16="http://schemas.microsoft.com/office/drawing/2014/main" id="{FBDE6D5E-521E-4730-84D0-2601494F8F61}"/>
-              </a:ext>
-            </a:extLst>
-          </p:cNvPr>
-          <p:cNvSpPr>
-            <a:spLocks xmlns:a="http://schemas.openxmlformats.org/drawingml/2006/main" noGrp="1"/>
-          </p:cNvSpPr>
-          <p:nvPr/>
-        </p:nvSpPr>
-        <p:spPr>
-          <a:xfrm xmlns:a="http://schemas.openxmlformats.org/drawingml/2006/main">
-            <a:off x="7198457" y="1873600"/>
+            <a:off x="6279082" y="1016750"/>
             <a:ext cx="1216800" cy="746100"/>
           </a:xfrm>
           <a:prstGeom xmlns:a="http://schemas.openxmlformats.org/drawingml/2006/main" prst="rect">
@@ -22689,159 +22768,66 @@
       </p:sp>
       <p:sp>
         <p:nvSpPr>
-          <p:cNvPr id="214" name="Google Shape;214;p24">
-            <a:extLst xmlns:a="http://schemas.openxmlformats.org/drawingml/2006/main">
-              <a:ext uri="{FF2B5EF4-FFF2-40B4-BE49-F238E27FC236}">
-                <a16:creationId xmlns:a16="http://schemas.microsoft.com/office/drawing/2014/main" id="{5EE6EEBD-605C-4EFD-803C-779B4C388CA3}"/>
-              </a:ext>
-            </a:extLst>
-          </p:cNvPr>
-          <p:cNvSpPr>
-            <a:spLocks xmlns:a="http://schemas.openxmlformats.org/drawingml/2006/main" noGrp="1"/>
-          </p:cNvSpPr>
-          <p:nvPr>
-            <p:ph type="ctrTitle" idx="0"/>
-          </p:nvPr>
+          <p:cNvPr id="313" name="slide-heading-marker-13">
+            <a:extLst xmlns:a="http://schemas.openxmlformats.org/drawingml/2006/main">
+              <a:ext uri="{FF2B5EF4-FFF2-40B4-BE49-F238E27FC236}">
+                <a16:creationId xmlns:a16="http://schemas.microsoft.com/office/drawing/2014/main" id="{4F82ACE8-61F6-46BC-A2E0-C802663B9E7F}"/>
+              </a:ext>
+            </a:extLst>
+          </p:cNvPr>
+          <p:cNvSpPr>
+            <a:spLocks xmlns:a="http://schemas.openxmlformats.org/drawingml/2006/main" noGrp="1"/>
+          </p:cNvSpPr>
+          <p:nvPr/>
         </p:nvSpPr>
         <p:spPr>
           <a:xfrm xmlns:a="http://schemas.openxmlformats.org/drawingml/2006/main">
-            <a:off x="1875450" y="1974375"/>
-            <a:ext cx="4148400" cy="746100"/>
-          </a:xfrm>
-          <a:prstGeom xmlns:a="http://schemas.openxmlformats.org/drawingml/2006/main" prst="rect">
-            <a:avLst/>
-          </a:prstGeom>
-        </p:spPr>
-        <p:txBody>
-          <a:bodyPr xmlns:a="http://schemas.openxmlformats.org/drawingml/2006/main" spcFirstLastPara="1" wrap="square" lIns="91425" tIns="91425" rIns="91425" bIns="91425" anchor="t">
-            <a:noAutofit/>
-          </a:bodyPr>
-          <a:lstStyle xmlns:a="http://schemas.openxmlformats.org/drawingml/2006/main"/>
-          <a:p xmlns:a="http://schemas.openxmlformats.org/drawingml/2006/main">
-            <a:pPr marL="0" indent="0" algn="l">
-              <a:spcBef>
-                <a:spcPts val="0"/>
-              </a:spcBef>
-              <a:spcAft>
-                <a:spcPts val="0"/>
-              </a:spcAft>
-              <a:buNone/>
+            <a:off x="742950" y="447675"/>
+            <a:ext cx="476250" cy="323850"/>
+          </a:xfrm>
+          <a:prstGeom xmlns:a="http://schemas.openxmlformats.org/drawingml/2006/main" prst="rect">
+            <a:avLst/>
+          </a:prstGeom>
+          <a:noFill xmlns:a="http://schemas.openxmlformats.org/drawingml/2006/main"/>
+          <a:ln xmlns:a="http://schemas.openxmlformats.org/drawingml/2006/main" w="0">
+            <a:noFill/>
+            <a:prstDash val="solid"/>
+          </a:ln>
+        </p:spPr>
+        <p:txBody>
+          <a:bodyPr xmlns:a="http://schemas.openxmlformats.org/drawingml/2006/main"/>
+          <a:lstStyle xmlns:a="http://schemas.openxmlformats.org/drawingml/2006/main"/>
+          <a:p xmlns:a="http://schemas.openxmlformats.org/drawingml/2006/main">
+            <a:pPr algn="l">
+              <a:defRPr sz="1950" b="1">
+                <a:solidFill>
+                  <a:srgbClr val="FFDB5D"/>
+                </a:solidFill>
+                <a:latin typeface="Source Code Pro"/>
+                <a:ea typeface="Source Code Pro"/>
+                <a:cs typeface="Source Code Pro"/>
+              </a:defRPr>
             </a:pPr>
             <a:r>
-              <a:t>Kahoot time!</a:t>
-            </a:r>
-          </a:p>
-        </p:txBody>
-      </p:sp>
-      <p:sp>
-        <p:nvSpPr>
-          <p:cNvPr id="215" name="Google Shape;215;p24">
-            <a:extLst xmlns:a="http://schemas.openxmlformats.org/drawingml/2006/main">
-              <a:ext uri="{FF2B5EF4-FFF2-40B4-BE49-F238E27FC236}">
-                <a16:creationId xmlns:a16="http://schemas.microsoft.com/office/drawing/2014/main" id="{561222E6-86D3-4D0D-888F-084113278088}"/>
-              </a:ext>
-            </a:extLst>
-          </p:cNvPr>
-          <p:cNvSpPr>
-            <a:spLocks xmlns:a="http://schemas.openxmlformats.org/drawingml/2006/main" noGrp="1"/>
-          </p:cNvSpPr>
-          <p:nvPr>
-            <p:ph type="subTitle" idx="1"/>
-          </p:nvPr>
-        </p:nvSpPr>
-        <p:spPr>
-          <a:xfrm xmlns:a="http://schemas.openxmlformats.org/drawingml/2006/main">
-            <a:off x="4751650" y="3680600"/>
-            <a:ext cx="3043800" cy="528600"/>
-          </a:xfrm>
-          <a:prstGeom xmlns:a="http://schemas.openxmlformats.org/drawingml/2006/main" prst="rect">
-            <a:avLst/>
-          </a:prstGeom>
-        </p:spPr>
-        <p:txBody>
-          <a:bodyPr xmlns:a="http://schemas.openxmlformats.org/drawingml/2006/main" spcFirstLastPara="1" wrap="square" lIns="91425" tIns="91425" rIns="91425" bIns="91425" anchor="ctr">
-            <a:noAutofit/>
-          </a:bodyPr>
-          <a:lstStyle xmlns:a="http://schemas.openxmlformats.org/drawingml/2006/main"/>
-          <a:p xmlns:a="http://schemas.openxmlformats.org/drawingml/2006/main">
-            <a:pPr marL="0" indent="0" algn="l">
-              <a:spcBef>
-                <a:spcPts val="0"/>
-              </a:spcBef>
-              <a:spcAft>
-                <a:spcPts val="0"/>
-              </a:spcAft>
-              <a:buNone/>
-            </a:pPr>
-            <a:r>
-              <a:rPr sz="1400"/>
-              <a:t>15 fun questions. Learn the game.</a:t>
-            </a:r>
-          </a:p>
-        </p:txBody>
-      </p:sp>
-      <p:sp>
-        <p:nvSpPr>
-          <p:cNvPr id="216" name="Google Shape;216;p24">
-            <a:extLst xmlns:a="http://schemas.openxmlformats.org/drawingml/2006/main">
-              <a:ext uri="{FF2B5EF4-FFF2-40B4-BE49-F238E27FC236}">
-                <a16:creationId xmlns:a16="http://schemas.microsoft.com/office/drawing/2014/main" id="{3CB2B6C1-3795-43B8-9621-54C5BB056D62}"/>
-              </a:ext>
-            </a:extLst>
-          </p:cNvPr>
-          <p:cNvSpPr>
-            <a:spLocks xmlns:a="http://schemas.openxmlformats.org/drawingml/2006/main" noGrp="1"/>
-          </p:cNvSpPr>
-          <p:nvPr/>
-        </p:nvSpPr>
-        <p:spPr>
-          <a:xfrm xmlns:a="http://schemas.openxmlformats.org/drawingml/2006/main">
-            <a:off x="536125" y="117311"/>
-            <a:ext cx="1999500" cy="180300"/>
-          </a:xfrm>
-          <a:prstGeom xmlns:a="http://schemas.openxmlformats.org/drawingml/2006/main" prst="rect">
-            <a:avLst/>
-          </a:prstGeom>
-          <a:noFill xmlns:a="http://schemas.openxmlformats.org/drawingml/2006/main"/>
-          <a:ln xmlns:a="http://schemas.openxmlformats.org/drawingml/2006/main">
-            <a:noFill/>
-          </a:ln>
-        </p:spPr>
-        <p:txBody>
-          <a:bodyPr xmlns:a="http://schemas.openxmlformats.org/drawingml/2006/main" spcFirstLastPara="1" wrap="square" lIns="91425" tIns="91425" rIns="91425" bIns="91425" anchor="ctr">
-            <a:noAutofit/>
-          </a:bodyPr>
-          <a:lstStyle xmlns:a="http://schemas.openxmlformats.org/drawingml/2006/main"/>
-          <a:p xmlns:a="http://schemas.openxmlformats.org/drawingml/2006/main">
-            <a:pPr marL="0" indent="0" algn="l">
-              <a:spcBef>
-                <a:spcPts val="0"/>
-              </a:spcBef>
-              <a:spcAft>
-                <a:spcPts val="0"/>
-              </a:spcAft>
-              <a:buNone/>
-            </a:pPr>
-            <a:r>
-              <a:rPr sz="1000">
+              <a:rPr sz="1950" b="1">
                 <a:solidFill>
-                  <a:schemeClr val="dk1"/>
+                  <a:srgbClr val="FFDB5D"/>
                 </a:solidFill>
                 <a:latin typeface="Source Code Pro"/>
                 <a:ea typeface="Source Code Pro"/>
                 <a:cs typeface="Source Code Pro"/>
               </a:rPr>
-              <a:t>Classroom Presentation</a:t>
+              <a:t>&lt;/</a:t>
             </a:r>
           </a:p>
         </p:txBody>
       </p:sp>
       <p:sp>
         <p:nvSpPr>
-          <p:cNvPr id="217" name="Google Shape;217;p24">
-            <a:extLst xmlns:a="http://schemas.openxmlformats.org/drawingml/2006/main">
-              <a:ext uri="{FF2B5EF4-FFF2-40B4-BE49-F238E27FC236}">
-                <a16:creationId xmlns:a16="http://schemas.microsoft.com/office/drawing/2014/main" id="{1BCE298B-ADAB-4360-9E4B-303C95BFACCE}"/>
+          <p:cNvPr id="314" name="slide-heading-text-13">
+            <a:extLst xmlns:a="http://schemas.openxmlformats.org/drawingml/2006/main">
+              <a:ext uri="{FF2B5EF4-FFF2-40B4-BE49-F238E27FC236}">
+                <a16:creationId xmlns:a16="http://schemas.microsoft.com/office/drawing/2014/main" id="{BD1026FB-DB3E-426C-9133-827B9BDA3E11}"/>
               </a:ext>
             </a:extLst>
           </p:cNvPr>
@@ -22852,42 +22838,42 @@
         </p:nvSpPr>
         <p:spPr>
           <a:xfrm xmlns:a="http://schemas.openxmlformats.org/drawingml/2006/main">
-            <a:off x="3730325" y="117311"/>
-            <a:ext cx="1999500" cy="180300"/>
+            <a:off x="1152525" y="428625"/>
+            <a:ext cx="5619750" cy="361950"/>
           </a:xfrm>
           <a:prstGeom xmlns:a="http://schemas.openxmlformats.org/drawingml/2006/main" prst="rect">
             <a:avLst/>
           </a:prstGeom>
           <a:noFill xmlns:a="http://schemas.openxmlformats.org/drawingml/2006/main"/>
-          <a:ln xmlns:a="http://schemas.openxmlformats.org/drawingml/2006/main">
+          <a:ln xmlns:a="http://schemas.openxmlformats.org/drawingml/2006/main" w="0">
             <a:noFill/>
+            <a:prstDash val="solid"/>
           </a:ln>
         </p:spPr>
         <p:txBody>
-          <a:bodyPr xmlns:a="http://schemas.openxmlformats.org/drawingml/2006/main" spcFirstLastPara="1" wrap="square" lIns="91425" tIns="91425" rIns="91425" bIns="91425" anchor="ctr">
-            <a:noAutofit/>
-          </a:bodyPr>
-          <a:lstStyle xmlns:a="http://schemas.openxmlformats.org/drawingml/2006/main"/>
-          <a:p xmlns:a="http://schemas.openxmlformats.org/drawingml/2006/main">
-            <a:pPr marL="0" indent="0" algn="l">
-              <a:spcBef>
-                <a:spcPts val="0"/>
-              </a:spcBef>
-              <a:spcAft>
-                <a:spcPts val="0"/>
-              </a:spcAft>
-              <a:buNone/>
+          <a:bodyPr xmlns:a="http://schemas.openxmlformats.org/drawingml/2006/main"/>
+          <a:lstStyle xmlns:a="http://schemas.openxmlformats.org/drawingml/2006/main"/>
+          <a:p xmlns:a="http://schemas.openxmlformats.org/drawingml/2006/main">
+            <a:pPr algn="l">
+              <a:defRPr sz="1800" b="0">
+                <a:solidFill>
+                  <a:srgbClr val="FFFFFF"/>
+                </a:solidFill>
+                <a:latin typeface="Arial"/>
+                <a:ea typeface="Arial"/>
+                <a:cs typeface="Arial"/>
+              </a:defRPr>
             </a:pPr>
             <a:r>
-              <a:rPr sz="1000">
+              <a:rPr sz="1800" b="0">
                 <a:solidFill>
-                  <a:schemeClr val="dk1"/>
+                  <a:srgbClr val="FFFFFF"/>
                 </a:solidFill>
-                <a:latin typeface="Source Code Pro"/>
-                <a:ea typeface="Source Code Pro"/>
-                <a:cs typeface="Source Code Pro"/>
+                <a:latin typeface="Arial"/>
+                <a:ea typeface="Arial"/>
+                <a:cs typeface="Arial"/>
               </a:rPr>
-              <a:t>. . .</a:t>
+              <a:t>Class habits that help everyone</a:t>
             </a:r>
           </a:p>
         </p:txBody>
@@ -22895,7 +22881,7 @@
     </p:spTree>
     <p:extLst>
       <p:ext uri="{BB962C8B-B14F-4D97-AF65-F5344CB8AC3E}">
-        <p14:creationId xmlns:p14="http://schemas.microsoft.com/office/powerpoint/2010/main" val="592295941"/>
+        <p14:creationId xmlns:p14="http://schemas.microsoft.com/office/powerpoint/2010/main" val="694519266"/>
       </p:ext>
     </p:extLst>
   </p:cSld>
@@ -23464,7 +23450,7 @@
               <a:buNone/>
             </a:pPr>
             <a:r>
-              <a:t>Break time</a:t>
+              <a:t>Kahoot time!</a:t>
             </a:r>
           </a:p>
         </p:txBody>
@@ -23511,7 +23497,7 @@
             </a:pPr>
             <a:r>
               <a:rPr sz="1400"/>
-              <a:t>Return at 11:00 AM Pacific.</a:t>
+              <a:t>15 fun questions. Learn the game.</a:t>
             </a:r>
           </a:p>
         </p:txBody>
@@ -24200,7 +24186,7 @@
               <a:buNone/>
             </a:pPr>
             <a:r>
-              <a:t>Typing practice</a:t>
+              <a:t>Break time</a:t>
             </a:r>
           </a:p>
         </p:txBody>
@@ -24247,7 +24233,7 @@
             </a:pPr>
             <a:r>
               <a:rPr sz="1400"/>
-              <a:t>Accuracy first. Speed comes later.</a:t>
+              <a:t>Return at 11:00 AM Pacific.</a:t>
             </a:r>
           </a:p>
         </p:txBody>
@@ -24377,6 +24363,13 @@
 <file path=ppt/slides/slide17.xml><?xml version="1.0" encoding="utf-8"?>
 <p:sld xmlns:p="http://schemas.openxmlformats.org/presentationml/2006/main">
   <p:cSld>
+    <p:bg>
+      <p:bgPr>
+        <a:solidFill xmlns:a="http://schemas.openxmlformats.org/drawingml/2006/main">
+          <a:schemeClr val="lt1"/>
+        </a:solidFill>
+      </p:bgPr>
+    </p:bg>
     <p:spTree>
       <p:nvGrpSpPr>
         <p:cNvPr id="1" name=""/>
@@ -24388,36 +24381,353 @@
       </p:grpSpPr>
       <p:sp>
         <p:nvSpPr>
-          <p:cNvPr id="302" name="Google Shape;302;p30">
-            <a:extLst xmlns:a="http://schemas.openxmlformats.org/drawingml/2006/main">
-              <a:ext uri="{FF2B5EF4-FFF2-40B4-BE49-F238E27FC236}">
-                <a16:creationId xmlns:a16="http://schemas.microsoft.com/office/drawing/2014/main" id="{069093DC-4E13-45FD-972F-EFACFB762C06}"/>
-              </a:ext>
-            </a:extLst>
-          </p:cNvPr>
-          <p:cNvSpPr>
-            <a:spLocks xmlns:a="http://schemas.openxmlformats.org/drawingml/2006/main" noGrp="1"/>
-          </p:cNvSpPr>
-          <p:nvPr>
-            <p:ph type="subTitle" idx="3"/>
-          </p:nvPr>
+          <p:cNvPr id="203" name="Google Shape;203;p24">
+            <a:extLst xmlns:a="http://schemas.openxmlformats.org/drawingml/2006/main">
+              <a:ext uri="{FF2B5EF4-FFF2-40B4-BE49-F238E27FC236}">
+                <a16:creationId xmlns:a16="http://schemas.microsoft.com/office/drawing/2014/main" id="{04D2E2B3-22FD-441D-93E4-32F09B56D5E7}"/>
+              </a:ext>
+            </a:extLst>
+          </p:cNvPr>
+          <p:cNvSpPr>
+            <a:spLocks xmlns:a="http://schemas.openxmlformats.org/drawingml/2006/main" noGrp="1"/>
+          </p:cNvSpPr>
+          <p:nvPr/>
+        </p:nvSpPr>
+        <p:spPr>
+          <a:xfrm xmlns:a="http://schemas.openxmlformats.org/drawingml/2006/main" rot="0">
+            <a:off x="772525" y="726625"/>
+            <a:ext cx="6578100" cy="3438300"/>
+          </a:xfrm>
+          <a:prstGeom xmlns:a="http://schemas.openxmlformats.org/drawingml/2006/main" prst="rect">
+            <a:avLst/>
+          </a:prstGeom>
+          <a:solidFill xmlns:a="http://schemas.openxmlformats.org/drawingml/2006/main">
+            <a:schemeClr val="lt1"/>
+          </a:solidFill>
+          <a:ln xmlns:a="http://schemas.openxmlformats.org/drawingml/2006/main" w="9525" cmpd="sng">
+            <a:solidFill>
+              <a:schemeClr val="dk1"/>
+            </a:solidFill>
+            <a:prstDash val="solid"/>
+            <a:headEnd type="none" w="sm" len="sm"/>
+            <a:tailEnd type="none" w="sm" len="sm"/>
+          </a:ln>
+        </p:spPr>
+        <p:txBody>
+          <a:bodyPr xmlns:a="http://schemas.openxmlformats.org/drawingml/2006/main" spcFirstLastPara="1" wrap="square" lIns="91425" tIns="91425" rIns="91425" bIns="91425" anchor="ctr">
+            <a:noAutofit/>
+          </a:bodyPr>
+          <a:lstStyle xmlns:a="http://schemas.openxmlformats.org/drawingml/2006/main"/>
+          <a:p xmlns:a="http://schemas.openxmlformats.org/drawingml/2006/main">
+            <a:pPr marL="0" indent="0" algn="l">
+              <a:spcBef>
+                <a:spcPts val="0"/>
+              </a:spcBef>
+              <a:spcAft>
+                <a:spcPts val="0"/>
+              </a:spcAft>
+              <a:buNone/>
+            </a:pPr>
+          </a:p>
+        </p:txBody>
+      </p:sp>
+      <p:sp>
+        <p:nvSpPr>
+          <p:cNvPr id="204" name="Google Shape;204;p24">
+            <a:extLst xmlns:a="http://schemas.openxmlformats.org/drawingml/2006/main">
+              <a:ext uri="{FF2B5EF4-FFF2-40B4-BE49-F238E27FC236}">
+                <a16:creationId xmlns:a16="http://schemas.microsoft.com/office/drawing/2014/main" id="{B1D93451-B164-4654-813D-9B921C836466}"/>
+              </a:ext>
+            </a:extLst>
+          </p:cNvPr>
+          <p:cNvSpPr>
+            <a:spLocks xmlns:a="http://schemas.openxmlformats.org/drawingml/2006/main" noGrp="1"/>
+          </p:cNvSpPr>
+          <p:nvPr/>
+        </p:nvSpPr>
+        <p:spPr>
+          <a:xfrm xmlns:a="http://schemas.openxmlformats.org/drawingml/2006/main" rot="0">
+            <a:off x="772525" y="726625"/>
+            <a:ext cx="6578100" cy="255300"/>
+          </a:xfrm>
+          <a:prstGeom xmlns:a="http://schemas.openxmlformats.org/drawingml/2006/main" prst="rect">
+            <a:avLst/>
+          </a:prstGeom>
+          <a:solidFill xmlns:a="http://schemas.openxmlformats.org/drawingml/2006/main">
+            <a:schemeClr val="lt1"/>
+          </a:solidFill>
+          <a:ln xmlns:a="http://schemas.openxmlformats.org/drawingml/2006/main" w="9525" cmpd="sng">
+            <a:solidFill>
+              <a:schemeClr val="dk1"/>
+            </a:solidFill>
+            <a:prstDash val="solid"/>
+            <a:headEnd type="none" w="sm" len="sm"/>
+            <a:tailEnd type="none" w="sm" len="sm"/>
+          </a:ln>
+        </p:spPr>
+        <p:txBody>
+          <a:bodyPr xmlns:a="http://schemas.openxmlformats.org/drawingml/2006/main" spcFirstLastPara="1" wrap="square" lIns="91425" tIns="91425" rIns="91425" bIns="91425" anchor="ctr">
+            <a:noAutofit/>
+          </a:bodyPr>
+          <a:lstStyle xmlns:a="http://schemas.openxmlformats.org/drawingml/2006/main"/>
+          <a:p xmlns:a="http://schemas.openxmlformats.org/drawingml/2006/main">
+            <a:pPr marL="0" indent="0" algn="l">
+              <a:spcBef>
+                <a:spcPts val="0"/>
+              </a:spcBef>
+              <a:spcAft>
+                <a:spcPts val="0"/>
+              </a:spcAft>
+              <a:buNone/>
+            </a:pPr>
+          </a:p>
+        </p:txBody>
+      </p:sp>
+      <p:sp>
+        <p:nvSpPr>
+          <p:cNvPr id="206" name="Google Shape;206;p24">
+            <a:extLst xmlns:a="http://schemas.openxmlformats.org/drawingml/2006/main">
+              <a:ext uri="{FF2B5EF4-FFF2-40B4-BE49-F238E27FC236}">
+                <a16:creationId xmlns:a16="http://schemas.microsoft.com/office/drawing/2014/main" id="{EE5B2A1D-12A2-40AB-8D58-2E80CD3BFA13}"/>
+              </a:ext>
+            </a:extLst>
+          </p:cNvPr>
+          <p:cNvSpPr>
+            <a:spLocks xmlns:a="http://schemas.openxmlformats.org/drawingml/2006/main" noGrp="1"/>
+          </p:cNvSpPr>
+          <p:nvPr/>
+        </p:nvSpPr>
+        <p:spPr>
+          <a:xfrm xmlns:a="http://schemas.openxmlformats.org/drawingml/2006/main" rot="0">
+            <a:off x="4506625" y="3349925"/>
+            <a:ext cx="3447300" cy="962400"/>
+          </a:xfrm>
+          <a:prstGeom xmlns:a="http://schemas.openxmlformats.org/drawingml/2006/main" prst="rect">
+            <a:avLst/>
+          </a:prstGeom>
+          <a:solidFill xmlns:a="http://schemas.openxmlformats.org/drawingml/2006/main">
+            <a:schemeClr val="lt1"/>
+          </a:solidFill>
+          <a:ln xmlns:a="http://schemas.openxmlformats.org/drawingml/2006/main" w="9525" cmpd="sng">
+            <a:solidFill>
+              <a:schemeClr val="dk1"/>
+            </a:solidFill>
+            <a:prstDash val="solid"/>
+            <a:headEnd type="none" w="sm" len="sm"/>
+            <a:tailEnd type="none" w="sm" len="sm"/>
+          </a:ln>
+        </p:spPr>
+        <p:txBody>
+          <a:bodyPr xmlns:a="http://schemas.openxmlformats.org/drawingml/2006/main" spcFirstLastPara="1" wrap="square" lIns="91425" tIns="91425" rIns="91425" bIns="91425" anchor="ctr">
+            <a:noAutofit/>
+          </a:bodyPr>
+          <a:lstStyle xmlns:a="http://schemas.openxmlformats.org/drawingml/2006/main"/>
+          <a:p xmlns:a="http://schemas.openxmlformats.org/drawingml/2006/main">
+            <a:pPr marL="0" indent="0" algn="l">
+              <a:spcBef>
+                <a:spcPts val="0"/>
+              </a:spcBef>
+              <a:spcAft>
+                <a:spcPts val="0"/>
+              </a:spcAft>
+              <a:buNone/>
+            </a:pPr>
+          </a:p>
+        </p:txBody>
+      </p:sp>
+      <p:sp>
+        <p:nvSpPr>
+          <p:cNvPr id="207" name="Google Shape;207;p24">
+            <a:extLst xmlns:a="http://schemas.openxmlformats.org/drawingml/2006/main">
+              <a:ext uri="{FF2B5EF4-FFF2-40B4-BE49-F238E27FC236}">
+                <a16:creationId xmlns:a16="http://schemas.microsoft.com/office/drawing/2014/main" id="{2045E92C-FD95-4F72-B1D3-175AA5BC638E}"/>
+              </a:ext>
+            </a:extLst>
+          </p:cNvPr>
+          <p:cNvSpPr>
+            <a:spLocks xmlns:a="http://schemas.openxmlformats.org/drawingml/2006/main" noGrp="1"/>
+          </p:cNvSpPr>
+          <p:nvPr/>
+        </p:nvSpPr>
+        <p:spPr>
+          <a:xfrm xmlns:a="http://schemas.openxmlformats.org/drawingml/2006/main" rot="0">
+            <a:off x="4506625" y="3349925"/>
+            <a:ext cx="3447300" cy="255300"/>
+          </a:xfrm>
+          <a:prstGeom xmlns:a="http://schemas.openxmlformats.org/drawingml/2006/main" prst="rect">
+            <a:avLst/>
+          </a:prstGeom>
+          <a:solidFill xmlns:a="http://schemas.openxmlformats.org/drawingml/2006/main">
+            <a:schemeClr val="lt1"/>
+          </a:solidFill>
+          <a:ln xmlns:a="http://schemas.openxmlformats.org/drawingml/2006/main" w="9525" cmpd="sng">
+            <a:solidFill>
+              <a:schemeClr val="dk1"/>
+            </a:solidFill>
+            <a:prstDash val="solid"/>
+            <a:headEnd type="none" w="sm" len="sm"/>
+            <a:tailEnd type="none" w="sm" len="sm"/>
+          </a:ln>
+        </p:spPr>
+        <p:txBody>
+          <a:bodyPr xmlns:a="http://schemas.openxmlformats.org/drawingml/2006/main" spcFirstLastPara="1" wrap="square" lIns="91425" tIns="91425" rIns="91425" bIns="91425" anchor="ctr">
+            <a:noAutofit/>
+          </a:bodyPr>
+          <a:lstStyle xmlns:a="http://schemas.openxmlformats.org/drawingml/2006/main"/>
+          <a:p xmlns:a="http://schemas.openxmlformats.org/drawingml/2006/main">
+            <a:pPr marL="0" indent="0" algn="l">
+              <a:spcBef>
+                <a:spcPts val="0"/>
+              </a:spcBef>
+              <a:spcAft>
+                <a:spcPts val="0"/>
+              </a:spcAft>
+              <a:buNone/>
+            </a:pPr>
+          </a:p>
+        </p:txBody>
+      </p:sp>
+      <p:sp>
+        <p:nvSpPr>
+          <p:cNvPr id="209" name="Google Shape;209;p24">
+            <a:extLst xmlns:a="http://schemas.openxmlformats.org/drawingml/2006/main">
+              <a:ext uri="{FF2B5EF4-FFF2-40B4-BE49-F238E27FC236}">
+                <a16:creationId xmlns:a16="http://schemas.microsoft.com/office/drawing/2014/main" id="{0AE4C7F2-E08C-4333-A7CB-F563247B91DD}"/>
+              </a:ext>
+            </a:extLst>
+          </p:cNvPr>
+          <p:cNvSpPr>
+            <a:spLocks xmlns:a="http://schemas.openxmlformats.org/drawingml/2006/main" noGrp="1"/>
+          </p:cNvSpPr>
+          <p:nvPr/>
+        </p:nvSpPr>
+        <p:spPr>
+          <a:xfrm xmlns:a="http://schemas.openxmlformats.org/drawingml/2006/main" rot="0">
+            <a:off x="6849418" y="1309987"/>
+            <a:ext cx="1864825" cy="1637031"/>
+          </a:xfrm>
+          <a:prstGeom xmlns:a="http://schemas.openxmlformats.org/drawingml/2006/main" prst="rect">
+            <a:avLst/>
+          </a:prstGeom>
+          <a:solidFill xmlns:a="http://schemas.openxmlformats.org/drawingml/2006/main">
+            <a:schemeClr val="lt1"/>
+          </a:solidFill>
+          <a:ln xmlns:a="http://schemas.openxmlformats.org/drawingml/2006/main" w="9525" cmpd="sng">
+            <a:solidFill>
+              <a:schemeClr val="dk1"/>
+            </a:solidFill>
+            <a:prstDash val="solid"/>
+            <a:headEnd type="none" w="sm" len="sm"/>
+            <a:tailEnd type="none" w="sm" len="sm"/>
+          </a:ln>
+        </p:spPr>
+        <p:txBody>
+          <a:bodyPr xmlns:a="http://schemas.openxmlformats.org/drawingml/2006/main" spcFirstLastPara="1" wrap="square" lIns="91425" tIns="91425" rIns="91425" bIns="91425" anchor="ctr">
+            <a:noAutofit/>
+          </a:bodyPr>
+          <a:lstStyle xmlns:a="http://schemas.openxmlformats.org/drawingml/2006/main"/>
+          <a:p xmlns:a="http://schemas.openxmlformats.org/drawingml/2006/main">
+            <a:pPr marL="0" indent="0" algn="l">
+              <a:spcBef>
+                <a:spcPts val="0"/>
+              </a:spcBef>
+              <a:spcAft>
+                <a:spcPts val="0"/>
+              </a:spcAft>
+              <a:buNone/>
+            </a:pPr>
+          </a:p>
+        </p:txBody>
+      </p:sp>
+      <p:sp>
+        <p:nvSpPr>
+          <p:cNvPr id="210" name="Google Shape;210;p24">
+            <a:extLst xmlns:a="http://schemas.openxmlformats.org/drawingml/2006/main">
+              <a:ext uri="{FF2B5EF4-FFF2-40B4-BE49-F238E27FC236}">
+                <a16:creationId xmlns:a16="http://schemas.microsoft.com/office/drawing/2014/main" id="{976E2B22-EB9F-4CC7-ABF6-B9854C645052}"/>
+              </a:ext>
+            </a:extLst>
+          </p:cNvPr>
+          <p:cNvSpPr>
+            <a:spLocks xmlns:a="http://schemas.openxmlformats.org/drawingml/2006/main" noGrp="1"/>
+          </p:cNvSpPr>
+          <p:nvPr/>
+        </p:nvSpPr>
+        <p:spPr>
+          <a:xfrm xmlns:a="http://schemas.openxmlformats.org/drawingml/2006/main" rot="0">
+            <a:off x="6849425" y="1309976"/>
+            <a:ext cx="1864825" cy="255307"/>
+          </a:xfrm>
+          <a:prstGeom xmlns:a="http://schemas.openxmlformats.org/drawingml/2006/main" prst="rect">
+            <a:avLst/>
+          </a:prstGeom>
+          <a:solidFill xmlns:a="http://schemas.openxmlformats.org/drawingml/2006/main">
+            <a:schemeClr val="lt1"/>
+          </a:solidFill>
+          <a:ln xmlns:a="http://schemas.openxmlformats.org/drawingml/2006/main" w="9525" cmpd="sng">
+            <a:solidFill>
+              <a:schemeClr val="dk1"/>
+            </a:solidFill>
+            <a:prstDash val="solid"/>
+            <a:headEnd type="none" w="sm" len="sm"/>
+            <a:tailEnd type="none" w="sm" len="sm"/>
+          </a:ln>
+        </p:spPr>
+        <p:txBody>
+          <a:bodyPr xmlns:a="http://schemas.openxmlformats.org/drawingml/2006/main" spcFirstLastPara="1" wrap="square" lIns="91425" tIns="91425" rIns="91425" bIns="91425" anchor="ctr">
+            <a:noAutofit/>
+          </a:bodyPr>
+          <a:lstStyle xmlns:a="http://schemas.openxmlformats.org/drawingml/2006/main"/>
+          <a:p xmlns:a="http://schemas.openxmlformats.org/drawingml/2006/main">
+            <a:pPr marL="0" indent="0" algn="l">
+              <a:spcBef>
+                <a:spcPts val="0"/>
+              </a:spcBef>
+              <a:spcAft>
+                <a:spcPts val="0"/>
+              </a:spcAft>
+              <a:buNone/>
+            </a:pPr>
+          </a:p>
+        </p:txBody>
+      </p:sp>
+      <p:sp>
+        <p:nvSpPr>
+          <p:cNvPr id="211" name="Google Shape;211;p24">
+            <a:extLst xmlns:a="http://schemas.openxmlformats.org/drawingml/2006/main">
+              <a:ext uri="{FF2B5EF4-FFF2-40B4-BE49-F238E27FC236}">
+                <a16:creationId xmlns:a16="http://schemas.microsoft.com/office/drawing/2014/main" id="{6775FBA8-32A6-4C5D-858A-FBE91F9F8C9B}"/>
+              </a:ext>
+            </a:extLst>
+          </p:cNvPr>
+          <p:cNvSpPr>
+            <a:spLocks xmlns:a="http://schemas.openxmlformats.org/drawingml/2006/main" noGrp="1"/>
+          </p:cNvSpPr>
+          <p:nvPr/>
         </p:nvSpPr>
         <p:spPr>
           <a:xfrm xmlns:a="http://schemas.openxmlformats.org/drawingml/2006/main">
-            <a:off x="1252403" y="2857500"/>
-            <a:ext cx="4190700" cy="384600"/>
-          </a:xfrm>
-          <a:prstGeom xmlns:a="http://schemas.openxmlformats.org/drawingml/2006/main" prst="rect">
-            <a:avLst/>
-          </a:prstGeom>
-        </p:spPr>
-        <p:txBody>
-          <a:bodyPr xmlns:a="http://schemas.openxmlformats.org/drawingml/2006/main" spcFirstLastPara="1" wrap="square" lIns="91425" tIns="91425" rIns="91425" bIns="91425" anchor="t">
+            <a:off x="1084325" y="2012800"/>
+            <a:ext cx="702900" cy="606900"/>
+          </a:xfrm>
+          <a:prstGeom xmlns:a="http://schemas.openxmlformats.org/drawingml/2006/main" prst="rect">
+            <a:avLst/>
+          </a:prstGeom>
+          <a:noFill xmlns:a="http://schemas.openxmlformats.org/drawingml/2006/main"/>
+          <a:ln xmlns:a="http://schemas.openxmlformats.org/drawingml/2006/main">
+            <a:noFill/>
+          </a:ln>
+        </p:spPr>
+        <p:txBody>
+          <a:bodyPr xmlns:a="http://schemas.openxmlformats.org/drawingml/2006/main" spcFirstLastPara="1" wrap="square" lIns="91425" tIns="91425" rIns="91425" bIns="91425" anchor="ctr">
             <a:noAutofit/>
           </a:bodyPr>
           <a:lstStyle xmlns:a="http://schemas.openxmlformats.org/drawingml/2006/main"/>
           <a:p xmlns:a="http://schemas.openxmlformats.org/drawingml/2006/main">
             <a:pPr marL="0" indent="0" algn="l">
+              <a:lnSpc>
+                <a:spcPct val="90000"/>
+              </a:lnSpc>
               <a:spcBef>
                 <a:spcPts val="0"/>
               </a:spcBef>
@@ -24427,268 +24737,36 @@
               <a:buNone/>
             </a:pPr>
             <a:r>
-              <a:t>Helps when someone gets stuck</a:t>
-            </a:r>
-          </a:p>
-        </p:txBody>
-      </p:sp>
-      <p:sp>
-        <p:nvSpPr>
-          <p:cNvPr id="303" name="Google Shape;303;p30">
-            <a:extLst xmlns:a="http://schemas.openxmlformats.org/drawingml/2006/main">
-              <a:ext uri="{FF2B5EF4-FFF2-40B4-BE49-F238E27FC236}">
-                <a16:creationId xmlns:a16="http://schemas.microsoft.com/office/drawing/2014/main" id="{22068794-3762-46E6-9FE4-6EE3ED61B7DC}"/>
-              </a:ext>
-            </a:extLst>
-          </p:cNvPr>
-          <p:cNvSpPr>
-            <a:spLocks xmlns:a="http://schemas.openxmlformats.org/drawingml/2006/main" noGrp="1"/>
-          </p:cNvSpPr>
-          <p:nvPr>
-            <p:ph type="title" idx="0"/>
-          </p:nvPr>
-        </p:nvSpPr>
-        <p:spPr>
-          <a:xfrm xmlns:a="http://schemas.openxmlformats.org/drawingml/2006/main">
-            <a:off x="1252403" y="1022536"/>
-            <a:ext cx="4190700" cy="733500"/>
-          </a:xfrm>
-          <a:prstGeom xmlns:a="http://schemas.openxmlformats.org/drawingml/2006/main" prst="rect">
-            <a:avLst/>
-          </a:prstGeom>
-        </p:spPr>
-        <p:txBody>
-          <a:bodyPr xmlns:a="http://schemas.openxmlformats.org/drawingml/2006/main" spcFirstLastPara="1" wrap="square" lIns="91425" tIns="91425" rIns="91425" bIns="91425" anchor="b">
-            <a:noAutofit/>
-          </a:bodyPr>
-          <a:lstStyle xmlns:a="http://schemas.openxmlformats.org/drawingml/2006/main"/>
-          <a:p xmlns:a="http://schemas.openxmlformats.org/drawingml/2006/main">
-            <a:pPr marL="0" indent="0" algn="l">
-              <a:spcBef>
-                <a:spcPts val="0"/>
-              </a:spcBef>
-              <a:spcAft>
-                <a:spcPts val="0"/>
-              </a:spcAft>
-              <a:buNone/>
-            </a:pPr>
-            <a:r>
-              <a:rPr>
-                <a:solidFill>
-                  <a:schemeClr val="accent2"/>
-                </a:solidFill>
-              </a:rPr>
-              <a:t>{Captain}</a:t>
-            </a:r>
-          </a:p>
-        </p:txBody>
-      </p:sp>
-      <p:sp>
-        <p:nvSpPr>
-          <p:cNvPr id="304" name="Google Shape;304;p30">
-            <a:extLst xmlns:a="http://schemas.openxmlformats.org/drawingml/2006/main">
-              <a:ext uri="{FF2B5EF4-FFF2-40B4-BE49-F238E27FC236}">
-                <a16:creationId xmlns:a16="http://schemas.microsoft.com/office/drawing/2014/main" id="{4B083477-9C13-4431-934E-B2803526A8A3}"/>
-              </a:ext>
-            </a:extLst>
-          </p:cNvPr>
-          <p:cNvSpPr>
-            <a:spLocks xmlns:a="http://schemas.openxmlformats.org/drawingml/2006/main" noGrp="1"/>
-          </p:cNvSpPr>
-          <p:nvPr>
-            <p:ph type="subTitle" idx="1"/>
-          </p:nvPr>
-        </p:nvSpPr>
-        <p:spPr>
-          <a:xfrm xmlns:a="http://schemas.openxmlformats.org/drawingml/2006/main">
-            <a:off x="1252403" y="1790700"/>
-            <a:ext cx="4190700" cy="384600"/>
-          </a:xfrm>
-          <a:prstGeom xmlns:a="http://schemas.openxmlformats.org/drawingml/2006/main" prst="rect">
-            <a:avLst/>
-          </a:prstGeom>
-        </p:spPr>
-        <p:txBody>
-          <a:bodyPr xmlns:a="http://schemas.openxmlformats.org/drawingml/2006/main" spcFirstLastPara="1" wrap="square" lIns="91425" tIns="91425" rIns="91425" bIns="91425" anchor="t">
-            <a:noAutofit/>
-          </a:bodyPr>
-          <a:lstStyle xmlns:a="http://schemas.openxmlformats.org/drawingml/2006/main"/>
-          <a:p xmlns:a="http://schemas.openxmlformats.org/drawingml/2006/main">
-            <a:pPr marL="0" indent="0" algn="l">
-              <a:spcBef>
-                <a:spcPts val="0"/>
-              </a:spcBef>
-              <a:spcAft>
-                <a:spcPts val="0"/>
-              </a:spcAft>
-              <a:buNone/>
-            </a:pPr>
-            <a:r>
-              <a:t>Keeps the crew on the mission</a:t>
-            </a:r>
-          </a:p>
-        </p:txBody>
-      </p:sp>
-      <p:sp>
-        <p:nvSpPr>
-          <p:cNvPr id="305" name="Google Shape;305;p30">
-            <a:extLst xmlns:a="http://schemas.openxmlformats.org/drawingml/2006/main">
-              <a:ext uri="{FF2B5EF4-FFF2-40B4-BE49-F238E27FC236}">
-                <a16:creationId xmlns:a16="http://schemas.microsoft.com/office/drawing/2014/main" id="{8FB84568-B635-4D96-BECD-DDAB98281B56}"/>
-              </a:ext>
-            </a:extLst>
-          </p:cNvPr>
-          <p:cNvSpPr>
-            <a:spLocks xmlns:a="http://schemas.openxmlformats.org/drawingml/2006/main" noGrp="1"/>
-          </p:cNvSpPr>
-          <p:nvPr>
-            <p:ph type="title" idx="2"/>
-          </p:nvPr>
-        </p:nvSpPr>
-        <p:spPr>
-          <a:xfrm xmlns:a="http://schemas.openxmlformats.org/drawingml/2006/main">
-            <a:off x="1252403" y="2080661"/>
-            <a:ext cx="4190700" cy="733500"/>
-          </a:xfrm>
-          <a:prstGeom xmlns:a="http://schemas.openxmlformats.org/drawingml/2006/main" prst="rect">
-            <a:avLst/>
-          </a:prstGeom>
-        </p:spPr>
-        <p:txBody>
-          <a:bodyPr xmlns:a="http://schemas.openxmlformats.org/drawingml/2006/main" spcFirstLastPara="1" wrap="square" lIns="91425" tIns="91425" rIns="91425" bIns="91425" anchor="b">
-            <a:noAutofit/>
-          </a:bodyPr>
-          <a:lstStyle xmlns:a="http://schemas.openxmlformats.org/drawingml/2006/main"/>
-          <a:p xmlns:a="http://schemas.openxmlformats.org/drawingml/2006/main">
-            <a:pPr marL="0" indent="0" algn="l">
-              <a:spcBef>
-                <a:spcPts val="0"/>
-              </a:spcBef>
-              <a:spcAft>
-                <a:spcPts val="0"/>
-              </a:spcAft>
-              <a:buNone/>
-            </a:pPr>
-            <a:r>
-              <a:t>{Coach}</a:t>
-            </a:r>
-          </a:p>
-        </p:txBody>
-      </p:sp>
-      <p:sp>
-        <p:nvSpPr>
-          <p:cNvPr id="306" name="Google Shape;306;p30">
-            <a:extLst xmlns:a="http://schemas.openxmlformats.org/drawingml/2006/main">
-              <a:ext uri="{FF2B5EF4-FFF2-40B4-BE49-F238E27FC236}">
-                <a16:creationId xmlns:a16="http://schemas.microsoft.com/office/drawing/2014/main" id="{39D7BB6A-B939-4CF0-8868-1E889722D03D}"/>
-              </a:ext>
-            </a:extLst>
-          </p:cNvPr>
-          <p:cNvSpPr>
-            <a:spLocks xmlns:a="http://schemas.openxmlformats.org/drawingml/2006/main" noGrp="1"/>
-          </p:cNvSpPr>
-          <p:nvPr>
-            <p:ph type="title" idx="4"/>
-          </p:nvPr>
-        </p:nvSpPr>
-        <p:spPr>
-          <a:xfrm xmlns:a="http://schemas.openxmlformats.org/drawingml/2006/main">
-            <a:off x="1252404" y="3138786"/>
-            <a:ext cx="4190700" cy="733500"/>
-          </a:xfrm>
-          <a:prstGeom xmlns:a="http://schemas.openxmlformats.org/drawingml/2006/main" prst="rect">
-            <a:avLst/>
-          </a:prstGeom>
-        </p:spPr>
-        <p:txBody>
-          <a:bodyPr xmlns:a="http://schemas.openxmlformats.org/drawingml/2006/main" spcFirstLastPara="1" wrap="square" lIns="91425" tIns="91425" rIns="91425" bIns="91425" anchor="b">
-            <a:noAutofit/>
-          </a:bodyPr>
-          <a:lstStyle xmlns:a="http://schemas.openxmlformats.org/drawingml/2006/main"/>
-          <a:p xmlns:a="http://schemas.openxmlformats.org/drawingml/2006/main">
-            <a:pPr marL="0" indent="0" algn="l">
-              <a:spcBef>
-                <a:spcPts val="0"/>
-              </a:spcBef>
-              <a:spcAft>
-                <a:spcPts val="0"/>
-              </a:spcAft>
-              <a:buNone/>
-            </a:pPr>
-            <a:r>
-              <a:rPr>
+              <a:rPr sz="3600">
                 <a:solidFill>
                   <a:schemeClr val="lt2"/>
                 </a:solidFill>
+                <a:latin typeface="Quantico"/>
+                <a:ea typeface="Quantico"/>
+                <a:cs typeface="Quantico"/>
               </a:rPr>
-              <a:t>{Reporter}</a:t>
+              <a:t>&lt;/</a:t>
             </a:r>
           </a:p>
         </p:txBody>
       </p:sp>
       <p:sp>
         <p:nvSpPr>
-          <p:cNvPr id="307" name="Google Shape;307;p30">
-            <a:extLst xmlns:a="http://schemas.openxmlformats.org/drawingml/2006/main">
-              <a:ext uri="{FF2B5EF4-FFF2-40B4-BE49-F238E27FC236}">
-                <a16:creationId xmlns:a16="http://schemas.microsoft.com/office/drawing/2014/main" id="{B1468CD5-D03B-4903-8BF7-9F0C7E81B677}"/>
-              </a:ext>
-            </a:extLst>
-          </p:cNvPr>
-          <p:cNvSpPr>
-            <a:spLocks xmlns:a="http://schemas.openxmlformats.org/drawingml/2006/main" noGrp="1"/>
-          </p:cNvSpPr>
-          <p:nvPr>
-            <p:ph type="subTitle" idx="5"/>
-          </p:nvPr>
+          <p:cNvPr id="212" name="Google Shape;212;p24">
+            <a:extLst xmlns:a="http://schemas.openxmlformats.org/drawingml/2006/main">
+              <a:ext uri="{FF2B5EF4-FFF2-40B4-BE49-F238E27FC236}">
+                <a16:creationId xmlns:a16="http://schemas.microsoft.com/office/drawing/2014/main" id="{E705969D-D0F1-46F7-91BE-19AAFA3FBB61}"/>
+              </a:ext>
+            </a:extLst>
+          </p:cNvPr>
+          <p:cNvSpPr>
+            <a:spLocks xmlns:a="http://schemas.openxmlformats.org/drawingml/2006/main" noGrp="1"/>
+          </p:cNvSpPr>
+          <p:nvPr/>
         </p:nvSpPr>
         <p:spPr>
           <a:xfrm xmlns:a="http://schemas.openxmlformats.org/drawingml/2006/main">
-            <a:off x="1252404" y="3914775"/>
-            <a:ext cx="4190700" cy="384600"/>
-          </a:xfrm>
-          <a:prstGeom xmlns:a="http://schemas.openxmlformats.org/drawingml/2006/main" prst="rect">
-            <a:avLst/>
-          </a:prstGeom>
-        </p:spPr>
-        <p:txBody>
-          <a:bodyPr xmlns:a="http://schemas.openxmlformats.org/drawingml/2006/main" spcFirstLastPara="1" wrap="square" lIns="91425" tIns="91425" rIns="91425" bIns="91425" anchor="t">
-            <a:noAutofit/>
-          </a:bodyPr>
-          <a:lstStyle xmlns:a="http://schemas.openxmlformats.org/drawingml/2006/main"/>
-          <a:p xmlns:a="http://schemas.openxmlformats.org/drawingml/2006/main">
-            <a:pPr marL="0" indent="0" algn="l">
-              <a:spcBef>
-                <a:spcPts val="0"/>
-              </a:spcBef>
-              <a:spcAft>
-                <a:spcPts val="0"/>
-              </a:spcAft>
-              <a:buNone/>
-            </a:pPr>
-            <a:r>
-              <a:t>Shares one discovery</a:t>
-            </a:r>
-          </a:p>
-        </p:txBody>
-      </p:sp>
-      <p:sp>
-        <p:nvSpPr>
-          <p:cNvPr id="308" name="Google Shape;308;p30">
-            <a:extLst xmlns:a="http://schemas.openxmlformats.org/drawingml/2006/main">
-              <a:ext uri="{FF2B5EF4-FFF2-40B4-BE49-F238E27FC236}">
-                <a16:creationId xmlns:a16="http://schemas.microsoft.com/office/drawing/2014/main" id="{B78C6BA0-ED32-48DC-85F2-B4E00038ECB9}"/>
-              </a:ext>
-            </a:extLst>
-          </p:cNvPr>
-          <p:cNvSpPr>
-            <a:spLocks xmlns:a="http://schemas.openxmlformats.org/drawingml/2006/main" noGrp="1"/>
-          </p:cNvSpPr>
-          <p:nvPr/>
-        </p:nvSpPr>
-        <p:spPr>
-          <a:xfrm xmlns:a="http://schemas.openxmlformats.org/drawingml/2006/main">
-            <a:off x="7721100" y="3868300"/>
+            <a:off x="5878825" y="1974375"/>
             <a:ext cx="702900" cy="606900"/>
           </a:xfrm>
           <a:prstGeom xmlns:a="http://schemas.openxmlformats.org/drawingml/2006/main" prst="rect">
@@ -24733,10 +24811,10 @@
       </p:sp>
       <p:sp>
         <p:nvSpPr>
-          <p:cNvPr id="310" name="Google Shape;310;p30">
-            <a:extLst xmlns:a="http://schemas.openxmlformats.org/drawingml/2006/main">
-              <a:ext uri="{FF2B5EF4-FFF2-40B4-BE49-F238E27FC236}">
-                <a16:creationId xmlns:a16="http://schemas.microsoft.com/office/drawing/2014/main" id="{09B6DAF8-8302-4623-897D-26165EA51BCA}"/>
+          <p:cNvPr id="213" name="Google Shape;213;p24">
+            <a:extLst xmlns:a="http://schemas.openxmlformats.org/drawingml/2006/main">
+              <a:ext uri="{FF2B5EF4-FFF2-40B4-BE49-F238E27FC236}">
+                <a16:creationId xmlns:a16="http://schemas.microsoft.com/office/drawing/2014/main" id="{FBDE6D5E-521E-4730-84D0-2601494F8F61}"/>
               </a:ext>
             </a:extLst>
           </p:cNvPr>
@@ -24746,112 +24824,8 @@
           <p:nvPr/>
         </p:nvSpPr>
         <p:spPr>
-          <a:xfrm xmlns:a="http://schemas.openxmlformats.org/drawingml/2006/main" rot="0">
-            <a:off x="5827600" y="697350"/>
-            <a:ext cx="2119744" cy="1127400"/>
-          </a:xfrm>
-          <a:prstGeom xmlns:a="http://schemas.openxmlformats.org/drawingml/2006/main" prst="rect">
-            <a:avLst/>
-          </a:prstGeom>
-          <a:solidFill xmlns:a="http://schemas.openxmlformats.org/drawingml/2006/main">
-            <a:schemeClr val="lt1"/>
-          </a:solidFill>
-          <a:ln xmlns:a="http://schemas.openxmlformats.org/drawingml/2006/main" w="9525" cmpd="sng">
-            <a:solidFill>
-              <a:schemeClr val="dk1"/>
-            </a:solidFill>
-            <a:prstDash val="solid"/>
-            <a:headEnd type="none" w="sm" len="sm"/>
-            <a:tailEnd type="none" w="sm" len="sm"/>
-          </a:ln>
-        </p:spPr>
-        <p:txBody>
-          <a:bodyPr xmlns:a="http://schemas.openxmlformats.org/drawingml/2006/main" spcFirstLastPara="1" wrap="square" lIns="91425" tIns="91425" rIns="91425" bIns="91425" anchor="ctr">
-            <a:noAutofit/>
-          </a:bodyPr>
-          <a:lstStyle xmlns:a="http://schemas.openxmlformats.org/drawingml/2006/main"/>
-          <a:p xmlns:a="http://schemas.openxmlformats.org/drawingml/2006/main">
-            <a:pPr marL="0" indent="0" algn="l">
-              <a:spcBef>
-                <a:spcPts val="0"/>
-              </a:spcBef>
-              <a:spcAft>
-                <a:spcPts val="0"/>
-              </a:spcAft>
-              <a:buNone/>
-            </a:pPr>
-          </a:p>
-        </p:txBody>
-      </p:sp>
-      <p:sp>
-        <p:nvSpPr>
-          <p:cNvPr id="311" name="Google Shape;311;p30">
-            <a:extLst xmlns:a="http://schemas.openxmlformats.org/drawingml/2006/main">
-              <a:ext uri="{FF2B5EF4-FFF2-40B4-BE49-F238E27FC236}">
-                <a16:creationId xmlns:a16="http://schemas.microsoft.com/office/drawing/2014/main" id="{742D31F6-3221-48C9-8E30-90EE2ECD8DA0}"/>
-              </a:ext>
-            </a:extLst>
-          </p:cNvPr>
-          <p:cNvSpPr>
-            <a:spLocks xmlns:a="http://schemas.openxmlformats.org/drawingml/2006/main" noGrp="1"/>
-          </p:cNvSpPr>
-          <p:nvPr/>
-        </p:nvSpPr>
-        <p:spPr>
-          <a:xfrm xmlns:a="http://schemas.openxmlformats.org/drawingml/2006/main" rot="0">
-            <a:off x="5827603" y="697350"/>
-            <a:ext cx="2119744" cy="255300"/>
-          </a:xfrm>
-          <a:prstGeom xmlns:a="http://schemas.openxmlformats.org/drawingml/2006/main" prst="rect">
-            <a:avLst/>
-          </a:prstGeom>
-          <a:solidFill xmlns:a="http://schemas.openxmlformats.org/drawingml/2006/main">
-            <a:schemeClr val="lt1"/>
-          </a:solidFill>
-          <a:ln xmlns:a="http://schemas.openxmlformats.org/drawingml/2006/main" w="9525" cmpd="sng">
-            <a:solidFill>
-              <a:schemeClr val="dk1"/>
-            </a:solidFill>
-            <a:prstDash val="solid"/>
-            <a:headEnd type="none" w="sm" len="sm"/>
-            <a:tailEnd type="none" w="sm" len="sm"/>
-          </a:ln>
-        </p:spPr>
-        <p:txBody>
-          <a:bodyPr xmlns:a="http://schemas.openxmlformats.org/drawingml/2006/main" spcFirstLastPara="1" wrap="square" lIns="91425" tIns="91425" rIns="91425" bIns="91425" anchor="ctr">
-            <a:noAutofit/>
-          </a:bodyPr>
-          <a:lstStyle xmlns:a="http://schemas.openxmlformats.org/drawingml/2006/main"/>
-          <a:p xmlns:a="http://schemas.openxmlformats.org/drawingml/2006/main">
-            <a:pPr marL="0" indent="0" algn="l">
-              <a:spcBef>
-                <a:spcPts val="0"/>
-              </a:spcBef>
-              <a:spcAft>
-                <a:spcPts val="0"/>
-              </a:spcAft>
-              <a:buNone/>
-            </a:pPr>
-          </a:p>
-        </p:txBody>
-      </p:sp>
-      <p:sp>
-        <p:nvSpPr>
-          <p:cNvPr id="312" name="Google Shape;312;p30">
-            <a:extLst xmlns:a="http://schemas.openxmlformats.org/drawingml/2006/main">
-              <a:ext uri="{FF2B5EF4-FFF2-40B4-BE49-F238E27FC236}">
-                <a16:creationId xmlns:a16="http://schemas.microsoft.com/office/drawing/2014/main" id="{1197A6D5-E686-4D9D-B748-4B534E594BA4}"/>
-              </a:ext>
-            </a:extLst>
-          </p:cNvPr>
-          <p:cNvSpPr>
-            <a:spLocks xmlns:a="http://schemas.openxmlformats.org/drawingml/2006/main" noGrp="1"/>
-          </p:cNvSpPr>
-          <p:nvPr/>
-        </p:nvSpPr>
-        <p:spPr>
           <a:xfrm xmlns:a="http://schemas.openxmlformats.org/drawingml/2006/main">
-            <a:off x="6279082" y="1016750"/>
+            <a:off x="7198457" y="1873600"/>
             <a:ext cx="1216800" cy="746100"/>
           </a:xfrm>
           <a:prstGeom xmlns:a="http://schemas.openxmlformats.org/drawingml/2006/main" prst="rect">
@@ -24909,10 +24883,103 @@
       </p:sp>
       <p:sp>
         <p:nvSpPr>
-          <p:cNvPr id="313" name="slide-heading-marker-17">
-            <a:extLst xmlns:a="http://schemas.openxmlformats.org/drawingml/2006/main">
-              <a:ext uri="{FF2B5EF4-FFF2-40B4-BE49-F238E27FC236}">
-                <a16:creationId xmlns:a16="http://schemas.microsoft.com/office/drawing/2014/main" id="{559BC036-4BD0-412B-AB5C-572DD9375E95}"/>
+          <p:cNvPr id="214" name="Google Shape;214;p24">
+            <a:extLst xmlns:a="http://schemas.openxmlformats.org/drawingml/2006/main">
+              <a:ext uri="{FF2B5EF4-FFF2-40B4-BE49-F238E27FC236}">
+                <a16:creationId xmlns:a16="http://schemas.microsoft.com/office/drawing/2014/main" id="{5EE6EEBD-605C-4EFD-803C-779B4C388CA3}"/>
+              </a:ext>
+            </a:extLst>
+          </p:cNvPr>
+          <p:cNvSpPr>
+            <a:spLocks xmlns:a="http://schemas.openxmlformats.org/drawingml/2006/main" noGrp="1"/>
+          </p:cNvSpPr>
+          <p:nvPr>
+            <p:ph type="ctrTitle" idx="0"/>
+          </p:nvPr>
+        </p:nvSpPr>
+        <p:spPr>
+          <a:xfrm xmlns:a="http://schemas.openxmlformats.org/drawingml/2006/main">
+            <a:off x="1875450" y="1974375"/>
+            <a:ext cx="4148400" cy="746100"/>
+          </a:xfrm>
+          <a:prstGeom xmlns:a="http://schemas.openxmlformats.org/drawingml/2006/main" prst="rect">
+            <a:avLst/>
+          </a:prstGeom>
+        </p:spPr>
+        <p:txBody>
+          <a:bodyPr xmlns:a="http://schemas.openxmlformats.org/drawingml/2006/main" spcFirstLastPara="1" wrap="square" lIns="91425" tIns="91425" rIns="91425" bIns="91425" anchor="t">
+            <a:noAutofit/>
+          </a:bodyPr>
+          <a:lstStyle xmlns:a="http://schemas.openxmlformats.org/drawingml/2006/main"/>
+          <a:p xmlns:a="http://schemas.openxmlformats.org/drawingml/2006/main">
+            <a:pPr marL="0" indent="0" algn="l">
+              <a:spcBef>
+                <a:spcPts val="0"/>
+              </a:spcBef>
+              <a:spcAft>
+                <a:spcPts val="0"/>
+              </a:spcAft>
+              <a:buNone/>
+            </a:pPr>
+            <a:r>
+              <a:t>Typing practice</a:t>
+            </a:r>
+          </a:p>
+        </p:txBody>
+      </p:sp>
+      <p:sp>
+        <p:nvSpPr>
+          <p:cNvPr id="215" name="Google Shape;215;p24">
+            <a:extLst xmlns:a="http://schemas.openxmlformats.org/drawingml/2006/main">
+              <a:ext uri="{FF2B5EF4-FFF2-40B4-BE49-F238E27FC236}">
+                <a16:creationId xmlns:a16="http://schemas.microsoft.com/office/drawing/2014/main" id="{561222E6-86D3-4D0D-888F-084113278088}"/>
+              </a:ext>
+            </a:extLst>
+          </p:cNvPr>
+          <p:cNvSpPr>
+            <a:spLocks xmlns:a="http://schemas.openxmlformats.org/drawingml/2006/main" noGrp="1"/>
+          </p:cNvSpPr>
+          <p:nvPr>
+            <p:ph type="subTitle" idx="1"/>
+          </p:nvPr>
+        </p:nvSpPr>
+        <p:spPr>
+          <a:xfrm xmlns:a="http://schemas.openxmlformats.org/drawingml/2006/main">
+            <a:off x="4751650" y="3680600"/>
+            <a:ext cx="3043800" cy="528600"/>
+          </a:xfrm>
+          <a:prstGeom xmlns:a="http://schemas.openxmlformats.org/drawingml/2006/main" prst="rect">
+            <a:avLst/>
+          </a:prstGeom>
+        </p:spPr>
+        <p:txBody>
+          <a:bodyPr xmlns:a="http://schemas.openxmlformats.org/drawingml/2006/main" spcFirstLastPara="1" wrap="square" lIns="91425" tIns="91425" rIns="91425" bIns="91425" anchor="ctr">
+            <a:noAutofit/>
+          </a:bodyPr>
+          <a:lstStyle xmlns:a="http://schemas.openxmlformats.org/drawingml/2006/main"/>
+          <a:p xmlns:a="http://schemas.openxmlformats.org/drawingml/2006/main">
+            <a:pPr marL="0" indent="0" algn="l">
+              <a:spcBef>
+                <a:spcPts val="0"/>
+              </a:spcBef>
+              <a:spcAft>
+                <a:spcPts val="0"/>
+              </a:spcAft>
+              <a:buNone/>
+            </a:pPr>
+            <a:r>
+              <a:rPr sz="1400"/>
+              <a:t>Accuracy first. Speed comes later.</a:t>
+            </a:r>
+          </a:p>
+        </p:txBody>
+      </p:sp>
+      <p:sp>
+        <p:nvSpPr>
+          <p:cNvPr id="216" name="Google Shape;216;p24">
+            <a:extLst xmlns:a="http://schemas.openxmlformats.org/drawingml/2006/main">
+              <a:ext uri="{FF2B5EF4-FFF2-40B4-BE49-F238E27FC236}">
+                <a16:creationId xmlns:a16="http://schemas.microsoft.com/office/drawing/2014/main" id="{3CB2B6C1-3795-43B8-9621-54C5BB056D62}"/>
               </a:ext>
             </a:extLst>
           </p:cNvPr>
@@ -24923,52 +24990,52 @@
         </p:nvSpPr>
         <p:spPr>
           <a:xfrm xmlns:a="http://schemas.openxmlformats.org/drawingml/2006/main">
-            <a:off x="742950" y="447675"/>
-            <a:ext cx="476250" cy="323850"/>
+            <a:off x="536125" y="117311"/>
+            <a:ext cx="1999500" cy="180300"/>
           </a:xfrm>
           <a:prstGeom xmlns:a="http://schemas.openxmlformats.org/drawingml/2006/main" prst="rect">
             <a:avLst/>
           </a:prstGeom>
           <a:noFill xmlns:a="http://schemas.openxmlformats.org/drawingml/2006/main"/>
-          <a:ln xmlns:a="http://schemas.openxmlformats.org/drawingml/2006/main" w="0">
+          <a:ln xmlns:a="http://schemas.openxmlformats.org/drawingml/2006/main">
             <a:noFill/>
-            <a:prstDash val="solid"/>
           </a:ln>
         </p:spPr>
         <p:txBody>
-          <a:bodyPr xmlns:a="http://schemas.openxmlformats.org/drawingml/2006/main"/>
-          <a:lstStyle xmlns:a="http://schemas.openxmlformats.org/drawingml/2006/main"/>
-          <a:p xmlns:a="http://schemas.openxmlformats.org/drawingml/2006/main">
-            <a:pPr algn="l">
-              <a:defRPr sz="1950" b="1">
+          <a:bodyPr xmlns:a="http://schemas.openxmlformats.org/drawingml/2006/main" spcFirstLastPara="1" wrap="square" lIns="91425" tIns="91425" rIns="91425" bIns="91425" anchor="ctr">
+            <a:noAutofit/>
+          </a:bodyPr>
+          <a:lstStyle xmlns:a="http://schemas.openxmlformats.org/drawingml/2006/main"/>
+          <a:p xmlns:a="http://schemas.openxmlformats.org/drawingml/2006/main">
+            <a:pPr marL="0" indent="0" algn="l">
+              <a:spcBef>
+                <a:spcPts val="0"/>
+              </a:spcBef>
+              <a:spcAft>
+                <a:spcPts val="0"/>
+              </a:spcAft>
+              <a:buNone/>
+            </a:pPr>
+            <a:r>
+              <a:rPr sz="1000">
                 <a:solidFill>
-                  <a:srgbClr val="FFDB5D"/>
-                </a:solidFill>
-                <a:latin typeface="Source Code Pro"/>
-                <a:ea typeface="Source Code Pro"/>
-                <a:cs typeface="Source Code Pro"/>
-              </a:defRPr>
-            </a:pPr>
-            <a:r>
-              <a:rPr sz="1950" b="1">
-                <a:solidFill>
-                  <a:srgbClr val="FFDB5D"/>
+                  <a:schemeClr val="dk1"/>
                 </a:solidFill>
                 <a:latin typeface="Source Code Pro"/>
                 <a:ea typeface="Source Code Pro"/>
                 <a:cs typeface="Source Code Pro"/>
               </a:rPr>
-              <a:t>&lt;/</a:t>
+              <a:t>Classroom Presentation</a:t>
             </a:r>
           </a:p>
         </p:txBody>
       </p:sp>
       <p:sp>
         <p:nvSpPr>
-          <p:cNvPr id="314" name="slide-heading-text-17">
-            <a:extLst xmlns:a="http://schemas.openxmlformats.org/drawingml/2006/main">
-              <a:ext uri="{FF2B5EF4-FFF2-40B4-BE49-F238E27FC236}">
-                <a16:creationId xmlns:a16="http://schemas.microsoft.com/office/drawing/2014/main" id="{7252F779-6AC0-41E4-A633-40E59A7D6DCB}"/>
+          <p:cNvPr id="217" name="Google Shape;217;p24">
+            <a:extLst xmlns:a="http://schemas.openxmlformats.org/drawingml/2006/main">
+              <a:ext uri="{FF2B5EF4-FFF2-40B4-BE49-F238E27FC236}">
+                <a16:creationId xmlns:a16="http://schemas.microsoft.com/office/drawing/2014/main" id="{1BCE298B-ADAB-4360-9E4B-303C95BFACCE}"/>
               </a:ext>
             </a:extLst>
           </p:cNvPr>
@@ -24979,42 +25046,42 @@
         </p:nvSpPr>
         <p:spPr>
           <a:xfrm xmlns:a="http://schemas.openxmlformats.org/drawingml/2006/main">
-            <a:off x="1152525" y="428625"/>
-            <a:ext cx="5619750" cy="361950"/>
+            <a:off x="3730325" y="117311"/>
+            <a:ext cx="1999500" cy="180300"/>
           </a:xfrm>
           <a:prstGeom xmlns:a="http://schemas.openxmlformats.org/drawingml/2006/main" prst="rect">
             <a:avLst/>
           </a:prstGeom>
           <a:noFill xmlns:a="http://schemas.openxmlformats.org/drawingml/2006/main"/>
-          <a:ln xmlns:a="http://schemas.openxmlformats.org/drawingml/2006/main" w="0">
+          <a:ln xmlns:a="http://schemas.openxmlformats.org/drawingml/2006/main">
             <a:noFill/>
-            <a:prstDash val="solid"/>
           </a:ln>
         </p:spPr>
         <p:txBody>
-          <a:bodyPr xmlns:a="http://schemas.openxmlformats.org/drawingml/2006/main"/>
-          <a:lstStyle xmlns:a="http://schemas.openxmlformats.org/drawingml/2006/main"/>
-          <a:p xmlns:a="http://schemas.openxmlformats.org/drawingml/2006/main">
-            <a:pPr algn="l">
-              <a:defRPr sz="1800" b="0">
+          <a:bodyPr xmlns:a="http://schemas.openxmlformats.org/drawingml/2006/main" spcFirstLastPara="1" wrap="square" lIns="91425" tIns="91425" rIns="91425" bIns="91425" anchor="ctr">
+            <a:noAutofit/>
+          </a:bodyPr>
+          <a:lstStyle xmlns:a="http://schemas.openxmlformats.org/drawingml/2006/main"/>
+          <a:p xmlns:a="http://schemas.openxmlformats.org/drawingml/2006/main">
+            <a:pPr marL="0" indent="0" algn="l">
+              <a:spcBef>
+                <a:spcPts val="0"/>
+              </a:spcBef>
+              <a:spcAft>
+                <a:spcPts val="0"/>
+              </a:spcAft>
+              <a:buNone/>
+            </a:pPr>
+            <a:r>
+              <a:rPr sz="1000">
                 <a:solidFill>
-                  <a:srgbClr val="FFFFFF"/>
+                  <a:schemeClr val="dk1"/>
                 </a:solidFill>
-                <a:latin typeface="Arial"/>
-                <a:ea typeface="Arial"/>
-                <a:cs typeface="Arial"/>
-              </a:defRPr>
-            </a:pPr>
-            <a:r>
-              <a:rPr sz="1800" b="0">
-                <a:solidFill>
-                  <a:srgbClr val="FFFFFF"/>
-                </a:solidFill>
-                <a:latin typeface="Arial"/>
-                <a:ea typeface="Arial"/>
-                <a:cs typeface="Arial"/>
+                <a:latin typeface="Source Code Pro"/>
+                <a:ea typeface="Source Code Pro"/>
+                <a:cs typeface="Source Code Pro"/>
               </a:rPr>
-              <a:t>Breakout room jobs</a:t>
+              <a:t>. . .</a:t>
             </a:r>
           </a:p>
         </p:txBody>
@@ -25022,7 +25089,7 @@
     </p:spTree>
     <p:extLst>
       <p:ext uri="{BB962C8B-B14F-4D97-AF65-F5344CB8AC3E}">
-        <p14:creationId xmlns:p14="http://schemas.microsoft.com/office/powerpoint/2010/main" val="694519266"/>
+        <p14:creationId xmlns:p14="http://schemas.microsoft.com/office/powerpoint/2010/main" val="592295941"/>
       </p:ext>
     </p:extLst>
   </p:cSld>
@@ -25082,7 +25149,7 @@
               <a:buNone/>
             </a:pPr>
             <a:r>
-              <a:t>Help by asking questions</a:t>
+              <a:t>Helps when someone gets stuck</a:t>
             </a:r>
           </a:p>
         </p:txBody>
@@ -25133,7 +25200,7 @@
                   <a:schemeClr val="accent2"/>
                 </a:solidFill>
               </a:rPr>
-              <a:t>{Own project}</a:t>
+              <a:t>{Captain}</a:t>
             </a:r>
           </a:p>
         </p:txBody>
@@ -25179,7 +25246,7 @@
               <a:buNone/>
             </a:pPr>
             <a:r>
-              <a:t>Work on your computer</a:t>
+              <a:t>Keeps the crew on the mission</a:t>
             </a:r>
           </a:p>
         </p:txBody>
@@ -25225,7 +25292,7 @@
               <a:buNone/>
             </a:pPr>
             <a:r>
-              <a:t>{Explain}</a:t>
+              <a:t>{Coach}</a:t>
             </a:r>
           </a:p>
         </p:txBody>
@@ -25276,7 +25343,7 @@
                   <a:schemeClr val="lt2"/>
                 </a:solidFill>
               </a:rPr>
-              <a:t>{Everyone}</a:t>
+              <a:t>{Reporter}</a:t>
             </a:r>
           </a:p>
         </p:txBody>
@@ -25322,7 +25389,7 @@
               <a:buNone/>
             </a:pPr>
             <a:r>
-              <a:t>A crew succeeds together</a:t>
+              <a:t>Shares one discovery</a:t>
             </a:r>
           </a:p>
         </p:txBody>
@@ -25564,10 +25631,10 @@
       </p:sp>
       <p:sp>
         <p:nvSpPr>
-          <p:cNvPr id="313" name="slide-heading-marker-18">
-            <a:extLst xmlns:a="http://schemas.openxmlformats.org/drawingml/2006/main">
-              <a:ext uri="{FF2B5EF4-FFF2-40B4-BE49-F238E27FC236}">
-                <a16:creationId xmlns:a16="http://schemas.microsoft.com/office/drawing/2014/main" id="{A39BB46D-1AA7-4211-9D40-E9FFDCFA524F}"/>
+          <p:cNvPr id="313" name="slide-heading-marker-17">
+            <a:extLst xmlns:a="http://schemas.openxmlformats.org/drawingml/2006/main">
+              <a:ext uri="{FF2B5EF4-FFF2-40B4-BE49-F238E27FC236}">
+                <a16:creationId xmlns:a16="http://schemas.microsoft.com/office/drawing/2014/main" id="{30254FC8-4B32-4F09-819D-7B9FB14DF821}"/>
               </a:ext>
             </a:extLst>
           </p:cNvPr>
@@ -25620,10 +25687,10 @@
       </p:sp>
       <p:sp>
         <p:nvSpPr>
-          <p:cNvPr id="314" name="slide-heading-text-18">
-            <a:extLst xmlns:a="http://schemas.openxmlformats.org/drawingml/2006/main">
-              <a:ext uri="{FF2B5EF4-FFF2-40B4-BE49-F238E27FC236}">
-                <a16:creationId xmlns:a16="http://schemas.microsoft.com/office/drawing/2014/main" id="{FC3829C1-E401-4194-8D1B-38B699279D94}"/>
+          <p:cNvPr id="314" name="slide-heading-text-17">
+            <a:extLst xmlns:a="http://schemas.openxmlformats.org/drawingml/2006/main">
+              <a:ext uri="{FF2B5EF4-FFF2-40B4-BE49-F238E27FC236}">
+                <a16:creationId xmlns:a16="http://schemas.microsoft.com/office/drawing/2014/main" id="{F3293156-3E19-41AA-99C6-7A740EB564C2}"/>
               </a:ext>
             </a:extLst>
           </p:cNvPr>
@@ -25669,7 +25736,7 @@
                 <a:ea typeface="Arial"/>
                 <a:cs typeface="Arial"/>
               </a:rPr>
-              <a:t>How to work as a code crew</a:t>
+              <a:t>Breakout room jobs</a:t>
             </a:r>
           </a:p>
         </p:txBody>
@@ -25737,7 +25804,7 @@
               <a:buNone/>
             </a:pPr>
             <a:r>
-              <a:t>Combine at least two sounds</a:t>
+              <a:t>Help by asking questions</a:t>
             </a:r>
           </a:p>
         </p:txBody>
@@ -25788,7 +25855,7 @@
                   <a:schemeClr val="accent2"/>
                 </a:solidFill>
               </a:rPr>
-              <a:t>{Music Lab}</a:t>
+              <a:t>{Own project}</a:t>
             </a:r>
           </a:p>
         </p:txBody>
@@ -25834,7 +25901,7 @@
               <a:buNone/>
             </a:pPr>
             <a:r>
-              <a:t>Use the link in Teams</a:t>
+              <a:t>Work on your computer</a:t>
             </a:r>
           </a:p>
         </p:txBody>
@@ -25880,7 +25947,7 @@
               <a:buNone/>
             </a:pPr>
             <a:r>
-              <a:t>{Build a mix}</a:t>
+              <a:t>{Explain}</a:t>
             </a:r>
           </a:p>
         </p:txBody>
@@ -25931,7 +25998,7 @@
                   <a:schemeClr val="lt2"/>
                 </a:solidFill>
               </a:rPr>
-              <a:t>{Try AI drums}</a:t>
+              <a:t>{Everyone}</a:t>
             </a:r>
           </a:p>
         </p:txBody>
@@ -25977,7 +26044,7 @@
               <a:buNone/>
             </a:pPr>
             <a:r>
-              <a:t>Notice what changes</a:t>
+              <a:t>A crew succeeds together</a:t>
             </a:r>
           </a:p>
         </p:txBody>
@@ -26219,10 +26286,10 @@
       </p:sp>
       <p:sp>
         <p:nvSpPr>
-          <p:cNvPr id="313" name="slide-heading-marker-19">
-            <a:extLst xmlns:a="http://schemas.openxmlformats.org/drawingml/2006/main">
-              <a:ext uri="{FF2B5EF4-FFF2-40B4-BE49-F238E27FC236}">
-                <a16:creationId xmlns:a16="http://schemas.microsoft.com/office/drawing/2014/main" id="{F56B54AD-AC38-4C09-9E91-D1E5CB005254}"/>
+          <p:cNvPr id="313" name="slide-heading-marker-18">
+            <a:extLst xmlns:a="http://schemas.openxmlformats.org/drawingml/2006/main">
+              <a:ext uri="{FF2B5EF4-FFF2-40B4-BE49-F238E27FC236}">
+                <a16:creationId xmlns:a16="http://schemas.microsoft.com/office/drawing/2014/main" id="{E36D6877-1446-411F-92B3-D0E3487DA876}"/>
               </a:ext>
             </a:extLst>
           </p:cNvPr>
@@ -26275,10 +26342,10 @@
       </p:sp>
       <p:sp>
         <p:nvSpPr>
-          <p:cNvPr id="314" name="slide-heading-text-19">
-            <a:extLst xmlns:a="http://schemas.openxmlformats.org/drawingml/2006/main">
-              <a:ext uri="{FF2B5EF4-FFF2-40B4-BE49-F238E27FC236}">
-                <a16:creationId xmlns:a16="http://schemas.microsoft.com/office/drawing/2014/main" id="{BEE061BA-D36C-48C1-9B9A-1C904F65885B}"/>
+          <p:cNvPr id="314" name="slide-heading-text-18">
+            <a:extLst xmlns:a="http://schemas.openxmlformats.org/drawingml/2006/main">
+              <a:ext uri="{FF2B5EF4-FFF2-40B4-BE49-F238E27FC236}">
+                <a16:creationId xmlns:a16="http://schemas.microsoft.com/office/drawing/2014/main" id="{A478548A-7D1A-4FA2-B6C5-F097C5C70FC4}"/>
               </a:ext>
             </a:extLst>
           </p:cNvPr>
@@ -26324,7 +26391,7 @@
                 <a:ea typeface="Arial"/>
                 <a:cs typeface="Arial"/>
               </a:rPr>
-              <a:t>Code.org Music Lab</a:t>
+              <a:t>How to work as a code crew</a:t>
             </a:r>
           </a:p>
         </p:txBody>
@@ -26770,7 +26837,7 @@
           <p:nvPr/>
         </p:nvPicPr>
         <p:blipFill>
-          <a:blip xmlns:r="http://schemas.openxmlformats.org/officeDocument/2006/relationships" xmlns:a="http://schemas.openxmlformats.org/drawingml/2006/main" r:embed="R01a281b9a14a4469">
+          <a:blip xmlns:r="http://schemas.openxmlformats.org/officeDocument/2006/relationships" xmlns:a="http://schemas.openxmlformats.org/drawingml/2006/main" r:embed="R5dd7c184289e4a4e">
             <a:alphaModFix/>
           </a:blip>
           <a:stretch xmlns:a="http://schemas.openxmlformats.org/drawingml/2006/main">
@@ -26853,7 +26920,7 @@
               <a:buNone/>
             </a:pPr>
             <a:r>
-              <a:t>An action starts something</a:t>
+              <a:t>Combine at least two sounds</a:t>
             </a:r>
           </a:p>
         </p:txBody>
@@ -26904,7 +26971,7 @@
                   <a:schemeClr val="accent2"/>
                 </a:solidFill>
               </a:rPr>
-              <a:t>{Sequence}</a:t>
+              <a:t>{Music Lab}</a:t>
             </a:r>
           </a:p>
         </p:txBody>
@@ -26950,7 +27017,7 @@
               <a:buNone/>
             </a:pPr>
             <a:r>
-              <a:t>Steps run in an order</a:t>
+              <a:t>Use the link in Teams</a:t>
             </a:r>
           </a:p>
         </p:txBody>
@@ -26996,7 +27063,7 @@
               <a:buNone/>
             </a:pPr>
             <a:r>
-              <a:t>{Event}</a:t>
+              <a:t>{Build a mix}</a:t>
             </a:r>
           </a:p>
         </p:txBody>
@@ -27047,7 +27114,7 @@
                   <a:schemeClr val="lt2"/>
                 </a:solidFill>
               </a:rPr>
-              <a:t>{Debug}</a:t>
+              <a:t>{Try AI drums}</a:t>
             </a:r>
           </a:p>
         </p:txBody>
@@ -27093,7 +27160,7 @@
               <a:buNone/>
             </a:pPr>
             <a:r>
-              <a:t>Find and fix a problem</a:t>
+              <a:t>Notice what changes</a:t>
             </a:r>
           </a:p>
         </p:txBody>
@@ -27335,10 +27402,10 @@
       </p:sp>
       <p:sp>
         <p:nvSpPr>
-          <p:cNvPr id="313" name="slide-heading-marker-20">
-            <a:extLst xmlns:a="http://schemas.openxmlformats.org/drawingml/2006/main">
-              <a:ext uri="{FF2B5EF4-FFF2-40B4-BE49-F238E27FC236}">
-                <a16:creationId xmlns:a16="http://schemas.microsoft.com/office/drawing/2014/main" id="{45868136-9554-4792-BEFF-67B1A93DE446}"/>
+          <p:cNvPr id="313" name="slide-heading-marker-19">
+            <a:extLst xmlns:a="http://schemas.openxmlformats.org/drawingml/2006/main">
+              <a:ext uri="{FF2B5EF4-FFF2-40B4-BE49-F238E27FC236}">
+                <a16:creationId xmlns:a16="http://schemas.microsoft.com/office/drawing/2014/main" id="{475FEE72-9290-4A89-B379-B0B50BB7629D}"/>
               </a:ext>
             </a:extLst>
           </p:cNvPr>
@@ -27391,10 +27458,10 @@
       </p:sp>
       <p:sp>
         <p:nvSpPr>
-          <p:cNvPr id="314" name="slide-heading-text-20">
-            <a:extLst xmlns:a="http://schemas.openxmlformats.org/drawingml/2006/main">
-              <a:ext uri="{FF2B5EF4-FFF2-40B4-BE49-F238E27FC236}">
-                <a16:creationId xmlns:a16="http://schemas.microsoft.com/office/drawing/2014/main" id="{E354BC7C-CD89-4A48-A4B0-863C4553A9BC}"/>
+          <p:cNvPr id="314" name="slide-heading-text-19">
+            <a:extLst xmlns:a="http://schemas.openxmlformats.org/drawingml/2006/main">
+              <a:ext uri="{FF2B5EF4-FFF2-40B4-BE49-F238E27FC236}">
+                <a16:creationId xmlns:a16="http://schemas.microsoft.com/office/drawing/2014/main" id="{B6815240-3FFD-4F2A-A724-38F38F28C320}"/>
               </a:ext>
             </a:extLst>
           </p:cNvPr>
@@ -27440,7 +27507,7 @@
                 <a:ea typeface="Arial"/>
                 <a:cs typeface="Arial"/>
               </a:rPr>
-              <a:t>Programming words we will use</a:t>
+              <a:t>Code.org Music Lab</a:t>
             </a:r>
           </a:p>
         </p:txBody>
@@ -27508,7 +27575,7 @@
               <a:buNone/>
             </a:pPr>
             <a:r>
-              <a:t>Keep, change, or remix</a:t>
+              <a:t>An action starts something</a:t>
             </a:r>
           </a:p>
         </p:txBody>
@@ -27559,7 +27626,7 @@
                   <a:schemeClr val="accent2"/>
                 </a:solidFill>
               </a:rPr>
-              <a:t>{AI suggests}</a:t>
+              <a:t>{Sequence}</a:t>
             </a:r>
           </a:p>
         </p:txBody>
@@ -27605,7 +27672,7 @@
               <a:buNone/>
             </a:pPr>
             <a:r>
-              <a:t>Music Lab can generate beats</a:t>
+              <a:t>Steps run in an order</a:t>
             </a:r>
           </a:p>
         </p:txBody>
@@ -27651,7 +27718,7 @@
               <a:buNone/>
             </a:pPr>
             <a:r>
-              <a:t>{You choose}</a:t>
+              <a:t>{Event}</a:t>
             </a:r>
           </a:p>
         </p:txBody>
@@ -27702,7 +27769,7 @@
                   <a:schemeClr val="lt2"/>
                 </a:solidFill>
               </a:rPr>
-              <a:t>{Humans lead}</a:t>
+              <a:t>{Debug}</a:t>
             </a:r>
           </a:p>
         </p:txBody>
@@ -27748,7 +27815,7 @@
               <a:buNone/>
             </a:pPr>
             <a:r>
-              <a:t>Creativity and judgment stay yours</a:t>
+              <a:t>Find and fix a problem</a:t>
             </a:r>
           </a:p>
         </p:txBody>
@@ -27990,10 +28057,10 @@
       </p:sp>
       <p:sp>
         <p:nvSpPr>
-          <p:cNvPr id="313" name="slide-heading-marker-21">
-            <a:extLst xmlns:a="http://schemas.openxmlformats.org/drawingml/2006/main">
-              <a:ext uri="{FF2B5EF4-FFF2-40B4-BE49-F238E27FC236}">
-                <a16:creationId xmlns:a16="http://schemas.microsoft.com/office/drawing/2014/main" id="{538DD39C-610E-410F-AFD9-AB9C2149CD18}"/>
+          <p:cNvPr id="313" name="slide-heading-marker-20">
+            <a:extLst xmlns:a="http://schemas.openxmlformats.org/drawingml/2006/main">
+              <a:ext uri="{FF2B5EF4-FFF2-40B4-BE49-F238E27FC236}">
+                <a16:creationId xmlns:a16="http://schemas.microsoft.com/office/drawing/2014/main" id="{214EDE73-A2E7-4A5F-A356-10F8C73F85DF}"/>
               </a:ext>
             </a:extLst>
           </p:cNvPr>
@@ -28046,10 +28113,10 @@
       </p:sp>
       <p:sp>
         <p:nvSpPr>
-          <p:cNvPr id="314" name="slide-heading-text-21">
-            <a:extLst xmlns:a="http://schemas.openxmlformats.org/drawingml/2006/main">
-              <a:ext uri="{FF2B5EF4-FFF2-40B4-BE49-F238E27FC236}">
-                <a16:creationId xmlns:a16="http://schemas.microsoft.com/office/drawing/2014/main" id="{F41FAAE0-8387-417B-9A51-260235602C2B}"/>
+          <p:cNvPr id="314" name="slide-heading-text-20">
+            <a:extLst xmlns:a="http://schemas.openxmlformats.org/drawingml/2006/main">
+              <a:ext uri="{FF2B5EF4-FFF2-40B4-BE49-F238E27FC236}">
+                <a16:creationId xmlns:a16="http://schemas.microsoft.com/office/drawing/2014/main" id="{84CD7BA5-0ACA-4CB0-ADBF-BE0EC5133548}"/>
               </a:ext>
             </a:extLst>
           </p:cNvPr>
@@ -28095,7 +28162,7 @@
                 <a:ea typeface="Arial"/>
                 <a:cs typeface="Arial"/>
               </a:rPr>
-              <a:t>AI can help, but you decide</a:t>
+              <a:t>Programming words we will use</a:t>
             </a:r>
           </a:p>
         </p:txBody>
@@ -28163,7 +28230,7 @@
               <a:buNone/>
             </a:pPr>
             <a:r>
-              <a:t>Show a favorite moment</a:t>
+              <a:t>Keep, change, or remix</a:t>
             </a:r>
           </a:p>
         </p:txBody>
@@ -28214,7 +28281,7 @@
                   <a:schemeClr val="accent2"/>
                 </a:solidFill>
               </a:rPr>
-              <a:t>{One discovery}</a:t>
+              <a:t>{AI suggests}</a:t>
             </a:r>
           </a:p>
         </p:txBody>
@@ -28260,7 +28327,7 @@
               <a:buNone/>
             </a:pPr>
             <a:r>
-              <a:t>What did your crew learn?</a:t>
+              <a:t>Music Lab can generate beats</a:t>
             </a:r>
           </a:p>
         </p:txBody>
@@ -28306,7 +28373,7 @@
               <a:buNone/>
             </a:pPr>
             <a:r>
-              <a:t>{One project}</a:t>
+              <a:t>{You choose}</a:t>
             </a:r>
           </a:p>
         </p:txBody>
@@ -28357,7 +28424,7 @@
                   <a:schemeClr val="lt2"/>
                 </a:solidFill>
               </a:rPr>
-              <a:t>{One shout-out}</a:t>
+              <a:t>{Humans lead}</a:t>
             </a:r>
           </a:p>
         </p:txBody>
@@ -28403,7 +28470,7 @@
               <a:buNone/>
             </a:pPr>
             <a:r>
-              <a:t>Thank someone who helped</a:t>
+              <a:t>Creativity and judgment stay yours</a:t>
             </a:r>
           </a:p>
         </p:txBody>
@@ -28645,10 +28712,10 @@
       </p:sp>
       <p:sp>
         <p:nvSpPr>
-          <p:cNvPr id="313" name="slide-heading-marker-22">
-            <a:extLst xmlns:a="http://schemas.openxmlformats.org/drawingml/2006/main">
-              <a:ext uri="{FF2B5EF4-FFF2-40B4-BE49-F238E27FC236}">
-                <a16:creationId xmlns:a16="http://schemas.microsoft.com/office/drawing/2014/main" id="{F6C2D193-E68A-4077-9735-13C38DF15C7D}"/>
+          <p:cNvPr id="313" name="slide-heading-marker-21">
+            <a:extLst xmlns:a="http://schemas.openxmlformats.org/drawingml/2006/main">
+              <a:ext uri="{FF2B5EF4-FFF2-40B4-BE49-F238E27FC236}">
+                <a16:creationId xmlns:a16="http://schemas.microsoft.com/office/drawing/2014/main" id="{C96B5FFF-202C-4FA9-B527-10EB4F503E3E}"/>
               </a:ext>
             </a:extLst>
           </p:cNvPr>
@@ -28701,10 +28768,10 @@
       </p:sp>
       <p:sp>
         <p:nvSpPr>
-          <p:cNvPr id="314" name="slide-heading-text-22">
-            <a:extLst xmlns:a="http://schemas.openxmlformats.org/drawingml/2006/main">
-              <a:ext uri="{FF2B5EF4-FFF2-40B4-BE49-F238E27FC236}">
-                <a16:creationId xmlns:a16="http://schemas.microsoft.com/office/drawing/2014/main" id="{5B04327E-6B3F-46C1-9339-73C7435C5DF0}"/>
+          <p:cNvPr id="314" name="slide-heading-text-21">
+            <a:extLst xmlns:a="http://schemas.openxmlformats.org/drawingml/2006/main">
+              <a:ext uri="{FF2B5EF4-FFF2-40B4-BE49-F238E27FC236}">
+                <a16:creationId xmlns:a16="http://schemas.microsoft.com/office/drawing/2014/main" id="{B8A7CD00-A1A0-4A9A-A27D-DEEEA0B100A3}"/>
               </a:ext>
             </a:extLst>
           </p:cNvPr>
@@ -28750,7 +28817,7 @@
                 <a:ea typeface="Arial"/>
                 <a:cs typeface="Arial"/>
               </a:rPr>
-              <a:t>Share what your crew made</a:t>
+              <a:t>AI can help, but you decide</a:t>
             </a:r>
           </a:p>
         </p:txBody>
@@ -28768,13 +28835,6 @@
 <file path=ppt/slides/slide23.xml><?xml version="1.0" encoding="utf-8"?>
 <p:sld xmlns:p="http://schemas.openxmlformats.org/presentationml/2006/main">
   <p:cSld>
-    <p:bg>
-      <p:bgPr>
-        <a:solidFill xmlns:a="http://schemas.openxmlformats.org/drawingml/2006/main">
-          <a:schemeClr val="lt1"/>
-        </a:solidFill>
-      </p:bgPr>
-    </p:bg>
     <p:spTree>
       <p:nvGrpSpPr>
         <p:cNvPr id="1" name=""/>
@@ -28786,10 +28846,296 @@
       </p:grpSpPr>
       <p:sp>
         <p:nvSpPr>
-          <p:cNvPr id="203" name="Google Shape;203;p24">
-            <a:extLst xmlns:a="http://schemas.openxmlformats.org/drawingml/2006/main">
-              <a:ext uri="{FF2B5EF4-FFF2-40B4-BE49-F238E27FC236}">
-                <a16:creationId xmlns:a16="http://schemas.microsoft.com/office/drawing/2014/main" id="{04D2E2B3-22FD-441D-93E4-32F09B56D5E7}"/>
+          <p:cNvPr id="302" name="Google Shape;302;p30">
+            <a:extLst xmlns:a="http://schemas.openxmlformats.org/drawingml/2006/main">
+              <a:ext uri="{FF2B5EF4-FFF2-40B4-BE49-F238E27FC236}">
+                <a16:creationId xmlns:a16="http://schemas.microsoft.com/office/drawing/2014/main" id="{069093DC-4E13-45FD-972F-EFACFB762C06}"/>
+              </a:ext>
+            </a:extLst>
+          </p:cNvPr>
+          <p:cNvSpPr>
+            <a:spLocks xmlns:a="http://schemas.openxmlformats.org/drawingml/2006/main" noGrp="1"/>
+          </p:cNvSpPr>
+          <p:nvPr>
+            <p:ph type="subTitle" idx="3"/>
+          </p:nvPr>
+        </p:nvSpPr>
+        <p:spPr>
+          <a:xfrm xmlns:a="http://schemas.openxmlformats.org/drawingml/2006/main">
+            <a:off x="1252403" y="2857500"/>
+            <a:ext cx="4190700" cy="384600"/>
+          </a:xfrm>
+          <a:prstGeom xmlns:a="http://schemas.openxmlformats.org/drawingml/2006/main" prst="rect">
+            <a:avLst/>
+          </a:prstGeom>
+        </p:spPr>
+        <p:txBody>
+          <a:bodyPr xmlns:a="http://schemas.openxmlformats.org/drawingml/2006/main" spcFirstLastPara="1" wrap="square" lIns="91425" tIns="91425" rIns="91425" bIns="91425" anchor="t">
+            <a:noAutofit/>
+          </a:bodyPr>
+          <a:lstStyle xmlns:a="http://schemas.openxmlformats.org/drawingml/2006/main"/>
+          <a:p xmlns:a="http://schemas.openxmlformats.org/drawingml/2006/main">
+            <a:pPr marL="0" indent="0" algn="l">
+              <a:spcBef>
+                <a:spcPts val="0"/>
+              </a:spcBef>
+              <a:spcAft>
+                <a:spcPts val="0"/>
+              </a:spcAft>
+              <a:buNone/>
+            </a:pPr>
+            <a:r>
+              <a:t>Show a favorite moment</a:t>
+            </a:r>
+          </a:p>
+        </p:txBody>
+      </p:sp>
+      <p:sp>
+        <p:nvSpPr>
+          <p:cNvPr id="303" name="Google Shape;303;p30">
+            <a:extLst xmlns:a="http://schemas.openxmlformats.org/drawingml/2006/main">
+              <a:ext uri="{FF2B5EF4-FFF2-40B4-BE49-F238E27FC236}">
+                <a16:creationId xmlns:a16="http://schemas.microsoft.com/office/drawing/2014/main" id="{22068794-3762-46E6-9FE4-6EE3ED61B7DC}"/>
+              </a:ext>
+            </a:extLst>
+          </p:cNvPr>
+          <p:cNvSpPr>
+            <a:spLocks xmlns:a="http://schemas.openxmlformats.org/drawingml/2006/main" noGrp="1"/>
+          </p:cNvSpPr>
+          <p:nvPr>
+            <p:ph type="title" idx="0"/>
+          </p:nvPr>
+        </p:nvSpPr>
+        <p:spPr>
+          <a:xfrm xmlns:a="http://schemas.openxmlformats.org/drawingml/2006/main">
+            <a:off x="1252403" y="1022536"/>
+            <a:ext cx="4190700" cy="733500"/>
+          </a:xfrm>
+          <a:prstGeom xmlns:a="http://schemas.openxmlformats.org/drawingml/2006/main" prst="rect">
+            <a:avLst/>
+          </a:prstGeom>
+        </p:spPr>
+        <p:txBody>
+          <a:bodyPr xmlns:a="http://schemas.openxmlformats.org/drawingml/2006/main" spcFirstLastPara="1" wrap="square" lIns="91425" tIns="91425" rIns="91425" bIns="91425" anchor="b">
+            <a:noAutofit/>
+          </a:bodyPr>
+          <a:lstStyle xmlns:a="http://schemas.openxmlformats.org/drawingml/2006/main"/>
+          <a:p xmlns:a="http://schemas.openxmlformats.org/drawingml/2006/main">
+            <a:pPr marL="0" indent="0" algn="l">
+              <a:spcBef>
+                <a:spcPts val="0"/>
+              </a:spcBef>
+              <a:spcAft>
+                <a:spcPts val="0"/>
+              </a:spcAft>
+              <a:buNone/>
+            </a:pPr>
+            <a:r>
+              <a:rPr>
+                <a:solidFill>
+                  <a:schemeClr val="accent2"/>
+                </a:solidFill>
+              </a:rPr>
+              <a:t>{One discovery}</a:t>
+            </a:r>
+          </a:p>
+        </p:txBody>
+      </p:sp>
+      <p:sp>
+        <p:nvSpPr>
+          <p:cNvPr id="304" name="Google Shape;304;p30">
+            <a:extLst xmlns:a="http://schemas.openxmlformats.org/drawingml/2006/main">
+              <a:ext uri="{FF2B5EF4-FFF2-40B4-BE49-F238E27FC236}">
+                <a16:creationId xmlns:a16="http://schemas.microsoft.com/office/drawing/2014/main" id="{4B083477-9C13-4431-934E-B2803526A8A3}"/>
+              </a:ext>
+            </a:extLst>
+          </p:cNvPr>
+          <p:cNvSpPr>
+            <a:spLocks xmlns:a="http://schemas.openxmlformats.org/drawingml/2006/main" noGrp="1"/>
+          </p:cNvSpPr>
+          <p:nvPr>
+            <p:ph type="subTitle" idx="1"/>
+          </p:nvPr>
+        </p:nvSpPr>
+        <p:spPr>
+          <a:xfrm xmlns:a="http://schemas.openxmlformats.org/drawingml/2006/main">
+            <a:off x="1252403" y="1790700"/>
+            <a:ext cx="4190700" cy="384600"/>
+          </a:xfrm>
+          <a:prstGeom xmlns:a="http://schemas.openxmlformats.org/drawingml/2006/main" prst="rect">
+            <a:avLst/>
+          </a:prstGeom>
+        </p:spPr>
+        <p:txBody>
+          <a:bodyPr xmlns:a="http://schemas.openxmlformats.org/drawingml/2006/main" spcFirstLastPara="1" wrap="square" lIns="91425" tIns="91425" rIns="91425" bIns="91425" anchor="t">
+            <a:noAutofit/>
+          </a:bodyPr>
+          <a:lstStyle xmlns:a="http://schemas.openxmlformats.org/drawingml/2006/main"/>
+          <a:p xmlns:a="http://schemas.openxmlformats.org/drawingml/2006/main">
+            <a:pPr marL="0" indent="0" algn="l">
+              <a:spcBef>
+                <a:spcPts val="0"/>
+              </a:spcBef>
+              <a:spcAft>
+                <a:spcPts val="0"/>
+              </a:spcAft>
+              <a:buNone/>
+            </a:pPr>
+            <a:r>
+              <a:t>What did your crew learn?</a:t>
+            </a:r>
+          </a:p>
+        </p:txBody>
+      </p:sp>
+      <p:sp>
+        <p:nvSpPr>
+          <p:cNvPr id="305" name="Google Shape;305;p30">
+            <a:extLst xmlns:a="http://schemas.openxmlformats.org/drawingml/2006/main">
+              <a:ext uri="{FF2B5EF4-FFF2-40B4-BE49-F238E27FC236}">
+                <a16:creationId xmlns:a16="http://schemas.microsoft.com/office/drawing/2014/main" id="{8FB84568-B635-4D96-BECD-DDAB98281B56}"/>
+              </a:ext>
+            </a:extLst>
+          </p:cNvPr>
+          <p:cNvSpPr>
+            <a:spLocks xmlns:a="http://schemas.openxmlformats.org/drawingml/2006/main" noGrp="1"/>
+          </p:cNvSpPr>
+          <p:nvPr>
+            <p:ph type="title" idx="2"/>
+          </p:nvPr>
+        </p:nvSpPr>
+        <p:spPr>
+          <a:xfrm xmlns:a="http://schemas.openxmlformats.org/drawingml/2006/main">
+            <a:off x="1252403" y="2080661"/>
+            <a:ext cx="4190700" cy="733500"/>
+          </a:xfrm>
+          <a:prstGeom xmlns:a="http://schemas.openxmlformats.org/drawingml/2006/main" prst="rect">
+            <a:avLst/>
+          </a:prstGeom>
+        </p:spPr>
+        <p:txBody>
+          <a:bodyPr xmlns:a="http://schemas.openxmlformats.org/drawingml/2006/main" spcFirstLastPara="1" wrap="square" lIns="91425" tIns="91425" rIns="91425" bIns="91425" anchor="b">
+            <a:noAutofit/>
+          </a:bodyPr>
+          <a:lstStyle xmlns:a="http://schemas.openxmlformats.org/drawingml/2006/main"/>
+          <a:p xmlns:a="http://schemas.openxmlformats.org/drawingml/2006/main">
+            <a:pPr marL="0" indent="0" algn="l">
+              <a:spcBef>
+                <a:spcPts val="0"/>
+              </a:spcBef>
+              <a:spcAft>
+                <a:spcPts val="0"/>
+              </a:spcAft>
+              <a:buNone/>
+            </a:pPr>
+            <a:r>
+              <a:t>{One project}</a:t>
+            </a:r>
+          </a:p>
+        </p:txBody>
+      </p:sp>
+      <p:sp>
+        <p:nvSpPr>
+          <p:cNvPr id="306" name="Google Shape;306;p30">
+            <a:extLst xmlns:a="http://schemas.openxmlformats.org/drawingml/2006/main">
+              <a:ext uri="{FF2B5EF4-FFF2-40B4-BE49-F238E27FC236}">
+                <a16:creationId xmlns:a16="http://schemas.microsoft.com/office/drawing/2014/main" id="{39D7BB6A-B939-4CF0-8868-1E889722D03D}"/>
+              </a:ext>
+            </a:extLst>
+          </p:cNvPr>
+          <p:cNvSpPr>
+            <a:spLocks xmlns:a="http://schemas.openxmlformats.org/drawingml/2006/main" noGrp="1"/>
+          </p:cNvSpPr>
+          <p:nvPr>
+            <p:ph type="title" idx="4"/>
+          </p:nvPr>
+        </p:nvSpPr>
+        <p:spPr>
+          <a:xfrm xmlns:a="http://schemas.openxmlformats.org/drawingml/2006/main">
+            <a:off x="1252404" y="3138786"/>
+            <a:ext cx="4190700" cy="733500"/>
+          </a:xfrm>
+          <a:prstGeom xmlns:a="http://schemas.openxmlformats.org/drawingml/2006/main" prst="rect">
+            <a:avLst/>
+          </a:prstGeom>
+        </p:spPr>
+        <p:txBody>
+          <a:bodyPr xmlns:a="http://schemas.openxmlformats.org/drawingml/2006/main" spcFirstLastPara="1" wrap="square" lIns="91425" tIns="91425" rIns="91425" bIns="91425" anchor="b">
+            <a:noAutofit/>
+          </a:bodyPr>
+          <a:lstStyle xmlns:a="http://schemas.openxmlformats.org/drawingml/2006/main"/>
+          <a:p xmlns:a="http://schemas.openxmlformats.org/drawingml/2006/main">
+            <a:pPr marL="0" indent="0" algn="l">
+              <a:spcBef>
+                <a:spcPts val="0"/>
+              </a:spcBef>
+              <a:spcAft>
+                <a:spcPts val="0"/>
+              </a:spcAft>
+              <a:buNone/>
+            </a:pPr>
+            <a:r>
+              <a:rPr>
+                <a:solidFill>
+                  <a:schemeClr val="lt2"/>
+                </a:solidFill>
+              </a:rPr>
+              <a:t>{One shout-out}</a:t>
+            </a:r>
+          </a:p>
+        </p:txBody>
+      </p:sp>
+      <p:sp>
+        <p:nvSpPr>
+          <p:cNvPr id="307" name="Google Shape;307;p30">
+            <a:extLst xmlns:a="http://schemas.openxmlformats.org/drawingml/2006/main">
+              <a:ext uri="{FF2B5EF4-FFF2-40B4-BE49-F238E27FC236}">
+                <a16:creationId xmlns:a16="http://schemas.microsoft.com/office/drawing/2014/main" id="{B1468CD5-D03B-4903-8BF7-9F0C7E81B677}"/>
+              </a:ext>
+            </a:extLst>
+          </p:cNvPr>
+          <p:cNvSpPr>
+            <a:spLocks xmlns:a="http://schemas.openxmlformats.org/drawingml/2006/main" noGrp="1"/>
+          </p:cNvSpPr>
+          <p:nvPr>
+            <p:ph type="subTitle" idx="5"/>
+          </p:nvPr>
+        </p:nvSpPr>
+        <p:spPr>
+          <a:xfrm xmlns:a="http://schemas.openxmlformats.org/drawingml/2006/main">
+            <a:off x="1252404" y="3914775"/>
+            <a:ext cx="4190700" cy="384600"/>
+          </a:xfrm>
+          <a:prstGeom xmlns:a="http://schemas.openxmlformats.org/drawingml/2006/main" prst="rect">
+            <a:avLst/>
+          </a:prstGeom>
+        </p:spPr>
+        <p:txBody>
+          <a:bodyPr xmlns:a="http://schemas.openxmlformats.org/drawingml/2006/main" spcFirstLastPara="1" wrap="square" lIns="91425" tIns="91425" rIns="91425" bIns="91425" anchor="t">
+            <a:noAutofit/>
+          </a:bodyPr>
+          <a:lstStyle xmlns:a="http://schemas.openxmlformats.org/drawingml/2006/main"/>
+          <a:p xmlns:a="http://schemas.openxmlformats.org/drawingml/2006/main">
+            <a:pPr marL="0" indent="0" algn="l">
+              <a:spcBef>
+                <a:spcPts val="0"/>
+              </a:spcBef>
+              <a:spcAft>
+                <a:spcPts val="0"/>
+              </a:spcAft>
+              <a:buNone/>
+            </a:pPr>
+            <a:r>
+              <a:t>Thank someone who helped</a:t>
+            </a:r>
+          </a:p>
+        </p:txBody>
+      </p:sp>
+      <p:sp>
+        <p:nvSpPr>
+          <p:cNvPr id="308" name="Google Shape;308;p30">
+            <a:extLst xmlns:a="http://schemas.openxmlformats.org/drawingml/2006/main">
+              <a:ext uri="{FF2B5EF4-FFF2-40B4-BE49-F238E27FC236}">
+                <a16:creationId xmlns:a16="http://schemas.microsoft.com/office/drawing/2014/main" id="{B78C6BA0-ED32-48DC-85F2-B4E00038ECB9}"/>
               </a:ext>
             </a:extLst>
           </p:cNvPr>
@@ -28799,9 +29145,68 @@
           <p:nvPr/>
         </p:nvSpPr>
         <p:spPr>
+          <a:xfrm xmlns:a="http://schemas.openxmlformats.org/drawingml/2006/main">
+            <a:off x="7721100" y="3868300"/>
+            <a:ext cx="702900" cy="606900"/>
+          </a:xfrm>
+          <a:prstGeom xmlns:a="http://schemas.openxmlformats.org/drawingml/2006/main" prst="rect">
+            <a:avLst/>
+          </a:prstGeom>
+          <a:noFill xmlns:a="http://schemas.openxmlformats.org/drawingml/2006/main"/>
+          <a:ln xmlns:a="http://schemas.openxmlformats.org/drawingml/2006/main">
+            <a:noFill/>
+          </a:ln>
+        </p:spPr>
+        <p:txBody>
+          <a:bodyPr xmlns:a="http://schemas.openxmlformats.org/drawingml/2006/main" spcFirstLastPara="1" wrap="square" lIns="91425" tIns="91425" rIns="91425" bIns="91425" anchor="ctr">
+            <a:noAutofit/>
+          </a:bodyPr>
+          <a:lstStyle xmlns:a="http://schemas.openxmlformats.org/drawingml/2006/main"/>
+          <a:p xmlns:a="http://schemas.openxmlformats.org/drawingml/2006/main">
+            <a:pPr marL="0" indent="0" algn="l">
+              <a:lnSpc>
+                <a:spcPct val="90000"/>
+              </a:lnSpc>
+              <a:spcBef>
+                <a:spcPts val="0"/>
+              </a:spcBef>
+              <a:spcAft>
+                <a:spcPts val="0"/>
+              </a:spcAft>
+              <a:buNone/>
+            </a:pPr>
+            <a:r>
+              <a:rPr sz="3600">
+                <a:solidFill>
+                  <a:schemeClr val="dk1"/>
+                </a:solidFill>
+                <a:latin typeface="Quantico"/>
+                <a:ea typeface="Quantico"/>
+                <a:cs typeface="Quantico"/>
+              </a:rPr>
+              <a:t>/&gt;</a:t>
+            </a:r>
+          </a:p>
+        </p:txBody>
+      </p:sp>
+      <p:sp>
+        <p:nvSpPr>
+          <p:cNvPr id="310" name="Google Shape;310;p30">
+            <a:extLst xmlns:a="http://schemas.openxmlformats.org/drawingml/2006/main">
+              <a:ext uri="{FF2B5EF4-FFF2-40B4-BE49-F238E27FC236}">
+                <a16:creationId xmlns:a16="http://schemas.microsoft.com/office/drawing/2014/main" id="{09B6DAF8-8302-4623-897D-26165EA51BCA}"/>
+              </a:ext>
+            </a:extLst>
+          </p:cNvPr>
+          <p:cNvSpPr>
+            <a:spLocks xmlns:a="http://schemas.openxmlformats.org/drawingml/2006/main" noGrp="1"/>
+          </p:cNvSpPr>
+          <p:nvPr/>
+        </p:nvSpPr>
+        <p:spPr>
           <a:xfrm xmlns:a="http://schemas.openxmlformats.org/drawingml/2006/main" rot="0">
-            <a:off x="772525" y="726625"/>
-            <a:ext cx="6578100" cy="3438300"/>
+            <a:off x="5827600" y="697350"/>
+            <a:ext cx="2119744" cy="1127400"/>
           </a:xfrm>
           <a:prstGeom xmlns:a="http://schemas.openxmlformats.org/drawingml/2006/main" prst="rect">
             <a:avLst/>
@@ -28838,10 +29243,10 @@
       </p:sp>
       <p:sp>
         <p:nvSpPr>
-          <p:cNvPr id="204" name="Google Shape;204;p24">
-            <a:extLst xmlns:a="http://schemas.openxmlformats.org/drawingml/2006/main">
-              <a:ext uri="{FF2B5EF4-FFF2-40B4-BE49-F238E27FC236}">
-                <a16:creationId xmlns:a16="http://schemas.microsoft.com/office/drawing/2014/main" id="{B1D93451-B164-4654-813D-9B921C836466}"/>
+          <p:cNvPr id="311" name="Google Shape;311;p30">
+            <a:extLst xmlns:a="http://schemas.openxmlformats.org/drawingml/2006/main">
+              <a:ext uri="{FF2B5EF4-FFF2-40B4-BE49-F238E27FC236}">
+                <a16:creationId xmlns:a16="http://schemas.microsoft.com/office/drawing/2014/main" id="{742D31F6-3221-48C9-8E30-90EE2ECD8DA0}"/>
               </a:ext>
             </a:extLst>
           </p:cNvPr>
@@ -28852,8 +29257,8 @@
         </p:nvSpPr>
         <p:spPr>
           <a:xfrm xmlns:a="http://schemas.openxmlformats.org/drawingml/2006/main" rot="0">
-            <a:off x="772525" y="726625"/>
-            <a:ext cx="6578100" cy="255300"/>
+            <a:off x="5827603" y="697350"/>
+            <a:ext cx="2119744" cy="255300"/>
           </a:xfrm>
           <a:prstGeom xmlns:a="http://schemas.openxmlformats.org/drawingml/2006/main" prst="rect">
             <a:avLst/>
@@ -28890,10 +29295,10 @@
       </p:sp>
       <p:sp>
         <p:nvSpPr>
-          <p:cNvPr id="206" name="Google Shape;206;p24">
-            <a:extLst xmlns:a="http://schemas.openxmlformats.org/drawingml/2006/main">
-              <a:ext uri="{FF2B5EF4-FFF2-40B4-BE49-F238E27FC236}">
-                <a16:creationId xmlns:a16="http://schemas.microsoft.com/office/drawing/2014/main" id="{EE5B2A1D-12A2-40AB-8D58-2E80CD3BFA13}"/>
+          <p:cNvPr id="312" name="Google Shape;312;p30">
+            <a:extLst xmlns:a="http://schemas.openxmlformats.org/drawingml/2006/main">
+              <a:ext uri="{FF2B5EF4-FFF2-40B4-BE49-F238E27FC236}">
+                <a16:creationId xmlns:a16="http://schemas.microsoft.com/office/drawing/2014/main" id="{1197A6D5-E686-4D9D-B748-4B534E594BA4}"/>
               </a:ext>
             </a:extLst>
           </p:cNvPr>
@@ -28903,334 +29308,8 @@
           <p:nvPr/>
         </p:nvSpPr>
         <p:spPr>
-          <a:xfrm xmlns:a="http://schemas.openxmlformats.org/drawingml/2006/main" rot="0">
-            <a:off x="4506625" y="3349925"/>
-            <a:ext cx="3447300" cy="962400"/>
-          </a:xfrm>
-          <a:prstGeom xmlns:a="http://schemas.openxmlformats.org/drawingml/2006/main" prst="rect">
-            <a:avLst/>
-          </a:prstGeom>
-          <a:solidFill xmlns:a="http://schemas.openxmlformats.org/drawingml/2006/main">
-            <a:schemeClr val="lt1"/>
-          </a:solidFill>
-          <a:ln xmlns:a="http://schemas.openxmlformats.org/drawingml/2006/main" w="9525" cmpd="sng">
-            <a:solidFill>
-              <a:schemeClr val="dk1"/>
-            </a:solidFill>
-            <a:prstDash val="solid"/>
-            <a:headEnd type="none" w="sm" len="sm"/>
-            <a:tailEnd type="none" w="sm" len="sm"/>
-          </a:ln>
-        </p:spPr>
-        <p:txBody>
-          <a:bodyPr xmlns:a="http://schemas.openxmlformats.org/drawingml/2006/main" spcFirstLastPara="1" wrap="square" lIns="91425" tIns="91425" rIns="91425" bIns="91425" anchor="ctr">
-            <a:noAutofit/>
-          </a:bodyPr>
-          <a:lstStyle xmlns:a="http://schemas.openxmlformats.org/drawingml/2006/main"/>
-          <a:p xmlns:a="http://schemas.openxmlformats.org/drawingml/2006/main">
-            <a:pPr marL="0" indent="0" algn="l">
-              <a:spcBef>
-                <a:spcPts val="0"/>
-              </a:spcBef>
-              <a:spcAft>
-                <a:spcPts val="0"/>
-              </a:spcAft>
-              <a:buNone/>
-            </a:pPr>
-          </a:p>
-        </p:txBody>
-      </p:sp>
-      <p:sp>
-        <p:nvSpPr>
-          <p:cNvPr id="207" name="Google Shape;207;p24">
-            <a:extLst xmlns:a="http://schemas.openxmlformats.org/drawingml/2006/main">
-              <a:ext uri="{FF2B5EF4-FFF2-40B4-BE49-F238E27FC236}">
-                <a16:creationId xmlns:a16="http://schemas.microsoft.com/office/drawing/2014/main" id="{2045E92C-FD95-4F72-B1D3-175AA5BC638E}"/>
-              </a:ext>
-            </a:extLst>
-          </p:cNvPr>
-          <p:cNvSpPr>
-            <a:spLocks xmlns:a="http://schemas.openxmlformats.org/drawingml/2006/main" noGrp="1"/>
-          </p:cNvSpPr>
-          <p:nvPr/>
-        </p:nvSpPr>
-        <p:spPr>
-          <a:xfrm xmlns:a="http://schemas.openxmlformats.org/drawingml/2006/main" rot="0">
-            <a:off x="4506625" y="3349925"/>
-            <a:ext cx="3447300" cy="255300"/>
-          </a:xfrm>
-          <a:prstGeom xmlns:a="http://schemas.openxmlformats.org/drawingml/2006/main" prst="rect">
-            <a:avLst/>
-          </a:prstGeom>
-          <a:solidFill xmlns:a="http://schemas.openxmlformats.org/drawingml/2006/main">
-            <a:schemeClr val="lt1"/>
-          </a:solidFill>
-          <a:ln xmlns:a="http://schemas.openxmlformats.org/drawingml/2006/main" w="9525" cmpd="sng">
-            <a:solidFill>
-              <a:schemeClr val="dk1"/>
-            </a:solidFill>
-            <a:prstDash val="solid"/>
-            <a:headEnd type="none" w="sm" len="sm"/>
-            <a:tailEnd type="none" w="sm" len="sm"/>
-          </a:ln>
-        </p:spPr>
-        <p:txBody>
-          <a:bodyPr xmlns:a="http://schemas.openxmlformats.org/drawingml/2006/main" spcFirstLastPara="1" wrap="square" lIns="91425" tIns="91425" rIns="91425" bIns="91425" anchor="ctr">
-            <a:noAutofit/>
-          </a:bodyPr>
-          <a:lstStyle xmlns:a="http://schemas.openxmlformats.org/drawingml/2006/main"/>
-          <a:p xmlns:a="http://schemas.openxmlformats.org/drawingml/2006/main">
-            <a:pPr marL="0" indent="0" algn="l">
-              <a:spcBef>
-                <a:spcPts val="0"/>
-              </a:spcBef>
-              <a:spcAft>
-                <a:spcPts val="0"/>
-              </a:spcAft>
-              <a:buNone/>
-            </a:pPr>
-          </a:p>
-        </p:txBody>
-      </p:sp>
-      <p:sp>
-        <p:nvSpPr>
-          <p:cNvPr id="209" name="Google Shape;209;p24">
-            <a:extLst xmlns:a="http://schemas.openxmlformats.org/drawingml/2006/main">
-              <a:ext uri="{FF2B5EF4-FFF2-40B4-BE49-F238E27FC236}">
-                <a16:creationId xmlns:a16="http://schemas.microsoft.com/office/drawing/2014/main" id="{0AE4C7F2-E08C-4333-A7CB-F563247B91DD}"/>
-              </a:ext>
-            </a:extLst>
-          </p:cNvPr>
-          <p:cNvSpPr>
-            <a:spLocks xmlns:a="http://schemas.openxmlformats.org/drawingml/2006/main" noGrp="1"/>
-          </p:cNvSpPr>
-          <p:nvPr/>
-        </p:nvSpPr>
-        <p:spPr>
-          <a:xfrm xmlns:a="http://schemas.openxmlformats.org/drawingml/2006/main" rot="0">
-            <a:off x="6849418" y="1309987"/>
-            <a:ext cx="1864825" cy="1637031"/>
-          </a:xfrm>
-          <a:prstGeom xmlns:a="http://schemas.openxmlformats.org/drawingml/2006/main" prst="rect">
-            <a:avLst/>
-          </a:prstGeom>
-          <a:solidFill xmlns:a="http://schemas.openxmlformats.org/drawingml/2006/main">
-            <a:schemeClr val="lt1"/>
-          </a:solidFill>
-          <a:ln xmlns:a="http://schemas.openxmlformats.org/drawingml/2006/main" w="9525" cmpd="sng">
-            <a:solidFill>
-              <a:schemeClr val="dk1"/>
-            </a:solidFill>
-            <a:prstDash val="solid"/>
-            <a:headEnd type="none" w="sm" len="sm"/>
-            <a:tailEnd type="none" w="sm" len="sm"/>
-          </a:ln>
-        </p:spPr>
-        <p:txBody>
-          <a:bodyPr xmlns:a="http://schemas.openxmlformats.org/drawingml/2006/main" spcFirstLastPara="1" wrap="square" lIns="91425" tIns="91425" rIns="91425" bIns="91425" anchor="ctr">
-            <a:noAutofit/>
-          </a:bodyPr>
-          <a:lstStyle xmlns:a="http://schemas.openxmlformats.org/drawingml/2006/main"/>
-          <a:p xmlns:a="http://schemas.openxmlformats.org/drawingml/2006/main">
-            <a:pPr marL="0" indent="0" algn="l">
-              <a:spcBef>
-                <a:spcPts val="0"/>
-              </a:spcBef>
-              <a:spcAft>
-                <a:spcPts val="0"/>
-              </a:spcAft>
-              <a:buNone/>
-            </a:pPr>
-          </a:p>
-        </p:txBody>
-      </p:sp>
-      <p:sp>
-        <p:nvSpPr>
-          <p:cNvPr id="210" name="Google Shape;210;p24">
-            <a:extLst xmlns:a="http://schemas.openxmlformats.org/drawingml/2006/main">
-              <a:ext uri="{FF2B5EF4-FFF2-40B4-BE49-F238E27FC236}">
-                <a16:creationId xmlns:a16="http://schemas.microsoft.com/office/drawing/2014/main" id="{976E2B22-EB9F-4CC7-ABF6-B9854C645052}"/>
-              </a:ext>
-            </a:extLst>
-          </p:cNvPr>
-          <p:cNvSpPr>
-            <a:spLocks xmlns:a="http://schemas.openxmlformats.org/drawingml/2006/main" noGrp="1"/>
-          </p:cNvSpPr>
-          <p:nvPr/>
-        </p:nvSpPr>
-        <p:spPr>
-          <a:xfrm xmlns:a="http://schemas.openxmlformats.org/drawingml/2006/main" rot="0">
-            <a:off x="6849425" y="1309976"/>
-            <a:ext cx="1864825" cy="255307"/>
-          </a:xfrm>
-          <a:prstGeom xmlns:a="http://schemas.openxmlformats.org/drawingml/2006/main" prst="rect">
-            <a:avLst/>
-          </a:prstGeom>
-          <a:solidFill xmlns:a="http://schemas.openxmlformats.org/drawingml/2006/main">
-            <a:schemeClr val="lt1"/>
-          </a:solidFill>
-          <a:ln xmlns:a="http://schemas.openxmlformats.org/drawingml/2006/main" w="9525" cmpd="sng">
-            <a:solidFill>
-              <a:schemeClr val="dk1"/>
-            </a:solidFill>
-            <a:prstDash val="solid"/>
-            <a:headEnd type="none" w="sm" len="sm"/>
-            <a:tailEnd type="none" w="sm" len="sm"/>
-          </a:ln>
-        </p:spPr>
-        <p:txBody>
-          <a:bodyPr xmlns:a="http://schemas.openxmlformats.org/drawingml/2006/main" spcFirstLastPara="1" wrap="square" lIns="91425" tIns="91425" rIns="91425" bIns="91425" anchor="ctr">
-            <a:noAutofit/>
-          </a:bodyPr>
-          <a:lstStyle xmlns:a="http://schemas.openxmlformats.org/drawingml/2006/main"/>
-          <a:p xmlns:a="http://schemas.openxmlformats.org/drawingml/2006/main">
-            <a:pPr marL="0" indent="0" algn="l">
-              <a:spcBef>
-                <a:spcPts val="0"/>
-              </a:spcBef>
-              <a:spcAft>
-                <a:spcPts val="0"/>
-              </a:spcAft>
-              <a:buNone/>
-            </a:pPr>
-          </a:p>
-        </p:txBody>
-      </p:sp>
-      <p:sp>
-        <p:nvSpPr>
-          <p:cNvPr id="211" name="Google Shape;211;p24">
-            <a:extLst xmlns:a="http://schemas.openxmlformats.org/drawingml/2006/main">
-              <a:ext uri="{FF2B5EF4-FFF2-40B4-BE49-F238E27FC236}">
-                <a16:creationId xmlns:a16="http://schemas.microsoft.com/office/drawing/2014/main" id="{6775FBA8-32A6-4C5D-858A-FBE91F9F8C9B}"/>
-              </a:ext>
-            </a:extLst>
-          </p:cNvPr>
-          <p:cNvSpPr>
-            <a:spLocks xmlns:a="http://schemas.openxmlformats.org/drawingml/2006/main" noGrp="1"/>
-          </p:cNvSpPr>
-          <p:nvPr/>
-        </p:nvSpPr>
-        <p:spPr>
           <a:xfrm xmlns:a="http://schemas.openxmlformats.org/drawingml/2006/main">
-            <a:off x="1084325" y="2012800"/>
-            <a:ext cx="702900" cy="606900"/>
-          </a:xfrm>
-          <a:prstGeom xmlns:a="http://schemas.openxmlformats.org/drawingml/2006/main" prst="rect">
-            <a:avLst/>
-          </a:prstGeom>
-          <a:noFill xmlns:a="http://schemas.openxmlformats.org/drawingml/2006/main"/>
-          <a:ln xmlns:a="http://schemas.openxmlformats.org/drawingml/2006/main">
-            <a:noFill/>
-          </a:ln>
-        </p:spPr>
-        <p:txBody>
-          <a:bodyPr xmlns:a="http://schemas.openxmlformats.org/drawingml/2006/main" spcFirstLastPara="1" wrap="square" lIns="91425" tIns="91425" rIns="91425" bIns="91425" anchor="ctr">
-            <a:noAutofit/>
-          </a:bodyPr>
-          <a:lstStyle xmlns:a="http://schemas.openxmlformats.org/drawingml/2006/main"/>
-          <a:p xmlns:a="http://schemas.openxmlformats.org/drawingml/2006/main">
-            <a:pPr marL="0" indent="0" algn="l">
-              <a:lnSpc>
-                <a:spcPct val="90000"/>
-              </a:lnSpc>
-              <a:spcBef>
-                <a:spcPts val="0"/>
-              </a:spcBef>
-              <a:spcAft>
-                <a:spcPts val="0"/>
-              </a:spcAft>
-              <a:buNone/>
-            </a:pPr>
-            <a:r>
-              <a:rPr sz="3600">
-                <a:solidFill>
-                  <a:schemeClr val="lt2"/>
-                </a:solidFill>
-                <a:latin typeface="Quantico"/>
-                <a:ea typeface="Quantico"/>
-                <a:cs typeface="Quantico"/>
-              </a:rPr>
-              <a:t>&lt;/</a:t>
-            </a:r>
-          </a:p>
-        </p:txBody>
-      </p:sp>
-      <p:sp>
-        <p:nvSpPr>
-          <p:cNvPr id="212" name="Google Shape;212;p24">
-            <a:extLst xmlns:a="http://schemas.openxmlformats.org/drawingml/2006/main">
-              <a:ext uri="{FF2B5EF4-FFF2-40B4-BE49-F238E27FC236}">
-                <a16:creationId xmlns:a16="http://schemas.microsoft.com/office/drawing/2014/main" id="{E705969D-D0F1-46F7-91BE-19AAFA3FBB61}"/>
-              </a:ext>
-            </a:extLst>
-          </p:cNvPr>
-          <p:cNvSpPr>
-            <a:spLocks xmlns:a="http://schemas.openxmlformats.org/drawingml/2006/main" noGrp="1"/>
-          </p:cNvSpPr>
-          <p:nvPr/>
-        </p:nvSpPr>
-        <p:spPr>
-          <a:xfrm xmlns:a="http://schemas.openxmlformats.org/drawingml/2006/main">
-            <a:off x="5878825" y="1974375"/>
-            <a:ext cx="702900" cy="606900"/>
-          </a:xfrm>
-          <a:prstGeom xmlns:a="http://schemas.openxmlformats.org/drawingml/2006/main" prst="rect">
-            <a:avLst/>
-          </a:prstGeom>
-          <a:noFill xmlns:a="http://schemas.openxmlformats.org/drawingml/2006/main"/>
-          <a:ln xmlns:a="http://schemas.openxmlformats.org/drawingml/2006/main">
-            <a:noFill/>
-          </a:ln>
-        </p:spPr>
-        <p:txBody>
-          <a:bodyPr xmlns:a="http://schemas.openxmlformats.org/drawingml/2006/main" spcFirstLastPara="1" wrap="square" lIns="91425" tIns="91425" rIns="91425" bIns="91425" anchor="ctr">
-            <a:noAutofit/>
-          </a:bodyPr>
-          <a:lstStyle xmlns:a="http://schemas.openxmlformats.org/drawingml/2006/main"/>
-          <a:p xmlns:a="http://schemas.openxmlformats.org/drawingml/2006/main">
-            <a:pPr marL="0" indent="0" algn="l">
-              <a:lnSpc>
-                <a:spcPct val="90000"/>
-              </a:lnSpc>
-              <a:spcBef>
-                <a:spcPts val="0"/>
-              </a:spcBef>
-              <a:spcAft>
-                <a:spcPts val="0"/>
-              </a:spcAft>
-              <a:buNone/>
-            </a:pPr>
-            <a:r>
-              <a:rPr sz="3600">
-                <a:solidFill>
-                  <a:schemeClr val="dk1"/>
-                </a:solidFill>
-                <a:latin typeface="Quantico"/>
-                <a:ea typeface="Quantico"/>
-                <a:cs typeface="Quantico"/>
-              </a:rPr>
-              <a:t>/&gt;</a:t>
-            </a:r>
-          </a:p>
-        </p:txBody>
-      </p:sp>
-      <p:sp>
-        <p:nvSpPr>
-          <p:cNvPr id="213" name="Google Shape;213;p24">
-            <a:extLst xmlns:a="http://schemas.openxmlformats.org/drawingml/2006/main">
-              <a:ext uri="{FF2B5EF4-FFF2-40B4-BE49-F238E27FC236}">
-                <a16:creationId xmlns:a16="http://schemas.microsoft.com/office/drawing/2014/main" id="{FBDE6D5E-521E-4730-84D0-2601494F8F61}"/>
-              </a:ext>
-            </a:extLst>
-          </p:cNvPr>
-          <p:cNvSpPr>
-            <a:spLocks xmlns:a="http://schemas.openxmlformats.org/drawingml/2006/main" noGrp="1"/>
-          </p:cNvSpPr>
-          <p:nvPr/>
-        </p:nvSpPr>
-        <p:spPr>
-          <a:xfrm xmlns:a="http://schemas.openxmlformats.org/drawingml/2006/main">
-            <a:off x="7198457" y="1873600"/>
+            <a:off x="6279082" y="1016750"/>
             <a:ext cx="1216800" cy="746100"/>
           </a:xfrm>
           <a:prstGeom xmlns:a="http://schemas.openxmlformats.org/drawingml/2006/main" prst="rect">
@@ -29288,159 +29367,66 @@
       </p:sp>
       <p:sp>
         <p:nvSpPr>
-          <p:cNvPr id="214" name="Google Shape;214;p24">
-            <a:extLst xmlns:a="http://schemas.openxmlformats.org/drawingml/2006/main">
-              <a:ext uri="{FF2B5EF4-FFF2-40B4-BE49-F238E27FC236}">
-                <a16:creationId xmlns:a16="http://schemas.microsoft.com/office/drawing/2014/main" id="{5EE6EEBD-605C-4EFD-803C-779B4C388CA3}"/>
-              </a:ext>
-            </a:extLst>
-          </p:cNvPr>
-          <p:cNvSpPr>
-            <a:spLocks xmlns:a="http://schemas.openxmlformats.org/drawingml/2006/main" noGrp="1"/>
-          </p:cNvSpPr>
-          <p:nvPr>
-            <p:ph type="ctrTitle" idx="0"/>
-          </p:nvPr>
+          <p:cNvPr id="313" name="slide-heading-marker-22">
+            <a:extLst xmlns:a="http://schemas.openxmlformats.org/drawingml/2006/main">
+              <a:ext uri="{FF2B5EF4-FFF2-40B4-BE49-F238E27FC236}">
+                <a16:creationId xmlns:a16="http://schemas.microsoft.com/office/drawing/2014/main" id="{4FEFA774-8080-4BDE-ACFD-9EE79F273732}"/>
+              </a:ext>
+            </a:extLst>
+          </p:cNvPr>
+          <p:cNvSpPr>
+            <a:spLocks xmlns:a="http://schemas.openxmlformats.org/drawingml/2006/main" noGrp="1"/>
+          </p:cNvSpPr>
+          <p:nvPr/>
         </p:nvSpPr>
         <p:spPr>
           <a:xfrm xmlns:a="http://schemas.openxmlformats.org/drawingml/2006/main">
-            <a:off x="1875450" y="1974375"/>
-            <a:ext cx="4148400" cy="746100"/>
-          </a:xfrm>
-          <a:prstGeom xmlns:a="http://schemas.openxmlformats.org/drawingml/2006/main" prst="rect">
-            <a:avLst/>
-          </a:prstGeom>
-        </p:spPr>
-        <p:txBody>
-          <a:bodyPr xmlns:a="http://schemas.openxmlformats.org/drawingml/2006/main" spcFirstLastPara="1" wrap="square" lIns="91425" tIns="91425" rIns="91425" bIns="91425" anchor="t">
-            <a:noAutofit/>
-          </a:bodyPr>
-          <a:lstStyle xmlns:a="http://schemas.openxmlformats.org/drawingml/2006/main"/>
-          <a:p xmlns:a="http://schemas.openxmlformats.org/drawingml/2006/main">
-            <a:pPr marL="0" indent="0" algn="l">
-              <a:spcBef>
-                <a:spcPts val="0"/>
-              </a:spcBef>
-              <a:spcAft>
-                <a:spcPts val="0"/>
-              </a:spcAft>
-              <a:buNone/>
+            <a:off x="742950" y="447675"/>
+            <a:ext cx="476250" cy="323850"/>
+          </a:xfrm>
+          <a:prstGeom xmlns:a="http://schemas.openxmlformats.org/drawingml/2006/main" prst="rect">
+            <a:avLst/>
+          </a:prstGeom>
+          <a:noFill xmlns:a="http://schemas.openxmlformats.org/drawingml/2006/main"/>
+          <a:ln xmlns:a="http://schemas.openxmlformats.org/drawingml/2006/main" w="0">
+            <a:noFill/>
+            <a:prstDash val="solid"/>
+          </a:ln>
+        </p:spPr>
+        <p:txBody>
+          <a:bodyPr xmlns:a="http://schemas.openxmlformats.org/drawingml/2006/main"/>
+          <a:lstStyle xmlns:a="http://schemas.openxmlformats.org/drawingml/2006/main"/>
+          <a:p xmlns:a="http://schemas.openxmlformats.org/drawingml/2006/main">
+            <a:pPr algn="l">
+              <a:defRPr sz="1950" b="1">
+                <a:solidFill>
+                  <a:srgbClr val="FFDB5D"/>
+                </a:solidFill>
+                <a:latin typeface="Source Code Pro"/>
+                <a:ea typeface="Source Code Pro"/>
+                <a:cs typeface="Source Code Pro"/>
+              </a:defRPr>
             </a:pPr>
             <a:r>
-              <a:t>Final Kahoot</a:t>
-            </a:r>
-          </a:p>
-        </p:txBody>
-      </p:sp>
-      <p:sp>
-        <p:nvSpPr>
-          <p:cNvPr id="215" name="Google Shape;215;p24">
-            <a:extLst xmlns:a="http://schemas.openxmlformats.org/drawingml/2006/main">
-              <a:ext uri="{FF2B5EF4-FFF2-40B4-BE49-F238E27FC236}">
-                <a16:creationId xmlns:a16="http://schemas.microsoft.com/office/drawing/2014/main" id="{561222E6-86D3-4D0D-888F-084113278088}"/>
-              </a:ext>
-            </a:extLst>
-          </p:cNvPr>
-          <p:cNvSpPr>
-            <a:spLocks xmlns:a="http://schemas.openxmlformats.org/drawingml/2006/main" noGrp="1"/>
-          </p:cNvSpPr>
-          <p:nvPr>
-            <p:ph type="subTitle" idx="1"/>
-          </p:nvPr>
-        </p:nvSpPr>
-        <p:spPr>
-          <a:xfrm xmlns:a="http://schemas.openxmlformats.org/drawingml/2006/main">
-            <a:off x="4751650" y="3680600"/>
-            <a:ext cx="3043800" cy="528600"/>
-          </a:xfrm>
-          <a:prstGeom xmlns:a="http://schemas.openxmlformats.org/drawingml/2006/main" prst="rect">
-            <a:avLst/>
-          </a:prstGeom>
-        </p:spPr>
-        <p:txBody>
-          <a:bodyPr xmlns:a="http://schemas.openxmlformats.org/drawingml/2006/main" spcFirstLastPara="1" wrap="square" lIns="91425" tIns="91425" rIns="91425" bIns="91425" anchor="ctr">
-            <a:noAutofit/>
-          </a:bodyPr>
-          <a:lstStyle xmlns:a="http://schemas.openxmlformats.org/drawingml/2006/main"/>
-          <a:p xmlns:a="http://schemas.openxmlformats.org/drawingml/2006/main">
-            <a:pPr marL="0" indent="0" algn="l">
-              <a:spcBef>
-                <a:spcPts val="0"/>
-              </a:spcBef>
-              <a:spcAft>
-                <a:spcPts val="0"/>
-              </a:spcAft>
-              <a:buNone/>
-            </a:pPr>
-            <a:r>
-              <a:rPr sz="1400"/>
-              <a:t>Show what you learned today.</a:t>
-            </a:r>
-          </a:p>
-        </p:txBody>
-      </p:sp>
-      <p:sp>
-        <p:nvSpPr>
-          <p:cNvPr id="216" name="Google Shape;216;p24">
-            <a:extLst xmlns:a="http://schemas.openxmlformats.org/drawingml/2006/main">
-              <a:ext uri="{FF2B5EF4-FFF2-40B4-BE49-F238E27FC236}">
-                <a16:creationId xmlns:a16="http://schemas.microsoft.com/office/drawing/2014/main" id="{3CB2B6C1-3795-43B8-9621-54C5BB056D62}"/>
-              </a:ext>
-            </a:extLst>
-          </p:cNvPr>
-          <p:cNvSpPr>
-            <a:spLocks xmlns:a="http://schemas.openxmlformats.org/drawingml/2006/main" noGrp="1"/>
-          </p:cNvSpPr>
-          <p:nvPr/>
-        </p:nvSpPr>
-        <p:spPr>
-          <a:xfrm xmlns:a="http://schemas.openxmlformats.org/drawingml/2006/main">
-            <a:off x="536125" y="117311"/>
-            <a:ext cx="1999500" cy="180300"/>
-          </a:xfrm>
-          <a:prstGeom xmlns:a="http://schemas.openxmlformats.org/drawingml/2006/main" prst="rect">
-            <a:avLst/>
-          </a:prstGeom>
-          <a:noFill xmlns:a="http://schemas.openxmlformats.org/drawingml/2006/main"/>
-          <a:ln xmlns:a="http://schemas.openxmlformats.org/drawingml/2006/main">
-            <a:noFill/>
-          </a:ln>
-        </p:spPr>
-        <p:txBody>
-          <a:bodyPr xmlns:a="http://schemas.openxmlformats.org/drawingml/2006/main" spcFirstLastPara="1" wrap="square" lIns="91425" tIns="91425" rIns="91425" bIns="91425" anchor="ctr">
-            <a:noAutofit/>
-          </a:bodyPr>
-          <a:lstStyle xmlns:a="http://schemas.openxmlformats.org/drawingml/2006/main"/>
-          <a:p xmlns:a="http://schemas.openxmlformats.org/drawingml/2006/main">
-            <a:pPr marL="0" indent="0" algn="l">
-              <a:spcBef>
-                <a:spcPts val="0"/>
-              </a:spcBef>
-              <a:spcAft>
-                <a:spcPts val="0"/>
-              </a:spcAft>
-              <a:buNone/>
-            </a:pPr>
-            <a:r>
-              <a:rPr sz="1000">
+              <a:rPr sz="1950" b="1">
                 <a:solidFill>
-                  <a:schemeClr val="dk1"/>
+                  <a:srgbClr val="FFDB5D"/>
                 </a:solidFill>
                 <a:latin typeface="Source Code Pro"/>
                 <a:ea typeface="Source Code Pro"/>
                 <a:cs typeface="Source Code Pro"/>
               </a:rPr>
-              <a:t>Classroom Presentation</a:t>
+              <a:t>&lt;/</a:t>
             </a:r>
           </a:p>
         </p:txBody>
       </p:sp>
       <p:sp>
         <p:nvSpPr>
-          <p:cNvPr id="217" name="Google Shape;217;p24">
-            <a:extLst xmlns:a="http://schemas.openxmlformats.org/drawingml/2006/main">
-              <a:ext uri="{FF2B5EF4-FFF2-40B4-BE49-F238E27FC236}">
-                <a16:creationId xmlns:a16="http://schemas.microsoft.com/office/drawing/2014/main" id="{1BCE298B-ADAB-4360-9E4B-303C95BFACCE}"/>
+          <p:cNvPr id="314" name="slide-heading-text-22">
+            <a:extLst xmlns:a="http://schemas.openxmlformats.org/drawingml/2006/main">
+              <a:ext uri="{FF2B5EF4-FFF2-40B4-BE49-F238E27FC236}">
+                <a16:creationId xmlns:a16="http://schemas.microsoft.com/office/drawing/2014/main" id="{A8BABE84-3134-42F8-BF6D-7693E4AFFF2D}"/>
               </a:ext>
             </a:extLst>
           </p:cNvPr>
@@ -29451,42 +29437,42 @@
         </p:nvSpPr>
         <p:spPr>
           <a:xfrm xmlns:a="http://schemas.openxmlformats.org/drawingml/2006/main">
-            <a:off x="3730325" y="117311"/>
-            <a:ext cx="1999500" cy="180300"/>
+            <a:off x="1152525" y="428625"/>
+            <a:ext cx="5619750" cy="361950"/>
           </a:xfrm>
           <a:prstGeom xmlns:a="http://schemas.openxmlformats.org/drawingml/2006/main" prst="rect">
             <a:avLst/>
           </a:prstGeom>
           <a:noFill xmlns:a="http://schemas.openxmlformats.org/drawingml/2006/main"/>
-          <a:ln xmlns:a="http://schemas.openxmlformats.org/drawingml/2006/main">
+          <a:ln xmlns:a="http://schemas.openxmlformats.org/drawingml/2006/main" w="0">
             <a:noFill/>
+            <a:prstDash val="solid"/>
           </a:ln>
         </p:spPr>
         <p:txBody>
-          <a:bodyPr xmlns:a="http://schemas.openxmlformats.org/drawingml/2006/main" spcFirstLastPara="1" wrap="square" lIns="91425" tIns="91425" rIns="91425" bIns="91425" anchor="ctr">
-            <a:noAutofit/>
-          </a:bodyPr>
-          <a:lstStyle xmlns:a="http://schemas.openxmlformats.org/drawingml/2006/main"/>
-          <a:p xmlns:a="http://schemas.openxmlformats.org/drawingml/2006/main">
-            <a:pPr marL="0" indent="0" algn="l">
-              <a:spcBef>
-                <a:spcPts val="0"/>
-              </a:spcBef>
-              <a:spcAft>
-                <a:spcPts val="0"/>
-              </a:spcAft>
-              <a:buNone/>
+          <a:bodyPr xmlns:a="http://schemas.openxmlformats.org/drawingml/2006/main"/>
+          <a:lstStyle xmlns:a="http://schemas.openxmlformats.org/drawingml/2006/main"/>
+          <a:p xmlns:a="http://schemas.openxmlformats.org/drawingml/2006/main">
+            <a:pPr algn="l">
+              <a:defRPr sz="1800" b="0">
+                <a:solidFill>
+                  <a:srgbClr val="FFFFFF"/>
+                </a:solidFill>
+                <a:latin typeface="Arial"/>
+                <a:ea typeface="Arial"/>
+                <a:cs typeface="Arial"/>
+              </a:defRPr>
             </a:pPr>
             <a:r>
-              <a:rPr sz="1000">
+              <a:rPr sz="1800" b="0">
                 <a:solidFill>
-                  <a:schemeClr val="dk1"/>
+                  <a:srgbClr val="FFFFFF"/>
                 </a:solidFill>
-                <a:latin typeface="Source Code Pro"/>
-                <a:ea typeface="Source Code Pro"/>
-                <a:cs typeface="Source Code Pro"/>
+                <a:latin typeface="Arial"/>
+                <a:ea typeface="Arial"/>
+                <a:cs typeface="Arial"/>
               </a:rPr>
-              <a:t>. . .</a:t>
+              <a:t>Share what your crew made</a:t>
             </a:r>
           </a:p>
         </p:txBody>
@@ -29494,7 +29480,7 @@
     </p:spTree>
     <p:extLst>
       <p:ext uri="{BB962C8B-B14F-4D97-AF65-F5344CB8AC3E}">
-        <p14:creationId xmlns:p14="http://schemas.microsoft.com/office/powerpoint/2010/main" val="592295941"/>
+        <p14:creationId xmlns:p14="http://schemas.microsoft.com/office/powerpoint/2010/main" val="694519266"/>
       </p:ext>
     </p:extLst>
   </p:cSld>
@@ -29504,6 +29490,13 @@
 <file path=ppt/slides/slide24.xml><?xml version="1.0" encoding="utf-8"?>
 <p:sld xmlns:p="http://schemas.openxmlformats.org/presentationml/2006/main">
   <p:cSld>
+    <p:bg>
+      <p:bgPr>
+        <a:solidFill xmlns:a="http://schemas.openxmlformats.org/drawingml/2006/main">
+          <a:schemeClr val="lt1"/>
+        </a:solidFill>
+      </p:bgPr>
+    </p:bg>
     <p:spTree>
       <p:nvGrpSpPr>
         <p:cNvPr id="1" name=""/>
@@ -29515,36 +29508,353 @@
       </p:grpSpPr>
       <p:sp>
         <p:nvSpPr>
-          <p:cNvPr id="302" name="Google Shape;302;p30">
-            <a:extLst xmlns:a="http://schemas.openxmlformats.org/drawingml/2006/main">
-              <a:ext uri="{FF2B5EF4-FFF2-40B4-BE49-F238E27FC236}">
-                <a16:creationId xmlns:a16="http://schemas.microsoft.com/office/drawing/2014/main" id="{069093DC-4E13-45FD-972F-EFACFB762C06}"/>
-              </a:ext>
-            </a:extLst>
-          </p:cNvPr>
-          <p:cNvSpPr>
-            <a:spLocks xmlns:a="http://schemas.openxmlformats.org/drawingml/2006/main" noGrp="1"/>
-          </p:cNvSpPr>
-          <p:nvPr>
-            <p:ph type="subTitle" idx="3"/>
-          </p:nvPr>
+          <p:cNvPr id="203" name="Google Shape;203;p24">
+            <a:extLst xmlns:a="http://schemas.openxmlformats.org/drawingml/2006/main">
+              <a:ext uri="{FF2B5EF4-FFF2-40B4-BE49-F238E27FC236}">
+                <a16:creationId xmlns:a16="http://schemas.microsoft.com/office/drawing/2014/main" id="{04D2E2B3-22FD-441D-93E4-32F09B56D5E7}"/>
+              </a:ext>
+            </a:extLst>
+          </p:cNvPr>
+          <p:cNvSpPr>
+            <a:spLocks xmlns:a="http://schemas.openxmlformats.org/drawingml/2006/main" noGrp="1"/>
+          </p:cNvSpPr>
+          <p:nvPr/>
+        </p:nvSpPr>
+        <p:spPr>
+          <a:xfrm xmlns:a="http://schemas.openxmlformats.org/drawingml/2006/main" rot="0">
+            <a:off x="772525" y="726625"/>
+            <a:ext cx="6578100" cy="3438300"/>
+          </a:xfrm>
+          <a:prstGeom xmlns:a="http://schemas.openxmlformats.org/drawingml/2006/main" prst="rect">
+            <a:avLst/>
+          </a:prstGeom>
+          <a:solidFill xmlns:a="http://schemas.openxmlformats.org/drawingml/2006/main">
+            <a:schemeClr val="lt1"/>
+          </a:solidFill>
+          <a:ln xmlns:a="http://schemas.openxmlformats.org/drawingml/2006/main" w="9525" cmpd="sng">
+            <a:solidFill>
+              <a:schemeClr val="dk1"/>
+            </a:solidFill>
+            <a:prstDash val="solid"/>
+            <a:headEnd type="none" w="sm" len="sm"/>
+            <a:tailEnd type="none" w="sm" len="sm"/>
+          </a:ln>
+        </p:spPr>
+        <p:txBody>
+          <a:bodyPr xmlns:a="http://schemas.openxmlformats.org/drawingml/2006/main" spcFirstLastPara="1" wrap="square" lIns="91425" tIns="91425" rIns="91425" bIns="91425" anchor="ctr">
+            <a:noAutofit/>
+          </a:bodyPr>
+          <a:lstStyle xmlns:a="http://schemas.openxmlformats.org/drawingml/2006/main"/>
+          <a:p xmlns:a="http://schemas.openxmlformats.org/drawingml/2006/main">
+            <a:pPr marL="0" indent="0" algn="l">
+              <a:spcBef>
+                <a:spcPts val="0"/>
+              </a:spcBef>
+              <a:spcAft>
+                <a:spcPts val="0"/>
+              </a:spcAft>
+              <a:buNone/>
+            </a:pPr>
+          </a:p>
+        </p:txBody>
+      </p:sp>
+      <p:sp>
+        <p:nvSpPr>
+          <p:cNvPr id="204" name="Google Shape;204;p24">
+            <a:extLst xmlns:a="http://schemas.openxmlformats.org/drawingml/2006/main">
+              <a:ext uri="{FF2B5EF4-FFF2-40B4-BE49-F238E27FC236}">
+                <a16:creationId xmlns:a16="http://schemas.microsoft.com/office/drawing/2014/main" id="{B1D93451-B164-4654-813D-9B921C836466}"/>
+              </a:ext>
+            </a:extLst>
+          </p:cNvPr>
+          <p:cNvSpPr>
+            <a:spLocks xmlns:a="http://schemas.openxmlformats.org/drawingml/2006/main" noGrp="1"/>
+          </p:cNvSpPr>
+          <p:nvPr/>
+        </p:nvSpPr>
+        <p:spPr>
+          <a:xfrm xmlns:a="http://schemas.openxmlformats.org/drawingml/2006/main" rot="0">
+            <a:off x="772525" y="726625"/>
+            <a:ext cx="6578100" cy="255300"/>
+          </a:xfrm>
+          <a:prstGeom xmlns:a="http://schemas.openxmlformats.org/drawingml/2006/main" prst="rect">
+            <a:avLst/>
+          </a:prstGeom>
+          <a:solidFill xmlns:a="http://schemas.openxmlformats.org/drawingml/2006/main">
+            <a:schemeClr val="lt1"/>
+          </a:solidFill>
+          <a:ln xmlns:a="http://schemas.openxmlformats.org/drawingml/2006/main" w="9525" cmpd="sng">
+            <a:solidFill>
+              <a:schemeClr val="dk1"/>
+            </a:solidFill>
+            <a:prstDash val="solid"/>
+            <a:headEnd type="none" w="sm" len="sm"/>
+            <a:tailEnd type="none" w="sm" len="sm"/>
+          </a:ln>
+        </p:spPr>
+        <p:txBody>
+          <a:bodyPr xmlns:a="http://schemas.openxmlformats.org/drawingml/2006/main" spcFirstLastPara="1" wrap="square" lIns="91425" tIns="91425" rIns="91425" bIns="91425" anchor="ctr">
+            <a:noAutofit/>
+          </a:bodyPr>
+          <a:lstStyle xmlns:a="http://schemas.openxmlformats.org/drawingml/2006/main"/>
+          <a:p xmlns:a="http://schemas.openxmlformats.org/drawingml/2006/main">
+            <a:pPr marL="0" indent="0" algn="l">
+              <a:spcBef>
+                <a:spcPts val="0"/>
+              </a:spcBef>
+              <a:spcAft>
+                <a:spcPts val="0"/>
+              </a:spcAft>
+              <a:buNone/>
+            </a:pPr>
+          </a:p>
+        </p:txBody>
+      </p:sp>
+      <p:sp>
+        <p:nvSpPr>
+          <p:cNvPr id="206" name="Google Shape;206;p24">
+            <a:extLst xmlns:a="http://schemas.openxmlformats.org/drawingml/2006/main">
+              <a:ext uri="{FF2B5EF4-FFF2-40B4-BE49-F238E27FC236}">
+                <a16:creationId xmlns:a16="http://schemas.microsoft.com/office/drawing/2014/main" id="{EE5B2A1D-12A2-40AB-8D58-2E80CD3BFA13}"/>
+              </a:ext>
+            </a:extLst>
+          </p:cNvPr>
+          <p:cNvSpPr>
+            <a:spLocks xmlns:a="http://schemas.openxmlformats.org/drawingml/2006/main" noGrp="1"/>
+          </p:cNvSpPr>
+          <p:nvPr/>
+        </p:nvSpPr>
+        <p:spPr>
+          <a:xfrm xmlns:a="http://schemas.openxmlformats.org/drawingml/2006/main" rot="0">
+            <a:off x="4506625" y="3349925"/>
+            <a:ext cx="3447300" cy="962400"/>
+          </a:xfrm>
+          <a:prstGeom xmlns:a="http://schemas.openxmlformats.org/drawingml/2006/main" prst="rect">
+            <a:avLst/>
+          </a:prstGeom>
+          <a:solidFill xmlns:a="http://schemas.openxmlformats.org/drawingml/2006/main">
+            <a:schemeClr val="lt1"/>
+          </a:solidFill>
+          <a:ln xmlns:a="http://schemas.openxmlformats.org/drawingml/2006/main" w="9525" cmpd="sng">
+            <a:solidFill>
+              <a:schemeClr val="dk1"/>
+            </a:solidFill>
+            <a:prstDash val="solid"/>
+            <a:headEnd type="none" w="sm" len="sm"/>
+            <a:tailEnd type="none" w="sm" len="sm"/>
+          </a:ln>
+        </p:spPr>
+        <p:txBody>
+          <a:bodyPr xmlns:a="http://schemas.openxmlformats.org/drawingml/2006/main" spcFirstLastPara="1" wrap="square" lIns="91425" tIns="91425" rIns="91425" bIns="91425" anchor="ctr">
+            <a:noAutofit/>
+          </a:bodyPr>
+          <a:lstStyle xmlns:a="http://schemas.openxmlformats.org/drawingml/2006/main"/>
+          <a:p xmlns:a="http://schemas.openxmlformats.org/drawingml/2006/main">
+            <a:pPr marL="0" indent="0" algn="l">
+              <a:spcBef>
+                <a:spcPts val="0"/>
+              </a:spcBef>
+              <a:spcAft>
+                <a:spcPts val="0"/>
+              </a:spcAft>
+              <a:buNone/>
+            </a:pPr>
+          </a:p>
+        </p:txBody>
+      </p:sp>
+      <p:sp>
+        <p:nvSpPr>
+          <p:cNvPr id="207" name="Google Shape;207;p24">
+            <a:extLst xmlns:a="http://schemas.openxmlformats.org/drawingml/2006/main">
+              <a:ext uri="{FF2B5EF4-FFF2-40B4-BE49-F238E27FC236}">
+                <a16:creationId xmlns:a16="http://schemas.microsoft.com/office/drawing/2014/main" id="{2045E92C-FD95-4F72-B1D3-175AA5BC638E}"/>
+              </a:ext>
+            </a:extLst>
+          </p:cNvPr>
+          <p:cNvSpPr>
+            <a:spLocks xmlns:a="http://schemas.openxmlformats.org/drawingml/2006/main" noGrp="1"/>
+          </p:cNvSpPr>
+          <p:nvPr/>
+        </p:nvSpPr>
+        <p:spPr>
+          <a:xfrm xmlns:a="http://schemas.openxmlformats.org/drawingml/2006/main" rot="0">
+            <a:off x="4506625" y="3349925"/>
+            <a:ext cx="3447300" cy="255300"/>
+          </a:xfrm>
+          <a:prstGeom xmlns:a="http://schemas.openxmlformats.org/drawingml/2006/main" prst="rect">
+            <a:avLst/>
+          </a:prstGeom>
+          <a:solidFill xmlns:a="http://schemas.openxmlformats.org/drawingml/2006/main">
+            <a:schemeClr val="lt1"/>
+          </a:solidFill>
+          <a:ln xmlns:a="http://schemas.openxmlformats.org/drawingml/2006/main" w="9525" cmpd="sng">
+            <a:solidFill>
+              <a:schemeClr val="dk1"/>
+            </a:solidFill>
+            <a:prstDash val="solid"/>
+            <a:headEnd type="none" w="sm" len="sm"/>
+            <a:tailEnd type="none" w="sm" len="sm"/>
+          </a:ln>
+        </p:spPr>
+        <p:txBody>
+          <a:bodyPr xmlns:a="http://schemas.openxmlformats.org/drawingml/2006/main" spcFirstLastPara="1" wrap="square" lIns="91425" tIns="91425" rIns="91425" bIns="91425" anchor="ctr">
+            <a:noAutofit/>
+          </a:bodyPr>
+          <a:lstStyle xmlns:a="http://schemas.openxmlformats.org/drawingml/2006/main"/>
+          <a:p xmlns:a="http://schemas.openxmlformats.org/drawingml/2006/main">
+            <a:pPr marL="0" indent="0" algn="l">
+              <a:spcBef>
+                <a:spcPts val="0"/>
+              </a:spcBef>
+              <a:spcAft>
+                <a:spcPts val="0"/>
+              </a:spcAft>
+              <a:buNone/>
+            </a:pPr>
+          </a:p>
+        </p:txBody>
+      </p:sp>
+      <p:sp>
+        <p:nvSpPr>
+          <p:cNvPr id="209" name="Google Shape;209;p24">
+            <a:extLst xmlns:a="http://schemas.openxmlformats.org/drawingml/2006/main">
+              <a:ext uri="{FF2B5EF4-FFF2-40B4-BE49-F238E27FC236}">
+                <a16:creationId xmlns:a16="http://schemas.microsoft.com/office/drawing/2014/main" id="{0AE4C7F2-E08C-4333-A7CB-F563247B91DD}"/>
+              </a:ext>
+            </a:extLst>
+          </p:cNvPr>
+          <p:cNvSpPr>
+            <a:spLocks xmlns:a="http://schemas.openxmlformats.org/drawingml/2006/main" noGrp="1"/>
+          </p:cNvSpPr>
+          <p:nvPr/>
+        </p:nvSpPr>
+        <p:spPr>
+          <a:xfrm xmlns:a="http://schemas.openxmlformats.org/drawingml/2006/main" rot="0">
+            <a:off x="6849418" y="1309987"/>
+            <a:ext cx="1864825" cy="1637031"/>
+          </a:xfrm>
+          <a:prstGeom xmlns:a="http://schemas.openxmlformats.org/drawingml/2006/main" prst="rect">
+            <a:avLst/>
+          </a:prstGeom>
+          <a:solidFill xmlns:a="http://schemas.openxmlformats.org/drawingml/2006/main">
+            <a:schemeClr val="lt1"/>
+          </a:solidFill>
+          <a:ln xmlns:a="http://schemas.openxmlformats.org/drawingml/2006/main" w="9525" cmpd="sng">
+            <a:solidFill>
+              <a:schemeClr val="dk1"/>
+            </a:solidFill>
+            <a:prstDash val="solid"/>
+            <a:headEnd type="none" w="sm" len="sm"/>
+            <a:tailEnd type="none" w="sm" len="sm"/>
+          </a:ln>
+        </p:spPr>
+        <p:txBody>
+          <a:bodyPr xmlns:a="http://schemas.openxmlformats.org/drawingml/2006/main" spcFirstLastPara="1" wrap="square" lIns="91425" tIns="91425" rIns="91425" bIns="91425" anchor="ctr">
+            <a:noAutofit/>
+          </a:bodyPr>
+          <a:lstStyle xmlns:a="http://schemas.openxmlformats.org/drawingml/2006/main"/>
+          <a:p xmlns:a="http://schemas.openxmlformats.org/drawingml/2006/main">
+            <a:pPr marL="0" indent="0" algn="l">
+              <a:spcBef>
+                <a:spcPts val="0"/>
+              </a:spcBef>
+              <a:spcAft>
+                <a:spcPts val="0"/>
+              </a:spcAft>
+              <a:buNone/>
+            </a:pPr>
+          </a:p>
+        </p:txBody>
+      </p:sp>
+      <p:sp>
+        <p:nvSpPr>
+          <p:cNvPr id="210" name="Google Shape;210;p24">
+            <a:extLst xmlns:a="http://schemas.openxmlformats.org/drawingml/2006/main">
+              <a:ext uri="{FF2B5EF4-FFF2-40B4-BE49-F238E27FC236}">
+                <a16:creationId xmlns:a16="http://schemas.microsoft.com/office/drawing/2014/main" id="{976E2B22-EB9F-4CC7-ABF6-B9854C645052}"/>
+              </a:ext>
+            </a:extLst>
+          </p:cNvPr>
+          <p:cNvSpPr>
+            <a:spLocks xmlns:a="http://schemas.openxmlformats.org/drawingml/2006/main" noGrp="1"/>
+          </p:cNvSpPr>
+          <p:nvPr/>
+        </p:nvSpPr>
+        <p:spPr>
+          <a:xfrm xmlns:a="http://schemas.openxmlformats.org/drawingml/2006/main" rot="0">
+            <a:off x="6849425" y="1309976"/>
+            <a:ext cx="1864825" cy="255307"/>
+          </a:xfrm>
+          <a:prstGeom xmlns:a="http://schemas.openxmlformats.org/drawingml/2006/main" prst="rect">
+            <a:avLst/>
+          </a:prstGeom>
+          <a:solidFill xmlns:a="http://schemas.openxmlformats.org/drawingml/2006/main">
+            <a:schemeClr val="lt1"/>
+          </a:solidFill>
+          <a:ln xmlns:a="http://schemas.openxmlformats.org/drawingml/2006/main" w="9525" cmpd="sng">
+            <a:solidFill>
+              <a:schemeClr val="dk1"/>
+            </a:solidFill>
+            <a:prstDash val="solid"/>
+            <a:headEnd type="none" w="sm" len="sm"/>
+            <a:tailEnd type="none" w="sm" len="sm"/>
+          </a:ln>
+        </p:spPr>
+        <p:txBody>
+          <a:bodyPr xmlns:a="http://schemas.openxmlformats.org/drawingml/2006/main" spcFirstLastPara="1" wrap="square" lIns="91425" tIns="91425" rIns="91425" bIns="91425" anchor="ctr">
+            <a:noAutofit/>
+          </a:bodyPr>
+          <a:lstStyle xmlns:a="http://schemas.openxmlformats.org/drawingml/2006/main"/>
+          <a:p xmlns:a="http://schemas.openxmlformats.org/drawingml/2006/main">
+            <a:pPr marL="0" indent="0" algn="l">
+              <a:spcBef>
+                <a:spcPts val="0"/>
+              </a:spcBef>
+              <a:spcAft>
+                <a:spcPts val="0"/>
+              </a:spcAft>
+              <a:buNone/>
+            </a:pPr>
+          </a:p>
+        </p:txBody>
+      </p:sp>
+      <p:sp>
+        <p:nvSpPr>
+          <p:cNvPr id="211" name="Google Shape;211;p24">
+            <a:extLst xmlns:a="http://schemas.openxmlformats.org/drawingml/2006/main">
+              <a:ext uri="{FF2B5EF4-FFF2-40B4-BE49-F238E27FC236}">
+                <a16:creationId xmlns:a16="http://schemas.microsoft.com/office/drawing/2014/main" id="{6775FBA8-32A6-4C5D-858A-FBE91F9F8C9B}"/>
+              </a:ext>
+            </a:extLst>
+          </p:cNvPr>
+          <p:cNvSpPr>
+            <a:spLocks xmlns:a="http://schemas.openxmlformats.org/drawingml/2006/main" noGrp="1"/>
+          </p:cNvSpPr>
+          <p:nvPr/>
         </p:nvSpPr>
         <p:spPr>
           <a:xfrm xmlns:a="http://schemas.openxmlformats.org/drawingml/2006/main">
-            <a:off x="1252403" y="2857500"/>
-            <a:ext cx="4190700" cy="384600"/>
-          </a:xfrm>
-          <a:prstGeom xmlns:a="http://schemas.openxmlformats.org/drawingml/2006/main" prst="rect">
-            <a:avLst/>
-          </a:prstGeom>
-        </p:spPr>
-        <p:txBody>
-          <a:bodyPr xmlns:a="http://schemas.openxmlformats.org/drawingml/2006/main" spcFirstLastPara="1" wrap="square" lIns="91425" tIns="91425" rIns="91425" bIns="91425" anchor="t">
+            <a:off x="1084325" y="2012800"/>
+            <a:ext cx="702900" cy="606900"/>
+          </a:xfrm>
+          <a:prstGeom xmlns:a="http://schemas.openxmlformats.org/drawingml/2006/main" prst="rect">
+            <a:avLst/>
+          </a:prstGeom>
+          <a:noFill xmlns:a="http://schemas.openxmlformats.org/drawingml/2006/main"/>
+          <a:ln xmlns:a="http://schemas.openxmlformats.org/drawingml/2006/main">
+            <a:noFill/>
+          </a:ln>
+        </p:spPr>
+        <p:txBody>
+          <a:bodyPr xmlns:a="http://schemas.openxmlformats.org/drawingml/2006/main" spcFirstLastPara="1" wrap="square" lIns="91425" tIns="91425" rIns="91425" bIns="91425" anchor="ctr">
             <a:noAutofit/>
           </a:bodyPr>
           <a:lstStyle xmlns:a="http://schemas.openxmlformats.org/drawingml/2006/main"/>
           <a:p xmlns:a="http://schemas.openxmlformats.org/drawingml/2006/main">
             <a:pPr marL="0" indent="0" algn="l">
+              <a:lnSpc>
+                <a:spcPct val="90000"/>
+              </a:lnSpc>
               <a:spcBef>
                 <a:spcPts val="0"/>
               </a:spcBef>
@@ -29554,268 +29864,36 @@
               <a:buNone/>
             </a:pPr>
             <a:r>
-              <a:t>3 sounds, AI drums, 2 changes</a:t>
-            </a:r>
-          </a:p>
-        </p:txBody>
-      </p:sp>
-      <p:sp>
-        <p:nvSpPr>
-          <p:cNvPr id="303" name="Google Shape;303;p30">
-            <a:extLst xmlns:a="http://schemas.openxmlformats.org/drawingml/2006/main">
-              <a:ext uri="{FF2B5EF4-FFF2-40B4-BE49-F238E27FC236}">
-                <a16:creationId xmlns:a16="http://schemas.microsoft.com/office/drawing/2014/main" id="{22068794-3762-46E6-9FE4-6EE3ED61B7DC}"/>
-              </a:ext>
-            </a:extLst>
-          </p:cNvPr>
-          <p:cNvSpPr>
-            <a:spLocks xmlns:a="http://schemas.openxmlformats.org/drawingml/2006/main" noGrp="1"/>
-          </p:cNvSpPr>
-          <p:nvPr>
-            <p:ph type="title" idx="0"/>
-          </p:nvPr>
-        </p:nvSpPr>
-        <p:spPr>
-          <a:xfrm xmlns:a="http://schemas.openxmlformats.org/drawingml/2006/main">
-            <a:off x="1252403" y="1022536"/>
-            <a:ext cx="4190700" cy="733500"/>
-          </a:xfrm>
-          <a:prstGeom xmlns:a="http://schemas.openxmlformats.org/drawingml/2006/main" prst="rect">
-            <a:avLst/>
-          </a:prstGeom>
-        </p:spPr>
-        <p:txBody>
-          <a:bodyPr xmlns:a="http://schemas.openxmlformats.org/drawingml/2006/main" spcFirstLastPara="1" wrap="square" lIns="91425" tIns="91425" rIns="91425" bIns="91425" anchor="b">
-            <a:noAutofit/>
-          </a:bodyPr>
-          <a:lstStyle xmlns:a="http://schemas.openxmlformats.org/drawingml/2006/main"/>
-          <a:p xmlns:a="http://schemas.openxmlformats.org/drawingml/2006/main">
-            <a:pPr marL="0" indent="0" algn="l">
-              <a:spcBef>
-                <a:spcPts val="0"/>
-              </a:spcBef>
-              <a:spcAft>
-                <a:spcPts val="0"/>
-              </a:spcAft>
-              <a:buNone/>
-            </a:pPr>
-            <a:r>
-              <a:rPr>
-                <a:solidFill>
-                  <a:schemeClr val="accent2"/>
-                </a:solidFill>
-              </a:rPr>
-              <a:t>{Finish levels}</a:t>
-            </a:r>
-          </a:p>
-        </p:txBody>
-      </p:sp>
-      <p:sp>
-        <p:nvSpPr>
-          <p:cNvPr id="304" name="Google Shape;304;p30">
-            <a:extLst xmlns:a="http://schemas.openxmlformats.org/drawingml/2006/main">
-              <a:ext uri="{FF2B5EF4-FFF2-40B4-BE49-F238E27FC236}">
-                <a16:creationId xmlns:a16="http://schemas.microsoft.com/office/drawing/2014/main" id="{4B083477-9C13-4431-934E-B2803526A8A3}"/>
-              </a:ext>
-            </a:extLst>
-          </p:cNvPr>
-          <p:cNvSpPr>
-            <a:spLocks xmlns:a="http://schemas.openxmlformats.org/drawingml/2006/main" noGrp="1"/>
-          </p:cNvSpPr>
-          <p:nvPr>
-            <p:ph type="subTitle" idx="1"/>
-          </p:nvPr>
-        </p:nvSpPr>
-        <p:spPr>
-          <a:xfrm xmlns:a="http://schemas.openxmlformats.org/drawingml/2006/main">
-            <a:off x="1252403" y="1790700"/>
-            <a:ext cx="4190700" cy="384600"/>
-          </a:xfrm>
-          <a:prstGeom xmlns:a="http://schemas.openxmlformats.org/drawingml/2006/main" prst="rect">
-            <a:avLst/>
-          </a:prstGeom>
-        </p:spPr>
-        <p:txBody>
-          <a:bodyPr xmlns:a="http://schemas.openxmlformats.org/drawingml/2006/main" spcFirstLastPara="1" wrap="square" lIns="91425" tIns="91425" rIns="91425" bIns="91425" anchor="t">
-            <a:noAutofit/>
-          </a:bodyPr>
-          <a:lstStyle xmlns:a="http://schemas.openxmlformats.org/drawingml/2006/main"/>
-          <a:p xmlns:a="http://schemas.openxmlformats.org/drawingml/2006/main">
-            <a:pPr marL="0" indent="0" algn="l">
-              <a:spcBef>
-                <a:spcPts val="0"/>
-              </a:spcBef>
-              <a:spcAft>
-                <a:spcPts val="0"/>
-              </a:spcAft>
-              <a:buNone/>
-            </a:pPr>
-            <a:r>
-              <a:t>Complete the guided levels</a:t>
-            </a:r>
-          </a:p>
-        </p:txBody>
-      </p:sp>
-      <p:sp>
-        <p:nvSpPr>
-          <p:cNvPr id="305" name="Google Shape;305;p30">
-            <a:extLst xmlns:a="http://schemas.openxmlformats.org/drawingml/2006/main">
-              <a:ext uri="{FF2B5EF4-FFF2-40B4-BE49-F238E27FC236}">
-                <a16:creationId xmlns:a16="http://schemas.microsoft.com/office/drawing/2014/main" id="{8FB84568-B635-4D96-BECD-DDAB98281B56}"/>
-              </a:ext>
-            </a:extLst>
-          </p:cNvPr>
-          <p:cNvSpPr>
-            <a:spLocks xmlns:a="http://schemas.openxmlformats.org/drawingml/2006/main" noGrp="1"/>
-          </p:cNvSpPr>
-          <p:nvPr>
-            <p:ph type="title" idx="2"/>
-          </p:nvPr>
-        </p:nvSpPr>
-        <p:spPr>
-          <a:xfrm xmlns:a="http://schemas.openxmlformats.org/drawingml/2006/main">
-            <a:off x="1252403" y="2080661"/>
-            <a:ext cx="4190700" cy="733500"/>
-          </a:xfrm>
-          <a:prstGeom xmlns:a="http://schemas.openxmlformats.org/drawingml/2006/main" prst="rect">
-            <a:avLst/>
-          </a:prstGeom>
-        </p:spPr>
-        <p:txBody>
-          <a:bodyPr xmlns:a="http://schemas.openxmlformats.org/drawingml/2006/main" spcFirstLastPara="1" wrap="square" lIns="91425" tIns="91425" rIns="91425" bIns="91425" anchor="b">
-            <a:noAutofit/>
-          </a:bodyPr>
-          <a:lstStyle xmlns:a="http://schemas.openxmlformats.org/drawingml/2006/main"/>
-          <a:p xmlns:a="http://schemas.openxmlformats.org/drawingml/2006/main">
-            <a:pPr marL="0" indent="0" algn="l">
-              <a:spcBef>
-                <a:spcPts val="0"/>
-              </a:spcBef>
-              <a:spcAft>
-                <a:spcPts val="0"/>
-              </a:spcAft>
-              <a:buNone/>
-            </a:pPr>
-            <a:r>
-              <a:t>{Remix it}</a:t>
-            </a:r>
-          </a:p>
-        </p:txBody>
-      </p:sp>
-      <p:sp>
-        <p:nvSpPr>
-          <p:cNvPr id="306" name="Google Shape;306;p30">
-            <a:extLst xmlns:a="http://schemas.openxmlformats.org/drawingml/2006/main">
-              <a:ext uri="{FF2B5EF4-FFF2-40B4-BE49-F238E27FC236}">
-                <a16:creationId xmlns:a16="http://schemas.microsoft.com/office/drawing/2014/main" id="{39D7BB6A-B939-4CF0-8868-1E889722D03D}"/>
-              </a:ext>
-            </a:extLst>
-          </p:cNvPr>
-          <p:cNvSpPr>
-            <a:spLocks xmlns:a="http://schemas.openxmlformats.org/drawingml/2006/main" noGrp="1"/>
-          </p:cNvSpPr>
-          <p:nvPr>
-            <p:ph type="title" idx="4"/>
-          </p:nvPr>
-        </p:nvSpPr>
-        <p:spPr>
-          <a:xfrm xmlns:a="http://schemas.openxmlformats.org/drawingml/2006/main">
-            <a:off x="1252404" y="3138786"/>
-            <a:ext cx="4190700" cy="733500"/>
-          </a:xfrm>
-          <a:prstGeom xmlns:a="http://schemas.openxmlformats.org/drawingml/2006/main" prst="rect">
-            <a:avLst/>
-          </a:prstGeom>
-        </p:spPr>
-        <p:txBody>
-          <a:bodyPr xmlns:a="http://schemas.openxmlformats.org/drawingml/2006/main" spcFirstLastPara="1" wrap="square" lIns="91425" tIns="91425" rIns="91425" bIns="91425" anchor="b">
-            <a:noAutofit/>
-          </a:bodyPr>
-          <a:lstStyle xmlns:a="http://schemas.openxmlformats.org/drawingml/2006/main"/>
-          <a:p xmlns:a="http://schemas.openxmlformats.org/drawingml/2006/main">
-            <a:pPr marL="0" indent="0" algn="l">
-              <a:spcBef>
-                <a:spcPts val="0"/>
-              </a:spcBef>
-              <a:spcAft>
-                <a:spcPts val="0"/>
-              </a:spcAft>
-              <a:buNone/>
-            </a:pPr>
-            <a:r>
-              <a:rPr>
+              <a:rPr sz="3600">
                 <a:solidFill>
                   <a:schemeClr val="lt2"/>
                 </a:solidFill>
+                <a:latin typeface="Quantico"/>
+                <a:ea typeface="Quantico"/>
+                <a:cs typeface="Quantico"/>
               </a:rPr>
-              <a:t>{Submit}</a:t>
+              <a:t>&lt;/</a:t>
             </a:r>
           </a:p>
         </p:txBody>
       </p:sp>
       <p:sp>
         <p:nvSpPr>
-          <p:cNvPr id="307" name="Google Shape;307;p30">
-            <a:extLst xmlns:a="http://schemas.openxmlformats.org/drawingml/2006/main">
-              <a:ext uri="{FF2B5EF4-FFF2-40B4-BE49-F238E27FC236}">
-                <a16:creationId xmlns:a16="http://schemas.microsoft.com/office/drawing/2014/main" id="{B1468CD5-D03B-4903-8BF7-9F0C7E81B677}"/>
-              </a:ext>
-            </a:extLst>
-          </p:cNvPr>
-          <p:cNvSpPr>
-            <a:spLocks xmlns:a="http://schemas.openxmlformats.org/drawingml/2006/main" noGrp="1"/>
-          </p:cNvSpPr>
-          <p:nvPr>
-            <p:ph type="subTitle" idx="5"/>
-          </p:nvPr>
+          <p:cNvPr id="212" name="Google Shape;212;p24">
+            <a:extLst xmlns:a="http://schemas.openxmlformats.org/drawingml/2006/main">
+              <a:ext uri="{FF2B5EF4-FFF2-40B4-BE49-F238E27FC236}">
+                <a16:creationId xmlns:a16="http://schemas.microsoft.com/office/drawing/2014/main" id="{E705969D-D0F1-46F7-91BE-19AAFA3FBB61}"/>
+              </a:ext>
+            </a:extLst>
+          </p:cNvPr>
+          <p:cNvSpPr>
+            <a:spLocks xmlns:a="http://schemas.openxmlformats.org/drawingml/2006/main" noGrp="1"/>
+          </p:cNvSpPr>
+          <p:nvPr/>
         </p:nvSpPr>
         <p:spPr>
           <a:xfrm xmlns:a="http://schemas.openxmlformats.org/drawingml/2006/main">
-            <a:off x="1252404" y="3914775"/>
-            <a:ext cx="4190700" cy="384600"/>
-          </a:xfrm>
-          <a:prstGeom xmlns:a="http://schemas.openxmlformats.org/drawingml/2006/main" prst="rect">
-            <a:avLst/>
-          </a:prstGeom>
-        </p:spPr>
-        <p:txBody>
-          <a:bodyPr xmlns:a="http://schemas.openxmlformats.org/drawingml/2006/main" spcFirstLastPara="1" wrap="square" lIns="91425" tIns="91425" rIns="91425" bIns="91425" anchor="t">
-            <a:noAutofit/>
-          </a:bodyPr>
-          <a:lstStyle xmlns:a="http://schemas.openxmlformats.org/drawingml/2006/main"/>
-          <a:p xmlns:a="http://schemas.openxmlformats.org/drawingml/2006/main">
-            <a:pPr marL="0" indent="0" algn="l">
-              <a:spcBef>
-                <a:spcPts val="0"/>
-              </a:spcBef>
-              <a:spcAft>
-                <a:spcPts val="0"/>
-              </a:spcAft>
-              <a:buNone/>
-            </a:pPr>
-            <a:r>
-              <a:t>Link or screenshot in Teams</a:t>
-            </a:r>
-          </a:p>
-        </p:txBody>
-      </p:sp>
-      <p:sp>
-        <p:nvSpPr>
-          <p:cNvPr id="308" name="Google Shape;308;p30">
-            <a:extLst xmlns:a="http://schemas.openxmlformats.org/drawingml/2006/main">
-              <a:ext uri="{FF2B5EF4-FFF2-40B4-BE49-F238E27FC236}">
-                <a16:creationId xmlns:a16="http://schemas.microsoft.com/office/drawing/2014/main" id="{B78C6BA0-ED32-48DC-85F2-B4E00038ECB9}"/>
-              </a:ext>
-            </a:extLst>
-          </p:cNvPr>
-          <p:cNvSpPr>
-            <a:spLocks xmlns:a="http://schemas.openxmlformats.org/drawingml/2006/main" noGrp="1"/>
-          </p:cNvSpPr>
-          <p:nvPr/>
-        </p:nvSpPr>
-        <p:spPr>
-          <a:xfrm xmlns:a="http://schemas.openxmlformats.org/drawingml/2006/main">
-            <a:off x="7721100" y="3868300"/>
+            <a:off x="5878825" y="1974375"/>
             <a:ext cx="702900" cy="606900"/>
           </a:xfrm>
           <a:prstGeom xmlns:a="http://schemas.openxmlformats.org/drawingml/2006/main" prst="rect">
@@ -29860,10 +29938,10 @@
       </p:sp>
       <p:sp>
         <p:nvSpPr>
-          <p:cNvPr id="310" name="Google Shape;310;p30">
-            <a:extLst xmlns:a="http://schemas.openxmlformats.org/drawingml/2006/main">
-              <a:ext uri="{FF2B5EF4-FFF2-40B4-BE49-F238E27FC236}">
-                <a16:creationId xmlns:a16="http://schemas.microsoft.com/office/drawing/2014/main" id="{09B6DAF8-8302-4623-897D-26165EA51BCA}"/>
+          <p:cNvPr id="213" name="Google Shape;213;p24">
+            <a:extLst xmlns:a="http://schemas.openxmlformats.org/drawingml/2006/main">
+              <a:ext uri="{FF2B5EF4-FFF2-40B4-BE49-F238E27FC236}">
+                <a16:creationId xmlns:a16="http://schemas.microsoft.com/office/drawing/2014/main" id="{FBDE6D5E-521E-4730-84D0-2601494F8F61}"/>
               </a:ext>
             </a:extLst>
           </p:cNvPr>
@@ -29873,112 +29951,8 @@
           <p:nvPr/>
         </p:nvSpPr>
         <p:spPr>
-          <a:xfrm xmlns:a="http://schemas.openxmlformats.org/drawingml/2006/main" rot="0">
-            <a:off x="5827600" y="697350"/>
-            <a:ext cx="2119744" cy="1127400"/>
-          </a:xfrm>
-          <a:prstGeom xmlns:a="http://schemas.openxmlformats.org/drawingml/2006/main" prst="rect">
-            <a:avLst/>
-          </a:prstGeom>
-          <a:solidFill xmlns:a="http://schemas.openxmlformats.org/drawingml/2006/main">
-            <a:schemeClr val="lt1"/>
-          </a:solidFill>
-          <a:ln xmlns:a="http://schemas.openxmlformats.org/drawingml/2006/main" w="9525" cmpd="sng">
-            <a:solidFill>
-              <a:schemeClr val="dk1"/>
-            </a:solidFill>
-            <a:prstDash val="solid"/>
-            <a:headEnd type="none" w="sm" len="sm"/>
-            <a:tailEnd type="none" w="sm" len="sm"/>
-          </a:ln>
-        </p:spPr>
-        <p:txBody>
-          <a:bodyPr xmlns:a="http://schemas.openxmlformats.org/drawingml/2006/main" spcFirstLastPara="1" wrap="square" lIns="91425" tIns="91425" rIns="91425" bIns="91425" anchor="ctr">
-            <a:noAutofit/>
-          </a:bodyPr>
-          <a:lstStyle xmlns:a="http://schemas.openxmlformats.org/drawingml/2006/main"/>
-          <a:p xmlns:a="http://schemas.openxmlformats.org/drawingml/2006/main">
-            <a:pPr marL="0" indent="0" algn="l">
-              <a:spcBef>
-                <a:spcPts val="0"/>
-              </a:spcBef>
-              <a:spcAft>
-                <a:spcPts val="0"/>
-              </a:spcAft>
-              <a:buNone/>
-            </a:pPr>
-          </a:p>
-        </p:txBody>
-      </p:sp>
-      <p:sp>
-        <p:nvSpPr>
-          <p:cNvPr id="311" name="Google Shape;311;p30">
-            <a:extLst xmlns:a="http://schemas.openxmlformats.org/drawingml/2006/main">
-              <a:ext uri="{FF2B5EF4-FFF2-40B4-BE49-F238E27FC236}">
-                <a16:creationId xmlns:a16="http://schemas.microsoft.com/office/drawing/2014/main" id="{742D31F6-3221-48C9-8E30-90EE2ECD8DA0}"/>
-              </a:ext>
-            </a:extLst>
-          </p:cNvPr>
-          <p:cNvSpPr>
-            <a:spLocks xmlns:a="http://schemas.openxmlformats.org/drawingml/2006/main" noGrp="1"/>
-          </p:cNvSpPr>
-          <p:nvPr/>
-        </p:nvSpPr>
-        <p:spPr>
-          <a:xfrm xmlns:a="http://schemas.openxmlformats.org/drawingml/2006/main" rot="0">
-            <a:off x="5827603" y="697350"/>
-            <a:ext cx="2119744" cy="255300"/>
-          </a:xfrm>
-          <a:prstGeom xmlns:a="http://schemas.openxmlformats.org/drawingml/2006/main" prst="rect">
-            <a:avLst/>
-          </a:prstGeom>
-          <a:solidFill xmlns:a="http://schemas.openxmlformats.org/drawingml/2006/main">
-            <a:schemeClr val="lt1"/>
-          </a:solidFill>
-          <a:ln xmlns:a="http://schemas.openxmlformats.org/drawingml/2006/main" w="9525" cmpd="sng">
-            <a:solidFill>
-              <a:schemeClr val="dk1"/>
-            </a:solidFill>
-            <a:prstDash val="solid"/>
-            <a:headEnd type="none" w="sm" len="sm"/>
-            <a:tailEnd type="none" w="sm" len="sm"/>
-          </a:ln>
-        </p:spPr>
-        <p:txBody>
-          <a:bodyPr xmlns:a="http://schemas.openxmlformats.org/drawingml/2006/main" spcFirstLastPara="1" wrap="square" lIns="91425" tIns="91425" rIns="91425" bIns="91425" anchor="ctr">
-            <a:noAutofit/>
-          </a:bodyPr>
-          <a:lstStyle xmlns:a="http://schemas.openxmlformats.org/drawingml/2006/main"/>
-          <a:p xmlns:a="http://schemas.openxmlformats.org/drawingml/2006/main">
-            <a:pPr marL="0" indent="0" algn="l">
-              <a:spcBef>
-                <a:spcPts val="0"/>
-              </a:spcBef>
-              <a:spcAft>
-                <a:spcPts val="0"/>
-              </a:spcAft>
-              <a:buNone/>
-            </a:pPr>
-          </a:p>
-        </p:txBody>
-      </p:sp>
-      <p:sp>
-        <p:nvSpPr>
-          <p:cNvPr id="312" name="Google Shape;312;p30">
-            <a:extLst xmlns:a="http://schemas.openxmlformats.org/drawingml/2006/main">
-              <a:ext uri="{FF2B5EF4-FFF2-40B4-BE49-F238E27FC236}">
-                <a16:creationId xmlns:a16="http://schemas.microsoft.com/office/drawing/2014/main" id="{1197A6D5-E686-4D9D-B748-4B534E594BA4}"/>
-              </a:ext>
-            </a:extLst>
-          </p:cNvPr>
-          <p:cNvSpPr>
-            <a:spLocks xmlns:a="http://schemas.openxmlformats.org/drawingml/2006/main" noGrp="1"/>
-          </p:cNvSpPr>
-          <p:nvPr/>
-        </p:nvSpPr>
-        <p:spPr>
           <a:xfrm xmlns:a="http://schemas.openxmlformats.org/drawingml/2006/main">
-            <a:off x="6279082" y="1016750"/>
+            <a:off x="7198457" y="1873600"/>
             <a:ext cx="1216800" cy="746100"/>
           </a:xfrm>
           <a:prstGeom xmlns:a="http://schemas.openxmlformats.org/drawingml/2006/main" prst="rect">
@@ -30036,10 +30010,103 @@
       </p:sp>
       <p:sp>
         <p:nvSpPr>
-          <p:cNvPr id="313" name="slide-heading-marker-24">
-            <a:extLst xmlns:a="http://schemas.openxmlformats.org/drawingml/2006/main">
-              <a:ext uri="{FF2B5EF4-FFF2-40B4-BE49-F238E27FC236}">
-                <a16:creationId xmlns:a16="http://schemas.microsoft.com/office/drawing/2014/main" id="{3B558470-BCEC-4DFB-81AE-A82ED8F6A4C5}"/>
+          <p:cNvPr id="214" name="Google Shape;214;p24">
+            <a:extLst xmlns:a="http://schemas.openxmlformats.org/drawingml/2006/main">
+              <a:ext uri="{FF2B5EF4-FFF2-40B4-BE49-F238E27FC236}">
+                <a16:creationId xmlns:a16="http://schemas.microsoft.com/office/drawing/2014/main" id="{5EE6EEBD-605C-4EFD-803C-779B4C388CA3}"/>
+              </a:ext>
+            </a:extLst>
+          </p:cNvPr>
+          <p:cNvSpPr>
+            <a:spLocks xmlns:a="http://schemas.openxmlformats.org/drawingml/2006/main" noGrp="1"/>
+          </p:cNvSpPr>
+          <p:nvPr>
+            <p:ph type="ctrTitle" idx="0"/>
+          </p:nvPr>
+        </p:nvSpPr>
+        <p:spPr>
+          <a:xfrm xmlns:a="http://schemas.openxmlformats.org/drawingml/2006/main">
+            <a:off x="1875450" y="1974375"/>
+            <a:ext cx="4148400" cy="746100"/>
+          </a:xfrm>
+          <a:prstGeom xmlns:a="http://schemas.openxmlformats.org/drawingml/2006/main" prst="rect">
+            <a:avLst/>
+          </a:prstGeom>
+        </p:spPr>
+        <p:txBody>
+          <a:bodyPr xmlns:a="http://schemas.openxmlformats.org/drawingml/2006/main" spcFirstLastPara="1" wrap="square" lIns="91425" tIns="91425" rIns="91425" bIns="91425" anchor="t">
+            <a:noAutofit/>
+          </a:bodyPr>
+          <a:lstStyle xmlns:a="http://schemas.openxmlformats.org/drawingml/2006/main"/>
+          <a:p xmlns:a="http://schemas.openxmlformats.org/drawingml/2006/main">
+            <a:pPr marL="0" indent="0" algn="l">
+              <a:spcBef>
+                <a:spcPts val="0"/>
+              </a:spcBef>
+              <a:spcAft>
+                <a:spcPts val="0"/>
+              </a:spcAft>
+              <a:buNone/>
+            </a:pPr>
+            <a:r>
+              <a:t>Final Kahoot</a:t>
+            </a:r>
+          </a:p>
+        </p:txBody>
+      </p:sp>
+      <p:sp>
+        <p:nvSpPr>
+          <p:cNvPr id="215" name="Google Shape;215;p24">
+            <a:extLst xmlns:a="http://schemas.openxmlformats.org/drawingml/2006/main">
+              <a:ext uri="{FF2B5EF4-FFF2-40B4-BE49-F238E27FC236}">
+                <a16:creationId xmlns:a16="http://schemas.microsoft.com/office/drawing/2014/main" id="{561222E6-86D3-4D0D-888F-084113278088}"/>
+              </a:ext>
+            </a:extLst>
+          </p:cNvPr>
+          <p:cNvSpPr>
+            <a:spLocks xmlns:a="http://schemas.openxmlformats.org/drawingml/2006/main" noGrp="1"/>
+          </p:cNvSpPr>
+          <p:nvPr>
+            <p:ph type="subTitle" idx="1"/>
+          </p:nvPr>
+        </p:nvSpPr>
+        <p:spPr>
+          <a:xfrm xmlns:a="http://schemas.openxmlformats.org/drawingml/2006/main">
+            <a:off x="4751650" y="3680600"/>
+            <a:ext cx="3043800" cy="528600"/>
+          </a:xfrm>
+          <a:prstGeom xmlns:a="http://schemas.openxmlformats.org/drawingml/2006/main" prst="rect">
+            <a:avLst/>
+          </a:prstGeom>
+        </p:spPr>
+        <p:txBody>
+          <a:bodyPr xmlns:a="http://schemas.openxmlformats.org/drawingml/2006/main" spcFirstLastPara="1" wrap="square" lIns="91425" tIns="91425" rIns="91425" bIns="91425" anchor="ctr">
+            <a:noAutofit/>
+          </a:bodyPr>
+          <a:lstStyle xmlns:a="http://schemas.openxmlformats.org/drawingml/2006/main"/>
+          <a:p xmlns:a="http://schemas.openxmlformats.org/drawingml/2006/main">
+            <a:pPr marL="0" indent="0" algn="l">
+              <a:spcBef>
+                <a:spcPts val="0"/>
+              </a:spcBef>
+              <a:spcAft>
+                <a:spcPts val="0"/>
+              </a:spcAft>
+              <a:buNone/>
+            </a:pPr>
+            <a:r>
+              <a:rPr sz="1400"/>
+              <a:t>Show what you learned today.</a:t>
+            </a:r>
+          </a:p>
+        </p:txBody>
+      </p:sp>
+      <p:sp>
+        <p:nvSpPr>
+          <p:cNvPr id="216" name="Google Shape;216;p24">
+            <a:extLst xmlns:a="http://schemas.openxmlformats.org/drawingml/2006/main">
+              <a:ext uri="{FF2B5EF4-FFF2-40B4-BE49-F238E27FC236}">
+                <a16:creationId xmlns:a16="http://schemas.microsoft.com/office/drawing/2014/main" id="{3CB2B6C1-3795-43B8-9621-54C5BB056D62}"/>
               </a:ext>
             </a:extLst>
           </p:cNvPr>
@@ -30050,52 +30117,52 @@
         </p:nvSpPr>
         <p:spPr>
           <a:xfrm xmlns:a="http://schemas.openxmlformats.org/drawingml/2006/main">
-            <a:off x="742950" y="447675"/>
-            <a:ext cx="476250" cy="323850"/>
+            <a:off x="536125" y="117311"/>
+            <a:ext cx="1999500" cy="180300"/>
           </a:xfrm>
           <a:prstGeom xmlns:a="http://schemas.openxmlformats.org/drawingml/2006/main" prst="rect">
             <a:avLst/>
           </a:prstGeom>
           <a:noFill xmlns:a="http://schemas.openxmlformats.org/drawingml/2006/main"/>
-          <a:ln xmlns:a="http://schemas.openxmlformats.org/drawingml/2006/main" w="0">
+          <a:ln xmlns:a="http://schemas.openxmlformats.org/drawingml/2006/main">
             <a:noFill/>
-            <a:prstDash val="solid"/>
           </a:ln>
         </p:spPr>
         <p:txBody>
-          <a:bodyPr xmlns:a="http://schemas.openxmlformats.org/drawingml/2006/main"/>
-          <a:lstStyle xmlns:a="http://schemas.openxmlformats.org/drawingml/2006/main"/>
-          <a:p xmlns:a="http://schemas.openxmlformats.org/drawingml/2006/main">
-            <a:pPr algn="l">
-              <a:defRPr sz="1950" b="1">
+          <a:bodyPr xmlns:a="http://schemas.openxmlformats.org/drawingml/2006/main" spcFirstLastPara="1" wrap="square" lIns="91425" tIns="91425" rIns="91425" bIns="91425" anchor="ctr">
+            <a:noAutofit/>
+          </a:bodyPr>
+          <a:lstStyle xmlns:a="http://schemas.openxmlformats.org/drawingml/2006/main"/>
+          <a:p xmlns:a="http://schemas.openxmlformats.org/drawingml/2006/main">
+            <a:pPr marL="0" indent="0" algn="l">
+              <a:spcBef>
+                <a:spcPts val="0"/>
+              </a:spcBef>
+              <a:spcAft>
+                <a:spcPts val="0"/>
+              </a:spcAft>
+              <a:buNone/>
+            </a:pPr>
+            <a:r>
+              <a:rPr sz="1000">
                 <a:solidFill>
-                  <a:srgbClr val="FFDB5D"/>
-                </a:solidFill>
-                <a:latin typeface="Source Code Pro"/>
-                <a:ea typeface="Source Code Pro"/>
-                <a:cs typeface="Source Code Pro"/>
-              </a:defRPr>
-            </a:pPr>
-            <a:r>
-              <a:rPr sz="1950" b="1">
-                <a:solidFill>
-                  <a:srgbClr val="FFDB5D"/>
+                  <a:schemeClr val="dk1"/>
                 </a:solidFill>
                 <a:latin typeface="Source Code Pro"/>
                 <a:ea typeface="Source Code Pro"/>
                 <a:cs typeface="Source Code Pro"/>
               </a:rPr>
-              <a:t>&lt;/</a:t>
+              <a:t>Classroom Presentation</a:t>
             </a:r>
           </a:p>
         </p:txBody>
       </p:sp>
       <p:sp>
         <p:nvSpPr>
-          <p:cNvPr id="314" name="slide-heading-text-24">
-            <a:extLst xmlns:a="http://schemas.openxmlformats.org/drawingml/2006/main">
-              <a:ext uri="{FF2B5EF4-FFF2-40B4-BE49-F238E27FC236}">
-                <a16:creationId xmlns:a16="http://schemas.microsoft.com/office/drawing/2014/main" id="{8B23174A-638A-46EC-AD07-1B1BC78D919D}"/>
+          <p:cNvPr id="217" name="Google Shape;217;p24">
+            <a:extLst xmlns:a="http://schemas.openxmlformats.org/drawingml/2006/main">
+              <a:ext uri="{FF2B5EF4-FFF2-40B4-BE49-F238E27FC236}">
+                <a16:creationId xmlns:a16="http://schemas.microsoft.com/office/drawing/2014/main" id="{1BCE298B-ADAB-4360-9E4B-303C95BFACCE}"/>
               </a:ext>
             </a:extLst>
           </p:cNvPr>
@@ -30106,42 +30173,42 @@
         </p:nvSpPr>
         <p:spPr>
           <a:xfrm xmlns:a="http://schemas.openxmlformats.org/drawingml/2006/main">
-            <a:off x="1152525" y="428625"/>
-            <a:ext cx="5619750" cy="361950"/>
+            <a:off x="3730325" y="117311"/>
+            <a:ext cx="1999500" cy="180300"/>
           </a:xfrm>
           <a:prstGeom xmlns:a="http://schemas.openxmlformats.org/drawingml/2006/main" prst="rect">
             <a:avLst/>
           </a:prstGeom>
           <a:noFill xmlns:a="http://schemas.openxmlformats.org/drawingml/2006/main"/>
-          <a:ln xmlns:a="http://schemas.openxmlformats.org/drawingml/2006/main" w="0">
+          <a:ln xmlns:a="http://schemas.openxmlformats.org/drawingml/2006/main">
             <a:noFill/>
-            <a:prstDash val="solid"/>
           </a:ln>
         </p:spPr>
         <p:txBody>
-          <a:bodyPr xmlns:a="http://schemas.openxmlformats.org/drawingml/2006/main"/>
-          <a:lstStyle xmlns:a="http://schemas.openxmlformats.org/drawingml/2006/main"/>
-          <a:p xmlns:a="http://schemas.openxmlformats.org/drawingml/2006/main">
-            <a:pPr algn="l">
-              <a:defRPr sz="1800" b="0">
+          <a:bodyPr xmlns:a="http://schemas.openxmlformats.org/drawingml/2006/main" spcFirstLastPara="1" wrap="square" lIns="91425" tIns="91425" rIns="91425" bIns="91425" anchor="ctr">
+            <a:noAutofit/>
+          </a:bodyPr>
+          <a:lstStyle xmlns:a="http://schemas.openxmlformats.org/drawingml/2006/main"/>
+          <a:p xmlns:a="http://schemas.openxmlformats.org/drawingml/2006/main">
+            <a:pPr marL="0" indent="0" algn="l">
+              <a:spcBef>
+                <a:spcPts val="0"/>
+              </a:spcBef>
+              <a:spcAft>
+                <a:spcPts val="0"/>
+              </a:spcAft>
+              <a:buNone/>
+            </a:pPr>
+            <a:r>
+              <a:rPr sz="1000">
                 <a:solidFill>
-                  <a:srgbClr val="FFFFFF"/>
+                  <a:schemeClr val="dk1"/>
                 </a:solidFill>
-                <a:latin typeface="Arial"/>
-                <a:ea typeface="Arial"/>
-                <a:cs typeface="Arial"/>
-              </a:defRPr>
-            </a:pPr>
-            <a:r>
-              <a:rPr sz="1800" b="0">
-                <a:solidFill>
-                  <a:srgbClr val="FFFFFF"/>
-                </a:solidFill>
-                <a:latin typeface="Arial"/>
-                <a:ea typeface="Arial"/>
-                <a:cs typeface="Arial"/>
+                <a:latin typeface="Source Code Pro"/>
+                <a:ea typeface="Source Code Pro"/>
+                <a:cs typeface="Source Code Pro"/>
               </a:rPr>
-              <a:t>Homework: Music Lab remix</a:t>
+              <a:t>. . .</a:t>
             </a:r>
           </a:p>
         </p:txBody>
@@ -30149,7 +30216,7 @@
     </p:spTree>
     <p:extLst>
       <p:ext uri="{BB962C8B-B14F-4D97-AF65-F5344CB8AC3E}">
-        <p14:creationId xmlns:p14="http://schemas.microsoft.com/office/powerpoint/2010/main" val="694519266"/>
+        <p14:creationId xmlns:p14="http://schemas.microsoft.com/office/powerpoint/2010/main" val="592295941"/>
       </p:ext>
     </p:extLst>
   </p:cSld>
@@ -30209,7 +30276,7 @@
               <a:buNone/>
             </a:pPr>
             <a:r>
-              <a:t>Start with small, clear steps</a:t>
+              <a:t>3 sounds, AI drums, 2 changes</a:t>
             </a:r>
           </a:p>
         </p:txBody>
@@ -30260,7 +30327,7 @@
                   <a:schemeClr val="accent2"/>
                 </a:solidFill>
               </a:rPr>
-              <a:t>{TypeScript}</a:t>
+              <a:t>{Finish levels}</a:t>
             </a:r>
           </a:p>
         </p:txBody>
@@ -30306,7 +30373,7 @@
               <a:buNone/>
             </a:pPr>
             <a:r>
-              <a:t>Our programming language</a:t>
+              <a:t>Complete the guided levels</a:t>
             </a:r>
           </a:p>
         </p:txBody>
@@ -30352,7 +30419,7 @@
               <a:buNone/>
             </a:pPr>
             <a:r>
-              <a:t>{Write code}</a:t>
+              <a:t>{Remix it}</a:t>
             </a:r>
           </a:p>
         </p:txBody>
@@ -30403,7 +30470,7 @@
                   <a:schemeClr val="lt2"/>
                 </a:solidFill>
               </a:rPr>
-              <a:t>{Build together}</a:t>
+              <a:t>{Submit}</a:t>
             </a:r>
           </a:p>
         </p:txBody>
@@ -30449,7 +30516,7 @@
               <a:buNone/>
             </a:pPr>
             <a:r>
-              <a:t>Questions are always welcome</a:t>
+              <a:t>Link or screenshot in Teams</a:t>
             </a:r>
           </a:p>
         </p:txBody>
@@ -30691,10 +30758,10 @@
       </p:sp>
       <p:sp>
         <p:nvSpPr>
-          <p:cNvPr id="313" name="slide-heading-marker-25">
-            <a:extLst xmlns:a="http://schemas.openxmlformats.org/drawingml/2006/main">
-              <a:ext uri="{FF2B5EF4-FFF2-40B4-BE49-F238E27FC236}">
-                <a16:creationId xmlns:a16="http://schemas.microsoft.com/office/drawing/2014/main" id="{079E65ED-329B-4E2D-81E6-058ECD3A6287}"/>
+          <p:cNvPr id="313" name="slide-heading-marker-24">
+            <a:extLst xmlns:a="http://schemas.openxmlformats.org/drawingml/2006/main">
+              <a:ext uri="{FF2B5EF4-FFF2-40B4-BE49-F238E27FC236}">
+                <a16:creationId xmlns:a16="http://schemas.microsoft.com/office/drawing/2014/main" id="{A9CE4926-4216-4FFF-BB6E-41AEE8C13D47}"/>
               </a:ext>
             </a:extLst>
           </p:cNvPr>
@@ -30747,10 +30814,10 @@
       </p:sp>
       <p:sp>
         <p:nvSpPr>
-          <p:cNvPr id="314" name="slide-heading-text-25">
-            <a:extLst xmlns:a="http://schemas.openxmlformats.org/drawingml/2006/main">
-              <a:ext uri="{FF2B5EF4-FFF2-40B4-BE49-F238E27FC236}">
-                <a16:creationId xmlns:a16="http://schemas.microsoft.com/office/drawing/2014/main" id="{2D39112E-D020-422B-8364-BD10B744919B}"/>
+          <p:cNvPr id="314" name="slide-heading-text-24">
+            <a:extLst xmlns:a="http://schemas.openxmlformats.org/drawingml/2006/main">
+              <a:ext uri="{FF2B5EF4-FFF2-40B4-BE49-F238E27FC236}">
+                <a16:creationId xmlns:a16="http://schemas.microsoft.com/office/drawing/2014/main" id="{41DB42BA-9B02-4553-A266-0C9DE62C7258}"/>
               </a:ext>
             </a:extLst>
           </p:cNvPr>
@@ -30796,7 +30863,7 @@
                 <a:ea typeface="Arial"/>
                 <a:cs typeface="Arial"/>
               </a:rPr>
-              <a:t>Next week we start TypeScript</a:t>
+              <a:t>Homework: Music Lab remix</a:t>
             </a:r>
           </a:p>
         </p:txBody>
@@ -30814,13 +30881,6 @@
 <file path=ppt/slides/slide26.xml><?xml version="1.0" encoding="utf-8"?>
 <p:sld xmlns:p="http://schemas.openxmlformats.org/presentationml/2006/main">
   <p:cSld>
-    <p:bg>
-      <p:bgPr>
-        <a:solidFill xmlns:a="http://schemas.openxmlformats.org/drawingml/2006/main">
-          <a:schemeClr val="lt1"/>
-        </a:solidFill>
-      </p:bgPr>
-    </p:bg>
     <p:spTree>
       <p:nvGrpSpPr>
         <p:cNvPr id="1" name=""/>
@@ -30832,10 +30892,296 @@
       </p:grpSpPr>
       <p:sp>
         <p:nvSpPr>
-          <p:cNvPr id="203" name="Google Shape;203;p24">
-            <a:extLst xmlns:a="http://schemas.openxmlformats.org/drawingml/2006/main">
-              <a:ext uri="{FF2B5EF4-FFF2-40B4-BE49-F238E27FC236}">
-                <a16:creationId xmlns:a16="http://schemas.microsoft.com/office/drawing/2014/main" id="{04D2E2B3-22FD-441D-93E4-32F09B56D5E7}"/>
+          <p:cNvPr id="302" name="Google Shape;302;p30">
+            <a:extLst xmlns:a="http://schemas.openxmlformats.org/drawingml/2006/main">
+              <a:ext uri="{FF2B5EF4-FFF2-40B4-BE49-F238E27FC236}">
+                <a16:creationId xmlns:a16="http://schemas.microsoft.com/office/drawing/2014/main" id="{069093DC-4E13-45FD-972F-EFACFB762C06}"/>
+              </a:ext>
+            </a:extLst>
+          </p:cNvPr>
+          <p:cNvSpPr>
+            <a:spLocks xmlns:a="http://schemas.openxmlformats.org/drawingml/2006/main" noGrp="1"/>
+          </p:cNvSpPr>
+          <p:nvPr>
+            <p:ph type="subTitle" idx="3"/>
+          </p:nvPr>
+        </p:nvSpPr>
+        <p:spPr>
+          <a:xfrm xmlns:a="http://schemas.openxmlformats.org/drawingml/2006/main">
+            <a:off x="1252403" y="2857500"/>
+            <a:ext cx="4190700" cy="384600"/>
+          </a:xfrm>
+          <a:prstGeom xmlns:a="http://schemas.openxmlformats.org/drawingml/2006/main" prst="rect">
+            <a:avLst/>
+          </a:prstGeom>
+        </p:spPr>
+        <p:txBody>
+          <a:bodyPr xmlns:a="http://schemas.openxmlformats.org/drawingml/2006/main" spcFirstLastPara="1" wrap="square" lIns="91425" tIns="91425" rIns="91425" bIns="91425" anchor="t">
+            <a:noAutofit/>
+          </a:bodyPr>
+          <a:lstStyle xmlns:a="http://schemas.openxmlformats.org/drawingml/2006/main"/>
+          <a:p xmlns:a="http://schemas.openxmlformats.org/drawingml/2006/main">
+            <a:pPr marL="0" indent="0" algn="l">
+              <a:spcBef>
+                <a:spcPts val="0"/>
+              </a:spcBef>
+              <a:spcAft>
+                <a:spcPts val="0"/>
+              </a:spcAft>
+              <a:buNone/>
+            </a:pPr>
+            <a:r>
+              <a:t>Start with small, clear steps</a:t>
+            </a:r>
+          </a:p>
+        </p:txBody>
+      </p:sp>
+      <p:sp>
+        <p:nvSpPr>
+          <p:cNvPr id="303" name="Google Shape;303;p30">
+            <a:extLst xmlns:a="http://schemas.openxmlformats.org/drawingml/2006/main">
+              <a:ext uri="{FF2B5EF4-FFF2-40B4-BE49-F238E27FC236}">
+                <a16:creationId xmlns:a16="http://schemas.microsoft.com/office/drawing/2014/main" id="{22068794-3762-46E6-9FE4-6EE3ED61B7DC}"/>
+              </a:ext>
+            </a:extLst>
+          </p:cNvPr>
+          <p:cNvSpPr>
+            <a:spLocks xmlns:a="http://schemas.openxmlformats.org/drawingml/2006/main" noGrp="1"/>
+          </p:cNvSpPr>
+          <p:nvPr>
+            <p:ph type="title" idx="0"/>
+          </p:nvPr>
+        </p:nvSpPr>
+        <p:spPr>
+          <a:xfrm xmlns:a="http://schemas.openxmlformats.org/drawingml/2006/main">
+            <a:off x="1252403" y="1022536"/>
+            <a:ext cx="4190700" cy="733500"/>
+          </a:xfrm>
+          <a:prstGeom xmlns:a="http://schemas.openxmlformats.org/drawingml/2006/main" prst="rect">
+            <a:avLst/>
+          </a:prstGeom>
+        </p:spPr>
+        <p:txBody>
+          <a:bodyPr xmlns:a="http://schemas.openxmlformats.org/drawingml/2006/main" spcFirstLastPara="1" wrap="square" lIns="91425" tIns="91425" rIns="91425" bIns="91425" anchor="b">
+            <a:noAutofit/>
+          </a:bodyPr>
+          <a:lstStyle xmlns:a="http://schemas.openxmlformats.org/drawingml/2006/main"/>
+          <a:p xmlns:a="http://schemas.openxmlformats.org/drawingml/2006/main">
+            <a:pPr marL="0" indent="0" algn="l">
+              <a:spcBef>
+                <a:spcPts val="0"/>
+              </a:spcBef>
+              <a:spcAft>
+                <a:spcPts val="0"/>
+              </a:spcAft>
+              <a:buNone/>
+            </a:pPr>
+            <a:r>
+              <a:rPr>
+                <a:solidFill>
+                  <a:schemeClr val="accent2"/>
+                </a:solidFill>
+              </a:rPr>
+              <a:t>{TypeScript}</a:t>
+            </a:r>
+          </a:p>
+        </p:txBody>
+      </p:sp>
+      <p:sp>
+        <p:nvSpPr>
+          <p:cNvPr id="304" name="Google Shape;304;p30">
+            <a:extLst xmlns:a="http://schemas.openxmlformats.org/drawingml/2006/main">
+              <a:ext uri="{FF2B5EF4-FFF2-40B4-BE49-F238E27FC236}">
+                <a16:creationId xmlns:a16="http://schemas.microsoft.com/office/drawing/2014/main" id="{4B083477-9C13-4431-934E-B2803526A8A3}"/>
+              </a:ext>
+            </a:extLst>
+          </p:cNvPr>
+          <p:cNvSpPr>
+            <a:spLocks xmlns:a="http://schemas.openxmlformats.org/drawingml/2006/main" noGrp="1"/>
+          </p:cNvSpPr>
+          <p:nvPr>
+            <p:ph type="subTitle" idx="1"/>
+          </p:nvPr>
+        </p:nvSpPr>
+        <p:spPr>
+          <a:xfrm xmlns:a="http://schemas.openxmlformats.org/drawingml/2006/main">
+            <a:off x="1252403" y="1790700"/>
+            <a:ext cx="4190700" cy="384600"/>
+          </a:xfrm>
+          <a:prstGeom xmlns:a="http://schemas.openxmlformats.org/drawingml/2006/main" prst="rect">
+            <a:avLst/>
+          </a:prstGeom>
+        </p:spPr>
+        <p:txBody>
+          <a:bodyPr xmlns:a="http://schemas.openxmlformats.org/drawingml/2006/main" spcFirstLastPara="1" wrap="square" lIns="91425" tIns="91425" rIns="91425" bIns="91425" anchor="t">
+            <a:noAutofit/>
+          </a:bodyPr>
+          <a:lstStyle xmlns:a="http://schemas.openxmlformats.org/drawingml/2006/main"/>
+          <a:p xmlns:a="http://schemas.openxmlformats.org/drawingml/2006/main">
+            <a:pPr marL="0" indent="0" algn="l">
+              <a:spcBef>
+                <a:spcPts val="0"/>
+              </a:spcBef>
+              <a:spcAft>
+                <a:spcPts val="0"/>
+              </a:spcAft>
+              <a:buNone/>
+            </a:pPr>
+            <a:r>
+              <a:t>Our programming language</a:t>
+            </a:r>
+          </a:p>
+        </p:txBody>
+      </p:sp>
+      <p:sp>
+        <p:nvSpPr>
+          <p:cNvPr id="305" name="Google Shape;305;p30">
+            <a:extLst xmlns:a="http://schemas.openxmlformats.org/drawingml/2006/main">
+              <a:ext uri="{FF2B5EF4-FFF2-40B4-BE49-F238E27FC236}">
+                <a16:creationId xmlns:a16="http://schemas.microsoft.com/office/drawing/2014/main" id="{8FB84568-B635-4D96-BECD-DDAB98281B56}"/>
+              </a:ext>
+            </a:extLst>
+          </p:cNvPr>
+          <p:cNvSpPr>
+            <a:spLocks xmlns:a="http://schemas.openxmlformats.org/drawingml/2006/main" noGrp="1"/>
+          </p:cNvSpPr>
+          <p:nvPr>
+            <p:ph type="title" idx="2"/>
+          </p:nvPr>
+        </p:nvSpPr>
+        <p:spPr>
+          <a:xfrm xmlns:a="http://schemas.openxmlformats.org/drawingml/2006/main">
+            <a:off x="1252403" y="2080661"/>
+            <a:ext cx="4190700" cy="733500"/>
+          </a:xfrm>
+          <a:prstGeom xmlns:a="http://schemas.openxmlformats.org/drawingml/2006/main" prst="rect">
+            <a:avLst/>
+          </a:prstGeom>
+        </p:spPr>
+        <p:txBody>
+          <a:bodyPr xmlns:a="http://schemas.openxmlformats.org/drawingml/2006/main" spcFirstLastPara="1" wrap="square" lIns="91425" tIns="91425" rIns="91425" bIns="91425" anchor="b">
+            <a:noAutofit/>
+          </a:bodyPr>
+          <a:lstStyle xmlns:a="http://schemas.openxmlformats.org/drawingml/2006/main"/>
+          <a:p xmlns:a="http://schemas.openxmlformats.org/drawingml/2006/main">
+            <a:pPr marL="0" indent="0" algn="l">
+              <a:spcBef>
+                <a:spcPts val="0"/>
+              </a:spcBef>
+              <a:spcAft>
+                <a:spcPts val="0"/>
+              </a:spcAft>
+              <a:buNone/>
+            </a:pPr>
+            <a:r>
+              <a:t>{Write code}</a:t>
+            </a:r>
+          </a:p>
+        </p:txBody>
+      </p:sp>
+      <p:sp>
+        <p:nvSpPr>
+          <p:cNvPr id="306" name="Google Shape;306;p30">
+            <a:extLst xmlns:a="http://schemas.openxmlformats.org/drawingml/2006/main">
+              <a:ext uri="{FF2B5EF4-FFF2-40B4-BE49-F238E27FC236}">
+                <a16:creationId xmlns:a16="http://schemas.microsoft.com/office/drawing/2014/main" id="{39D7BB6A-B939-4CF0-8868-1E889722D03D}"/>
+              </a:ext>
+            </a:extLst>
+          </p:cNvPr>
+          <p:cNvSpPr>
+            <a:spLocks xmlns:a="http://schemas.openxmlformats.org/drawingml/2006/main" noGrp="1"/>
+          </p:cNvSpPr>
+          <p:nvPr>
+            <p:ph type="title" idx="4"/>
+          </p:nvPr>
+        </p:nvSpPr>
+        <p:spPr>
+          <a:xfrm xmlns:a="http://schemas.openxmlformats.org/drawingml/2006/main">
+            <a:off x="1252404" y="3138786"/>
+            <a:ext cx="4190700" cy="733500"/>
+          </a:xfrm>
+          <a:prstGeom xmlns:a="http://schemas.openxmlformats.org/drawingml/2006/main" prst="rect">
+            <a:avLst/>
+          </a:prstGeom>
+        </p:spPr>
+        <p:txBody>
+          <a:bodyPr xmlns:a="http://schemas.openxmlformats.org/drawingml/2006/main" spcFirstLastPara="1" wrap="square" lIns="91425" tIns="91425" rIns="91425" bIns="91425" anchor="b">
+            <a:noAutofit/>
+          </a:bodyPr>
+          <a:lstStyle xmlns:a="http://schemas.openxmlformats.org/drawingml/2006/main"/>
+          <a:p xmlns:a="http://schemas.openxmlformats.org/drawingml/2006/main">
+            <a:pPr marL="0" indent="0" algn="l">
+              <a:spcBef>
+                <a:spcPts val="0"/>
+              </a:spcBef>
+              <a:spcAft>
+                <a:spcPts val="0"/>
+              </a:spcAft>
+              <a:buNone/>
+            </a:pPr>
+            <a:r>
+              <a:rPr>
+                <a:solidFill>
+                  <a:schemeClr val="lt2"/>
+                </a:solidFill>
+              </a:rPr>
+              <a:t>{Build together}</a:t>
+            </a:r>
+          </a:p>
+        </p:txBody>
+      </p:sp>
+      <p:sp>
+        <p:nvSpPr>
+          <p:cNvPr id="307" name="Google Shape;307;p30">
+            <a:extLst xmlns:a="http://schemas.openxmlformats.org/drawingml/2006/main">
+              <a:ext uri="{FF2B5EF4-FFF2-40B4-BE49-F238E27FC236}">
+                <a16:creationId xmlns:a16="http://schemas.microsoft.com/office/drawing/2014/main" id="{B1468CD5-D03B-4903-8BF7-9F0C7E81B677}"/>
+              </a:ext>
+            </a:extLst>
+          </p:cNvPr>
+          <p:cNvSpPr>
+            <a:spLocks xmlns:a="http://schemas.openxmlformats.org/drawingml/2006/main" noGrp="1"/>
+          </p:cNvSpPr>
+          <p:nvPr>
+            <p:ph type="subTitle" idx="5"/>
+          </p:nvPr>
+        </p:nvSpPr>
+        <p:spPr>
+          <a:xfrm xmlns:a="http://schemas.openxmlformats.org/drawingml/2006/main">
+            <a:off x="1252404" y="3914775"/>
+            <a:ext cx="4190700" cy="384600"/>
+          </a:xfrm>
+          <a:prstGeom xmlns:a="http://schemas.openxmlformats.org/drawingml/2006/main" prst="rect">
+            <a:avLst/>
+          </a:prstGeom>
+        </p:spPr>
+        <p:txBody>
+          <a:bodyPr xmlns:a="http://schemas.openxmlformats.org/drawingml/2006/main" spcFirstLastPara="1" wrap="square" lIns="91425" tIns="91425" rIns="91425" bIns="91425" anchor="t">
+            <a:noAutofit/>
+          </a:bodyPr>
+          <a:lstStyle xmlns:a="http://schemas.openxmlformats.org/drawingml/2006/main"/>
+          <a:p xmlns:a="http://schemas.openxmlformats.org/drawingml/2006/main">
+            <a:pPr marL="0" indent="0" algn="l">
+              <a:spcBef>
+                <a:spcPts val="0"/>
+              </a:spcBef>
+              <a:spcAft>
+                <a:spcPts val="0"/>
+              </a:spcAft>
+              <a:buNone/>
+            </a:pPr>
+            <a:r>
+              <a:t>Questions are always welcome</a:t>
+            </a:r>
+          </a:p>
+        </p:txBody>
+      </p:sp>
+      <p:sp>
+        <p:nvSpPr>
+          <p:cNvPr id="308" name="Google Shape;308;p30">
+            <a:extLst xmlns:a="http://schemas.openxmlformats.org/drawingml/2006/main">
+              <a:ext uri="{FF2B5EF4-FFF2-40B4-BE49-F238E27FC236}">
+                <a16:creationId xmlns:a16="http://schemas.microsoft.com/office/drawing/2014/main" id="{B78C6BA0-ED32-48DC-85F2-B4E00038ECB9}"/>
               </a:ext>
             </a:extLst>
           </p:cNvPr>
@@ -30845,9 +31191,68 @@
           <p:nvPr/>
         </p:nvSpPr>
         <p:spPr>
+          <a:xfrm xmlns:a="http://schemas.openxmlformats.org/drawingml/2006/main">
+            <a:off x="7721100" y="3868300"/>
+            <a:ext cx="702900" cy="606900"/>
+          </a:xfrm>
+          <a:prstGeom xmlns:a="http://schemas.openxmlformats.org/drawingml/2006/main" prst="rect">
+            <a:avLst/>
+          </a:prstGeom>
+          <a:noFill xmlns:a="http://schemas.openxmlformats.org/drawingml/2006/main"/>
+          <a:ln xmlns:a="http://schemas.openxmlformats.org/drawingml/2006/main">
+            <a:noFill/>
+          </a:ln>
+        </p:spPr>
+        <p:txBody>
+          <a:bodyPr xmlns:a="http://schemas.openxmlformats.org/drawingml/2006/main" spcFirstLastPara="1" wrap="square" lIns="91425" tIns="91425" rIns="91425" bIns="91425" anchor="ctr">
+            <a:noAutofit/>
+          </a:bodyPr>
+          <a:lstStyle xmlns:a="http://schemas.openxmlformats.org/drawingml/2006/main"/>
+          <a:p xmlns:a="http://schemas.openxmlformats.org/drawingml/2006/main">
+            <a:pPr marL="0" indent="0" algn="l">
+              <a:lnSpc>
+                <a:spcPct val="90000"/>
+              </a:lnSpc>
+              <a:spcBef>
+                <a:spcPts val="0"/>
+              </a:spcBef>
+              <a:spcAft>
+                <a:spcPts val="0"/>
+              </a:spcAft>
+              <a:buNone/>
+            </a:pPr>
+            <a:r>
+              <a:rPr sz="3600">
+                <a:solidFill>
+                  <a:schemeClr val="dk1"/>
+                </a:solidFill>
+                <a:latin typeface="Quantico"/>
+                <a:ea typeface="Quantico"/>
+                <a:cs typeface="Quantico"/>
+              </a:rPr>
+              <a:t>/&gt;</a:t>
+            </a:r>
+          </a:p>
+        </p:txBody>
+      </p:sp>
+      <p:sp>
+        <p:nvSpPr>
+          <p:cNvPr id="310" name="Google Shape;310;p30">
+            <a:extLst xmlns:a="http://schemas.openxmlformats.org/drawingml/2006/main">
+              <a:ext uri="{FF2B5EF4-FFF2-40B4-BE49-F238E27FC236}">
+                <a16:creationId xmlns:a16="http://schemas.microsoft.com/office/drawing/2014/main" id="{09B6DAF8-8302-4623-897D-26165EA51BCA}"/>
+              </a:ext>
+            </a:extLst>
+          </p:cNvPr>
+          <p:cNvSpPr>
+            <a:spLocks xmlns:a="http://schemas.openxmlformats.org/drawingml/2006/main" noGrp="1"/>
+          </p:cNvSpPr>
+          <p:nvPr/>
+        </p:nvSpPr>
+        <p:spPr>
           <a:xfrm xmlns:a="http://schemas.openxmlformats.org/drawingml/2006/main" rot="0">
-            <a:off x="772525" y="726625"/>
-            <a:ext cx="6578100" cy="3438300"/>
+            <a:off x="5827600" y="697350"/>
+            <a:ext cx="2119744" cy="1127400"/>
           </a:xfrm>
           <a:prstGeom xmlns:a="http://schemas.openxmlformats.org/drawingml/2006/main" prst="rect">
             <a:avLst/>
@@ -30884,10 +31289,10 @@
       </p:sp>
       <p:sp>
         <p:nvSpPr>
-          <p:cNvPr id="204" name="Google Shape;204;p24">
-            <a:extLst xmlns:a="http://schemas.openxmlformats.org/drawingml/2006/main">
-              <a:ext uri="{FF2B5EF4-FFF2-40B4-BE49-F238E27FC236}">
-                <a16:creationId xmlns:a16="http://schemas.microsoft.com/office/drawing/2014/main" id="{B1D93451-B164-4654-813D-9B921C836466}"/>
+          <p:cNvPr id="311" name="Google Shape;311;p30">
+            <a:extLst xmlns:a="http://schemas.openxmlformats.org/drawingml/2006/main">
+              <a:ext uri="{FF2B5EF4-FFF2-40B4-BE49-F238E27FC236}">
+                <a16:creationId xmlns:a16="http://schemas.microsoft.com/office/drawing/2014/main" id="{742D31F6-3221-48C9-8E30-90EE2ECD8DA0}"/>
               </a:ext>
             </a:extLst>
           </p:cNvPr>
@@ -30898,8 +31303,8 @@
         </p:nvSpPr>
         <p:spPr>
           <a:xfrm xmlns:a="http://schemas.openxmlformats.org/drawingml/2006/main" rot="0">
-            <a:off x="772525" y="726625"/>
-            <a:ext cx="6578100" cy="255300"/>
+            <a:off x="5827603" y="697350"/>
+            <a:ext cx="2119744" cy="255300"/>
           </a:xfrm>
           <a:prstGeom xmlns:a="http://schemas.openxmlformats.org/drawingml/2006/main" prst="rect">
             <a:avLst/>
@@ -30936,10 +31341,10 @@
       </p:sp>
       <p:sp>
         <p:nvSpPr>
-          <p:cNvPr id="206" name="Google Shape;206;p24">
-            <a:extLst xmlns:a="http://schemas.openxmlformats.org/drawingml/2006/main">
-              <a:ext uri="{FF2B5EF4-FFF2-40B4-BE49-F238E27FC236}">
-                <a16:creationId xmlns:a16="http://schemas.microsoft.com/office/drawing/2014/main" id="{EE5B2A1D-12A2-40AB-8D58-2E80CD3BFA13}"/>
+          <p:cNvPr id="312" name="Google Shape;312;p30">
+            <a:extLst xmlns:a="http://schemas.openxmlformats.org/drawingml/2006/main">
+              <a:ext uri="{FF2B5EF4-FFF2-40B4-BE49-F238E27FC236}">
+                <a16:creationId xmlns:a16="http://schemas.microsoft.com/office/drawing/2014/main" id="{1197A6D5-E686-4D9D-B748-4B534E594BA4}"/>
               </a:ext>
             </a:extLst>
           </p:cNvPr>
@@ -30949,334 +31354,8 @@
           <p:nvPr/>
         </p:nvSpPr>
         <p:spPr>
-          <a:xfrm xmlns:a="http://schemas.openxmlformats.org/drawingml/2006/main" rot="0">
-            <a:off x="4506625" y="3349925"/>
-            <a:ext cx="3447300" cy="962400"/>
-          </a:xfrm>
-          <a:prstGeom xmlns:a="http://schemas.openxmlformats.org/drawingml/2006/main" prst="rect">
-            <a:avLst/>
-          </a:prstGeom>
-          <a:solidFill xmlns:a="http://schemas.openxmlformats.org/drawingml/2006/main">
-            <a:schemeClr val="lt1"/>
-          </a:solidFill>
-          <a:ln xmlns:a="http://schemas.openxmlformats.org/drawingml/2006/main" w="9525" cmpd="sng">
-            <a:solidFill>
-              <a:schemeClr val="dk1"/>
-            </a:solidFill>
-            <a:prstDash val="solid"/>
-            <a:headEnd type="none" w="sm" len="sm"/>
-            <a:tailEnd type="none" w="sm" len="sm"/>
-          </a:ln>
-        </p:spPr>
-        <p:txBody>
-          <a:bodyPr xmlns:a="http://schemas.openxmlformats.org/drawingml/2006/main" spcFirstLastPara="1" wrap="square" lIns="91425" tIns="91425" rIns="91425" bIns="91425" anchor="ctr">
-            <a:noAutofit/>
-          </a:bodyPr>
-          <a:lstStyle xmlns:a="http://schemas.openxmlformats.org/drawingml/2006/main"/>
-          <a:p xmlns:a="http://schemas.openxmlformats.org/drawingml/2006/main">
-            <a:pPr marL="0" indent="0" algn="l">
-              <a:spcBef>
-                <a:spcPts val="0"/>
-              </a:spcBef>
-              <a:spcAft>
-                <a:spcPts val="0"/>
-              </a:spcAft>
-              <a:buNone/>
-            </a:pPr>
-          </a:p>
-        </p:txBody>
-      </p:sp>
-      <p:sp>
-        <p:nvSpPr>
-          <p:cNvPr id="207" name="Google Shape;207;p24">
-            <a:extLst xmlns:a="http://schemas.openxmlformats.org/drawingml/2006/main">
-              <a:ext uri="{FF2B5EF4-FFF2-40B4-BE49-F238E27FC236}">
-                <a16:creationId xmlns:a16="http://schemas.microsoft.com/office/drawing/2014/main" id="{2045E92C-FD95-4F72-B1D3-175AA5BC638E}"/>
-              </a:ext>
-            </a:extLst>
-          </p:cNvPr>
-          <p:cNvSpPr>
-            <a:spLocks xmlns:a="http://schemas.openxmlformats.org/drawingml/2006/main" noGrp="1"/>
-          </p:cNvSpPr>
-          <p:nvPr/>
-        </p:nvSpPr>
-        <p:spPr>
-          <a:xfrm xmlns:a="http://schemas.openxmlformats.org/drawingml/2006/main" rot="0">
-            <a:off x="4506625" y="3349925"/>
-            <a:ext cx="3447300" cy="255300"/>
-          </a:xfrm>
-          <a:prstGeom xmlns:a="http://schemas.openxmlformats.org/drawingml/2006/main" prst="rect">
-            <a:avLst/>
-          </a:prstGeom>
-          <a:solidFill xmlns:a="http://schemas.openxmlformats.org/drawingml/2006/main">
-            <a:schemeClr val="lt1"/>
-          </a:solidFill>
-          <a:ln xmlns:a="http://schemas.openxmlformats.org/drawingml/2006/main" w="9525" cmpd="sng">
-            <a:solidFill>
-              <a:schemeClr val="dk1"/>
-            </a:solidFill>
-            <a:prstDash val="solid"/>
-            <a:headEnd type="none" w="sm" len="sm"/>
-            <a:tailEnd type="none" w="sm" len="sm"/>
-          </a:ln>
-        </p:spPr>
-        <p:txBody>
-          <a:bodyPr xmlns:a="http://schemas.openxmlformats.org/drawingml/2006/main" spcFirstLastPara="1" wrap="square" lIns="91425" tIns="91425" rIns="91425" bIns="91425" anchor="ctr">
-            <a:noAutofit/>
-          </a:bodyPr>
-          <a:lstStyle xmlns:a="http://schemas.openxmlformats.org/drawingml/2006/main"/>
-          <a:p xmlns:a="http://schemas.openxmlformats.org/drawingml/2006/main">
-            <a:pPr marL="0" indent="0" algn="l">
-              <a:spcBef>
-                <a:spcPts val="0"/>
-              </a:spcBef>
-              <a:spcAft>
-                <a:spcPts val="0"/>
-              </a:spcAft>
-              <a:buNone/>
-            </a:pPr>
-          </a:p>
-        </p:txBody>
-      </p:sp>
-      <p:sp>
-        <p:nvSpPr>
-          <p:cNvPr id="209" name="Google Shape;209;p24">
-            <a:extLst xmlns:a="http://schemas.openxmlformats.org/drawingml/2006/main">
-              <a:ext uri="{FF2B5EF4-FFF2-40B4-BE49-F238E27FC236}">
-                <a16:creationId xmlns:a16="http://schemas.microsoft.com/office/drawing/2014/main" id="{0AE4C7F2-E08C-4333-A7CB-F563247B91DD}"/>
-              </a:ext>
-            </a:extLst>
-          </p:cNvPr>
-          <p:cNvSpPr>
-            <a:spLocks xmlns:a="http://schemas.openxmlformats.org/drawingml/2006/main" noGrp="1"/>
-          </p:cNvSpPr>
-          <p:nvPr/>
-        </p:nvSpPr>
-        <p:spPr>
-          <a:xfrm xmlns:a="http://schemas.openxmlformats.org/drawingml/2006/main" rot="0">
-            <a:off x="6849418" y="1309987"/>
-            <a:ext cx="1864825" cy="1637031"/>
-          </a:xfrm>
-          <a:prstGeom xmlns:a="http://schemas.openxmlformats.org/drawingml/2006/main" prst="rect">
-            <a:avLst/>
-          </a:prstGeom>
-          <a:solidFill xmlns:a="http://schemas.openxmlformats.org/drawingml/2006/main">
-            <a:schemeClr val="lt1"/>
-          </a:solidFill>
-          <a:ln xmlns:a="http://schemas.openxmlformats.org/drawingml/2006/main" w="9525" cmpd="sng">
-            <a:solidFill>
-              <a:schemeClr val="dk1"/>
-            </a:solidFill>
-            <a:prstDash val="solid"/>
-            <a:headEnd type="none" w="sm" len="sm"/>
-            <a:tailEnd type="none" w="sm" len="sm"/>
-          </a:ln>
-        </p:spPr>
-        <p:txBody>
-          <a:bodyPr xmlns:a="http://schemas.openxmlformats.org/drawingml/2006/main" spcFirstLastPara="1" wrap="square" lIns="91425" tIns="91425" rIns="91425" bIns="91425" anchor="ctr">
-            <a:noAutofit/>
-          </a:bodyPr>
-          <a:lstStyle xmlns:a="http://schemas.openxmlformats.org/drawingml/2006/main"/>
-          <a:p xmlns:a="http://schemas.openxmlformats.org/drawingml/2006/main">
-            <a:pPr marL="0" indent="0" algn="l">
-              <a:spcBef>
-                <a:spcPts val="0"/>
-              </a:spcBef>
-              <a:spcAft>
-                <a:spcPts val="0"/>
-              </a:spcAft>
-              <a:buNone/>
-            </a:pPr>
-          </a:p>
-        </p:txBody>
-      </p:sp>
-      <p:sp>
-        <p:nvSpPr>
-          <p:cNvPr id="210" name="Google Shape;210;p24">
-            <a:extLst xmlns:a="http://schemas.openxmlformats.org/drawingml/2006/main">
-              <a:ext uri="{FF2B5EF4-FFF2-40B4-BE49-F238E27FC236}">
-                <a16:creationId xmlns:a16="http://schemas.microsoft.com/office/drawing/2014/main" id="{976E2B22-EB9F-4CC7-ABF6-B9854C645052}"/>
-              </a:ext>
-            </a:extLst>
-          </p:cNvPr>
-          <p:cNvSpPr>
-            <a:spLocks xmlns:a="http://schemas.openxmlformats.org/drawingml/2006/main" noGrp="1"/>
-          </p:cNvSpPr>
-          <p:nvPr/>
-        </p:nvSpPr>
-        <p:spPr>
-          <a:xfrm xmlns:a="http://schemas.openxmlformats.org/drawingml/2006/main" rot="0">
-            <a:off x="6849425" y="1309976"/>
-            <a:ext cx="1864825" cy="255307"/>
-          </a:xfrm>
-          <a:prstGeom xmlns:a="http://schemas.openxmlformats.org/drawingml/2006/main" prst="rect">
-            <a:avLst/>
-          </a:prstGeom>
-          <a:solidFill xmlns:a="http://schemas.openxmlformats.org/drawingml/2006/main">
-            <a:schemeClr val="lt1"/>
-          </a:solidFill>
-          <a:ln xmlns:a="http://schemas.openxmlformats.org/drawingml/2006/main" w="9525" cmpd="sng">
-            <a:solidFill>
-              <a:schemeClr val="dk1"/>
-            </a:solidFill>
-            <a:prstDash val="solid"/>
-            <a:headEnd type="none" w="sm" len="sm"/>
-            <a:tailEnd type="none" w="sm" len="sm"/>
-          </a:ln>
-        </p:spPr>
-        <p:txBody>
-          <a:bodyPr xmlns:a="http://schemas.openxmlformats.org/drawingml/2006/main" spcFirstLastPara="1" wrap="square" lIns="91425" tIns="91425" rIns="91425" bIns="91425" anchor="ctr">
-            <a:noAutofit/>
-          </a:bodyPr>
-          <a:lstStyle xmlns:a="http://schemas.openxmlformats.org/drawingml/2006/main"/>
-          <a:p xmlns:a="http://schemas.openxmlformats.org/drawingml/2006/main">
-            <a:pPr marL="0" indent="0" algn="l">
-              <a:spcBef>
-                <a:spcPts val="0"/>
-              </a:spcBef>
-              <a:spcAft>
-                <a:spcPts val="0"/>
-              </a:spcAft>
-              <a:buNone/>
-            </a:pPr>
-          </a:p>
-        </p:txBody>
-      </p:sp>
-      <p:sp>
-        <p:nvSpPr>
-          <p:cNvPr id="211" name="Google Shape;211;p24">
-            <a:extLst xmlns:a="http://schemas.openxmlformats.org/drawingml/2006/main">
-              <a:ext uri="{FF2B5EF4-FFF2-40B4-BE49-F238E27FC236}">
-                <a16:creationId xmlns:a16="http://schemas.microsoft.com/office/drawing/2014/main" id="{6775FBA8-32A6-4C5D-858A-FBE91F9F8C9B}"/>
-              </a:ext>
-            </a:extLst>
-          </p:cNvPr>
-          <p:cNvSpPr>
-            <a:spLocks xmlns:a="http://schemas.openxmlformats.org/drawingml/2006/main" noGrp="1"/>
-          </p:cNvSpPr>
-          <p:nvPr/>
-        </p:nvSpPr>
-        <p:spPr>
           <a:xfrm xmlns:a="http://schemas.openxmlformats.org/drawingml/2006/main">
-            <a:off x="1084325" y="2012800"/>
-            <a:ext cx="702900" cy="606900"/>
-          </a:xfrm>
-          <a:prstGeom xmlns:a="http://schemas.openxmlformats.org/drawingml/2006/main" prst="rect">
-            <a:avLst/>
-          </a:prstGeom>
-          <a:noFill xmlns:a="http://schemas.openxmlformats.org/drawingml/2006/main"/>
-          <a:ln xmlns:a="http://schemas.openxmlformats.org/drawingml/2006/main">
-            <a:noFill/>
-          </a:ln>
-        </p:spPr>
-        <p:txBody>
-          <a:bodyPr xmlns:a="http://schemas.openxmlformats.org/drawingml/2006/main" spcFirstLastPara="1" wrap="square" lIns="91425" tIns="91425" rIns="91425" bIns="91425" anchor="ctr">
-            <a:noAutofit/>
-          </a:bodyPr>
-          <a:lstStyle xmlns:a="http://schemas.openxmlformats.org/drawingml/2006/main"/>
-          <a:p xmlns:a="http://schemas.openxmlformats.org/drawingml/2006/main">
-            <a:pPr marL="0" indent="0" algn="l">
-              <a:lnSpc>
-                <a:spcPct val="90000"/>
-              </a:lnSpc>
-              <a:spcBef>
-                <a:spcPts val="0"/>
-              </a:spcBef>
-              <a:spcAft>
-                <a:spcPts val="0"/>
-              </a:spcAft>
-              <a:buNone/>
-            </a:pPr>
-            <a:r>
-              <a:rPr sz="3600">
-                <a:solidFill>
-                  <a:schemeClr val="lt2"/>
-                </a:solidFill>
-                <a:latin typeface="Quantico"/>
-                <a:ea typeface="Quantico"/>
-                <a:cs typeface="Quantico"/>
-              </a:rPr>
-              <a:t>&lt;/</a:t>
-            </a:r>
-          </a:p>
-        </p:txBody>
-      </p:sp>
-      <p:sp>
-        <p:nvSpPr>
-          <p:cNvPr id="212" name="Google Shape;212;p24">
-            <a:extLst xmlns:a="http://schemas.openxmlformats.org/drawingml/2006/main">
-              <a:ext uri="{FF2B5EF4-FFF2-40B4-BE49-F238E27FC236}">
-                <a16:creationId xmlns:a16="http://schemas.microsoft.com/office/drawing/2014/main" id="{E705969D-D0F1-46F7-91BE-19AAFA3FBB61}"/>
-              </a:ext>
-            </a:extLst>
-          </p:cNvPr>
-          <p:cNvSpPr>
-            <a:spLocks xmlns:a="http://schemas.openxmlformats.org/drawingml/2006/main" noGrp="1"/>
-          </p:cNvSpPr>
-          <p:nvPr/>
-        </p:nvSpPr>
-        <p:spPr>
-          <a:xfrm xmlns:a="http://schemas.openxmlformats.org/drawingml/2006/main">
-            <a:off x="5878825" y="1974375"/>
-            <a:ext cx="702900" cy="606900"/>
-          </a:xfrm>
-          <a:prstGeom xmlns:a="http://schemas.openxmlformats.org/drawingml/2006/main" prst="rect">
-            <a:avLst/>
-          </a:prstGeom>
-          <a:noFill xmlns:a="http://schemas.openxmlformats.org/drawingml/2006/main"/>
-          <a:ln xmlns:a="http://schemas.openxmlformats.org/drawingml/2006/main">
-            <a:noFill/>
-          </a:ln>
-        </p:spPr>
-        <p:txBody>
-          <a:bodyPr xmlns:a="http://schemas.openxmlformats.org/drawingml/2006/main" spcFirstLastPara="1" wrap="square" lIns="91425" tIns="91425" rIns="91425" bIns="91425" anchor="ctr">
-            <a:noAutofit/>
-          </a:bodyPr>
-          <a:lstStyle xmlns:a="http://schemas.openxmlformats.org/drawingml/2006/main"/>
-          <a:p xmlns:a="http://schemas.openxmlformats.org/drawingml/2006/main">
-            <a:pPr marL="0" indent="0" algn="l">
-              <a:lnSpc>
-                <a:spcPct val="90000"/>
-              </a:lnSpc>
-              <a:spcBef>
-                <a:spcPts val="0"/>
-              </a:spcBef>
-              <a:spcAft>
-                <a:spcPts val="0"/>
-              </a:spcAft>
-              <a:buNone/>
-            </a:pPr>
-            <a:r>
-              <a:rPr sz="3600">
-                <a:solidFill>
-                  <a:schemeClr val="dk1"/>
-                </a:solidFill>
-                <a:latin typeface="Quantico"/>
-                <a:ea typeface="Quantico"/>
-                <a:cs typeface="Quantico"/>
-              </a:rPr>
-              <a:t>/&gt;</a:t>
-            </a:r>
-          </a:p>
-        </p:txBody>
-      </p:sp>
-      <p:sp>
-        <p:nvSpPr>
-          <p:cNvPr id="213" name="Google Shape;213;p24">
-            <a:extLst xmlns:a="http://schemas.openxmlformats.org/drawingml/2006/main">
-              <a:ext uri="{FF2B5EF4-FFF2-40B4-BE49-F238E27FC236}">
-                <a16:creationId xmlns:a16="http://schemas.microsoft.com/office/drawing/2014/main" id="{FBDE6D5E-521E-4730-84D0-2601494F8F61}"/>
-              </a:ext>
-            </a:extLst>
-          </p:cNvPr>
-          <p:cNvSpPr>
-            <a:spLocks xmlns:a="http://schemas.openxmlformats.org/drawingml/2006/main" noGrp="1"/>
-          </p:cNvSpPr>
-          <p:nvPr/>
-        </p:nvSpPr>
-        <p:spPr>
-          <a:xfrm xmlns:a="http://schemas.openxmlformats.org/drawingml/2006/main">
-            <a:off x="7198457" y="1873600"/>
+            <a:off x="6279082" y="1016750"/>
             <a:ext cx="1216800" cy="746100"/>
           </a:xfrm>
           <a:prstGeom xmlns:a="http://schemas.openxmlformats.org/drawingml/2006/main" prst="rect">
@@ -31334,159 +31413,66 @@
       </p:sp>
       <p:sp>
         <p:nvSpPr>
-          <p:cNvPr id="214" name="Google Shape;214;p24">
-            <a:extLst xmlns:a="http://schemas.openxmlformats.org/drawingml/2006/main">
-              <a:ext uri="{FF2B5EF4-FFF2-40B4-BE49-F238E27FC236}">
-                <a16:creationId xmlns:a16="http://schemas.microsoft.com/office/drawing/2014/main" id="{5EE6EEBD-605C-4EFD-803C-779B4C388CA3}"/>
-              </a:ext>
-            </a:extLst>
-          </p:cNvPr>
-          <p:cNvSpPr>
-            <a:spLocks xmlns:a="http://schemas.openxmlformats.org/drawingml/2006/main" noGrp="1"/>
-          </p:cNvSpPr>
-          <p:nvPr>
-            <p:ph type="ctrTitle" idx="0"/>
-          </p:nvPr>
+          <p:cNvPr id="313" name="slide-heading-marker-25">
+            <a:extLst xmlns:a="http://schemas.openxmlformats.org/drawingml/2006/main">
+              <a:ext uri="{FF2B5EF4-FFF2-40B4-BE49-F238E27FC236}">
+                <a16:creationId xmlns:a16="http://schemas.microsoft.com/office/drawing/2014/main" id="{9B84A4FA-3509-48AD-972C-035E478443B4}"/>
+              </a:ext>
+            </a:extLst>
+          </p:cNvPr>
+          <p:cNvSpPr>
+            <a:spLocks xmlns:a="http://schemas.openxmlformats.org/drawingml/2006/main" noGrp="1"/>
+          </p:cNvSpPr>
+          <p:nvPr/>
         </p:nvSpPr>
         <p:spPr>
           <a:xfrm xmlns:a="http://schemas.openxmlformats.org/drawingml/2006/main">
-            <a:off x="1875450" y="1974375"/>
-            <a:ext cx="4148400" cy="746100"/>
-          </a:xfrm>
-          <a:prstGeom xmlns:a="http://schemas.openxmlformats.org/drawingml/2006/main" prst="rect">
-            <a:avLst/>
-          </a:prstGeom>
-        </p:spPr>
-        <p:txBody>
-          <a:bodyPr xmlns:a="http://schemas.openxmlformats.org/drawingml/2006/main" spcFirstLastPara="1" wrap="square" lIns="91425" tIns="91425" rIns="91425" bIns="91425" anchor="t">
-            <a:noAutofit/>
-          </a:bodyPr>
-          <a:lstStyle xmlns:a="http://schemas.openxmlformats.org/drawingml/2006/main"/>
-          <a:p xmlns:a="http://schemas.openxmlformats.org/drawingml/2006/main">
-            <a:pPr marL="0" indent="0" algn="l">
-              <a:spcBef>
-                <a:spcPts val="0"/>
-              </a:spcBef>
-              <a:spcAft>
-                <a:spcPts val="0"/>
-              </a:spcAft>
-              <a:buNone/>
+            <a:off x="742950" y="447675"/>
+            <a:ext cx="476250" cy="323850"/>
+          </a:xfrm>
+          <a:prstGeom xmlns:a="http://schemas.openxmlformats.org/drawingml/2006/main" prst="rect">
+            <a:avLst/>
+          </a:prstGeom>
+          <a:noFill xmlns:a="http://schemas.openxmlformats.org/drawingml/2006/main"/>
+          <a:ln xmlns:a="http://schemas.openxmlformats.org/drawingml/2006/main" w="0">
+            <a:noFill/>
+            <a:prstDash val="solid"/>
+          </a:ln>
+        </p:spPr>
+        <p:txBody>
+          <a:bodyPr xmlns:a="http://schemas.openxmlformats.org/drawingml/2006/main"/>
+          <a:lstStyle xmlns:a="http://schemas.openxmlformats.org/drawingml/2006/main"/>
+          <a:p xmlns:a="http://schemas.openxmlformats.org/drawingml/2006/main">
+            <a:pPr algn="l">
+              <a:defRPr sz="1950" b="1">
+                <a:solidFill>
+                  <a:srgbClr val="FFDB5D"/>
+                </a:solidFill>
+                <a:latin typeface="Source Code Pro"/>
+                <a:ea typeface="Source Code Pro"/>
+                <a:cs typeface="Source Code Pro"/>
+              </a:defRPr>
             </a:pPr>
             <a:r>
-              <a:t>Great first day!</a:t>
-            </a:r>
-          </a:p>
-        </p:txBody>
-      </p:sp>
-      <p:sp>
-        <p:nvSpPr>
-          <p:cNvPr id="215" name="Google Shape;215;p24">
-            <a:extLst xmlns:a="http://schemas.openxmlformats.org/drawingml/2006/main">
-              <a:ext uri="{FF2B5EF4-FFF2-40B4-BE49-F238E27FC236}">
-                <a16:creationId xmlns:a16="http://schemas.microsoft.com/office/drawing/2014/main" id="{561222E6-86D3-4D0D-888F-084113278088}"/>
-              </a:ext>
-            </a:extLst>
-          </p:cNvPr>
-          <p:cNvSpPr>
-            <a:spLocks xmlns:a="http://schemas.openxmlformats.org/drawingml/2006/main" noGrp="1"/>
-          </p:cNvSpPr>
-          <p:nvPr>
-            <p:ph type="subTitle" idx="1"/>
-          </p:nvPr>
-        </p:nvSpPr>
-        <p:spPr>
-          <a:xfrm xmlns:a="http://schemas.openxmlformats.org/drawingml/2006/main">
-            <a:off x="4751650" y="3680600"/>
-            <a:ext cx="3043800" cy="528600"/>
-          </a:xfrm>
-          <a:prstGeom xmlns:a="http://schemas.openxmlformats.org/drawingml/2006/main" prst="rect">
-            <a:avLst/>
-          </a:prstGeom>
-        </p:spPr>
-        <p:txBody>
-          <a:bodyPr xmlns:a="http://schemas.openxmlformats.org/drawingml/2006/main" spcFirstLastPara="1" wrap="square" lIns="91425" tIns="91425" rIns="91425" bIns="91425" anchor="ctr">
-            <a:noAutofit/>
-          </a:bodyPr>
-          <a:lstStyle xmlns:a="http://schemas.openxmlformats.org/drawingml/2006/main"/>
-          <a:p xmlns:a="http://schemas.openxmlformats.org/drawingml/2006/main">
-            <a:pPr marL="0" indent="0" algn="l">
-              <a:spcBef>
-                <a:spcPts val="0"/>
-              </a:spcBef>
-              <a:spcAft>
-                <a:spcPts val="0"/>
-              </a:spcAft>
-              <a:buNone/>
-            </a:pPr>
-            <a:r>
-              <a:rPr sz="1400"/>
-              <a:t>See you next Saturday.</a:t>
-            </a:r>
-          </a:p>
-        </p:txBody>
-      </p:sp>
-      <p:sp>
-        <p:nvSpPr>
-          <p:cNvPr id="216" name="Google Shape;216;p24">
-            <a:extLst xmlns:a="http://schemas.openxmlformats.org/drawingml/2006/main">
-              <a:ext uri="{FF2B5EF4-FFF2-40B4-BE49-F238E27FC236}">
-                <a16:creationId xmlns:a16="http://schemas.microsoft.com/office/drawing/2014/main" id="{3CB2B6C1-3795-43B8-9621-54C5BB056D62}"/>
-              </a:ext>
-            </a:extLst>
-          </p:cNvPr>
-          <p:cNvSpPr>
-            <a:spLocks xmlns:a="http://schemas.openxmlformats.org/drawingml/2006/main" noGrp="1"/>
-          </p:cNvSpPr>
-          <p:nvPr/>
-        </p:nvSpPr>
-        <p:spPr>
-          <a:xfrm xmlns:a="http://schemas.openxmlformats.org/drawingml/2006/main">
-            <a:off x="536125" y="117311"/>
-            <a:ext cx="1999500" cy="180300"/>
-          </a:xfrm>
-          <a:prstGeom xmlns:a="http://schemas.openxmlformats.org/drawingml/2006/main" prst="rect">
-            <a:avLst/>
-          </a:prstGeom>
-          <a:noFill xmlns:a="http://schemas.openxmlformats.org/drawingml/2006/main"/>
-          <a:ln xmlns:a="http://schemas.openxmlformats.org/drawingml/2006/main">
-            <a:noFill/>
-          </a:ln>
-        </p:spPr>
-        <p:txBody>
-          <a:bodyPr xmlns:a="http://schemas.openxmlformats.org/drawingml/2006/main" spcFirstLastPara="1" wrap="square" lIns="91425" tIns="91425" rIns="91425" bIns="91425" anchor="ctr">
-            <a:noAutofit/>
-          </a:bodyPr>
-          <a:lstStyle xmlns:a="http://schemas.openxmlformats.org/drawingml/2006/main"/>
-          <a:p xmlns:a="http://schemas.openxmlformats.org/drawingml/2006/main">
-            <a:pPr marL="0" indent="0" algn="l">
-              <a:spcBef>
-                <a:spcPts val="0"/>
-              </a:spcBef>
-              <a:spcAft>
-                <a:spcPts val="0"/>
-              </a:spcAft>
-              <a:buNone/>
-            </a:pPr>
-            <a:r>
-              <a:rPr sz="1000">
+              <a:rPr sz="1950" b="1">
                 <a:solidFill>
-                  <a:schemeClr val="dk1"/>
+                  <a:srgbClr val="FFDB5D"/>
                 </a:solidFill>
                 <a:latin typeface="Source Code Pro"/>
                 <a:ea typeface="Source Code Pro"/>
                 <a:cs typeface="Source Code Pro"/>
               </a:rPr>
-              <a:t>Classroom Presentation</a:t>
+              <a:t>&lt;/</a:t>
             </a:r>
           </a:p>
         </p:txBody>
       </p:sp>
       <p:sp>
         <p:nvSpPr>
-          <p:cNvPr id="217" name="Google Shape;217;p24">
-            <a:extLst xmlns:a="http://schemas.openxmlformats.org/drawingml/2006/main">
-              <a:ext uri="{FF2B5EF4-FFF2-40B4-BE49-F238E27FC236}">
-                <a16:creationId xmlns:a16="http://schemas.microsoft.com/office/drawing/2014/main" id="{1BCE298B-ADAB-4360-9E4B-303C95BFACCE}"/>
+          <p:cNvPr id="314" name="slide-heading-text-25">
+            <a:extLst xmlns:a="http://schemas.openxmlformats.org/drawingml/2006/main">
+              <a:ext uri="{FF2B5EF4-FFF2-40B4-BE49-F238E27FC236}">
+                <a16:creationId xmlns:a16="http://schemas.microsoft.com/office/drawing/2014/main" id="{18BAB06A-9A69-4EBA-B0A0-E896A6DB164C}"/>
               </a:ext>
             </a:extLst>
           </p:cNvPr>
@@ -31497,42 +31483,42 @@
         </p:nvSpPr>
         <p:spPr>
           <a:xfrm xmlns:a="http://schemas.openxmlformats.org/drawingml/2006/main">
-            <a:off x="3730325" y="117311"/>
-            <a:ext cx="1999500" cy="180300"/>
+            <a:off x="1152525" y="428625"/>
+            <a:ext cx="5619750" cy="361950"/>
           </a:xfrm>
           <a:prstGeom xmlns:a="http://schemas.openxmlformats.org/drawingml/2006/main" prst="rect">
             <a:avLst/>
           </a:prstGeom>
           <a:noFill xmlns:a="http://schemas.openxmlformats.org/drawingml/2006/main"/>
-          <a:ln xmlns:a="http://schemas.openxmlformats.org/drawingml/2006/main">
+          <a:ln xmlns:a="http://schemas.openxmlformats.org/drawingml/2006/main" w="0">
             <a:noFill/>
+            <a:prstDash val="solid"/>
           </a:ln>
         </p:spPr>
         <p:txBody>
-          <a:bodyPr xmlns:a="http://schemas.openxmlformats.org/drawingml/2006/main" spcFirstLastPara="1" wrap="square" lIns="91425" tIns="91425" rIns="91425" bIns="91425" anchor="ctr">
-            <a:noAutofit/>
-          </a:bodyPr>
-          <a:lstStyle xmlns:a="http://schemas.openxmlformats.org/drawingml/2006/main"/>
-          <a:p xmlns:a="http://schemas.openxmlformats.org/drawingml/2006/main">
-            <a:pPr marL="0" indent="0" algn="l">
-              <a:spcBef>
-                <a:spcPts val="0"/>
-              </a:spcBef>
-              <a:spcAft>
-                <a:spcPts val="0"/>
-              </a:spcAft>
-              <a:buNone/>
+          <a:bodyPr xmlns:a="http://schemas.openxmlformats.org/drawingml/2006/main"/>
+          <a:lstStyle xmlns:a="http://schemas.openxmlformats.org/drawingml/2006/main"/>
+          <a:p xmlns:a="http://schemas.openxmlformats.org/drawingml/2006/main">
+            <a:pPr algn="l">
+              <a:defRPr sz="1800" b="0">
+                <a:solidFill>
+                  <a:srgbClr val="FFFFFF"/>
+                </a:solidFill>
+                <a:latin typeface="Arial"/>
+                <a:ea typeface="Arial"/>
+                <a:cs typeface="Arial"/>
+              </a:defRPr>
             </a:pPr>
             <a:r>
-              <a:rPr sz="1000">
+              <a:rPr sz="1800" b="0">
                 <a:solidFill>
-                  <a:schemeClr val="dk1"/>
+                  <a:srgbClr val="FFFFFF"/>
                 </a:solidFill>
-                <a:latin typeface="Source Code Pro"/>
-                <a:ea typeface="Source Code Pro"/>
-                <a:cs typeface="Source Code Pro"/>
+                <a:latin typeface="Arial"/>
+                <a:ea typeface="Arial"/>
+                <a:cs typeface="Arial"/>
               </a:rPr>
-              <a:t>. . .</a:t>
+              <a:t>Next week we start TypeScript</a:t>
             </a:r>
           </a:p>
         </p:txBody>
@@ -31540,16 +31526,23 @@
     </p:spTree>
     <p:extLst>
       <p:ext uri="{BB962C8B-B14F-4D97-AF65-F5344CB8AC3E}">
-        <p14:creationId xmlns:p14="http://schemas.microsoft.com/office/powerpoint/2010/main" val="592295941"/>
+        <p14:creationId xmlns:p14="http://schemas.microsoft.com/office/powerpoint/2010/main" val="694519266"/>
       </p:ext>
     </p:extLst>
   </p:cSld>
 </p:sld>
 </file>
 
-<file path=ppt/slides/slide3.xml><?xml version="1.0" encoding="utf-8"?>
+<file path=ppt/slides/slide27.xml><?xml version="1.0" encoding="utf-8"?>
 <p:sld xmlns:p="http://schemas.openxmlformats.org/presentationml/2006/main">
   <p:cSld>
+    <p:bg>
+      <p:bgPr>
+        <a:solidFill xmlns:a="http://schemas.openxmlformats.org/drawingml/2006/main">
+          <a:schemeClr val="lt1"/>
+        </a:solidFill>
+      </p:bgPr>
+    </p:bg>
     <p:spTree>
       <p:nvGrpSpPr>
         <p:cNvPr id="1" name=""/>
@@ -31561,10 +31554,10 @@
       </p:grpSpPr>
       <p:sp>
         <p:nvSpPr>
-          <p:cNvPr id="234" name="Google Shape;234;p26">
-            <a:extLst xmlns:a="http://schemas.openxmlformats.org/drawingml/2006/main">
-              <a:ext uri="{FF2B5EF4-FFF2-40B4-BE49-F238E27FC236}">
-                <a16:creationId xmlns:a16="http://schemas.microsoft.com/office/drawing/2014/main" id="{B14A69C7-AC5F-41D7-B561-C6582CB336CF}"/>
+          <p:cNvPr id="203" name="Google Shape;203;p24">
+            <a:extLst xmlns:a="http://schemas.openxmlformats.org/drawingml/2006/main">
+              <a:ext uri="{FF2B5EF4-FFF2-40B4-BE49-F238E27FC236}">
+                <a16:creationId xmlns:a16="http://schemas.microsoft.com/office/drawing/2014/main" id="{04D2E2B3-22FD-441D-93E4-32F09B56D5E7}"/>
               </a:ext>
             </a:extLst>
           </p:cNvPr>
@@ -31575,8 +31568,8 @@
         </p:nvSpPr>
         <p:spPr>
           <a:xfrm xmlns:a="http://schemas.openxmlformats.org/drawingml/2006/main" rot="0">
-            <a:off x="4806625" y="1238875"/>
-            <a:ext cx="3617313" cy="3166995"/>
+            <a:off x="772525" y="726625"/>
+            <a:ext cx="6578100" cy="3438300"/>
           </a:xfrm>
           <a:prstGeom xmlns:a="http://schemas.openxmlformats.org/drawingml/2006/main" prst="rect">
             <a:avLst/>
@@ -31613,10 +31606,10 @@
       </p:sp>
       <p:sp>
         <p:nvSpPr>
-          <p:cNvPr id="235" name="Google Shape;235;p26">
-            <a:extLst xmlns:a="http://schemas.openxmlformats.org/drawingml/2006/main">
-              <a:ext uri="{FF2B5EF4-FFF2-40B4-BE49-F238E27FC236}">
-                <a16:creationId xmlns:a16="http://schemas.microsoft.com/office/drawing/2014/main" id="{80820967-DED6-4709-8827-0E65E307CB1E}"/>
+          <p:cNvPr id="204" name="Google Shape;204;p24">
+            <a:extLst xmlns:a="http://schemas.openxmlformats.org/drawingml/2006/main">
+              <a:ext uri="{FF2B5EF4-FFF2-40B4-BE49-F238E27FC236}">
+                <a16:creationId xmlns:a16="http://schemas.microsoft.com/office/drawing/2014/main" id="{B1D93451-B164-4654-813D-9B921C836466}"/>
               </a:ext>
             </a:extLst>
           </p:cNvPr>
@@ -31627,8 +31620,8 @@
         </p:nvSpPr>
         <p:spPr>
           <a:xfrm xmlns:a="http://schemas.openxmlformats.org/drawingml/2006/main" rot="0">
-            <a:off x="4806625" y="1238875"/>
-            <a:ext cx="3617313" cy="255307"/>
+            <a:off x="772525" y="726625"/>
+            <a:ext cx="6578100" cy="255300"/>
           </a:xfrm>
           <a:prstGeom xmlns:a="http://schemas.openxmlformats.org/drawingml/2006/main" prst="rect">
             <a:avLst/>
@@ -31665,132 +31658,10 @@
       </p:sp>
       <p:sp>
         <p:nvSpPr>
-          <p:cNvPr id="236" name="Google Shape;236;p26">
-            <a:extLst xmlns:a="http://schemas.openxmlformats.org/drawingml/2006/main">
-              <a:ext uri="{FF2B5EF4-FFF2-40B4-BE49-F238E27FC236}">
-                <a16:creationId xmlns:a16="http://schemas.microsoft.com/office/drawing/2014/main" id="{0E1D9519-FD68-41BB-BE8C-59D8D4D03E12}"/>
-              </a:ext>
-            </a:extLst>
-          </p:cNvPr>
-          <p:cNvSpPr>
-            <a:spLocks xmlns:a="http://schemas.openxmlformats.org/drawingml/2006/main" noGrp="1"/>
-          </p:cNvSpPr>
-          <p:nvPr>
-            <p:ph type="title" idx="0"/>
-          </p:nvPr>
-        </p:nvSpPr>
-        <p:spPr>
-          <a:xfrm xmlns:a="http://schemas.openxmlformats.org/drawingml/2006/main">
-            <a:off x="720000" y="475500"/>
-            <a:ext cx="7704000" cy="557700"/>
-          </a:xfrm>
-          <a:prstGeom xmlns:a="http://schemas.openxmlformats.org/drawingml/2006/main" prst="rect">
-            <a:avLst/>
-          </a:prstGeom>
-        </p:spPr>
-        <p:txBody>
-          <a:bodyPr xmlns:a="http://schemas.openxmlformats.org/drawingml/2006/main" spcFirstLastPara="1" wrap="square" lIns="91425" tIns="91425" rIns="91425" bIns="91425" anchor="t">
-            <a:noAutofit/>
-          </a:bodyPr>
-          <a:lstStyle xmlns:a="http://schemas.openxmlformats.org/drawingml/2006/main"/>
-          <a:p xmlns:a="http://schemas.openxmlformats.org/drawingml/2006/main">
-            <a:pPr marL="0" indent="0" algn="l">
-              <a:spcBef>
-                <a:spcPts val="0"/>
-              </a:spcBef>
-              <a:spcAft>
-                <a:spcPts val="0"/>
-              </a:spcAft>
-              <a:buNone/>
-            </a:pPr>
-            <a:r>
-              <a:rPr>
-                <a:solidFill>
-                  <a:schemeClr val="lt2"/>
-                </a:solidFill>
-              </a:rPr>
-              <a:t>&lt;/ </a:t>
-            </a:r>
-            <a:r>
-              <a:t>Teachers</a:t>
-            </a:r>
-          </a:p>
-        </p:txBody>
-      </p:sp>
-      <p:sp>
-        <p:nvSpPr>
-          <p:cNvPr id="237" name="Google Shape;237;p26">
-            <a:extLst xmlns:a="http://schemas.openxmlformats.org/drawingml/2006/main">
-              <a:ext uri="{FF2B5EF4-FFF2-40B4-BE49-F238E27FC236}">
-                <a16:creationId xmlns:a16="http://schemas.microsoft.com/office/drawing/2014/main" id="{9B80CB32-94BD-40A6-A573-1C0337506855}"/>
-              </a:ext>
-            </a:extLst>
-          </p:cNvPr>
-          <p:cNvSpPr>
-            <a:spLocks xmlns:a="http://schemas.openxmlformats.org/drawingml/2006/main" noGrp="1"/>
-          </p:cNvSpPr>
-          <p:nvPr>
-            <p:ph type="body" idx="1"/>
-          </p:nvPr>
-        </p:nvSpPr>
-        <p:spPr>
-          <a:xfrm xmlns:a="http://schemas.openxmlformats.org/drawingml/2006/main">
-            <a:off x="724536" y="1153561"/>
-            <a:ext cx="3692400" cy="2955600"/>
-          </a:xfrm>
-          <a:prstGeom xmlns:a="http://schemas.openxmlformats.org/drawingml/2006/main" prst="rect">
-            <a:avLst/>
-          </a:prstGeom>
-        </p:spPr>
-        <p:txBody>
-          <a:bodyPr xmlns:a="http://schemas.openxmlformats.org/drawingml/2006/main" spcFirstLastPara="1" wrap="square" lIns="91425" tIns="91425" rIns="91425" bIns="91425" anchor="t">
-            <a:noAutofit/>
-          </a:bodyPr>
-          <a:lstStyle xmlns:a="http://schemas.openxmlformats.org/drawingml/2006/main"/>
-          <a:p xmlns:a="http://schemas.openxmlformats.org/drawingml/2006/main">
-            <a:pPr>
-              <a:lnSpc>
-                <a:spcPct val="200000"/>
-              </a:lnSpc>
-              <a:buChar char="●"/>
-            </a:pPr>
-            <a:r>
-              <a:t>Bachelors &amp; Masters in    Computer Science</a:t>
-            </a:r>
-          </a:p>
-          <a:p xmlns:a="http://schemas.openxmlformats.org/drawingml/2006/main">
-            <a:pPr>
-              <a:lnSpc>
-                <a:spcPct val="200000"/>
-              </a:lnSpc>
-              <a:buChar char="●"/>
-            </a:pPr>
-            <a:r>
-              <a:t>Software Engineer Intern at </a:t>
-            </a:r>
-            <a:r>
-              <a:t>Northrop Grumman and BNY</a:t>
-            </a:r>
-          </a:p>
-          <a:p xmlns:a="http://schemas.openxmlformats.org/drawingml/2006/main">
-            <a:pPr>
-              <a:lnSpc>
-                <a:spcPct val="200000"/>
-              </a:lnSpc>
-              <a:buChar char="●"/>
-            </a:pPr>
-            <a:r>
-              <a:t>Software Engineer at Google​</a:t>
-            </a:r>
-          </a:p>
-        </p:txBody>
-      </p:sp>
-      <p:sp>
-        <p:nvSpPr>
-          <p:cNvPr id="238" name="Google Shape;238;p26">
-            <a:extLst xmlns:a="http://schemas.openxmlformats.org/drawingml/2006/main">
-              <a:ext uri="{FF2B5EF4-FFF2-40B4-BE49-F238E27FC236}">
-                <a16:creationId xmlns:a16="http://schemas.microsoft.com/office/drawing/2014/main" id="{3C70EC75-6F40-46BC-9CE8-36EAC24FF65B}"/>
+          <p:cNvPr id="206" name="Google Shape;206;p24">
+            <a:extLst xmlns:a="http://schemas.openxmlformats.org/drawingml/2006/main">
+              <a:ext uri="{FF2B5EF4-FFF2-40B4-BE49-F238E27FC236}">
+                <a16:creationId xmlns:a16="http://schemas.microsoft.com/office/drawing/2014/main" id="{EE5B2A1D-12A2-40AB-8D58-2E80CD3BFA13}"/>
               </a:ext>
             </a:extLst>
           </p:cNvPr>
@@ -31800,125 +31671,9 @@
           <p:nvPr/>
         </p:nvSpPr>
         <p:spPr>
-          <a:xfrm xmlns:a="http://schemas.openxmlformats.org/drawingml/2006/main">
-            <a:off x="4950330" y="1581625"/>
-            <a:ext cx="1774800" cy="497400"/>
-          </a:xfrm>
-          <a:prstGeom xmlns:a="http://schemas.openxmlformats.org/drawingml/2006/main" prst="rect">
-            <a:avLst/>
-          </a:prstGeom>
-          <a:noFill xmlns:a="http://schemas.openxmlformats.org/drawingml/2006/main"/>
-          <a:ln xmlns:a="http://schemas.openxmlformats.org/drawingml/2006/main">
-            <a:noFill/>
-          </a:ln>
-        </p:spPr>
-        <p:txBody>
-          <a:bodyPr xmlns:a="http://schemas.openxmlformats.org/drawingml/2006/main" spcFirstLastPara="1" wrap="square" lIns="91425" tIns="91425" rIns="91425" bIns="91425" anchor="t">
-            <a:noAutofit/>
-          </a:bodyPr>
-          <a:lstStyle xmlns:a="http://schemas.openxmlformats.org/drawingml/2006/main"/>
-          <a:p xmlns:a="http://schemas.openxmlformats.org/drawingml/2006/main">
-            <a:pPr marL="0" indent="0" algn="l">
-              <a:lnSpc>
-                <a:spcPct val="90000"/>
-              </a:lnSpc>
-              <a:spcBef>
-                <a:spcPts val="0"/>
-              </a:spcBef>
-              <a:spcAft>
-                <a:spcPts val="0"/>
-              </a:spcAft>
-              <a:buNone/>
-            </a:pPr>
-            <a:r>
-              <a:rPr sz="2400">
-                <a:solidFill>
-                  <a:schemeClr val="accent2"/>
-                </a:solidFill>
-                <a:latin typeface="Quantico"/>
-                <a:ea typeface="Quantico"/>
-                <a:cs typeface="Quantico"/>
-              </a:rPr>
-              <a:t>Sanskar</a:t>
-            </a:r>
-            <a:r>
-              <a:rPr sz="2400">
-                <a:solidFill>
-                  <a:schemeClr val="accent1"/>
-                </a:solidFill>
-                <a:latin typeface="Quantico"/>
-                <a:ea typeface="Quantico"/>
-                <a:cs typeface="Quantico"/>
-              </a:rPr>
-              <a:t>&gt;</a:t>
-            </a:r>
-          </a:p>
-        </p:txBody>
-      </p:sp>
-      <p:pic>
-        <p:nvPicPr>
-          <p:cNvPr id="245" name="Picture 2"/>
-          <p:cNvPicPr>
-            <a:picLocks xmlns:a="http://schemas.openxmlformats.org/drawingml/2006/main" noChangeAspect="1"/>
-          </p:cNvPicPr>
-          <p:nvPr/>
-        </p:nvPicPr>
-        <p:blipFill>
-          <a:blip xmlns:r="http://schemas.openxmlformats.org/officeDocument/2006/relationships" xmlns:a="http://schemas.openxmlformats.org/drawingml/2006/main" r:embed="Recfdc9f447464a0d"/>
-          <a:stretch xmlns:a="http://schemas.openxmlformats.org/drawingml/2006/main">
-            <a:fillRect l="0" t="0" r="0" b="0"/>
-          </a:stretch>
-        </p:blipFill>
-        <p:spPr>
-          <a:xfrm xmlns:a="http://schemas.openxmlformats.org/drawingml/2006/main">
-            <a:off x="5837077" y="2003867"/>
-            <a:ext cx="1774182" cy="2343874"/>
-          </a:xfrm>
-          <a:prstGeom xmlns:a="http://schemas.openxmlformats.org/drawingml/2006/main" prst="rect">
-            <a:avLst/>
-          </a:prstGeom>
-        </p:spPr>
-      </p:pic>
-    </p:spTree>
-    <p:extLst>
-      <p:ext uri="{BB962C8B-B14F-4D97-AF65-F5344CB8AC3E}">
-        <p14:creationId xmlns:p14="http://schemas.microsoft.com/office/powerpoint/2010/main" val="1388730527"/>
-      </p:ext>
-    </p:extLst>
-  </p:cSld>
-</p:sld>
-</file>
-
-<file path=ppt/slides/slide4.xml><?xml version="1.0" encoding="utf-8"?>
-<p:sld xmlns:p="http://schemas.openxmlformats.org/presentationml/2006/main">
-  <p:cSld>
-    <p:spTree>
-      <p:nvGrpSpPr>
-        <p:cNvPr id="1" name=""/>
-        <p:cNvGrpSpPr/>
-        <p:nvPr/>
-      </p:nvGrpSpPr>
-      <p:grpSpPr>
-        <a:xfrm xmlns:a="http://schemas.openxmlformats.org/drawingml/2006/main"/>
-      </p:grpSpPr>
-      <p:sp>
-        <p:nvSpPr>
-          <p:cNvPr id="245" name="Google Shape;245;p27">
-            <a:extLst xmlns:a="http://schemas.openxmlformats.org/drawingml/2006/main">
-              <a:ext uri="{FF2B5EF4-FFF2-40B4-BE49-F238E27FC236}">
-                <a16:creationId xmlns:a16="http://schemas.microsoft.com/office/drawing/2014/main" id="{078FF67B-AC65-4B17-85F2-986FBFF0E9F3}"/>
-              </a:ext>
-            </a:extLst>
-          </p:cNvPr>
-          <p:cNvSpPr>
-            <a:spLocks xmlns:a="http://schemas.openxmlformats.org/drawingml/2006/main" noGrp="1"/>
-          </p:cNvSpPr>
-          <p:nvPr/>
-        </p:nvSpPr>
-        <p:spPr>
           <a:xfrm xmlns:a="http://schemas.openxmlformats.org/drawingml/2006/main" rot="0">
-            <a:off x="4806625" y="1238875"/>
-            <a:ext cx="3617313" cy="3166995"/>
+            <a:off x="4506625" y="3349925"/>
+            <a:ext cx="3447300" cy="962400"/>
           </a:xfrm>
           <a:prstGeom xmlns:a="http://schemas.openxmlformats.org/drawingml/2006/main" prst="rect">
             <a:avLst/>
@@ -31955,10 +31710,10 @@
       </p:sp>
       <p:sp>
         <p:nvSpPr>
-          <p:cNvPr id="246" name="Google Shape;246;p27">
-            <a:extLst xmlns:a="http://schemas.openxmlformats.org/drawingml/2006/main">
-              <a:ext uri="{FF2B5EF4-FFF2-40B4-BE49-F238E27FC236}">
-                <a16:creationId xmlns:a16="http://schemas.microsoft.com/office/drawing/2014/main" id="{0AB8B828-D83F-44BE-B9E9-6F4E359C2939}"/>
+          <p:cNvPr id="207" name="Google Shape;207;p24">
+            <a:extLst xmlns:a="http://schemas.openxmlformats.org/drawingml/2006/main">
+              <a:ext uri="{FF2B5EF4-FFF2-40B4-BE49-F238E27FC236}">
+                <a16:creationId xmlns:a16="http://schemas.microsoft.com/office/drawing/2014/main" id="{2045E92C-FD95-4F72-B1D3-175AA5BC638E}"/>
               </a:ext>
             </a:extLst>
           </p:cNvPr>
@@ -31969,8 +31724,8 @@
         </p:nvSpPr>
         <p:spPr>
           <a:xfrm xmlns:a="http://schemas.openxmlformats.org/drawingml/2006/main" rot="0">
-            <a:off x="4806625" y="1238875"/>
-            <a:ext cx="3617313" cy="255307"/>
+            <a:off x="4506625" y="3349925"/>
+            <a:ext cx="3447300" cy="255300"/>
           </a:xfrm>
           <a:prstGeom xmlns:a="http://schemas.openxmlformats.org/drawingml/2006/main" prst="rect">
             <a:avLst/>
@@ -32007,164 +31762,126 @@
       </p:sp>
       <p:sp>
         <p:nvSpPr>
-          <p:cNvPr id="247" name="Google Shape;247;p27">
-            <a:extLst xmlns:a="http://schemas.openxmlformats.org/drawingml/2006/main">
-              <a:ext uri="{FF2B5EF4-FFF2-40B4-BE49-F238E27FC236}">
-                <a16:creationId xmlns:a16="http://schemas.microsoft.com/office/drawing/2014/main" id="{9EB3861D-F425-4CCC-A481-C702DBCFBFEA}"/>
-              </a:ext>
-            </a:extLst>
-          </p:cNvPr>
-          <p:cNvSpPr>
-            <a:spLocks xmlns:a="http://schemas.openxmlformats.org/drawingml/2006/main" noGrp="1"/>
-          </p:cNvSpPr>
-          <p:nvPr>
-            <p:ph type="title" idx="0"/>
-          </p:nvPr>
+          <p:cNvPr id="209" name="Google Shape;209;p24">
+            <a:extLst xmlns:a="http://schemas.openxmlformats.org/drawingml/2006/main">
+              <a:ext uri="{FF2B5EF4-FFF2-40B4-BE49-F238E27FC236}">
+                <a16:creationId xmlns:a16="http://schemas.microsoft.com/office/drawing/2014/main" id="{0AE4C7F2-E08C-4333-A7CB-F563247B91DD}"/>
+              </a:ext>
+            </a:extLst>
+          </p:cNvPr>
+          <p:cNvSpPr>
+            <a:spLocks xmlns:a="http://schemas.openxmlformats.org/drawingml/2006/main" noGrp="1"/>
+          </p:cNvSpPr>
+          <p:nvPr/>
+        </p:nvSpPr>
+        <p:spPr>
+          <a:xfrm xmlns:a="http://schemas.openxmlformats.org/drawingml/2006/main" rot="0">
+            <a:off x="6849418" y="1309987"/>
+            <a:ext cx="1864825" cy="1637031"/>
+          </a:xfrm>
+          <a:prstGeom xmlns:a="http://schemas.openxmlformats.org/drawingml/2006/main" prst="rect">
+            <a:avLst/>
+          </a:prstGeom>
+          <a:solidFill xmlns:a="http://schemas.openxmlformats.org/drawingml/2006/main">
+            <a:schemeClr val="lt1"/>
+          </a:solidFill>
+          <a:ln xmlns:a="http://schemas.openxmlformats.org/drawingml/2006/main" w="9525" cmpd="sng">
+            <a:solidFill>
+              <a:schemeClr val="dk1"/>
+            </a:solidFill>
+            <a:prstDash val="solid"/>
+            <a:headEnd type="none" w="sm" len="sm"/>
+            <a:tailEnd type="none" w="sm" len="sm"/>
+          </a:ln>
+        </p:spPr>
+        <p:txBody>
+          <a:bodyPr xmlns:a="http://schemas.openxmlformats.org/drawingml/2006/main" spcFirstLastPara="1" wrap="square" lIns="91425" tIns="91425" rIns="91425" bIns="91425" anchor="ctr">
+            <a:noAutofit/>
+          </a:bodyPr>
+          <a:lstStyle xmlns:a="http://schemas.openxmlformats.org/drawingml/2006/main"/>
+          <a:p xmlns:a="http://schemas.openxmlformats.org/drawingml/2006/main">
+            <a:pPr marL="0" indent="0" algn="l">
+              <a:spcBef>
+                <a:spcPts val="0"/>
+              </a:spcBef>
+              <a:spcAft>
+                <a:spcPts val="0"/>
+              </a:spcAft>
+              <a:buNone/>
+            </a:pPr>
+          </a:p>
+        </p:txBody>
+      </p:sp>
+      <p:sp>
+        <p:nvSpPr>
+          <p:cNvPr id="210" name="Google Shape;210;p24">
+            <a:extLst xmlns:a="http://schemas.openxmlformats.org/drawingml/2006/main">
+              <a:ext uri="{FF2B5EF4-FFF2-40B4-BE49-F238E27FC236}">
+                <a16:creationId xmlns:a16="http://schemas.microsoft.com/office/drawing/2014/main" id="{976E2B22-EB9F-4CC7-ABF6-B9854C645052}"/>
+              </a:ext>
+            </a:extLst>
+          </p:cNvPr>
+          <p:cNvSpPr>
+            <a:spLocks xmlns:a="http://schemas.openxmlformats.org/drawingml/2006/main" noGrp="1"/>
+          </p:cNvSpPr>
+          <p:nvPr/>
+        </p:nvSpPr>
+        <p:spPr>
+          <a:xfrm xmlns:a="http://schemas.openxmlformats.org/drawingml/2006/main" rot="0">
+            <a:off x="6849425" y="1309976"/>
+            <a:ext cx="1864825" cy="255307"/>
+          </a:xfrm>
+          <a:prstGeom xmlns:a="http://schemas.openxmlformats.org/drawingml/2006/main" prst="rect">
+            <a:avLst/>
+          </a:prstGeom>
+          <a:solidFill xmlns:a="http://schemas.openxmlformats.org/drawingml/2006/main">
+            <a:schemeClr val="lt1"/>
+          </a:solidFill>
+          <a:ln xmlns:a="http://schemas.openxmlformats.org/drawingml/2006/main" w="9525" cmpd="sng">
+            <a:solidFill>
+              <a:schemeClr val="dk1"/>
+            </a:solidFill>
+            <a:prstDash val="solid"/>
+            <a:headEnd type="none" w="sm" len="sm"/>
+            <a:tailEnd type="none" w="sm" len="sm"/>
+          </a:ln>
+        </p:spPr>
+        <p:txBody>
+          <a:bodyPr xmlns:a="http://schemas.openxmlformats.org/drawingml/2006/main" spcFirstLastPara="1" wrap="square" lIns="91425" tIns="91425" rIns="91425" bIns="91425" anchor="ctr">
+            <a:noAutofit/>
+          </a:bodyPr>
+          <a:lstStyle xmlns:a="http://schemas.openxmlformats.org/drawingml/2006/main"/>
+          <a:p xmlns:a="http://schemas.openxmlformats.org/drawingml/2006/main">
+            <a:pPr marL="0" indent="0" algn="l">
+              <a:spcBef>
+                <a:spcPts val="0"/>
+              </a:spcBef>
+              <a:spcAft>
+                <a:spcPts val="0"/>
+              </a:spcAft>
+              <a:buNone/>
+            </a:pPr>
+          </a:p>
+        </p:txBody>
+      </p:sp>
+      <p:sp>
+        <p:nvSpPr>
+          <p:cNvPr id="211" name="Google Shape;211;p24">
+            <a:extLst xmlns:a="http://schemas.openxmlformats.org/drawingml/2006/main">
+              <a:ext uri="{FF2B5EF4-FFF2-40B4-BE49-F238E27FC236}">
+                <a16:creationId xmlns:a16="http://schemas.microsoft.com/office/drawing/2014/main" id="{6775FBA8-32A6-4C5D-858A-FBE91F9F8C9B}"/>
+              </a:ext>
+            </a:extLst>
+          </p:cNvPr>
+          <p:cNvSpPr>
+            <a:spLocks xmlns:a="http://schemas.openxmlformats.org/drawingml/2006/main" noGrp="1"/>
+          </p:cNvSpPr>
+          <p:nvPr/>
         </p:nvSpPr>
         <p:spPr>
           <a:xfrm xmlns:a="http://schemas.openxmlformats.org/drawingml/2006/main">
-            <a:off x="720000" y="475500"/>
-            <a:ext cx="7704000" cy="557700"/>
-          </a:xfrm>
-          <a:prstGeom xmlns:a="http://schemas.openxmlformats.org/drawingml/2006/main" prst="rect">
-            <a:avLst/>
-          </a:prstGeom>
-        </p:spPr>
-        <p:txBody>
-          <a:bodyPr xmlns:a="http://schemas.openxmlformats.org/drawingml/2006/main" spcFirstLastPara="1" wrap="square" lIns="91425" tIns="91425" rIns="91425" bIns="91425" anchor="t">
-            <a:noAutofit/>
-          </a:bodyPr>
-          <a:lstStyle xmlns:a="http://schemas.openxmlformats.org/drawingml/2006/main"/>
-          <a:p xmlns:a="http://schemas.openxmlformats.org/drawingml/2006/main">
-            <a:pPr marL="0" indent="0" algn="l">
-              <a:spcBef>
-                <a:spcPts val="0"/>
-              </a:spcBef>
-              <a:spcAft>
-                <a:spcPts val="0"/>
-              </a:spcAft>
-              <a:buNone/>
-            </a:pPr>
-            <a:r>
-              <a:rPr>
-                <a:solidFill>
-                  <a:schemeClr val="lt2"/>
-                </a:solidFill>
-              </a:rPr>
-              <a:t>&lt;/ </a:t>
-            </a:r>
-            <a:r>
-              <a:t>Teachers</a:t>
-            </a:r>
-          </a:p>
-        </p:txBody>
-      </p:sp>
-      <p:sp>
-        <p:nvSpPr>
-          <p:cNvPr id="248" name="Google Shape;248;p27">
-            <a:extLst xmlns:a="http://schemas.openxmlformats.org/drawingml/2006/main">
-              <a:ext uri="{FF2B5EF4-FFF2-40B4-BE49-F238E27FC236}">
-                <a16:creationId xmlns:a16="http://schemas.microsoft.com/office/drawing/2014/main" id="{C2828842-806C-469F-96B4-A6C8D8BB2D9B}"/>
-              </a:ext>
-            </a:extLst>
-          </p:cNvPr>
-          <p:cNvSpPr>
-            <a:spLocks xmlns:a="http://schemas.openxmlformats.org/drawingml/2006/main" noGrp="1"/>
-          </p:cNvSpPr>
-          <p:nvPr>
-            <p:ph type="body" idx="1"/>
-          </p:nvPr>
-        </p:nvSpPr>
-        <p:spPr>
-          <a:xfrm xmlns:a="http://schemas.openxmlformats.org/drawingml/2006/main">
-            <a:off x="720000" y="1244275"/>
-            <a:ext cx="3692400" cy="2955600"/>
-          </a:xfrm>
-          <a:prstGeom xmlns:a="http://schemas.openxmlformats.org/drawingml/2006/main" prst="rect">
-            <a:avLst/>
-          </a:prstGeom>
-        </p:spPr>
-        <p:txBody>
-          <a:bodyPr xmlns:a="http://schemas.openxmlformats.org/drawingml/2006/main" spcFirstLastPara="1" wrap="square" lIns="91425" tIns="91425" rIns="91425" bIns="91425" anchor="t">
-            <a:noAutofit/>
-          </a:bodyPr>
-          <a:lstStyle xmlns:a="http://schemas.openxmlformats.org/drawingml/2006/main"/>
-          <a:p xmlns:a="http://schemas.openxmlformats.org/drawingml/2006/main">
-            <a:pPr>
-              <a:lnSpc>
-                <a:spcPct val="200000"/>
-              </a:lnSpc>
-              <a:buChar char="●"/>
-            </a:pPr>
-            <a:r>
-              <a:t>Lead Software engineer at Flagship Financial Group</a:t>
-            </a:r>
-          </a:p>
-          <a:p xmlns:a="http://schemas.openxmlformats.org/drawingml/2006/main">
-            <a:pPr marL="457200" indent="-304800" algn="l">
-              <a:lnSpc>
-                <a:spcPct val="200000"/>
-              </a:lnSpc>
-              <a:spcBef>
-                <a:spcPts val="0"/>
-              </a:spcBef>
-              <a:spcAft>
-                <a:spcPts val="0"/>
-              </a:spcAft>
-              <a:buChar char="●"/>
-            </a:pPr>
-            <a:r>
-              <a:t>Avid learner</a:t>
-            </a:r>
-          </a:p>
-          <a:p xmlns:a="http://schemas.openxmlformats.org/drawingml/2006/main">
-            <a:pPr marL="457200" indent="-304800" algn="l">
-              <a:lnSpc>
-                <a:spcPct val="200000"/>
-              </a:lnSpc>
-              <a:spcBef>
-                <a:spcPts val="0"/>
-              </a:spcBef>
-              <a:spcAft>
-                <a:spcPts val="0"/>
-              </a:spcAft>
-              <a:buChar char="●"/>
-            </a:pPr>
-            <a:r>
-              <a:t>Masters in Software Engineering</a:t>
-            </a:r>
-          </a:p>
-          <a:p xmlns:a="http://schemas.openxmlformats.org/drawingml/2006/main">
-            <a:pPr>
-              <a:lnSpc>
-                <a:spcPct val="200000"/>
-              </a:lnSpc>
-              <a:buChar char="●"/>
-            </a:pPr>
-            <a:r>
-              <a:t>FOSS contributor - Bitcoin, Large Language Models, OpenAI</a:t>
-            </a:r>
-          </a:p>
-        </p:txBody>
-      </p:sp>
-      <p:sp>
-        <p:nvSpPr>
-          <p:cNvPr id="249" name="Google Shape;249;p27">
-            <a:extLst xmlns:a="http://schemas.openxmlformats.org/drawingml/2006/main">
-              <a:ext uri="{FF2B5EF4-FFF2-40B4-BE49-F238E27FC236}">
-                <a16:creationId xmlns:a16="http://schemas.microsoft.com/office/drawing/2014/main" id="{5B015460-D499-48EF-99B0-8C7EF22FFA5F}"/>
-              </a:ext>
-            </a:extLst>
-          </p:cNvPr>
-          <p:cNvSpPr>
-            <a:spLocks xmlns:a="http://schemas.openxmlformats.org/drawingml/2006/main" noGrp="1"/>
-          </p:cNvSpPr>
-          <p:nvPr/>
-        </p:nvSpPr>
-        <p:spPr>
-          <a:xfrm xmlns:a="http://schemas.openxmlformats.org/drawingml/2006/main">
-            <a:off x="4950330" y="1581625"/>
-            <a:ext cx="1774800" cy="497400"/>
+            <a:off x="1084325" y="2012800"/>
+            <a:ext cx="702900" cy="606900"/>
           </a:xfrm>
           <a:prstGeom xmlns:a="http://schemas.openxmlformats.org/drawingml/2006/main" prst="rect">
             <a:avLst/>
@@ -32175,7 +31892,7 @@
           </a:ln>
         </p:spPr>
         <p:txBody>
-          <a:bodyPr xmlns:a="http://schemas.openxmlformats.org/drawingml/2006/main" spcFirstLastPara="1" wrap="square" lIns="91425" tIns="91425" rIns="91425" bIns="91425" anchor="t">
+          <a:bodyPr xmlns:a="http://schemas.openxmlformats.org/drawingml/2006/main" spcFirstLastPara="1" wrap="square" lIns="91425" tIns="91425" rIns="91425" bIns="91425" anchor="ctr">
             <a:noAutofit/>
           </a:bodyPr>
           <a:lstStyle xmlns:a="http://schemas.openxmlformats.org/drawingml/2006/main"/>
@@ -32193,583 +31910,36 @@
               <a:buNone/>
             </a:pPr>
             <a:r>
-              <a:rPr sz="2400">
+              <a:rPr sz="3600">
                 <a:solidFill>
-                  <a:schemeClr val="accent2"/>
+                  <a:schemeClr val="lt2"/>
                 </a:solidFill>
                 <a:latin typeface="Quantico"/>
                 <a:ea typeface="Quantico"/>
                 <a:cs typeface="Quantico"/>
               </a:rPr>
-              <a:t>Abhigya</a:t>
+              <a:t>&lt;/</a:t>
             </a:r>
-            <a:r>
-              <a:rPr sz="2400">
-                <a:solidFill>
-                  <a:schemeClr val="accent1"/>
-                </a:solidFill>
-                <a:latin typeface="Quantico"/>
-                <a:ea typeface="Quantico"/>
-                <a:cs typeface="Quantico"/>
-              </a:rPr>
-              <a:t>&gt;</a:t>
-            </a:r>
-          </a:p>
-        </p:txBody>
-      </p:sp>
-      <p:pic>
-        <p:nvPicPr>
-          <p:cNvPr id="256" name="Picture 1"/>
-          <p:cNvPicPr>
-            <a:picLocks xmlns:a="http://schemas.openxmlformats.org/drawingml/2006/main" noChangeAspect="1"/>
-          </p:cNvPicPr>
+          </a:p>
+        </p:txBody>
+      </p:sp>
+      <p:sp>
+        <p:nvSpPr>
+          <p:cNvPr id="212" name="Google Shape;212;p24">
+            <a:extLst xmlns:a="http://schemas.openxmlformats.org/drawingml/2006/main">
+              <a:ext uri="{FF2B5EF4-FFF2-40B4-BE49-F238E27FC236}">
+                <a16:creationId xmlns:a16="http://schemas.microsoft.com/office/drawing/2014/main" id="{E705969D-D0F1-46F7-91BE-19AAFA3FBB61}"/>
+              </a:ext>
+            </a:extLst>
+          </p:cNvPr>
+          <p:cNvSpPr>
+            <a:spLocks xmlns:a="http://schemas.openxmlformats.org/drawingml/2006/main" noGrp="1"/>
+          </p:cNvSpPr>
           <p:nvPr/>
-        </p:nvPicPr>
-        <p:blipFill>
-          <a:blip xmlns:r="http://schemas.openxmlformats.org/officeDocument/2006/relationships" xmlns:a="http://schemas.openxmlformats.org/drawingml/2006/main" r:embed="R99f16198d822401b"/>
-          <a:stretch xmlns:a="http://schemas.openxmlformats.org/drawingml/2006/main">
-            <a:fillRect l="0" t="0" r="0" b="0"/>
-          </a:stretch>
-        </p:blipFill>
+        </p:nvSpPr>
         <p:spPr>
           <a:xfrm xmlns:a="http://schemas.openxmlformats.org/drawingml/2006/main">
-            <a:off x="5852482" y="2035294"/>
-            <a:ext cx="1525798" cy="2286001"/>
-          </a:xfrm>
-          <a:prstGeom xmlns:a="http://schemas.openxmlformats.org/drawingml/2006/main" prst="rect">
-            <a:avLst/>
-          </a:prstGeom>
-        </p:spPr>
-      </p:pic>
-    </p:spTree>
-    <p:extLst>
-      <p:ext uri="{BB962C8B-B14F-4D97-AF65-F5344CB8AC3E}">
-        <p14:creationId xmlns:p14="http://schemas.microsoft.com/office/powerpoint/2010/main" val="671181561"/>
-      </p:ext>
-    </p:extLst>
-  </p:cSld>
-</p:sld>
-</file>
-
-<file path=ppt/slides/slide5.xml><?xml version="1.0" encoding="utf-8"?>
-<p:sld xmlns:p="http://schemas.openxmlformats.org/presentationml/2006/main">
-  <p:cSld>
-    <p:spTree>
-      <p:nvGrpSpPr>
-        <p:cNvPr id="1" name=""/>
-        <p:cNvGrpSpPr/>
-        <p:nvPr/>
-      </p:nvGrpSpPr>
-      <p:grpSpPr>
-        <a:xfrm xmlns:a="http://schemas.openxmlformats.org/drawingml/2006/main"/>
-      </p:grpSpPr>
-      <p:sp>
-        <p:nvSpPr>
-          <p:cNvPr id="255" name="Google Shape;255;p28">
-            <a:extLst xmlns:a="http://schemas.openxmlformats.org/drawingml/2006/main">
-              <a:ext uri="{FF2B5EF4-FFF2-40B4-BE49-F238E27FC236}">
-                <a16:creationId xmlns:a16="http://schemas.microsoft.com/office/drawing/2014/main" id="{DFAE69D3-6EB5-46F0-9E84-438E071040D7}"/>
-              </a:ext>
-            </a:extLst>
-          </p:cNvPr>
-          <p:cNvSpPr>
-            <a:spLocks xmlns:a="http://schemas.openxmlformats.org/drawingml/2006/main" noGrp="1"/>
-          </p:cNvSpPr>
-          <p:nvPr>
-            <p:ph type="title" idx="0"/>
-          </p:nvPr>
-        </p:nvSpPr>
-        <p:spPr>
-          <a:xfrm xmlns:a="http://schemas.openxmlformats.org/drawingml/2006/main">
-            <a:off x="719988" y="459128"/>
-            <a:ext cx="7704000" cy="572700"/>
-          </a:xfrm>
-          <a:prstGeom xmlns:a="http://schemas.openxmlformats.org/drawingml/2006/main" prst="rect">
-            <a:avLst/>
-          </a:prstGeom>
-        </p:spPr>
-        <p:txBody>
-          <a:bodyPr xmlns:a="http://schemas.openxmlformats.org/drawingml/2006/main" spcFirstLastPara="1" wrap="square" lIns="91425" tIns="91425" rIns="91425" bIns="91425" anchor="t">
-            <a:noAutofit/>
-          </a:bodyPr>
-          <a:lstStyle xmlns:a="http://schemas.openxmlformats.org/drawingml/2006/main"/>
-          <a:p xmlns:a="http://schemas.openxmlformats.org/drawingml/2006/main">
-            <a:pPr marL="0" indent="0" algn="l">
-              <a:spcBef>
-                <a:spcPts val="0"/>
-              </a:spcBef>
-              <a:spcAft>
-                <a:spcPts val="0"/>
-              </a:spcAft>
-              <a:buNone/>
-            </a:pPr>
-            <a:r>
-              <a:rPr>
-                <a:solidFill>
-                  <a:schemeClr val="lt2"/>
-                </a:solidFill>
-              </a:rPr>
-              <a:t>&lt;/ </a:t>
-            </a:r>
-            <a:r>
-              <a:t>Assistant Teachers</a:t>
-            </a:r>
-          </a:p>
-        </p:txBody>
-      </p:sp>
-      <p:sp>
-        <p:nvSpPr>
-          <p:cNvPr id="257" name="Google Shape;257;p28">
-            <a:extLst xmlns:a="http://schemas.openxmlformats.org/drawingml/2006/main">
-              <a:ext uri="{FF2B5EF4-FFF2-40B4-BE49-F238E27FC236}">
-                <a16:creationId xmlns:a16="http://schemas.microsoft.com/office/drawing/2014/main" id="{5EB2085F-F120-4A0D-89C1-DA3065F8E986}"/>
-              </a:ext>
-            </a:extLst>
-          </p:cNvPr>
-          <p:cNvSpPr>
-            <a:spLocks xmlns:a="http://schemas.openxmlformats.org/drawingml/2006/main" noGrp="1"/>
-          </p:cNvSpPr>
-          <p:nvPr>
-            <p:ph type="subTitle" idx="4"/>
-          </p:nvPr>
-        </p:nvSpPr>
-        <p:spPr>
-          <a:xfrm xmlns:a="http://schemas.openxmlformats.org/drawingml/2006/main">
-            <a:off x="3966881" y="4147200"/>
-            <a:ext cx="1216190" cy="421800"/>
-          </a:xfrm>
-          <a:prstGeom xmlns:a="http://schemas.openxmlformats.org/drawingml/2006/main" prst="rect">
-            <a:avLst/>
-          </a:prstGeom>
-        </p:spPr>
-        <p:txBody>
-          <a:bodyPr xmlns:a="http://schemas.openxmlformats.org/drawingml/2006/main" spcFirstLastPara="1" wrap="square" lIns="91425" tIns="91425" rIns="91425" bIns="91425" anchor="b">
-            <a:noAutofit/>
-          </a:bodyPr>
-          <a:lstStyle xmlns:a="http://schemas.openxmlformats.org/drawingml/2006/main"/>
-          <a:p xmlns:a="http://schemas.openxmlformats.org/drawingml/2006/main">
-            <a:pPr marL="0" indent="0">
-              <a:buNone/>
-            </a:pPr>
-            <a:r>
-              <a:t>Ishwari Ma'am</a:t>
-            </a:r>
-          </a:p>
-        </p:txBody>
-      </p:sp>
-      <p:sp>
-        <p:nvSpPr>
-          <p:cNvPr id="6" name="Google Shape;259;p28">
-            <a:extLst xmlns:a="http://schemas.openxmlformats.org/drawingml/2006/main">
-              <a:ext uri="{FF2B5EF4-FFF2-40B4-BE49-F238E27FC236}">
-                <a16:creationId xmlns:a16="http://schemas.microsoft.com/office/drawing/2014/main" id="{0086CC82-890E-B8CB-8ADF-1ACB6220A550}"/>
-              </a:ext>
-            </a:extLst>
-          </p:cNvPr>
-          <p:cNvSpPr>
-            <a:spLocks xmlns:a="http://schemas.openxmlformats.org/drawingml/2006/main" noGrp="1"/>
-          </p:cNvSpPr>
-          <p:nvPr/>
-        </p:nvSpPr>
-        <p:spPr>
-          <a:xfrm xmlns:a="http://schemas.openxmlformats.org/drawingml/2006/main">
-            <a:off x="3967698" y="3456700"/>
-            <a:ext cx="1216800" cy="642000"/>
-          </a:xfrm>
-          <a:prstGeom xmlns:a="http://schemas.openxmlformats.org/drawingml/2006/main" prst="rect">
-            <a:avLst/>
-          </a:prstGeom>
-          <a:noFill xmlns:a="http://schemas.openxmlformats.org/drawingml/2006/main"/>
-          <a:ln xmlns:a="http://schemas.openxmlformats.org/drawingml/2006/main">
-            <a:noFill/>
-          </a:ln>
-        </p:spPr>
-        <p:txBody>
-          <a:bodyPr xmlns:a="http://schemas.openxmlformats.org/drawingml/2006/main" spcFirstLastPara="1" wrap="square" lIns="91425" tIns="91425" rIns="91425" bIns="91425" anchor="t">
-            <a:noAutofit/>
-          </a:bodyPr>
-          <a:lstStyle xmlns:a="http://schemas.openxmlformats.org/drawingml/2006/main"/>
-          <a:p xmlns:a="http://schemas.openxmlformats.org/drawingml/2006/main">
-            <a:pPr marL="0" indent="0" algn="ctr">
-              <a:lnSpc>
-                <a:spcPct val="90000"/>
-              </a:lnSpc>
-              <a:spcBef>
-                <a:spcPts val="0"/>
-              </a:spcBef>
-              <a:spcAft>
-                <a:spcPts val="0"/>
-              </a:spcAft>
-              <a:buNone/>
-            </a:pPr>
-            <a:r>
-              <a:rPr sz="3600">
-                <a:solidFill>
-                  <a:schemeClr val="accent2"/>
-                </a:solidFill>
-              </a:rPr>
-              <a:t>/&gt;</a:t>
-            </a:r>
-            <a:r>
-              <a:rPr sz="3600">
-                <a:solidFill>
-                  <a:schemeClr val="dk1"/>
-                </a:solidFill>
-              </a:rPr>
-              <a:t> **</a:t>
-            </a:r>
-          </a:p>
-        </p:txBody>
-      </p:sp>
-      <p:pic>
-        <p:nvPicPr>
-          <p:cNvPr id="262" name="Picture 1"/>
-          <p:cNvPicPr>
-            <a:picLocks xmlns:a="http://schemas.openxmlformats.org/drawingml/2006/main" noChangeAspect="1"/>
-          </p:cNvPicPr>
-          <p:nvPr/>
-        </p:nvPicPr>
-        <p:blipFill>
-          <a:blip xmlns:r="http://schemas.openxmlformats.org/officeDocument/2006/relationships" xmlns:a="http://schemas.openxmlformats.org/drawingml/2006/main" r:embed="R28a3943f73514f90"/>
-          <a:stretch xmlns:a="http://schemas.openxmlformats.org/drawingml/2006/main">
-            <a:fillRect l="0" t="0" r="0" b="0"/>
-          </a:stretch>
-        </p:blipFill>
-        <p:spPr>
-          <a:xfrm xmlns:a="http://schemas.openxmlformats.org/drawingml/2006/main">
-            <a:off x="2964086" y="1035076"/>
-            <a:ext cx="2804916" cy="2487679"/>
-          </a:xfrm>
-          <a:prstGeom xmlns:a="http://schemas.openxmlformats.org/drawingml/2006/main" prst="rect">
-            <a:avLst/>
-          </a:prstGeom>
-        </p:spPr>
-      </p:pic>
-    </p:spTree>
-    <p:extLst>
-      <p:ext uri="{BB962C8B-B14F-4D97-AF65-F5344CB8AC3E}">
-        <p14:creationId xmlns:p14="http://schemas.microsoft.com/office/powerpoint/2010/main" val="414484600"/>
-      </p:ext>
-    </p:extLst>
-  </p:cSld>
-</p:sld>
-</file>
-
-<file path=ppt/slides/slide6.xml><?xml version="1.0" encoding="utf-8"?>
-<p:sld xmlns:p="http://schemas.openxmlformats.org/presentationml/2006/main">
-  <p:cSld>
-    <p:spTree>
-      <p:nvGrpSpPr>
-        <p:cNvPr id="1" name=""/>
-        <p:cNvGrpSpPr/>
-        <p:nvPr/>
-      </p:nvGrpSpPr>
-      <p:grpSpPr>
-        <a:xfrm xmlns:a="http://schemas.openxmlformats.org/drawingml/2006/main"/>
-      </p:grpSpPr>
-      <p:sp>
-        <p:nvSpPr>
-          <p:cNvPr id="302" name="Google Shape;302;p30">
-            <a:extLst xmlns:a="http://schemas.openxmlformats.org/drawingml/2006/main">
-              <a:ext uri="{FF2B5EF4-FFF2-40B4-BE49-F238E27FC236}">
-                <a16:creationId xmlns:a16="http://schemas.microsoft.com/office/drawing/2014/main" id="{069093DC-4E13-45FD-972F-EFACFB762C06}"/>
-              </a:ext>
-            </a:extLst>
-          </p:cNvPr>
-          <p:cNvSpPr>
-            <a:spLocks xmlns:a="http://schemas.openxmlformats.org/drawingml/2006/main" noGrp="1"/>
-          </p:cNvSpPr>
-          <p:nvPr>
-            <p:ph type="subTitle" idx="3"/>
-          </p:nvPr>
-        </p:nvSpPr>
-        <p:spPr>
-          <a:xfrm xmlns:a="http://schemas.openxmlformats.org/drawingml/2006/main">
-            <a:off x="1252403" y="2857500"/>
-            <a:ext cx="4190700" cy="384600"/>
-          </a:xfrm>
-          <a:prstGeom xmlns:a="http://schemas.openxmlformats.org/drawingml/2006/main" prst="rect">
-            <a:avLst/>
-          </a:prstGeom>
-        </p:spPr>
-        <p:txBody>
-          <a:bodyPr xmlns:a="http://schemas.openxmlformats.org/drawingml/2006/main" spcFirstLastPara="1" wrap="square" lIns="91425" tIns="91425" rIns="91425" bIns="91425" anchor="t">
-            <a:noAutofit/>
-          </a:bodyPr>
-          <a:lstStyle xmlns:a="http://schemas.openxmlformats.org/drawingml/2006/main"/>
-          <a:p xmlns:a="http://schemas.openxmlformats.org/drawingml/2006/main">
-            <a:pPr marL="0" indent="0" algn="l">
-              <a:spcBef>
-                <a:spcPts val="0"/>
-              </a:spcBef>
-              <a:spcAft>
-                <a:spcPts val="0"/>
-              </a:spcAft>
-              <a:buNone/>
-            </a:pPr>
-            <a:r>
-              <a:t>Teams, Kahoot, and breakout rooms</a:t>
-            </a:r>
-          </a:p>
-        </p:txBody>
-      </p:sp>
-      <p:sp>
-        <p:nvSpPr>
-          <p:cNvPr id="303" name="Google Shape;303;p30">
-            <a:extLst xmlns:a="http://schemas.openxmlformats.org/drawingml/2006/main">
-              <a:ext uri="{FF2B5EF4-FFF2-40B4-BE49-F238E27FC236}">
-                <a16:creationId xmlns:a16="http://schemas.microsoft.com/office/drawing/2014/main" id="{22068794-3762-46E6-9FE4-6EE3ED61B7DC}"/>
-              </a:ext>
-            </a:extLst>
-          </p:cNvPr>
-          <p:cNvSpPr>
-            <a:spLocks xmlns:a="http://schemas.openxmlformats.org/drawingml/2006/main" noGrp="1"/>
-          </p:cNvSpPr>
-          <p:nvPr>
-            <p:ph type="title" idx="0"/>
-          </p:nvPr>
-        </p:nvSpPr>
-        <p:spPr>
-          <a:xfrm xmlns:a="http://schemas.openxmlformats.org/drawingml/2006/main">
-            <a:off x="1252403" y="1022536"/>
-            <a:ext cx="4190700" cy="733500"/>
-          </a:xfrm>
-          <a:prstGeom xmlns:a="http://schemas.openxmlformats.org/drawingml/2006/main" prst="rect">
-            <a:avLst/>
-          </a:prstGeom>
-        </p:spPr>
-        <p:txBody>
-          <a:bodyPr xmlns:a="http://schemas.openxmlformats.org/drawingml/2006/main" spcFirstLastPara="1" wrap="square" lIns="91425" tIns="91425" rIns="91425" bIns="91425" anchor="b">
-            <a:noAutofit/>
-          </a:bodyPr>
-          <a:lstStyle xmlns:a="http://schemas.openxmlformats.org/drawingml/2006/main"/>
-          <a:p xmlns:a="http://schemas.openxmlformats.org/drawingml/2006/main">
-            <a:pPr marL="0" indent="0" algn="l">
-              <a:spcBef>
-                <a:spcPts val="0"/>
-              </a:spcBef>
-              <a:spcAft>
-                <a:spcPts val="0"/>
-              </a:spcAft>
-              <a:buNone/>
-            </a:pPr>
-            <a:r>
-              <a:rPr>
-                <a:solidFill>
-                  <a:schemeClr val="accent2"/>
-                </a:solidFill>
-              </a:rPr>
-              <a:t>{Meet}</a:t>
-            </a:r>
-          </a:p>
-        </p:txBody>
-      </p:sp>
-      <p:sp>
-        <p:nvSpPr>
-          <p:cNvPr id="304" name="Google Shape;304;p30">
-            <a:extLst xmlns:a="http://schemas.openxmlformats.org/drawingml/2006/main">
-              <a:ext uri="{FF2B5EF4-FFF2-40B4-BE49-F238E27FC236}">
-                <a16:creationId xmlns:a16="http://schemas.microsoft.com/office/drawing/2014/main" id="{4B083477-9C13-4431-934E-B2803526A8A3}"/>
-              </a:ext>
-            </a:extLst>
-          </p:cNvPr>
-          <p:cNvSpPr>
-            <a:spLocks xmlns:a="http://schemas.openxmlformats.org/drawingml/2006/main" noGrp="1"/>
-          </p:cNvSpPr>
-          <p:nvPr>
-            <p:ph type="subTitle" idx="1"/>
-          </p:nvPr>
-        </p:nvSpPr>
-        <p:spPr>
-          <a:xfrm xmlns:a="http://schemas.openxmlformats.org/drawingml/2006/main">
-            <a:off x="1252403" y="1790700"/>
-            <a:ext cx="4190700" cy="384600"/>
-          </a:xfrm>
-          <a:prstGeom xmlns:a="http://schemas.openxmlformats.org/drawingml/2006/main" prst="rect">
-            <a:avLst/>
-          </a:prstGeom>
-        </p:spPr>
-        <p:txBody>
-          <a:bodyPr xmlns:a="http://schemas.openxmlformats.org/drawingml/2006/main" spcFirstLastPara="1" wrap="square" lIns="91425" tIns="91425" rIns="91425" bIns="91425" anchor="t">
-            <a:noAutofit/>
-          </a:bodyPr>
-          <a:lstStyle xmlns:a="http://schemas.openxmlformats.org/drawingml/2006/main"/>
-          <a:p xmlns:a="http://schemas.openxmlformats.org/drawingml/2006/main">
-            <a:pPr marL="0" indent="0" algn="l">
-              <a:spcBef>
-                <a:spcPts val="0"/>
-              </a:spcBef>
-              <a:spcAft>
-                <a:spcPts val="0"/>
-              </a:spcAft>
-              <a:buNone/>
-            </a:pPr>
-            <a:r>
-              <a:t>Learn who is here</a:t>
-            </a:r>
-          </a:p>
-        </p:txBody>
-      </p:sp>
-      <p:sp>
-        <p:nvSpPr>
-          <p:cNvPr id="305" name="Google Shape;305;p30">
-            <a:extLst xmlns:a="http://schemas.openxmlformats.org/drawingml/2006/main">
-              <a:ext uri="{FF2B5EF4-FFF2-40B4-BE49-F238E27FC236}">
-                <a16:creationId xmlns:a16="http://schemas.microsoft.com/office/drawing/2014/main" id="{8FB84568-B635-4D96-BECD-DDAB98281B56}"/>
-              </a:ext>
-            </a:extLst>
-          </p:cNvPr>
-          <p:cNvSpPr>
-            <a:spLocks xmlns:a="http://schemas.openxmlformats.org/drawingml/2006/main" noGrp="1"/>
-          </p:cNvSpPr>
-          <p:nvPr>
-            <p:ph type="title" idx="2"/>
-          </p:nvPr>
-        </p:nvSpPr>
-        <p:spPr>
-          <a:xfrm xmlns:a="http://schemas.openxmlformats.org/drawingml/2006/main">
-            <a:off x="1252403" y="2080661"/>
-            <a:ext cx="4190700" cy="733500"/>
-          </a:xfrm>
-          <a:prstGeom xmlns:a="http://schemas.openxmlformats.org/drawingml/2006/main" prst="rect">
-            <a:avLst/>
-          </a:prstGeom>
-        </p:spPr>
-        <p:txBody>
-          <a:bodyPr xmlns:a="http://schemas.openxmlformats.org/drawingml/2006/main" spcFirstLastPara="1" wrap="square" lIns="91425" tIns="91425" rIns="91425" bIns="91425" anchor="b">
-            <a:noAutofit/>
-          </a:bodyPr>
-          <a:lstStyle xmlns:a="http://schemas.openxmlformats.org/drawingml/2006/main"/>
-          <a:p xmlns:a="http://schemas.openxmlformats.org/drawingml/2006/main">
-            <a:pPr marL="0" indent="0" algn="l">
-              <a:spcBef>
-                <a:spcPts val="0"/>
-              </a:spcBef>
-              <a:spcAft>
-                <a:spcPts val="0"/>
-              </a:spcAft>
-              <a:buNone/>
-            </a:pPr>
-            <a:r>
-              <a:t>{Explore}</a:t>
-            </a:r>
-          </a:p>
-        </p:txBody>
-      </p:sp>
-      <p:sp>
-        <p:nvSpPr>
-          <p:cNvPr id="306" name="Google Shape;306;p30">
-            <a:extLst xmlns:a="http://schemas.openxmlformats.org/drawingml/2006/main">
-              <a:ext uri="{FF2B5EF4-FFF2-40B4-BE49-F238E27FC236}">
-                <a16:creationId xmlns:a16="http://schemas.microsoft.com/office/drawing/2014/main" id="{39D7BB6A-B939-4CF0-8868-1E889722D03D}"/>
-              </a:ext>
-            </a:extLst>
-          </p:cNvPr>
-          <p:cNvSpPr>
-            <a:spLocks xmlns:a="http://schemas.openxmlformats.org/drawingml/2006/main" noGrp="1"/>
-          </p:cNvSpPr>
-          <p:nvPr>
-            <p:ph type="title" idx="4"/>
-          </p:nvPr>
-        </p:nvSpPr>
-        <p:spPr>
-          <a:xfrm xmlns:a="http://schemas.openxmlformats.org/drawingml/2006/main">
-            <a:off x="1252404" y="3138786"/>
-            <a:ext cx="4190700" cy="733500"/>
-          </a:xfrm>
-          <a:prstGeom xmlns:a="http://schemas.openxmlformats.org/drawingml/2006/main" prst="rect">
-            <a:avLst/>
-          </a:prstGeom>
-        </p:spPr>
-        <p:txBody>
-          <a:bodyPr xmlns:a="http://schemas.openxmlformats.org/drawingml/2006/main" spcFirstLastPara="1" wrap="square" lIns="91425" tIns="91425" rIns="91425" bIns="91425" anchor="b">
-            <a:noAutofit/>
-          </a:bodyPr>
-          <a:lstStyle xmlns:a="http://schemas.openxmlformats.org/drawingml/2006/main"/>
-          <a:p xmlns:a="http://schemas.openxmlformats.org/drawingml/2006/main">
-            <a:pPr marL="0" indent="0" algn="l">
-              <a:spcBef>
-                <a:spcPts val="0"/>
-              </a:spcBef>
-              <a:spcAft>
-                <a:spcPts val="0"/>
-              </a:spcAft>
-              <a:buNone/>
-            </a:pPr>
-            <a:r>
-              <a:rPr>
-                <a:solidFill>
-                  <a:schemeClr val="lt2"/>
-                </a:solidFill>
-              </a:rPr>
-              <a:t>{Create}</a:t>
-            </a:r>
-          </a:p>
-        </p:txBody>
-      </p:sp>
-      <p:sp>
-        <p:nvSpPr>
-          <p:cNvPr id="307" name="Google Shape;307;p30">
-            <a:extLst xmlns:a="http://schemas.openxmlformats.org/drawingml/2006/main">
-              <a:ext uri="{FF2B5EF4-FFF2-40B4-BE49-F238E27FC236}">
-                <a16:creationId xmlns:a16="http://schemas.microsoft.com/office/drawing/2014/main" id="{B1468CD5-D03B-4903-8BF7-9F0C7E81B677}"/>
-              </a:ext>
-            </a:extLst>
-          </p:cNvPr>
-          <p:cNvSpPr>
-            <a:spLocks xmlns:a="http://schemas.openxmlformats.org/drawingml/2006/main" noGrp="1"/>
-          </p:cNvSpPr>
-          <p:nvPr>
-            <p:ph type="subTitle" idx="5"/>
-          </p:nvPr>
-        </p:nvSpPr>
-        <p:spPr>
-          <a:xfrm xmlns:a="http://schemas.openxmlformats.org/drawingml/2006/main">
-            <a:off x="1252404" y="3914775"/>
-            <a:ext cx="4190700" cy="384600"/>
-          </a:xfrm>
-          <a:prstGeom xmlns:a="http://schemas.openxmlformats.org/drawingml/2006/main" prst="rect">
-            <a:avLst/>
-          </a:prstGeom>
-        </p:spPr>
-        <p:txBody>
-          <a:bodyPr xmlns:a="http://schemas.openxmlformats.org/drawingml/2006/main" spcFirstLastPara="1" wrap="square" lIns="91425" tIns="91425" rIns="91425" bIns="91425" anchor="t">
-            <a:noAutofit/>
-          </a:bodyPr>
-          <a:lstStyle xmlns:a="http://schemas.openxmlformats.org/drawingml/2006/main"/>
-          <a:p xmlns:a="http://schemas.openxmlformats.org/drawingml/2006/main">
-            <a:pPr marL="0" indent="0" algn="l">
-              <a:spcBef>
-                <a:spcPts val="0"/>
-              </a:spcBef>
-              <a:spcAft>
-                <a:spcPts val="0"/>
-              </a:spcAft>
-              <a:buNone/>
-            </a:pPr>
-            <a:r>
-              <a:t>Make music with code</a:t>
-            </a:r>
-          </a:p>
-        </p:txBody>
-      </p:sp>
-      <p:sp>
-        <p:nvSpPr>
-          <p:cNvPr id="308" name="Google Shape;308;p30">
-            <a:extLst xmlns:a="http://schemas.openxmlformats.org/drawingml/2006/main">
-              <a:ext uri="{FF2B5EF4-FFF2-40B4-BE49-F238E27FC236}">
-                <a16:creationId xmlns:a16="http://schemas.microsoft.com/office/drawing/2014/main" id="{B78C6BA0-ED32-48DC-85F2-B4E00038ECB9}"/>
-              </a:ext>
-            </a:extLst>
-          </p:cNvPr>
-          <p:cNvSpPr>
-            <a:spLocks xmlns:a="http://schemas.openxmlformats.org/drawingml/2006/main" noGrp="1"/>
-          </p:cNvSpPr>
-          <p:nvPr/>
-        </p:nvSpPr>
-        <p:spPr>
-          <a:xfrm xmlns:a="http://schemas.openxmlformats.org/drawingml/2006/main">
-            <a:off x="7721100" y="3868300"/>
+            <a:off x="5878825" y="1974375"/>
             <a:ext cx="702900" cy="606900"/>
           </a:xfrm>
           <a:prstGeom xmlns:a="http://schemas.openxmlformats.org/drawingml/2006/main" prst="rect">
@@ -32814,10 +31984,10 @@
       </p:sp>
       <p:sp>
         <p:nvSpPr>
-          <p:cNvPr id="310" name="Google Shape;310;p30">
-            <a:extLst xmlns:a="http://schemas.openxmlformats.org/drawingml/2006/main">
-              <a:ext uri="{FF2B5EF4-FFF2-40B4-BE49-F238E27FC236}">
-                <a16:creationId xmlns:a16="http://schemas.microsoft.com/office/drawing/2014/main" id="{09B6DAF8-8302-4623-897D-26165EA51BCA}"/>
+          <p:cNvPr id="213" name="Google Shape;213;p24">
+            <a:extLst xmlns:a="http://schemas.openxmlformats.org/drawingml/2006/main">
+              <a:ext uri="{FF2B5EF4-FFF2-40B4-BE49-F238E27FC236}">
+                <a16:creationId xmlns:a16="http://schemas.microsoft.com/office/drawing/2014/main" id="{FBDE6D5E-521E-4730-84D0-2601494F8F61}"/>
               </a:ext>
             </a:extLst>
           </p:cNvPr>
@@ -32827,112 +31997,8 @@
           <p:nvPr/>
         </p:nvSpPr>
         <p:spPr>
-          <a:xfrm xmlns:a="http://schemas.openxmlformats.org/drawingml/2006/main" rot="0">
-            <a:off x="5827600" y="697350"/>
-            <a:ext cx="2119744" cy="1127400"/>
-          </a:xfrm>
-          <a:prstGeom xmlns:a="http://schemas.openxmlformats.org/drawingml/2006/main" prst="rect">
-            <a:avLst/>
-          </a:prstGeom>
-          <a:solidFill xmlns:a="http://schemas.openxmlformats.org/drawingml/2006/main">
-            <a:schemeClr val="lt1"/>
-          </a:solidFill>
-          <a:ln xmlns:a="http://schemas.openxmlformats.org/drawingml/2006/main" w="9525" cmpd="sng">
-            <a:solidFill>
-              <a:schemeClr val="dk1"/>
-            </a:solidFill>
-            <a:prstDash val="solid"/>
-            <a:headEnd type="none" w="sm" len="sm"/>
-            <a:tailEnd type="none" w="sm" len="sm"/>
-          </a:ln>
-        </p:spPr>
-        <p:txBody>
-          <a:bodyPr xmlns:a="http://schemas.openxmlformats.org/drawingml/2006/main" spcFirstLastPara="1" wrap="square" lIns="91425" tIns="91425" rIns="91425" bIns="91425" anchor="ctr">
-            <a:noAutofit/>
-          </a:bodyPr>
-          <a:lstStyle xmlns:a="http://schemas.openxmlformats.org/drawingml/2006/main"/>
-          <a:p xmlns:a="http://schemas.openxmlformats.org/drawingml/2006/main">
-            <a:pPr marL="0" indent="0" algn="l">
-              <a:spcBef>
-                <a:spcPts val="0"/>
-              </a:spcBef>
-              <a:spcAft>
-                <a:spcPts val="0"/>
-              </a:spcAft>
-              <a:buNone/>
-            </a:pPr>
-          </a:p>
-        </p:txBody>
-      </p:sp>
-      <p:sp>
-        <p:nvSpPr>
-          <p:cNvPr id="311" name="Google Shape;311;p30">
-            <a:extLst xmlns:a="http://schemas.openxmlformats.org/drawingml/2006/main">
-              <a:ext uri="{FF2B5EF4-FFF2-40B4-BE49-F238E27FC236}">
-                <a16:creationId xmlns:a16="http://schemas.microsoft.com/office/drawing/2014/main" id="{742D31F6-3221-48C9-8E30-90EE2ECD8DA0}"/>
-              </a:ext>
-            </a:extLst>
-          </p:cNvPr>
-          <p:cNvSpPr>
-            <a:spLocks xmlns:a="http://schemas.openxmlformats.org/drawingml/2006/main" noGrp="1"/>
-          </p:cNvSpPr>
-          <p:nvPr/>
-        </p:nvSpPr>
-        <p:spPr>
-          <a:xfrm xmlns:a="http://schemas.openxmlformats.org/drawingml/2006/main" rot="0">
-            <a:off x="5827603" y="697350"/>
-            <a:ext cx="2119744" cy="255300"/>
-          </a:xfrm>
-          <a:prstGeom xmlns:a="http://schemas.openxmlformats.org/drawingml/2006/main" prst="rect">
-            <a:avLst/>
-          </a:prstGeom>
-          <a:solidFill xmlns:a="http://schemas.openxmlformats.org/drawingml/2006/main">
-            <a:schemeClr val="lt1"/>
-          </a:solidFill>
-          <a:ln xmlns:a="http://schemas.openxmlformats.org/drawingml/2006/main" w="9525" cmpd="sng">
-            <a:solidFill>
-              <a:schemeClr val="dk1"/>
-            </a:solidFill>
-            <a:prstDash val="solid"/>
-            <a:headEnd type="none" w="sm" len="sm"/>
-            <a:tailEnd type="none" w="sm" len="sm"/>
-          </a:ln>
-        </p:spPr>
-        <p:txBody>
-          <a:bodyPr xmlns:a="http://schemas.openxmlformats.org/drawingml/2006/main" spcFirstLastPara="1" wrap="square" lIns="91425" tIns="91425" rIns="91425" bIns="91425" anchor="ctr">
-            <a:noAutofit/>
-          </a:bodyPr>
-          <a:lstStyle xmlns:a="http://schemas.openxmlformats.org/drawingml/2006/main"/>
-          <a:p xmlns:a="http://schemas.openxmlformats.org/drawingml/2006/main">
-            <a:pPr marL="0" indent="0" algn="l">
-              <a:spcBef>
-                <a:spcPts val="0"/>
-              </a:spcBef>
-              <a:spcAft>
-                <a:spcPts val="0"/>
-              </a:spcAft>
-              <a:buNone/>
-            </a:pPr>
-          </a:p>
-        </p:txBody>
-      </p:sp>
-      <p:sp>
-        <p:nvSpPr>
-          <p:cNvPr id="312" name="Google Shape;312;p30">
-            <a:extLst xmlns:a="http://schemas.openxmlformats.org/drawingml/2006/main">
-              <a:ext uri="{FF2B5EF4-FFF2-40B4-BE49-F238E27FC236}">
-                <a16:creationId xmlns:a16="http://schemas.microsoft.com/office/drawing/2014/main" id="{1197A6D5-E686-4D9D-B748-4B534E594BA4}"/>
-              </a:ext>
-            </a:extLst>
-          </p:cNvPr>
-          <p:cNvSpPr>
-            <a:spLocks xmlns:a="http://schemas.openxmlformats.org/drawingml/2006/main" noGrp="1"/>
-          </p:cNvSpPr>
-          <p:nvPr/>
-        </p:nvSpPr>
-        <p:spPr>
           <a:xfrm xmlns:a="http://schemas.openxmlformats.org/drawingml/2006/main">
-            <a:off x="6279082" y="1016750"/>
+            <a:off x="7198457" y="1873600"/>
             <a:ext cx="1216800" cy="746100"/>
           </a:xfrm>
           <a:prstGeom xmlns:a="http://schemas.openxmlformats.org/drawingml/2006/main" prst="rect">
@@ -32990,10 +32056,103 @@
       </p:sp>
       <p:sp>
         <p:nvSpPr>
-          <p:cNvPr id="313" name="slide-heading-marker-6">
-            <a:extLst xmlns:a="http://schemas.openxmlformats.org/drawingml/2006/main">
-              <a:ext uri="{FF2B5EF4-FFF2-40B4-BE49-F238E27FC236}">
-                <a16:creationId xmlns:a16="http://schemas.microsoft.com/office/drawing/2014/main" id="{2C098171-21A5-4CC8-BC03-EC51286BE3DD}"/>
+          <p:cNvPr id="214" name="Google Shape;214;p24">
+            <a:extLst xmlns:a="http://schemas.openxmlformats.org/drawingml/2006/main">
+              <a:ext uri="{FF2B5EF4-FFF2-40B4-BE49-F238E27FC236}">
+                <a16:creationId xmlns:a16="http://schemas.microsoft.com/office/drawing/2014/main" id="{5EE6EEBD-605C-4EFD-803C-779B4C388CA3}"/>
+              </a:ext>
+            </a:extLst>
+          </p:cNvPr>
+          <p:cNvSpPr>
+            <a:spLocks xmlns:a="http://schemas.openxmlformats.org/drawingml/2006/main" noGrp="1"/>
+          </p:cNvSpPr>
+          <p:nvPr>
+            <p:ph type="ctrTitle" idx="0"/>
+          </p:nvPr>
+        </p:nvSpPr>
+        <p:spPr>
+          <a:xfrm xmlns:a="http://schemas.openxmlformats.org/drawingml/2006/main">
+            <a:off x="1875450" y="1974375"/>
+            <a:ext cx="4148400" cy="746100"/>
+          </a:xfrm>
+          <a:prstGeom xmlns:a="http://schemas.openxmlformats.org/drawingml/2006/main" prst="rect">
+            <a:avLst/>
+          </a:prstGeom>
+        </p:spPr>
+        <p:txBody>
+          <a:bodyPr xmlns:a="http://schemas.openxmlformats.org/drawingml/2006/main" spcFirstLastPara="1" wrap="square" lIns="91425" tIns="91425" rIns="91425" bIns="91425" anchor="t">
+            <a:noAutofit/>
+          </a:bodyPr>
+          <a:lstStyle xmlns:a="http://schemas.openxmlformats.org/drawingml/2006/main"/>
+          <a:p xmlns:a="http://schemas.openxmlformats.org/drawingml/2006/main">
+            <a:pPr marL="0" indent="0" algn="l">
+              <a:spcBef>
+                <a:spcPts val="0"/>
+              </a:spcBef>
+              <a:spcAft>
+                <a:spcPts val="0"/>
+              </a:spcAft>
+              <a:buNone/>
+            </a:pPr>
+            <a:r>
+              <a:t>Great first day!</a:t>
+            </a:r>
+          </a:p>
+        </p:txBody>
+      </p:sp>
+      <p:sp>
+        <p:nvSpPr>
+          <p:cNvPr id="215" name="Google Shape;215;p24">
+            <a:extLst xmlns:a="http://schemas.openxmlformats.org/drawingml/2006/main">
+              <a:ext uri="{FF2B5EF4-FFF2-40B4-BE49-F238E27FC236}">
+                <a16:creationId xmlns:a16="http://schemas.microsoft.com/office/drawing/2014/main" id="{561222E6-86D3-4D0D-888F-084113278088}"/>
+              </a:ext>
+            </a:extLst>
+          </p:cNvPr>
+          <p:cNvSpPr>
+            <a:spLocks xmlns:a="http://schemas.openxmlformats.org/drawingml/2006/main" noGrp="1"/>
+          </p:cNvSpPr>
+          <p:nvPr>
+            <p:ph type="subTitle" idx="1"/>
+          </p:nvPr>
+        </p:nvSpPr>
+        <p:spPr>
+          <a:xfrm xmlns:a="http://schemas.openxmlformats.org/drawingml/2006/main">
+            <a:off x="4751650" y="3680600"/>
+            <a:ext cx="3043800" cy="528600"/>
+          </a:xfrm>
+          <a:prstGeom xmlns:a="http://schemas.openxmlformats.org/drawingml/2006/main" prst="rect">
+            <a:avLst/>
+          </a:prstGeom>
+        </p:spPr>
+        <p:txBody>
+          <a:bodyPr xmlns:a="http://schemas.openxmlformats.org/drawingml/2006/main" spcFirstLastPara="1" wrap="square" lIns="91425" tIns="91425" rIns="91425" bIns="91425" anchor="ctr">
+            <a:noAutofit/>
+          </a:bodyPr>
+          <a:lstStyle xmlns:a="http://schemas.openxmlformats.org/drawingml/2006/main"/>
+          <a:p xmlns:a="http://schemas.openxmlformats.org/drawingml/2006/main">
+            <a:pPr marL="0" indent="0" algn="l">
+              <a:spcBef>
+                <a:spcPts val="0"/>
+              </a:spcBef>
+              <a:spcAft>
+                <a:spcPts val="0"/>
+              </a:spcAft>
+              <a:buNone/>
+            </a:pPr>
+            <a:r>
+              <a:rPr sz="1400"/>
+              <a:t>See you next Saturday.</a:t>
+            </a:r>
+          </a:p>
+        </p:txBody>
+      </p:sp>
+      <p:sp>
+        <p:nvSpPr>
+          <p:cNvPr id="216" name="Google Shape;216;p24">
+            <a:extLst xmlns:a="http://schemas.openxmlformats.org/drawingml/2006/main">
+              <a:ext uri="{FF2B5EF4-FFF2-40B4-BE49-F238E27FC236}">
+                <a16:creationId xmlns:a16="http://schemas.microsoft.com/office/drawing/2014/main" id="{3CB2B6C1-3795-43B8-9621-54C5BB056D62}"/>
               </a:ext>
             </a:extLst>
           </p:cNvPr>
@@ -33004,8 +32163,1110 @@
         </p:nvSpPr>
         <p:spPr>
           <a:xfrm xmlns:a="http://schemas.openxmlformats.org/drawingml/2006/main">
-            <a:off x="742950" y="447675"/>
-            <a:ext cx="476250" cy="323850"/>
+            <a:off x="536125" y="117311"/>
+            <a:ext cx="1999500" cy="180300"/>
+          </a:xfrm>
+          <a:prstGeom xmlns:a="http://schemas.openxmlformats.org/drawingml/2006/main" prst="rect">
+            <a:avLst/>
+          </a:prstGeom>
+          <a:noFill xmlns:a="http://schemas.openxmlformats.org/drawingml/2006/main"/>
+          <a:ln xmlns:a="http://schemas.openxmlformats.org/drawingml/2006/main">
+            <a:noFill/>
+          </a:ln>
+        </p:spPr>
+        <p:txBody>
+          <a:bodyPr xmlns:a="http://schemas.openxmlformats.org/drawingml/2006/main" spcFirstLastPara="1" wrap="square" lIns="91425" tIns="91425" rIns="91425" bIns="91425" anchor="ctr">
+            <a:noAutofit/>
+          </a:bodyPr>
+          <a:lstStyle xmlns:a="http://schemas.openxmlformats.org/drawingml/2006/main"/>
+          <a:p xmlns:a="http://schemas.openxmlformats.org/drawingml/2006/main">
+            <a:pPr marL="0" indent="0" algn="l">
+              <a:spcBef>
+                <a:spcPts val="0"/>
+              </a:spcBef>
+              <a:spcAft>
+                <a:spcPts val="0"/>
+              </a:spcAft>
+              <a:buNone/>
+            </a:pPr>
+            <a:r>
+              <a:rPr sz="1000">
+                <a:solidFill>
+                  <a:schemeClr val="dk1"/>
+                </a:solidFill>
+                <a:latin typeface="Source Code Pro"/>
+                <a:ea typeface="Source Code Pro"/>
+                <a:cs typeface="Source Code Pro"/>
+              </a:rPr>
+              <a:t>Classroom Presentation</a:t>
+            </a:r>
+          </a:p>
+        </p:txBody>
+      </p:sp>
+      <p:sp>
+        <p:nvSpPr>
+          <p:cNvPr id="217" name="Google Shape;217;p24">
+            <a:extLst xmlns:a="http://schemas.openxmlformats.org/drawingml/2006/main">
+              <a:ext uri="{FF2B5EF4-FFF2-40B4-BE49-F238E27FC236}">
+                <a16:creationId xmlns:a16="http://schemas.microsoft.com/office/drawing/2014/main" id="{1BCE298B-ADAB-4360-9E4B-303C95BFACCE}"/>
+              </a:ext>
+            </a:extLst>
+          </p:cNvPr>
+          <p:cNvSpPr>
+            <a:spLocks xmlns:a="http://schemas.openxmlformats.org/drawingml/2006/main" noGrp="1"/>
+          </p:cNvSpPr>
+          <p:nvPr/>
+        </p:nvSpPr>
+        <p:spPr>
+          <a:xfrm xmlns:a="http://schemas.openxmlformats.org/drawingml/2006/main">
+            <a:off x="3730325" y="117311"/>
+            <a:ext cx="1999500" cy="180300"/>
+          </a:xfrm>
+          <a:prstGeom xmlns:a="http://schemas.openxmlformats.org/drawingml/2006/main" prst="rect">
+            <a:avLst/>
+          </a:prstGeom>
+          <a:noFill xmlns:a="http://schemas.openxmlformats.org/drawingml/2006/main"/>
+          <a:ln xmlns:a="http://schemas.openxmlformats.org/drawingml/2006/main">
+            <a:noFill/>
+          </a:ln>
+        </p:spPr>
+        <p:txBody>
+          <a:bodyPr xmlns:a="http://schemas.openxmlformats.org/drawingml/2006/main" spcFirstLastPara="1" wrap="square" lIns="91425" tIns="91425" rIns="91425" bIns="91425" anchor="ctr">
+            <a:noAutofit/>
+          </a:bodyPr>
+          <a:lstStyle xmlns:a="http://schemas.openxmlformats.org/drawingml/2006/main"/>
+          <a:p xmlns:a="http://schemas.openxmlformats.org/drawingml/2006/main">
+            <a:pPr marL="0" indent="0" algn="l">
+              <a:spcBef>
+                <a:spcPts val="0"/>
+              </a:spcBef>
+              <a:spcAft>
+                <a:spcPts val="0"/>
+              </a:spcAft>
+              <a:buNone/>
+            </a:pPr>
+            <a:r>
+              <a:rPr sz="1000">
+                <a:solidFill>
+                  <a:schemeClr val="dk1"/>
+                </a:solidFill>
+                <a:latin typeface="Source Code Pro"/>
+                <a:ea typeface="Source Code Pro"/>
+                <a:cs typeface="Source Code Pro"/>
+              </a:rPr>
+              <a:t>. . .</a:t>
+            </a:r>
+          </a:p>
+        </p:txBody>
+      </p:sp>
+    </p:spTree>
+    <p:extLst>
+      <p:ext uri="{BB962C8B-B14F-4D97-AF65-F5344CB8AC3E}">
+        <p14:creationId xmlns:p14="http://schemas.microsoft.com/office/powerpoint/2010/main" val="592295941"/>
+      </p:ext>
+    </p:extLst>
+  </p:cSld>
+</p:sld>
+</file>
+
+<file path=ppt/slides/slide3.xml><?xml version="1.0" encoding="utf-8"?>
+<p:sld xmlns:p="http://schemas.openxmlformats.org/presentationml/2006/main">
+  <p:cSld>
+    <p:spTree>
+      <p:nvGrpSpPr>
+        <p:cNvPr id="1" name=""/>
+        <p:cNvGrpSpPr/>
+        <p:nvPr/>
+      </p:nvGrpSpPr>
+      <p:grpSpPr>
+        <a:xfrm xmlns:a="http://schemas.openxmlformats.org/drawingml/2006/main"/>
+      </p:grpSpPr>
+      <p:sp>
+        <p:nvSpPr>
+          <p:cNvPr id="234" name="Google Shape;234;p26">
+            <a:extLst xmlns:a="http://schemas.openxmlformats.org/drawingml/2006/main">
+              <a:ext uri="{FF2B5EF4-FFF2-40B4-BE49-F238E27FC236}">
+                <a16:creationId xmlns:a16="http://schemas.microsoft.com/office/drawing/2014/main" id="{B14A69C7-AC5F-41D7-B561-C6582CB336CF}"/>
+              </a:ext>
+            </a:extLst>
+          </p:cNvPr>
+          <p:cNvSpPr>
+            <a:spLocks xmlns:a="http://schemas.openxmlformats.org/drawingml/2006/main" noGrp="1"/>
+          </p:cNvSpPr>
+          <p:nvPr/>
+        </p:nvSpPr>
+        <p:spPr>
+          <a:xfrm xmlns:a="http://schemas.openxmlformats.org/drawingml/2006/main" rot="0">
+            <a:off x="4806625" y="1238875"/>
+            <a:ext cx="3617313" cy="3166995"/>
+          </a:xfrm>
+          <a:prstGeom xmlns:a="http://schemas.openxmlformats.org/drawingml/2006/main" prst="rect">
+            <a:avLst/>
+          </a:prstGeom>
+          <a:solidFill xmlns:a="http://schemas.openxmlformats.org/drawingml/2006/main">
+            <a:schemeClr val="lt1"/>
+          </a:solidFill>
+          <a:ln xmlns:a="http://schemas.openxmlformats.org/drawingml/2006/main" w="9525" cmpd="sng">
+            <a:solidFill>
+              <a:schemeClr val="dk1"/>
+            </a:solidFill>
+            <a:prstDash val="solid"/>
+            <a:headEnd type="none" w="sm" len="sm"/>
+            <a:tailEnd type="none" w="sm" len="sm"/>
+          </a:ln>
+        </p:spPr>
+        <p:txBody>
+          <a:bodyPr xmlns:a="http://schemas.openxmlformats.org/drawingml/2006/main" spcFirstLastPara="1" wrap="square" lIns="91425" tIns="91425" rIns="91425" bIns="91425" anchor="ctr">
+            <a:noAutofit/>
+          </a:bodyPr>
+          <a:lstStyle xmlns:a="http://schemas.openxmlformats.org/drawingml/2006/main"/>
+          <a:p xmlns:a="http://schemas.openxmlformats.org/drawingml/2006/main">
+            <a:pPr marL="0" indent="0" algn="l">
+              <a:spcBef>
+                <a:spcPts val="0"/>
+              </a:spcBef>
+              <a:spcAft>
+                <a:spcPts val="0"/>
+              </a:spcAft>
+              <a:buNone/>
+            </a:pPr>
+          </a:p>
+        </p:txBody>
+      </p:sp>
+      <p:sp>
+        <p:nvSpPr>
+          <p:cNvPr id="235" name="Google Shape;235;p26">
+            <a:extLst xmlns:a="http://schemas.openxmlformats.org/drawingml/2006/main">
+              <a:ext uri="{FF2B5EF4-FFF2-40B4-BE49-F238E27FC236}">
+                <a16:creationId xmlns:a16="http://schemas.microsoft.com/office/drawing/2014/main" id="{80820967-DED6-4709-8827-0E65E307CB1E}"/>
+              </a:ext>
+            </a:extLst>
+          </p:cNvPr>
+          <p:cNvSpPr>
+            <a:spLocks xmlns:a="http://schemas.openxmlformats.org/drawingml/2006/main" noGrp="1"/>
+          </p:cNvSpPr>
+          <p:nvPr/>
+        </p:nvSpPr>
+        <p:spPr>
+          <a:xfrm xmlns:a="http://schemas.openxmlformats.org/drawingml/2006/main" rot="0">
+            <a:off x="4806625" y="1238875"/>
+            <a:ext cx="3617313" cy="255307"/>
+          </a:xfrm>
+          <a:prstGeom xmlns:a="http://schemas.openxmlformats.org/drawingml/2006/main" prst="rect">
+            <a:avLst/>
+          </a:prstGeom>
+          <a:solidFill xmlns:a="http://schemas.openxmlformats.org/drawingml/2006/main">
+            <a:schemeClr val="lt1"/>
+          </a:solidFill>
+          <a:ln xmlns:a="http://schemas.openxmlformats.org/drawingml/2006/main" w="9525" cmpd="sng">
+            <a:solidFill>
+              <a:schemeClr val="dk1"/>
+            </a:solidFill>
+            <a:prstDash val="solid"/>
+            <a:headEnd type="none" w="sm" len="sm"/>
+            <a:tailEnd type="none" w="sm" len="sm"/>
+          </a:ln>
+        </p:spPr>
+        <p:txBody>
+          <a:bodyPr xmlns:a="http://schemas.openxmlformats.org/drawingml/2006/main" spcFirstLastPara="1" wrap="square" lIns="91425" tIns="91425" rIns="91425" bIns="91425" anchor="ctr">
+            <a:noAutofit/>
+          </a:bodyPr>
+          <a:lstStyle xmlns:a="http://schemas.openxmlformats.org/drawingml/2006/main"/>
+          <a:p xmlns:a="http://schemas.openxmlformats.org/drawingml/2006/main">
+            <a:pPr marL="0" indent="0" algn="l">
+              <a:spcBef>
+                <a:spcPts val="0"/>
+              </a:spcBef>
+              <a:spcAft>
+                <a:spcPts val="0"/>
+              </a:spcAft>
+              <a:buNone/>
+            </a:pPr>
+          </a:p>
+        </p:txBody>
+      </p:sp>
+      <p:sp>
+        <p:nvSpPr>
+          <p:cNvPr id="236" name="Google Shape;236;p26">
+            <a:extLst xmlns:a="http://schemas.openxmlformats.org/drawingml/2006/main">
+              <a:ext uri="{FF2B5EF4-FFF2-40B4-BE49-F238E27FC236}">
+                <a16:creationId xmlns:a16="http://schemas.microsoft.com/office/drawing/2014/main" id="{0E1D9519-FD68-41BB-BE8C-59D8D4D03E12}"/>
+              </a:ext>
+            </a:extLst>
+          </p:cNvPr>
+          <p:cNvSpPr>
+            <a:spLocks xmlns:a="http://schemas.openxmlformats.org/drawingml/2006/main" noGrp="1"/>
+          </p:cNvSpPr>
+          <p:nvPr>
+            <p:ph type="title" idx="0"/>
+          </p:nvPr>
+        </p:nvSpPr>
+        <p:spPr>
+          <a:xfrm xmlns:a="http://schemas.openxmlformats.org/drawingml/2006/main">
+            <a:off x="720000" y="475500"/>
+            <a:ext cx="7704000" cy="557700"/>
+          </a:xfrm>
+          <a:prstGeom xmlns:a="http://schemas.openxmlformats.org/drawingml/2006/main" prst="rect">
+            <a:avLst/>
+          </a:prstGeom>
+        </p:spPr>
+        <p:txBody>
+          <a:bodyPr xmlns:a="http://schemas.openxmlformats.org/drawingml/2006/main" spcFirstLastPara="1" wrap="square" lIns="91425" tIns="91425" rIns="91425" bIns="91425" anchor="t">
+            <a:noAutofit/>
+          </a:bodyPr>
+          <a:lstStyle xmlns:a="http://schemas.openxmlformats.org/drawingml/2006/main"/>
+          <a:p xmlns:a="http://schemas.openxmlformats.org/drawingml/2006/main">
+            <a:pPr marL="0" indent="0" algn="l">
+              <a:spcBef>
+                <a:spcPts val="0"/>
+              </a:spcBef>
+              <a:spcAft>
+                <a:spcPts val="0"/>
+              </a:spcAft>
+              <a:buNone/>
+            </a:pPr>
+            <a:r>
+              <a:rPr>
+                <a:solidFill>
+                  <a:schemeClr val="lt2"/>
+                </a:solidFill>
+              </a:rPr>
+              <a:t>&lt;/ </a:t>
+            </a:r>
+            <a:r>
+              <a:t>Teachers</a:t>
+            </a:r>
+          </a:p>
+        </p:txBody>
+      </p:sp>
+      <p:sp>
+        <p:nvSpPr>
+          <p:cNvPr id="237" name="Google Shape;237;p26">
+            <a:extLst xmlns:a="http://schemas.openxmlformats.org/drawingml/2006/main">
+              <a:ext uri="{FF2B5EF4-FFF2-40B4-BE49-F238E27FC236}">
+                <a16:creationId xmlns:a16="http://schemas.microsoft.com/office/drawing/2014/main" id="{9B80CB32-94BD-40A6-A573-1C0337506855}"/>
+              </a:ext>
+            </a:extLst>
+          </p:cNvPr>
+          <p:cNvSpPr>
+            <a:spLocks xmlns:a="http://schemas.openxmlformats.org/drawingml/2006/main" noGrp="1"/>
+          </p:cNvSpPr>
+          <p:nvPr>
+            <p:ph type="body" idx="1"/>
+          </p:nvPr>
+        </p:nvSpPr>
+        <p:spPr>
+          <a:xfrm xmlns:a="http://schemas.openxmlformats.org/drawingml/2006/main">
+            <a:off x="724536" y="1153561"/>
+            <a:ext cx="3692400" cy="2955600"/>
+          </a:xfrm>
+          <a:prstGeom xmlns:a="http://schemas.openxmlformats.org/drawingml/2006/main" prst="rect">
+            <a:avLst/>
+          </a:prstGeom>
+        </p:spPr>
+        <p:txBody>
+          <a:bodyPr xmlns:a="http://schemas.openxmlformats.org/drawingml/2006/main" spcFirstLastPara="1" wrap="square" lIns="91425" tIns="91425" rIns="91425" bIns="91425" anchor="t">
+            <a:noAutofit/>
+          </a:bodyPr>
+          <a:lstStyle xmlns:a="http://schemas.openxmlformats.org/drawingml/2006/main"/>
+          <a:p xmlns:a="http://schemas.openxmlformats.org/drawingml/2006/main">
+            <a:pPr>
+              <a:lnSpc>
+                <a:spcPct val="200000"/>
+              </a:lnSpc>
+              <a:buChar char="●"/>
+            </a:pPr>
+            <a:r>
+              <a:t>Bachelors &amp; Masters in    Computer Science</a:t>
+            </a:r>
+          </a:p>
+          <a:p xmlns:a="http://schemas.openxmlformats.org/drawingml/2006/main">
+            <a:pPr>
+              <a:lnSpc>
+                <a:spcPct val="200000"/>
+              </a:lnSpc>
+              <a:buChar char="●"/>
+            </a:pPr>
+            <a:r>
+              <a:t>Software Engineer Intern at </a:t>
+            </a:r>
+            <a:r>
+              <a:t>Northrop Grumman and BNY</a:t>
+            </a:r>
+          </a:p>
+          <a:p xmlns:a="http://schemas.openxmlformats.org/drawingml/2006/main">
+            <a:pPr>
+              <a:lnSpc>
+                <a:spcPct val="200000"/>
+              </a:lnSpc>
+              <a:buChar char="●"/>
+            </a:pPr>
+            <a:r>
+              <a:t>Software Engineer at Google​</a:t>
+            </a:r>
+          </a:p>
+        </p:txBody>
+      </p:sp>
+      <p:sp>
+        <p:nvSpPr>
+          <p:cNvPr id="238" name="Google Shape;238;p26">
+            <a:extLst xmlns:a="http://schemas.openxmlformats.org/drawingml/2006/main">
+              <a:ext uri="{FF2B5EF4-FFF2-40B4-BE49-F238E27FC236}">
+                <a16:creationId xmlns:a16="http://schemas.microsoft.com/office/drawing/2014/main" id="{3C70EC75-6F40-46BC-9CE8-36EAC24FF65B}"/>
+              </a:ext>
+            </a:extLst>
+          </p:cNvPr>
+          <p:cNvSpPr>
+            <a:spLocks xmlns:a="http://schemas.openxmlformats.org/drawingml/2006/main" noGrp="1"/>
+          </p:cNvSpPr>
+          <p:nvPr/>
+        </p:nvSpPr>
+        <p:spPr>
+          <a:xfrm xmlns:a="http://schemas.openxmlformats.org/drawingml/2006/main">
+            <a:off x="4950330" y="1581625"/>
+            <a:ext cx="1774800" cy="497400"/>
+          </a:xfrm>
+          <a:prstGeom xmlns:a="http://schemas.openxmlformats.org/drawingml/2006/main" prst="rect">
+            <a:avLst/>
+          </a:prstGeom>
+          <a:noFill xmlns:a="http://schemas.openxmlformats.org/drawingml/2006/main"/>
+          <a:ln xmlns:a="http://schemas.openxmlformats.org/drawingml/2006/main">
+            <a:noFill/>
+          </a:ln>
+        </p:spPr>
+        <p:txBody>
+          <a:bodyPr xmlns:a="http://schemas.openxmlformats.org/drawingml/2006/main" spcFirstLastPara="1" wrap="square" lIns="91425" tIns="91425" rIns="91425" bIns="91425" anchor="t">
+            <a:noAutofit/>
+          </a:bodyPr>
+          <a:lstStyle xmlns:a="http://schemas.openxmlformats.org/drawingml/2006/main"/>
+          <a:p xmlns:a="http://schemas.openxmlformats.org/drawingml/2006/main">
+            <a:pPr marL="0" indent="0" algn="l">
+              <a:lnSpc>
+                <a:spcPct val="90000"/>
+              </a:lnSpc>
+              <a:spcBef>
+                <a:spcPts val="0"/>
+              </a:spcBef>
+              <a:spcAft>
+                <a:spcPts val="0"/>
+              </a:spcAft>
+              <a:buNone/>
+            </a:pPr>
+            <a:r>
+              <a:rPr sz="2400">
+                <a:solidFill>
+                  <a:schemeClr val="accent2"/>
+                </a:solidFill>
+                <a:latin typeface="Quantico"/>
+                <a:ea typeface="Quantico"/>
+                <a:cs typeface="Quantico"/>
+              </a:rPr>
+              <a:t>Sanskar</a:t>
+            </a:r>
+            <a:r>
+              <a:rPr sz="2400">
+                <a:solidFill>
+                  <a:schemeClr val="accent1"/>
+                </a:solidFill>
+                <a:latin typeface="Quantico"/>
+                <a:ea typeface="Quantico"/>
+                <a:cs typeface="Quantico"/>
+              </a:rPr>
+              <a:t>&gt;</a:t>
+            </a:r>
+          </a:p>
+        </p:txBody>
+      </p:sp>
+      <p:pic>
+        <p:nvPicPr>
+          <p:cNvPr id="245" name="Picture 2"/>
+          <p:cNvPicPr>
+            <a:picLocks xmlns:a="http://schemas.openxmlformats.org/drawingml/2006/main" noChangeAspect="1"/>
+          </p:cNvPicPr>
+          <p:nvPr/>
+        </p:nvPicPr>
+        <p:blipFill>
+          <a:blip xmlns:r="http://schemas.openxmlformats.org/officeDocument/2006/relationships" xmlns:a="http://schemas.openxmlformats.org/drawingml/2006/main" r:embed="Rf0dce5e522b84e55"/>
+          <a:stretch xmlns:a="http://schemas.openxmlformats.org/drawingml/2006/main">
+            <a:fillRect l="0" t="0" r="0" b="0"/>
+          </a:stretch>
+        </p:blipFill>
+        <p:spPr>
+          <a:xfrm xmlns:a="http://schemas.openxmlformats.org/drawingml/2006/main">
+            <a:off x="5837077" y="2003867"/>
+            <a:ext cx="1774182" cy="2343874"/>
+          </a:xfrm>
+          <a:prstGeom xmlns:a="http://schemas.openxmlformats.org/drawingml/2006/main" prst="rect">
+            <a:avLst/>
+          </a:prstGeom>
+        </p:spPr>
+      </p:pic>
+    </p:spTree>
+    <p:extLst>
+      <p:ext uri="{BB962C8B-B14F-4D97-AF65-F5344CB8AC3E}">
+        <p14:creationId xmlns:p14="http://schemas.microsoft.com/office/powerpoint/2010/main" val="1388730527"/>
+      </p:ext>
+    </p:extLst>
+  </p:cSld>
+</p:sld>
+</file>
+
+<file path=ppt/slides/slide4.xml><?xml version="1.0" encoding="utf-8"?>
+<p:sld xmlns:p="http://schemas.openxmlformats.org/presentationml/2006/main">
+  <p:cSld>
+    <p:spTree>
+      <p:nvGrpSpPr>
+        <p:cNvPr id="1" name=""/>
+        <p:cNvGrpSpPr/>
+        <p:nvPr/>
+      </p:nvGrpSpPr>
+      <p:grpSpPr>
+        <a:xfrm xmlns:a="http://schemas.openxmlformats.org/drawingml/2006/main"/>
+      </p:grpSpPr>
+      <p:sp>
+        <p:nvSpPr>
+          <p:cNvPr id="245" name="Google Shape;245;p27">
+            <a:extLst xmlns:a="http://schemas.openxmlformats.org/drawingml/2006/main">
+              <a:ext uri="{FF2B5EF4-FFF2-40B4-BE49-F238E27FC236}">
+                <a16:creationId xmlns:a16="http://schemas.microsoft.com/office/drawing/2014/main" id="{078FF67B-AC65-4B17-85F2-986FBFF0E9F3}"/>
+              </a:ext>
+            </a:extLst>
+          </p:cNvPr>
+          <p:cNvSpPr>
+            <a:spLocks xmlns:a="http://schemas.openxmlformats.org/drawingml/2006/main" noGrp="1"/>
+          </p:cNvSpPr>
+          <p:nvPr/>
+        </p:nvSpPr>
+        <p:spPr>
+          <a:xfrm xmlns:a="http://schemas.openxmlformats.org/drawingml/2006/main" rot="0">
+            <a:off x="4806625" y="1238875"/>
+            <a:ext cx="3617313" cy="3166995"/>
+          </a:xfrm>
+          <a:prstGeom xmlns:a="http://schemas.openxmlformats.org/drawingml/2006/main" prst="rect">
+            <a:avLst/>
+          </a:prstGeom>
+          <a:solidFill xmlns:a="http://schemas.openxmlformats.org/drawingml/2006/main">
+            <a:schemeClr val="lt1"/>
+          </a:solidFill>
+          <a:ln xmlns:a="http://schemas.openxmlformats.org/drawingml/2006/main" w="9525" cmpd="sng">
+            <a:solidFill>
+              <a:schemeClr val="dk1"/>
+            </a:solidFill>
+            <a:prstDash val="solid"/>
+            <a:headEnd type="none" w="sm" len="sm"/>
+            <a:tailEnd type="none" w="sm" len="sm"/>
+          </a:ln>
+        </p:spPr>
+        <p:txBody>
+          <a:bodyPr xmlns:a="http://schemas.openxmlformats.org/drawingml/2006/main" spcFirstLastPara="1" wrap="square" lIns="91425" tIns="91425" rIns="91425" bIns="91425" anchor="ctr">
+            <a:noAutofit/>
+          </a:bodyPr>
+          <a:lstStyle xmlns:a="http://schemas.openxmlformats.org/drawingml/2006/main"/>
+          <a:p xmlns:a="http://schemas.openxmlformats.org/drawingml/2006/main">
+            <a:pPr marL="0" indent="0" algn="l">
+              <a:spcBef>
+                <a:spcPts val="0"/>
+              </a:spcBef>
+              <a:spcAft>
+                <a:spcPts val="0"/>
+              </a:spcAft>
+              <a:buNone/>
+            </a:pPr>
+          </a:p>
+        </p:txBody>
+      </p:sp>
+      <p:sp>
+        <p:nvSpPr>
+          <p:cNvPr id="246" name="Google Shape;246;p27">
+            <a:extLst xmlns:a="http://schemas.openxmlformats.org/drawingml/2006/main">
+              <a:ext uri="{FF2B5EF4-FFF2-40B4-BE49-F238E27FC236}">
+                <a16:creationId xmlns:a16="http://schemas.microsoft.com/office/drawing/2014/main" id="{0AB8B828-D83F-44BE-B9E9-6F4E359C2939}"/>
+              </a:ext>
+            </a:extLst>
+          </p:cNvPr>
+          <p:cNvSpPr>
+            <a:spLocks xmlns:a="http://schemas.openxmlformats.org/drawingml/2006/main" noGrp="1"/>
+          </p:cNvSpPr>
+          <p:nvPr/>
+        </p:nvSpPr>
+        <p:spPr>
+          <a:xfrm xmlns:a="http://schemas.openxmlformats.org/drawingml/2006/main" rot="0">
+            <a:off x="4806625" y="1238875"/>
+            <a:ext cx="3617313" cy="255307"/>
+          </a:xfrm>
+          <a:prstGeom xmlns:a="http://schemas.openxmlformats.org/drawingml/2006/main" prst="rect">
+            <a:avLst/>
+          </a:prstGeom>
+          <a:solidFill xmlns:a="http://schemas.openxmlformats.org/drawingml/2006/main">
+            <a:schemeClr val="lt1"/>
+          </a:solidFill>
+          <a:ln xmlns:a="http://schemas.openxmlformats.org/drawingml/2006/main" w="9525" cmpd="sng">
+            <a:solidFill>
+              <a:schemeClr val="dk1"/>
+            </a:solidFill>
+            <a:prstDash val="solid"/>
+            <a:headEnd type="none" w="sm" len="sm"/>
+            <a:tailEnd type="none" w="sm" len="sm"/>
+          </a:ln>
+        </p:spPr>
+        <p:txBody>
+          <a:bodyPr xmlns:a="http://schemas.openxmlformats.org/drawingml/2006/main" spcFirstLastPara="1" wrap="square" lIns="91425" tIns="91425" rIns="91425" bIns="91425" anchor="ctr">
+            <a:noAutofit/>
+          </a:bodyPr>
+          <a:lstStyle xmlns:a="http://schemas.openxmlformats.org/drawingml/2006/main"/>
+          <a:p xmlns:a="http://schemas.openxmlformats.org/drawingml/2006/main">
+            <a:pPr marL="0" indent="0" algn="l">
+              <a:spcBef>
+                <a:spcPts val="0"/>
+              </a:spcBef>
+              <a:spcAft>
+                <a:spcPts val="0"/>
+              </a:spcAft>
+              <a:buNone/>
+            </a:pPr>
+          </a:p>
+        </p:txBody>
+      </p:sp>
+      <p:sp>
+        <p:nvSpPr>
+          <p:cNvPr id="247" name="Google Shape;247;p27">
+            <a:extLst xmlns:a="http://schemas.openxmlformats.org/drawingml/2006/main">
+              <a:ext uri="{FF2B5EF4-FFF2-40B4-BE49-F238E27FC236}">
+                <a16:creationId xmlns:a16="http://schemas.microsoft.com/office/drawing/2014/main" id="{9EB3861D-F425-4CCC-A481-C702DBCFBFEA}"/>
+              </a:ext>
+            </a:extLst>
+          </p:cNvPr>
+          <p:cNvSpPr>
+            <a:spLocks xmlns:a="http://schemas.openxmlformats.org/drawingml/2006/main" noGrp="1"/>
+          </p:cNvSpPr>
+          <p:nvPr>
+            <p:ph type="title" idx="0"/>
+          </p:nvPr>
+        </p:nvSpPr>
+        <p:spPr>
+          <a:xfrm xmlns:a="http://schemas.openxmlformats.org/drawingml/2006/main">
+            <a:off x="720000" y="475500"/>
+            <a:ext cx="7704000" cy="557700"/>
+          </a:xfrm>
+          <a:prstGeom xmlns:a="http://schemas.openxmlformats.org/drawingml/2006/main" prst="rect">
+            <a:avLst/>
+          </a:prstGeom>
+        </p:spPr>
+        <p:txBody>
+          <a:bodyPr xmlns:a="http://schemas.openxmlformats.org/drawingml/2006/main" spcFirstLastPara="1" wrap="square" lIns="91425" tIns="91425" rIns="91425" bIns="91425" anchor="t">
+            <a:noAutofit/>
+          </a:bodyPr>
+          <a:lstStyle xmlns:a="http://schemas.openxmlformats.org/drawingml/2006/main"/>
+          <a:p xmlns:a="http://schemas.openxmlformats.org/drawingml/2006/main">
+            <a:pPr marL="0" indent="0" algn="l">
+              <a:spcBef>
+                <a:spcPts val="0"/>
+              </a:spcBef>
+              <a:spcAft>
+                <a:spcPts val="0"/>
+              </a:spcAft>
+              <a:buNone/>
+            </a:pPr>
+            <a:r>
+              <a:rPr>
+                <a:solidFill>
+                  <a:schemeClr val="lt2"/>
+                </a:solidFill>
+              </a:rPr>
+              <a:t>&lt;/ </a:t>
+            </a:r>
+            <a:r>
+              <a:t>Teachers</a:t>
+            </a:r>
+          </a:p>
+        </p:txBody>
+      </p:sp>
+      <p:sp>
+        <p:nvSpPr>
+          <p:cNvPr id="248" name="Google Shape;248;p27">
+            <a:extLst xmlns:a="http://schemas.openxmlformats.org/drawingml/2006/main">
+              <a:ext uri="{FF2B5EF4-FFF2-40B4-BE49-F238E27FC236}">
+                <a16:creationId xmlns:a16="http://schemas.microsoft.com/office/drawing/2014/main" id="{C2828842-806C-469F-96B4-A6C8D8BB2D9B}"/>
+              </a:ext>
+            </a:extLst>
+          </p:cNvPr>
+          <p:cNvSpPr>
+            <a:spLocks xmlns:a="http://schemas.openxmlformats.org/drawingml/2006/main" noGrp="1"/>
+          </p:cNvSpPr>
+          <p:nvPr>
+            <p:ph type="body" idx="1"/>
+          </p:nvPr>
+        </p:nvSpPr>
+        <p:spPr>
+          <a:xfrm xmlns:a="http://schemas.openxmlformats.org/drawingml/2006/main">
+            <a:off x="720000" y="1244275"/>
+            <a:ext cx="3692400" cy="2955600"/>
+          </a:xfrm>
+          <a:prstGeom xmlns:a="http://schemas.openxmlformats.org/drawingml/2006/main" prst="rect">
+            <a:avLst/>
+          </a:prstGeom>
+        </p:spPr>
+        <p:txBody>
+          <a:bodyPr xmlns:a="http://schemas.openxmlformats.org/drawingml/2006/main" spcFirstLastPara="1" wrap="square" lIns="91425" tIns="91425" rIns="91425" bIns="91425" anchor="t">
+            <a:noAutofit/>
+          </a:bodyPr>
+          <a:lstStyle xmlns:a="http://schemas.openxmlformats.org/drawingml/2006/main"/>
+          <a:p xmlns:a="http://schemas.openxmlformats.org/drawingml/2006/main">
+            <a:pPr>
+              <a:lnSpc>
+                <a:spcPct val="200000"/>
+              </a:lnSpc>
+              <a:buChar char="●"/>
+            </a:pPr>
+            <a:r>
+              <a:t>Lead Software engineer at Flagship Financial Group</a:t>
+            </a:r>
+          </a:p>
+          <a:p xmlns:a="http://schemas.openxmlformats.org/drawingml/2006/main">
+            <a:pPr marL="457200" indent="-304800" algn="l">
+              <a:lnSpc>
+                <a:spcPct val="200000"/>
+              </a:lnSpc>
+              <a:spcBef>
+                <a:spcPts val="0"/>
+              </a:spcBef>
+              <a:spcAft>
+                <a:spcPts val="0"/>
+              </a:spcAft>
+              <a:buChar char="●"/>
+            </a:pPr>
+            <a:r>
+              <a:t>Avid learner</a:t>
+            </a:r>
+          </a:p>
+          <a:p xmlns:a="http://schemas.openxmlformats.org/drawingml/2006/main">
+            <a:pPr marL="457200" indent="-304800" algn="l">
+              <a:lnSpc>
+                <a:spcPct val="200000"/>
+              </a:lnSpc>
+              <a:spcBef>
+                <a:spcPts val="0"/>
+              </a:spcBef>
+              <a:spcAft>
+                <a:spcPts val="0"/>
+              </a:spcAft>
+              <a:buChar char="●"/>
+            </a:pPr>
+            <a:r>
+              <a:t>Masters in Software Engineering</a:t>
+            </a:r>
+          </a:p>
+          <a:p xmlns:a="http://schemas.openxmlformats.org/drawingml/2006/main">
+            <a:pPr>
+              <a:lnSpc>
+                <a:spcPct val="200000"/>
+              </a:lnSpc>
+              <a:buChar char="●"/>
+            </a:pPr>
+            <a:r>
+              <a:t>FOSS contributor - Bitcoin, Large Language Models, OpenAI</a:t>
+            </a:r>
+          </a:p>
+        </p:txBody>
+      </p:sp>
+      <p:sp>
+        <p:nvSpPr>
+          <p:cNvPr id="249" name="Google Shape;249;p27">
+            <a:extLst xmlns:a="http://schemas.openxmlformats.org/drawingml/2006/main">
+              <a:ext uri="{FF2B5EF4-FFF2-40B4-BE49-F238E27FC236}">
+                <a16:creationId xmlns:a16="http://schemas.microsoft.com/office/drawing/2014/main" id="{5B015460-D499-48EF-99B0-8C7EF22FFA5F}"/>
+              </a:ext>
+            </a:extLst>
+          </p:cNvPr>
+          <p:cNvSpPr>
+            <a:spLocks xmlns:a="http://schemas.openxmlformats.org/drawingml/2006/main" noGrp="1"/>
+          </p:cNvSpPr>
+          <p:nvPr/>
+        </p:nvSpPr>
+        <p:spPr>
+          <a:xfrm xmlns:a="http://schemas.openxmlformats.org/drawingml/2006/main">
+            <a:off x="4950330" y="1581625"/>
+            <a:ext cx="1774800" cy="497400"/>
+          </a:xfrm>
+          <a:prstGeom xmlns:a="http://schemas.openxmlformats.org/drawingml/2006/main" prst="rect">
+            <a:avLst/>
+          </a:prstGeom>
+          <a:noFill xmlns:a="http://schemas.openxmlformats.org/drawingml/2006/main"/>
+          <a:ln xmlns:a="http://schemas.openxmlformats.org/drawingml/2006/main">
+            <a:noFill/>
+          </a:ln>
+        </p:spPr>
+        <p:txBody>
+          <a:bodyPr xmlns:a="http://schemas.openxmlformats.org/drawingml/2006/main" spcFirstLastPara="1" wrap="square" lIns="91425" tIns="91425" rIns="91425" bIns="91425" anchor="t">
+            <a:noAutofit/>
+          </a:bodyPr>
+          <a:lstStyle xmlns:a="http://schemas.openxmlformats.org/drawingml/2006/main"/>
+          <a:p xmlns:a="http://schemas.openxmlformats.org/drawingml/2006/main">
+            <a:pPr marL="0" indent="0" algn="l">
+              <a:lnSpc>
+                <a:spcPct val="90000"/>
+              </a:lnSpc>
+              <a:spcBef>
+                <a:spcPts val="0"/>
+              </a:spcBef>
+              <a:spcAft>
+                <a:spcPts val="0"/>
+              </a:spcAft>
+              <a:buNone/>
+            </a:pPr>
+            <a:r>
+              <a:rPr sz="2400">
+                <a:solidFill>
+                  <a:schemeClr val="accent2"/>
+                </a:solidFill>
+                <a:latin typeface="Quantico"/>
+                <a:ea typeface="Quantico"/>
+                <a:cs typeface="Quantico"/>
+              </a:rPr>
+              <a:t>Abhigya</a:t>
+            </a:r>
+            <a:r>
+              <a:rPr sz="2400">
+                <a:solidFill>
+                  <a:schemeClr val="accent1"/>
+                </a:solidFill>
+                <a:latin typeface="Quantico"/>
+                <a:ea typeface="Quantico"/>
+                <a:cs typeface="Quantico"/>
+              </a:rPr>
+              <a:t>&gt;</a:t>
+            </a:r>
+          </a:p>
+        </p:txBody>
+      </p:sp>
+      <p:pic>
+        <p:nvPicPr>
+          <p:cNvPr id="256" name="Picture 1"/>
+          <p:cNvPicPr>
+            <a:picLocks xmlns:a="http://schemas.openxmlformats.org/drawingml/2006/main" noChangeAspect="1"/>
+          </p:cNvPicPr>
+          <p:nvPr/>
+        </p:nvPicPr>
+        <p:blipFill>
+          <a:blip xmlns:r="http://schemas.openxmlformats.org/officeDocument/2006/relationships" xmlns:a="http://schemas.openxmlformats.org/drawingml/2006/main" r:embed="R377fee4916eb4742"/>
+          <a:stretch xmlns:a="http://schemas.openxmlformats.org/drawingml/2006/main">
+            <a:fillRect l="0" t="0" r="0" b="0"/>
+          </a:stretch>
+        </p:blipFill>
+        <p:spPr>
+          <a:xfrm xmlns:a="http://schemas.openxmlformats.org/drawingml/2006/main">
+            <a:off x="5852482" y="2035294"/>
+            <a:ext cx="1525798" cy="2286001"/>
+          </a:xfrm>
+          <a:prstGeom xmlns:a="http://schemas.openxmlformats.org/drawingml/2006/main" prst="rect">
+            <a:avLst/>
+          </a:prstGeom>
+        </p:spPr>
+      </p:pic>
+    </p:spTree>
+    <p:extLst>
+      <p:ext uri="{BB962C8B-B14F-4D97-AF65-F5344CB8AC3E}">
+        <p14:creationId xmlns:p14="http://schemas.microsoft.com/office/powerpoint/2010/main" val="671181561"/>
+      </p:ext>
+    </p:extLst>
+  </p:cSld>
+</p:sld>
+</file>
+
+<file path=ppt/slides/slide5.xml><?xml version="1.0" encoding="utf-8"?>
+<p:sld xmlns:p="http://schemas.openxmlformats.org/presentationml/2006/main">
+  <p:cSld>
+    <p:spTree>
+      <p:nvGrpSpPr>
+        <p:cNvPr id="1" name=""/>
+        <p:cNvGrpSpPr/>
+        <p:nvPr/>
+      </p:nvGrpSpPr>
+      <p:grpSpPr>
+        <a:xfrm xmlns:a="http://schemas.openxmlformats.org/drawingml/2006/main"/>
+      </p:grpSpPr>
+      <p:sp>
+        <p:nvSpPr>
+          <p:cNvPr id="255" name="Google Shape;255;p28">
+            <a:extLst xmlns:a="http://schemas.openxmlformats.org/drawingml/2006/main">
+              <a:ext uri="{FF2B5EF4-FFF2-40B4-BE49-F238E27FC236}">
+                <a16:creationId xmlns:a16="http://schemas.microsoft.com/office/drawing/2014/main" id="{DFAE69D3-6EB5-46F0-9E84-438E071040D7}"/>
+              </a:ext>
+            </a:extLst>
+          </p:cNvPr>
+          <p:cNvSpPr>
+            <a:spLocks xmlns:a="http://schemas.openxmlformats.org/drawingml/2006/main" noGrp="1"/>
+          </p:cNvSpPr>
+          <p:nvPr>
+            <p:ph type="title" idx="0"/>
+          </p:nvPr>
+        </p:nvSpPr>
+        <p:spPr>
+          <a:xfrm xmlns:a="http://schemas.openxmlformats.org/drawingml/2006/main">
+            <a:off x="719988" y="459128"/>
+            <a:ext cx="7704000" cy="572700"/>
+          </a:xfrm>
+          <a:prstGeom xmlns:a="http://schemas.openxmlformats.org/drawingml/2006/main" prst="rect">
+            <a:avLst/>
+          </a:prstGeom>
+        </p:spPr>
+        <p:txBody>
+          <a:bodyPr xmlns:a="http://schemas.openxmlformats.org/drawingml/2006/main" spcFirstLastPara="1" wrap="square" lIns="91425" tIns="91425" rIns="91425" bIns="91425" anchor="t">
+            <a:noAutofit/>
+          </a:bodyPr>
+          <a:lstStyle xmlns:a="http://schemas.openxmlformats.org/drawingml/2006/main"/>
+          <a:p xmlns:a="http://schemas.openxmlformats.org/drawingml/2006/main">
+            <a:pPr marL="0" indent="0" algn="l">
+              <a:spcBef>
+                <a:spcPts val="0"/>
+              </a:spcBef>
+              <a:spcAft>
+                <a:spcPts val="0"/>
+              </a:spcAft>
+              <a:buNone/>
+            </a:pPr>
+            <a:r>
+              <a:rPr>
+                <a:solidFill>
+                  <a:schemeClr val="lt2"/>
+                </a:solidFill>
+              </a:rPr>
+              <a:t>&lt;/ </a:t>
+            </a:r>
+            <a:r>
+              <a:t>Assistant Teachers</a:t>
+            </a:r>
+          </a:p>
+        </p:txBody>
+      </p:sp>
+      <p:sp>
+        <p:nvSpPr>
+          <p:cNvPr id="257" name="Google Shape;257;p28">
+            <a:extLst xmlns:a="http://schemas.openxmlformats.org/drawingml/2006/main">
+              <a:ext uri="{FF2B5EF4-FFF2-40B4-BE49-F238E27FC236}">
+                <a16:creationId xmlns:a16="http://schemas.microsoft.com/office/drawing/2014/main" id="{5EB2085F-F120-4A0D-89C1-DA3065F8E986}"/>
+              </a:ext>
+            </a:extLst>
+          </p:cNvPr>
+          <p:cNvSpPr>
+            <a:spLocks xmlns:a="http://schemas.openxmlformats.org/drawingml/2006/main" noGrp="1"/>
+          </p:cNvSpPr>
+          <p:nvPr>
+            <p:ph type="subTitle" idx="4"/>
+          </p:nvPr>
+        </p:nvSpPr>
+        <p:spPr>
+          <a:xfrm xmlns:a="http://schemas.openxmlformats.org/drawingml/2006/main">
+            <a:off x="3966881" y="4147200"/>
+            <a:ext cx="1216190" cy="421800"/>
+          </a:xfrm>
+          <a:prstGeom xmlns:a="http://schemas.openxmlformats.org/drawingml/2006/main" prst="rect">
+            <a:avLst/>
+          </a:prstGeom>
+        </p:spPr>
+        <p:txBody>
+          <a:bodyPr xmlns:a="http://schemas.openxmlformats.org/drawingml/2006/main" spcFirstLastPara="1" wrap="square" lIns="91425" tIns="91425" rIns="91425" bIns="91425" anchor="b">
+            <a:noAutofit/>
+          </a:bodyPr>
+          <a:lstStyle xmlns:a="http://schemas.openxmlformats.org/drawingml/2006/main"/>
+          <a:p xmlns:a="http://schemas.openxmlformats.org/drawingml/2006/main">
+            <a:pPr marL="0" indent="0">
+              <a:buNone/>
+            </a:pPr>
+            <a:r>
+              <a:t>Ishwari Ma'am</a:t>
+            </a:r>
+          </a:p>
+        </p:txBody>
+      </p:sp>
+      <p:sp>
+        <p:nvSpPr>
+          <p:cNvPr id="6" name="Google Shape;259;p28">
+            <a:extLst xmlns:a="http://schemas.openxmlformats.org/drawingml/2006/main">
+              <a:ext uri="{FF2B5EF4-FFF2-40B4-BE49-F238E27FC236}">
+                <a16:creationId xmlns:a16="http://schemas.microsoft.com/office/drawing/2014/main" id="{0086CC82-890E-B8CB-8ADF-1ACB6220A550}"/>
+              </a:ext>
+            </a:extLst>
+          </p:cNvPr>
+          <p:cNvSpPr>
+            <a:spLocks xmlns:a="http://schemas.openxmlformats.org/drawingml/2006/main" noGrp="1"/>
+          </p:cNvSpPr>
+          <p:nvPr/>
+        </p:nvSpPr>
+        <p:spPr>
+          <a:xfrm xmlns:a="http://schemas.openxmlformats.org/drawingml/2006/main">
+            <a:off x="3967698" y="3456700"/>
+            <a:ext cx="1216800" cy="642000"/>
+          </a:xfrm>
+          <a:prstGeom xmlns:a="http://schemas.openxmlformats.org/drawingml/2006/main" prst="rect">
+            <a:avLst/>
+          </a:prstGeom>
+          <a:noFill xmlns:a="http://schemas.openxmlformats.org/drawingml/2006/main"/>
+          <a:ln xmlns:a="http://schemas.openxmlformats.org/drawingml/2006/main">
+            <a:noFill/>
+          </a:ln>
+        </p:spPr>
+        <p:txBody>
+          <a:bodyPr xmlns:a="http://schemas.openxmlformats.org/drawingml/2006/main" spcFirstLastPara="1" wrap="square" lIns="91425" tIns="91425" rIns="91425" bIns="91425" anchor="t">
+            <a:noAutofit/>
+          </a:bodyPr>
+          <a:lstStyle xmlns:a="http://schemas.openxmlformats.org/drawingml/2006/main"/>
+          <a:p xmlns:a="http://schemas.openxmlformats.org/drawingml/2006/main">
+            <a:pPr marL="0" indent="0" algn="ctr">
+              <a:lnSpc>
+                <a:spcPct val="90000"/>
+              </a:lnSpc>
+              <a:spcBef>
+                <a:spcPts val="0"/>
+              </a:spcBef>
+              <a:spcAft>
+                <a:spcPts val="0"/>
+              </a:spcAft>
+              <a:buNone/>
+            </a:pPr>
+            <a:r>
+              <a:rPr sz="3600">
+                <a:solidFill>
+                  <a:schemeClr val="accent2"/>
+                </a:solidFill>
+              </a:rPr>
+              <a:t>/&gt;</a:t>
+            </a:r>
+            <a:r>
+              <a:rPr sz="3600">
+                <a:solidFill>
+                  <a:schemeClr val="dk1"/>
+                </a:solidFill>
+              </a:rPr>
+              <a:t> **</a:t>
+            </a:r>
+          </a:p>
+        </p:txBody>
+      </p:sp>
+      <p:pic>
+        <p:nvPicPr>
+          <p:cNvPr id="262" name="Picture 1"/>
+          <p:cNvPicPr>
+            <a:picLocks xmlns:a="http://schemas.openxmlformats.org/drawingml/2006/main" noChangeAspect="1"/>
+          </p:cNvPicPr>
+          <p:nvPr/>
+        </p:nvPicPr>
+        <p:blipFill>
+          <a:blip xmlns:r="http://schemas.openxmlformats.org/officeDocument/2006/relationships" xmlns:a="http://schemas.openxmlformats.org/drawingml/2006/main" r:embed="R88c87f9e52a24d05"/>
+          <a:stretch xmlns:a="http://schemas.openxmlformats.org/drawingml/2006/main">
+            <a:fillRect l="0" t="0" r="0" b="0"/>
+          </a:stretch>
+        </p:blipFill>
+        <p:spPr>
+          <a:xfrm xmlns:a="http://schemas.openxmlformats.org/drawingml/2006/main">
+            <a:off x="2964086" y="1035076"/>
+            <a:ext cx="2804916" cy="2487679"/>
+          </a:xfrm>
+          <a:prstGeom xmlns:a="http://schemas.openxmlformats.org/drawingml/2006/main" prst="rect">
+            <a:avLst/>
+          </a:prstGeom>
+        </p:spPr>
+      </p:pic>
+    </p:spTree>
+    <p:extLst>
+      <p:ext uri="{BB962C8B-B14F-4D97-AF65-F5344CB8AC3E}">
+        <p14:creationId xmlns:p14="http://schemas.microsoft.com/office/powerpoint/2010/main" val="414484600"/>
+      </p:ext>
+    </p:extLst>
+  </p:cSld>
+</p:sld>
+</file>
+
+<file path=ppt/slides/slide6.xml><?xml version="1.0" encoding="utf-8"?>
+<p:sld xmlns:p="http://schemas.openxmlformats.org/presentationml/2006/main">
+  <p:cSld>
+    <p:spTree>
+      <p:nvGrpSpPr>
+        <p:cNvPr id="1" name=""/>
+        <p:cNvGrpSpPr/>
+        <p:nvPr/>
+      </p:nvGrpSpPr>
+      <p:grpSpPr>
+        <a:xfrm xmlns:a="http://schemas.openxmlformats.org/drawingml/2006/main"/>
+      </p:grpSpPr>
+      <p:pic>
+        <p:nvPicPr>
+          <p:cNvPr id="5" name=""/>
+          <p:cNvPicPr>
+            <a:picLocks xmlns:a="http://schemas.openxmlformats.org/drawingml/2006/main" noChangeAspect="1"/>
+          </p:cNvPicPr>
+          <p:nvPr/>
+        </p:nvPicPr>
+        <p:blipFill>
+          <a:blip xmlns:r="http://schemas.openxmlformats.org/officeDocument/2006/relationships" xmlns:a="http://schemas.openxmlformats.org/drawingml/2006/main" r:embed="R0b61776a30f241da"/>
+          <a:srcRect xmlns:a="http://schemas.openxmlformats.org/drawingml/2006/main" l="0" t="0" r="0" b="0"/>
+          <a:stretch xmlns:a="http://schemas.openxmlformats.org/drawingml/2006/main">
+            <a:fillRect l="0" t="0" r="0" b="0"/>
+          </a:stretch>
+        </p:blipFill>
+        <p:spPr>
+          <a:xfrm xmlns:a="http://schemas.openxmlformats.org/drawingml/2006/main">
+            <a:off x="0" y="0"/>
+            <a:ext cx="9144000" cy="5143500"/>
+          </a:xfrm>
+          <a:prstGeom xmlns:a="http://schemas.openxmlformats.org/drawingml/2006/main" prst="rect">
+            <a:avLst/>
+          </a:prstGeom>
+        </p:spPr>
+      </p:pic>
+      <p:sp>
+        <p:nvSpPr>
+          <p:cNvPr id="2" name="roadmap-typescript-card">
+            <a:extLst xmlns:a="http://schemas.openxmlformats.org/drawingml/2006/main">
+              <a:ext uri="{FF2B5EF4-FFF2-40B4-BE49-F238E27FC236}">
+                <a16:creationId xmlns:a16="http://schemas.microsoft.com/office/drawing/2014/main" id="{F979B461-AD3A-4814-AF68-B67E1309936F}"/>
+              </a:ext>
+            </a:extLst>
+          </p:cNvPr>
+          <p:cNvSpPr>
+            <a:spLocks xmlns:a="http://schemas.openxmlformats.org/drawingml/2006/main" noGrp="1"/>
+          </p:cNvSpPr>
+          <p:nvPr/>
+        </p:nvSpPr>
+        <p:spPr>
+          <a:xfrm xmlns:a="http://schemas.openxmlformats.org/drawingml/2006/main">
+            <a:off x="5981700" y="2266950"/>
+            <a:ext cx="1143000" cy="838200"/>
+          </a:xfrm>
+          <a:prstGeom xmlns:a="http://schemas.openxmlformats.org/drawingml/2006/main" prst="roundRect">
+            <a:avLst>
+              <a:gd name="adj" fmla="val 15909"/>
+            </a:avLst>
+          </a:prstGeom>
+          <a:solidFill xmlns:a="http://schemas.openxmlformats.org/drawingml/2006/main">
+            <a:srgbClr val="DDF7E3"/>
+          </a:solidFill>
+          <a:ln xmlns:a="http://schemas.openxmlformats.org/drawingml/2006/main" w="0">
+            <a:solidFill>
+              <a:srgbClr val="DDF7E3"/>
+            </a:solidFill>
+            <a:prstDash val="solid"/>
+          </a:ln>
+        </p:spPr>
+      </p:sp>
+      <p:sp>
+        <p:nvSpPr>
+          <p:cNvPr id="3" name="roadmap-typescript-title">
+            <a:extLst xmlns:a="http://schemas.openxmlformats.org/drawingml/2006/main">
+              <a:ext uri="{FF2B5EF4-FFF2-40B4-BE49-F238E27FC236}">
+                <a16:creationId xmlns:a16="http://schemas.microsoft.com/office/drawing/2014/main" id="{71F0A210-4902-497F-8043-66A19E66719C}"/>
+              </a:ext>
+            </a:extLst>
+          </p:cNvPr>
+          <p:cNvSpPr>
+            <a:spLocks xmlns:a="http://schemas.openxmlformats.org/drawingml/2006/main" noGrp="1"/>
+          </p:cNvSpPr>
+          <p:nvPr/>
+        </p:nvSpPr>
+        <p:spPr>
+          <a:xfrm xmlns:a="http://schemas.openxmlformats.org/drawingml/2006/main">
+            <a:off x="6115050" y="2352675"/>
+            <a:ext cx="933450" cy="342900"/>
           </a:xfrm>
           <a:prstGeom xmlns:a="http://schemas.openxmlformats.org/drawingml/2006/main" prst="rect">
             <a:avLst/>
@@ -33021,35 +33282,58 @@
           <a:lstStyle xmlns:a="http://schemas.openxmlformats.org/drawingml/2006/main"/>
           <a:p xmlns:a="http://schemas.openxmlformats.org/drawingml/2006/main">
             <a:pPr algn="l">
-              <a:defRPr sz="1950" b="1">
+              <a:defRPr sz="1125" b="1">
                 <a:solidFill>
-                  <a:srgbClr val="FFDB5D"/>
+                  <a:srgbClr val="000000"/>
                 </a:solidFill>
-                <a:latin typeface="Source Code Pro"/>
-                <a:ea typeface="Source Code Pro"/>
-                <a:cs typeface="Source Code Pro"/>
+                <a:latin typeface="Arial"/>
+                <a:ea typeface="Arial"/>
+                <a:cs typeface="Arial"/>
               </a:defRPr>
             </a:pPr>
             <a:r>
-              <a:rPr sz="1950" b="1">
+              <a:rPr sz="1125" b="1">
                 <a:solidFill>
-                  <a:srgbClr val="FFDB5D"/>
+                  <a:srgbClr val="000000"/>
                 </a:solidFill>
-                <a:latin typeface="Source Code Pro"/>
-                <a:ea typeface="Source Code Pro"/>
-                <a:cs typeface="Source Code Pro"/>
+                <a:latin typeface="Arial"/>
+                <a:ea typeface="Arial"/>
+                <a:cs typeface="Arial"/>
               </a:rPr>
-              <a:t>&lt;/</a:t>
+              <a:t>TypeScript</a:t>
             </a:r>
           </a:p>
-        </p:txBody>
-      </p:sp>
-      <p:sp>
-        <p:nvSpPr>
-          <p:cNvPr id="314" name="slide-heading-text-6">
-            <a:extLst xmlns:a="http://schemas.openxmlformats.org/drawingml/2006/main">
-              <a:ext uri="{FF2B5EF4-FFF2-40B4-BE49-F238E27FC236}">
-                <a16:creationId xmlns:a16="http://schemas.microsoft.com/office/drawing/2014/main" id="{5479F54C-0325-47A0-9630-F0FCCB742455}"/>
+          <a:p xmlns:a="http://schemas.openxmlformats.org/drawingml/2006/main">
+            <a:pPr algn="l">
+              <a:defRPr sz="1125" b="1">
+                <a:solidFill>
+                  <a:srgbClr val="000000"/>
+                </a:solidFill>
+                <a:latin typeface="Arial"/>
+                <a:ea typeface="Arial"/>
+                <a:cs typeface="Arial"/>
+              </a:defRPr>
+            </a:pPr>
+            <a:r>
+              <a:rPr sz="1125" b="1">
+                <a:solidFill>
+                  <a:srgbClr val="000000"/>
+                </a:solidFill>
+                <a:latin typeface="Arial"/>
+                <a:ea typeface="Arial"/>
+                <a:cs typeface="Arial"/>
+              </a:rPr>
+              <a:t>Basics</a:t>
+            </a:r>
+          </a:p>
+        </p:txBody>
+      </p:sp>
+      <p:sp>
+        <p:nvSpPr>
+          <p:cNvPr id="4" name="roadmap-typescript-details">
+            <a:extLst xmlns:a="http://schemas.openxmlformats.org/drawingml/2006/main">
+              <a:ext uri="{FF2B5EF4-FFF2-40B4-BE49-F238E27FC236}">
+                <a16:creationId xmlns:a16="http://schemas.microsoft.com/office/drawing/2014/main" id="{41C3FB83-8160-41DA-BC39-724B867E58FC}"/>
               </a:ext>
             </a:extLst>
           </p:cNvPr>
@@ -33060,8 +33344,8 @@
         </p:nvSpPr>
         <p:spPr>
           <a:xfrm xmlns:a="http://schemas.openxmlformats.org/drawingml/2006/main">
-            <a:off x="1152525" y="428625"/>
-            <a:ext cx="5619750" cy="361950"/>
+            <a:off x="6115050" y="2724150"/>
+            <a:ext cx="933450" cy="381000"/>
           </a:xfrm>
           <a:prstGeom xmlns:a="http://schemas.openxmlformats.org/drawingml/2006/main" prst="rect">
             <a:avLst/>
@@ -33077,9 +33361,9 @@
           <a:lstStyle xmlns:a="http://schemas.openxmlformats.org/drawingml/2006/main"/>
           <a:p xmlns:a="http://schemas.openxmlformats.org/drawingml/2006/main">
             <a:pPr algn="l">
-              <a:defRPr sz="1800" b="0">
+              <a:defRPr sz="863">
                 <a:solidFill>
-                  <a:srgbClr val="FFFFFF"/>
+                  <a:srgbClr val="000000"/>
                 </a:solidFill>
                 <a:latin typeface="Arial"/>
                 <a:ea typeface="Arial"/>
@@ -33087,15 +33371,61 @@
               </a:defRPr>
             </a:pPr>
             <a:r>
-              <a:rPr sz="1800" b="0">
+              <a:rPr sz="863">
                 <a:solidFill>
-                  <a:srgbClr val="FFFFFF"/>
+                  <a:srgbClr val="000000"/>
                 </a:solidFill>
                 <a:latin typeface="Arial"/>
                 <a:ea typeface="Arial"/>
                 <a:cs typeface="Arial"/>
               </a:rPr>
-              <a:t>Today's mission</a:t>
+              <a:t>Types</a:t>
+            </a:r>
+          </a:p>
+          <a:p xmlns:a="http://schemas.openxmlformats.org/drawingml/2006/main">
+            <a:pPr algn="l">
+              <a:defRPr sz="863">
+                <a:solidFill>
+                  <a:srgbClr val="000000"/>
+                </a:solidFill>
+                <a:latin typeface="Arial"/>
+                <a:ea typeface="Arial"/>
+                <a:cs typeface="Arial"/>
+              </a:defRPr>
+            </a:pPr>
+            <a:r>
+              <a:rPr sz="863">
+                <a:solidFill>
+                  <a:srgbClr val="000000"/>
+                </a:solidFill>
+                <a:latin typeface="Arial"/>
+                <a:ea typeface="Arial"/>
+                <a:cs typeface="Arial"/>
+              </a:rPr>
+              <a:t>Logic</a:t>
+            </a:r>
+          </a:p>
+          <a:p xmlns:a="http://schemas.openxmlformats.org/drawingml/2006/main">
+            <a:pPr algn="l">
+              <a:defRPr sz="863">
+                <a:solidFill>
+                  <a:srgbClr val="000000"/>
+                </a:solidFill>
+                <a:latin typeface="Arial"/>
+                <a:ea typeface="Arial"/>
+                <a:cs typeface="Arial"/>
+              </a:defRPr>
+            </a:pPr>
+            <a:r>
+              <a:rPr sz="863">
+                <a:solidFill>
+                  <a:srgbClr val="000000"/>
+                </a:solidFill>
+                <a:latin typeface="Arial"/>
+                <a:ea typeface="Arial"/>
+                <a:cs typeface="Arial"/>
+              </a:rPr>
+              <a:t>Syntax</a:t>
             </a:r>
           </a:p>
         </p:txBody>
@@ -33103,7 +33433,7 @@
     </p:spTree>
     <p:extLst>
       <p:ext uri="{BB962C8B-B14F-4D97-AF65-F5344CB8AC3E}">
-        <p14:creationId xmlns:p14="http://schemas.microsoft.com/office/powerpoint/2010/main" val="694519266"/>
+        <p14:creationId xmlns:p14="http://schemas.microsoft.com/office/powerpoint/2010/main" val="1286671001"/>
       </p:ext>
     </p:extLst>
   </p:cSld>
@@ -33163,7 +33493,7 @@
               <a:buNone/>
             </a:pPr>
             <a:r>
-              <a:t>Grade, subject, and hobby</a:t>
+              <a:t>Teams, Kahoot, and breakout rooms</a:t>
             </a:r>
           </a:p>
         </p:txBody>
@@ -33214,7 +33544,7 @@
                   <a:schemeClr val="accent2"/>
                 </a:solidFill>
               </a:rPr>
-              <a:t>{Say your name}</a:t>
+              <a:t>{Meet}</a:t>
             </a:r>
           </a:p>
         </p:txBody>
@@ -33260,7 +33590,7 @@
               <a:buNone/>
             </a:pPr>
             <a:r>
-              <a:t>City/state or country only</a:t>
+              <a:t>Learn who is here</a:t>
             </a:r>
           </a:p>
         </p:txBody>
@@ -33306,7 +33636,7 @@
               <a:buNone/>
             </a:pPr>
             <a:r>
-              <a:t>{Share favorites}</a:t>
+              <a:t>{Explore}</a:t>
             </a:r>
           </a:p>
         </p:txBody>
@@ -33357,7 +33687,7 @@
                   <a:schemeClr val="lt2"/>
                 </a:solidFill>
               </a:rPr>
-              <a:t>{Listen kindly}</a:t>
+              <a:t>{Create}</a:t>
             </a:r>
           </a:p>
         </p:txBody>
@@ -33403,7 +33733,7 @@
               <a:buNone/>
             </a:pPr>
             <a:r>
-              <a:t>Passing is always okay</a:t>
+              <a:t>Make music with code</a:t>
             </a:r>
           </a:p>
         </p:txBody>
@@ -33645,10 +33975,10 @@
       </p:sp>
       <p:sp>
         <p:nvSpPr>
-          <p:cNvPr id="313" name="slide-heading-marker-7">
-            <a:extLst xmlns:a="http://schemas.openxmlformats.org/drawingml/2006/main">
-              <a:ext uri="{FF2B5EF4-FFF2-40B4-BE49-F238E27FC236}">
-                <a16:creationId xmlns:a16="http://schemas.microsoft.com/office/drawing/2014/main" id="{31E9FE38-047B-4F43-B15D-E811F696848C}"/>
+          <p:cNvPr id="313" name="slide-heading-marker-6">
+            <a:extLst xmlns:a="http://schemas.openxmlformats.org/drawingml/2006/main">
+              <a:ext uri="{FF2B5EF4-FFF2-40B4-BE49-F238E27FC236}">
+                <a16:creationId xmlns:a16="http://schemas.microsoft.com/office/drawing/2014/main" id="{94D3C39B-FD62-4E8D-8BAB-68A96893135B}"/>
               </a:ext>
             </a:extLst>
           </p:cNvPr>
@@ -33701,10 +34031,10 @@
       </p:sp>
       <p:sp>
         <p:nvSpPr>
-          <p:cNvPr id="314" name="slide-heading-text-7">
-            <a:extLst xmlns:a="http://schemas.openxmlformats.org/drawingml/2006/main">
-              <a:ext uri="{FF2B5EF4-FFF2-40B4-BE49-F238E27FC236}">
-                <a16:creationId xmlns:a16="http://schemas.microsoft.com/office/drawing/2014/main" id="{A5C51008-35EA-4C2F-893C-55B209672C0D}"/>
+          <p:cNvPr id="314" name="slide-heading-text-6">
+            <a:extLst xmlns:a="http://schemas.openxmlformats.org/drawingml/2006/main">
+              <a:ext uri="{FF2B5EF4-FFF2-40B4-BE49-F238E27FC236}">
+                <a16:creationId xmlns:a16="http://schemas.microsoft.com/office/drawing/2014/main" id="{E3F334C3-75E5-4AFA-A45D-F15FEA54A773}"/>
               </a:ext>
             </a:extLst>
           </p:cNvPr>
@@ -33750,7 +34080,7 @@
                 <a:ea typeface="Arial"/>
                 <a:cs typeface="Arial"/>
               </a:rPr>
-              <a:t>Introduce yourself</a:t>
+              <a:t>Today's mission</a:t>
             </a:r>
           </a:p>
         </p:txBody>
@@ -33818,7 +34148,7 @@
               <a:buNone/>
             </a:pPr>
             <a:r>
-              <a:t>Writing code starts next week</a:t>
+              <a:t>Grade, subject, and hobby</a:t>
             </a:r>
           </a:p>
         </p:txBody>
@@ -33869,7 +34199,7 @@
                   <a:schemeClr val="accent2"/>
                 </a:solidFill>
               </a:rPr>
-              <a:t>{Code.org}</a:t>
+              <a:t>{Say your name}</a:t>
             </a:r>
           </a:p>
         </p:txBody>
@@ -33915,7 +34245,7 @@
               <a:buNone/>
             </a:pPr>
             <a:r>
-              <a:t>Visual blocks make ideas move</a:t>
+              <a:t>City/state or country only</a:t>
             </a:r>
           </a:p>
         </p:txBody>
@@ -33961,7 +34291,7 @@
               <a:buNone/>
             </a:pPr>
             <a:r>
-              <a:t>{TypeScript}</a:t>
+              <a:t>{Share favorites}</a:t>
             </a:r>
           </a:p>
         </p:txBody>
@@ -34012,7 +34342,7 @@
                   <a:schemeClr val="lt2"/>
                 </a:solidFill>
               </a:rPr>
-              <a:t>{Projects}</a:t>
+              <a:t>{Listen kindly}</a:t>
             </a:r>
           </a:p>
         </p:txBody>
@@ -34058,7 +34388,7 @@
               <a:buNone/>
             </a:pPr>
             <a:r>
-              <a:t>Build games, apps, and tools</a:t>
+              <a:t>Passing is always okay</a:t>
             </a:r>
           </a:p>
         </p:txBody>
@@ -34300,10 +34630,10 @@
       </p:sp>
       <p:sp>
         <p:nvSpPr>
-          <p:cNvPr id="313" name="slide-heading-marker-8">
-            <a:extLst xmlns:a="http://schemas.openxmlformats.org/drawingml/2006/main">
-              <a:ext uri="{FF2B5EF4-FFF2-40B4-BE49-F238E27FC236}">
-                <a16:creationId xmlns:a16="http://schemas.microsoft.com/office/drawing/2014/main" id="{3A8C6A94-A94C-44E1-ADDF-B4561B404724}"/>
+          <p:cNvPr id="313" name="slide-heading-marker-7">
+            <a:extLst xmlns:a="http://schemas.openxmlformats.org/drawingml/2006/main">
+              <a:ext uri="{FF2B5EF4-FFF2-40B4-BE49-F238E27FC236}">
+                <a16:creationId xmlns:a16="http://schemas.microsoft.com/office/drawing/2014/main" id="{E981E9A2-DB9C-4EA0-86E6-B886FB16B654}"/>
               </a:ext>
             </a:extLst>
           </p:cNvPr>
@@ -34356,10 +34686,10 @@
       </p:sp>
       <p:sp>
         <p:nvSpPr>
-          <p:cNvPr id="314" name="slide-heading-text-8">
-            <a:extLst xmlns:a="http://schemas.openxmlformats.org/drawingml/2006/main">
-              <a:ext uri="{FF2B5EF4-FFF2-40B4-BE49-F238E27FC236}">
-                <a16:creationId xmlns:a16="http://schemas.microsoft.com/office/drawing/2014/main" id="{D8FEFC39-CF12-4D35-9E56-0675E79EBED3}"/>
+          <p:cNvPr id="314" name="slide-heading-text-7">
+            <a:extLst xmlns:a="http://schemas.openxmlformats.org/drawingml/2006/main">
+              <a:ext uri="{FF2B5EF4-FFF2-40B4-BE49-F238E27FC236}">
+                <a16:creationId xmlns:a16="http://schemas.microsoft.com/office/drawing/2014/main" id="{D9F16F2D-C535-4DDF-8264-7BCDBA5F1DAF}"/>
               </a:ext>
             </a:extLst>
           </p:cNvPr>
@@ -34405,7 +34735,7 @@
                 <a:ea typeface="Arial"/>
                 <a:cs typeface="Arial"/>
               </a:rPr>
-              <a:t>Programming starts with ideas</a:t>
+              <a:t>Introduce yourself</a:t>
             </a:r>
           </a:p>
         </p:txBody>
@@ -34473,7 +34803,7 @@
               <a:buNone/>
             </a:pPr>
             <a:r>
-              <a:t>Rest and recharge</a:t>
+              <a:t>Writing code starts next week</a:t>
             </a:r>
           </a:p>
         </p:txBody>
@@ -34524,7 +34854,7 @@
                   <a:schemeClr val="accent2"/>
                 </a:solidFill>
               </a:rPr>
-              <a:t>{Class: 9-1}</a:t>
+              <a:t>{Code.org}</a:t>
             </a:r>
           </a:p>
         </p:txBody>
@@ -34570,7 +34900,7 @@
               <a:buNone/>
             </a:pPr>
             <a:r>
-              <a:t>Saturdays, Pacific Time</a:t>
+              <a:t>Visual blocks make ideas move</a:t>
             </a:r>
           </a:p>
         </p:txBody>
@@ -34616,7 +34946,7 @@
               <a:buNone/>
             </a:pPr>
             <a:r>
-              <a:t>{Break: 10:30}</a:t>
+              <a:t>{TypeScript}</a:t>
             </a:r>
           </a:p>
         </p:txBody>
@@ -34667,7 +34997,7 @@
                   <a:schemeClr val="lt2"/>
                 </a:solidFill>
               </a:rPr>
-              <a:t>{Typing: 11:00}</a:t>
+              <a:t>{Projects}</a:t>
             </a:r>
           </a:p>
         </p:txBody>
@@ -34713,7 +35043,7 @@
               <a:buNone/>
             </a:pPr>
             <a:r>
-              <a:t>Practice accuracy and speed</a:t>
+              <a:t>Build games, apps, and tools</a:t>
             </a:r>
           </a:p>
         </p:txBody>
@@ -34955,10 +35285,10 @@
       </p:sp>
       <p:sp>
         <p:nvSpPr>
-          <p:cNvPr id="313" name="slide-heading-marker-9">
-            <a:extLst xmlns:a="http://schemas.openxmlformats.org/drawingml/2006/main">
-              <a:ext uri="{FF2B5EF4-FFF2-40B4-BE49-F238E27FC236}">
-                <a16:creationId xmlns:a16="http://schemas.microsoft.com/office/drawing/2014/main" id="{49DBD3CA-3E4D-4E27-8CFD-2ECB71A27EDB}"/>
+          <p:cNvPr id="313" name="slide-heading-marker-8">
+            <a:extLst xmlns:a="http://schemas.openxmlformats.org/drawingml/2006/main">
+              <a:ext uri="{FF2B5EF4-FFF2-40B4-BE49-F238E27FC236}">
+                <a16:creationId xmlns:a16="http://schemas.microsoft.com/office/drawing/2014/main" id="{ABB713FC-6B4D-4063-8488-BDE19486BF29}"/>
               </a:ext>
             </a:extLst>
           </p:cNvPr>
@@ -35011,10 +35341,10 @@
       </p:sp>
       <p:sp>
         <p:nvSpPr>
-          <p:cNvPr id="314" name="slide-heading-text-9">
-            <a:extLst xmlns:a="http://schemas.openxmlformats.org/drawingml/2006/main">
-              <a:ext uri="{FF2B5EF4-FFF2-40B4-BE49-F238E27FC236}">
-                <a16:creationId xmlns:a16="http://schemas.microsoft.com/office/drawing/2014/main" id="{69BDD1A1-B1AD-49F4-94CD-9D4423E1A401}"/>
+          <p:cNvPr id="314" name="slide-heading-text-8">
+            <a:extLst xmlns:a="http://schemas.openxmlformats.org/drawingml/2006/main">
+              <a:ext uri="{FF2B5EF4-FFF2-40B4-BE49-F238E27FC236}">
+                <a16:creationId xmlns:a16="http://schemas.microsoft.com/office/drawing/2014/main" id="{4B94680D-F548-41E9-BF7C-BC61FE9325F0}"/>
               </a:ext>
             </a:extLst>
           </p:cNvPr>
@@ -35060,7 +35390,7 @@
                 <a:ea typeface="Arial"/>
                 <a:cs typeface="Arial"/>
               </a:rPr>
-              <a:t>Our Saturday class routine</a:t>
+              <a:t>Programming starts with ideas</a:t>
             </a:r>
           </a:p>
         </p:txBody>
